--- a/LaborForce_CookCountyHealth.pptx
+++ b/LaborForce_CookCountyHealth.pptx
@@ -1459,7 +1459,7 @@
           <a:p>
             <a:r>
               <a:rPr lang="en-US" dirty="0"/>
-              <a:t>Static version of the interactive planning model at its starting scenario: 150,000 ED encounters × 6% additional coverage × $4,000 net per encounter = $36M per year; 9,000 identified encounters; $153M associated gross charges at a $17,000 average ED charge. Each figure in the grid = 1,000 ED encounters. Illustrative planning model, not a forecast.</a:t>
+              <a:t>Static version of the interactive planning model at its starting scenario: 150,000 ED encounters × 6% additional coverage × $4,000 net per encounter = $36M per year; 9,000 identified encounters; $90M associated gross charges at a $10,000 average ED charge. Each figure in the grid = 1,000 ED encounters. Illustrative planning model, not a forecast.</a:t>
             </a:r>
             <a:endParaRPr lang="en-US" dirty="0"/>
           </a:p>
@@ -2352,7 +2352,7 @@
                 <a:ea typeface="Segoe UI" pitchFamily="34" charset="-122"/>
                 <a:cs typeface="Segoe UI" pitchFamily="34" charset="-120"/>
               </a:rPr>
-              <a:t>You deliver care. We recover revenue.</a:t>
+              <a:t>You Deliver Care, We Optimize Revenue.</a:t>
             </a:r>
             <a:endParaRPr lang="en-US" sz="1200" dirty="0"/>
           </a:p>
@@ -11169,7 +11169,7 @@
         <p:spPr>
           <a:xfrm>
             <a:off x="548640" y="4279392"/>
-            <a:ext cx="1649957" cy="54864"/>
+            <a:ext cx="3058160" cy="54864"/>
           </a:xfrm>
           <a:prstGeom prst="roundRect">
             <a:avLst>
@@ -11195,7 +11195,7 @@
         </p:nvSpPr>
         <p:spPr>
           <a:xfrm>
-            <a:off x="2125445" y="4233672"/>
+            <a:off x="3533648" y="4233672"/>
             <a:ext cx="146304" cy="146304"/>
           </a:xfrm>
           <a:prstGeom prst="ellipse">
@@ -11245,7 +11245,7 @@
                 <a:ea typeface="Segoe UI" pitchFamily="34" charset="-122"/>
                 <a:cs typeface="Segoe UI" pitchFamily="34" charset="-120"/>
               </a:rPr>
-              <a:t>$1,063</a:t>
+              <a:t>$500</a:t>
             </a:r>
             <a:endParaRPr lang="en-US" sz="850" dirty="0"/>
           </a:p>
@@ -11284,7 +11284,7 @@
                 <a:ea typeface="Segoe UI" pitchFamily="34" charset="-122"/>
                 <a:cs typeface="Segoe UI" pitchFamily="34" charset="-120"/>
               </a:rPr>
-              <a:t>$8,062</a:t>
+              <a:t>$5,000</a:t>
             </a:r>
             <a:endParaRPr lang="en-US" sz="850" dirty="0"/>
           </a:p>
@@ -11399,7 +11399,7 @@
                 <a:ea typeface="Segoe UI" pitchFamily="34" charset="-122"/>
                 <a:cs typeface="Segoe UI" pitchFamily="34" charset="-120"/>
               </a:rPr>
-              <a:t>$17,000</a:t>
+              <a:t>$10,000</a:t>
             </a:r>
             <a:endParaRPr lang="en-US" sz="1700" dirty="0"/>
           </a:p>
@@ -11441,7 +11441,7 @@
         <p:spPr>
           <a:xfrm>
             <a:off x="548640" y="5193792"/>
-            <a:ext cx="3194685" cy="54864"/>
+            <a:ext cx="2293620" cy="54864"/>
           </a:xfrm>
           <a:prstGeom prst="roundRect">
             <a:avLst>
@@ -11467,7 +11467,7 @@
         </p:nvSpPr>
         <p:spPr>
           <a:xfrm>
-            <a:off x="3670173" y="5148072"/>
+            <a:off x="2769108" y="5148072"/>
             <a:ext cx="146304" cy="146304"/>
           </a:xfrm>
           <a:prstGeom prst="ellipse">
@@ -11517,7 +11517,7 @@
                 <a:ea typeface="Segoe UI" pitchFamily="34" charset="-122"/>
                 <a:cs typeface="Segoe UI" pitchFamily="34" charset="-120"/>
               </a:rPr>
-              <a:t>$4,000</a:t>
+              <a:t>$3,000</a:t>
             </a:r>
             <a:endParaRPr lang="en-US" sz="850" dirty="0"/>
           </a:p>
@@ -11556,7 +11556,7 @@
                 <a:ea typeface="Segoe UI" pitchFamily="34" charset="-122"/>
                 <a:cs typeface="Segoe UI" pitchFamily="34" charset="-120"/>
               </a:rPr>
-              <a:t>$20,000</a:t>
+              <a:t>$15,000</a:t>
             </a:r>
             <a:endParaRPr lang="en-US" sz="850" dirty="0"/>
           </a:p>
@@ -11909,7 +11909,7 @@
                 <a:ea typeface="Segoe UI" pitchFamily="34" charset="-122"/>
                 <a:cs typeface="Segoe UI" pitchFamily="34" charset="-120"/>
               </a:rPr>
-              <a:t>$153M</a:t>
+              <a:t>$90M</a:t>
             </a:r>
             <a:endParaRPr lang="en-US" sz="2800" dirty="0"/>
           </a:p>

--- a/LaborForce_CookCountyHealth.pptx
+++ b/LaborForce_CookCountyHealth.pptx
@@ -2327,7 +2327,7 @@
         </p:nvSpPr>
         <p:spPr>
           <a:xfrm>
-            <a:off x="548640" y="1325880"/>
+            <a:off x="548640" y="1783080"/>
             <a:ext cx="5486400" cy="274320"/>
           </a:xfrm>
           <a:prstGeom prst="rect">
@@ -2366,7 +2366,7 @@
         </p:nvSpPr>
         <p:spPr>
           <a:xfrm>
-            <a:off x="548640" y="1645920"/>
+            <a:off x="548640" y="2103120"/>
             <a:ext cx="6675120" cy="1783080"/>
           </a:xfrm>
           <a:prstGeom prst="rect">
@@ -2428,7 +2428,7 @@
         </p:nvSpPr>
         <p:spPr>
           <a:xfrm>
-            <a:off x="548640" y="3520440"/>
+            <a:off x="548640" y="3977640"/>
             <a:ext cx="5120640" cy="868680"/>
           </a:xfrm>
           <a:prstGeom prst="rect">
@@ -2470,14 +2470,117 @@
         </p:nvSpPr>
         <p:spPr>
           <a:xfrm>
-            <a:off x="548640" y="4846320"/>
+            <a:off x="548640" y="6382512"/>
             <a:ext cx="6675120" cy="0"/>
           </a:xfrm>
           <a:prstGeom prst="line">
             <a:avLst/>
           </a:prstGeom>
           <a:noFill/>
-          <a:ln w="19050">
+          <a:ln w="9525">
+            <a:solidFill>
+              <a:srgbClr val="D4DCE6"/>
+            </a:solidFill>
+            <a:prstDash val="solid"/>
+          </a:ln>
+        </p:spPr>
+      </p:sp>
+      <p:sp>
+        <p:nvSpPr>
+          <p:cNvPr id="6" name="Text 4"/>
+          <p:cNvSpPr txBox="1"/>
+          <p:nvPr/>
+        </p:nvSpPr>
+        <p:spPr>
+          <a:xfrm>
+            <a:off x="548640" y="6455664"/>
+            <a:ext cx="4572000" cy="228600"/>
+          </a:xfrm>
+          <a:prstGeom prst="rect">
+            <a:avLst/>
+          </a:prstGeom>
+          <a:noFill/>
+          <a:ln/>
+        </p:spPr>
+        <p:txBody>
+          <a:bodyPr wrap="square" lIns="0" tIns="0" rIns="0" bIns="0" rtlCol="0" anchor="t"/>
+          <a:lstStyle/>
+          <a:p>
+            <a:pPr indent="0" marL="0">
+              <a:buNone/>
+            </a:pPr>
+            <a:r>
+              <a:rPr lang="en-US" sz="800" spc="150" kern="0" dirty="0">
+                <a:solidFill>
+                  <a:srgbClr val="6E7E90"/>
+                </a:solidFill>
+                <a:latin typeface="Segoe UI" pitchFamily="34" charset="0"/>
+                <a:ea typeface="Segoe UI" pitchFamily="34" charset="-122"/>
+                <a:cs typeface="Segoe UI" pitchFamily="34" charset="-120"/>
+              </a:rPr>
+              <a:t>CONFIDENTIAL — FOR DISCUSSION PURPOSES</a:t>
+            </a:r>
+            <a:endParaRPr lang="en-US" sz="800" dirty="0"/>
+          </a:p>
+        </p:txBody>
+      </p:sp>
+      <p:sp>
+        <p:nvSpPr>
+          <p:cNvPr id="7" name="Text 5"/>
+          <p:cNvSpPr txBox="1"/>
+          <p:nvPr/>
+        </p:nvSpPr>
+        <p:spPr>
+          <a:xfrm>
+            <a:off x="5394960" y="6455664"/>
+            <a:ext cx="1828800" cy="228600"/>
+          </a:xfrm>
+          <a:prstGeom prst="rect">
+            <a:avLst/>
+          </a:prstGeom>
+          <a:noFill/>
+          <a:ln/>
+        </p:spPr>
+        <p:txBody>
+          <a:bodyPr wrap="square" lIns="0" tIns="0" rIns="0" bIns="0" rtlCol="0" anchor="t"/>
+          <a:lstStyle/>
+          <a:p>
+            <a:pPr algn="r" indent="0" marL="0">
+              <a:buNone/>
+            </a:pPr>
+            <a:r>
+              <a:rPr lang="en-US" sz="800" spc="150" kern="0" dirty="0">
+                <a:solidFill>
+                  <a:srgbClr val="6E7E90"/>
+                </a:solidFill>
+                <a:latin typeface="Segoe UI" pitchFamily="34" charset="0"/>
+                <a:ea typeface="Segoe UI" pitchFamily="34" charset="-122"/>
+                <a:cs typeface="Segoe UI" pitchFamily="34" charset="-120"/>
+              </a:rPr>
+              <a:t>01 / 10</a:t>
+            </a:r>
+            <a:endParaRPr lang="en-US" sz="800" dirty="0"/>
+          </a:p>
+        </p:txBody>
+      </p:sp>
+      <p:sp>
+        <p:nvSpPr>
+          <p:cNvPr id="8" name="Shape 6"/>
+          <p:cNvSpPr/>
+          <p:nvPr/>
+        </p:nvSpPr>
+        <p:spPr>
+          <a:xfrm>
+            <a:off x="7726680" y="0"/>
+            <a:ext cx="4465015" cy="6858000"/>
+          </a:xfrm>
+          <a:prstGeom prst="rect">
+            <a:avLst/>
+          </a:prstGeom>
+          <a:solidFill>
+            <a:srgbClr val="0C3C75"/>
+          </a:solidFill>
+          <a:ln w="12700">
             <a:solidFill>
               <a:srgbClr val="0C3C75"/>
             </a:solidFill>
@@ -2487,53 +2590,117 @@
       </p:sp>
       <p:sp>
         <p:nvSpPr>
-          <p:cNvPr id="6" name="Text 4"/>
-          <p:cNvSpPr txBox="1"/>
-          <p:nvPr/>
-        </p:nvSpPr>
-        <p:spPr>
-          <a:xfrm>
-            <a:off x="548640" y="5047488"/>
-            <a:ext cx="2834640" cy="201168"/>
-          </a:xfrm>
-          <a:prstGeom prst="rect">
-            <a:avLst/>
-          </a:prstGeom>
-          <a:noFill/>
-          <a:ln/>
-        </p:spPr>
-        <p:txBody>
-          <a:bodyPr wrap="square" lIns="0" tIns="0" rIns="0" bIns="0" rtlCol="0" anchor="t"/>
-          <a:lstStyle/>
-          <a:p>
-            <a:pPr indent="0" marL="0">
-              <a:buNone/>
-            </a:pPr>
-            <a:r>
-              <a:rPr lang="en-US" sz="800" b="1" spc="150" kern="0" dirty="0">
-                <a:solidFill>
-                  <a:srgbClr val="6E7E90"/>
-                </a:solidFill>
-                <a:latin typeface="Segoe UI" pitchFamily="34" charset="0"/>
-                <a:ea typeface="Segoe UI" pitchFamily="34" charset="-122"/>
-                <a:cs typeface="Segoe UI" pitchFamily="34" charset="-120"/>
-              </a:rPr>
-              <a:t>PREPARED FOR</a:t>
-            </a:r>
-            <a:endParaRPr lang="en-US" sz="800" dirty="0"/>
-          </a:p>
-        </p:txBody>
-      </p:sp>
-      <p:sp>
-        <p:nvSpPr>
-          <p:cNvPr id="7" name="Text 5"/>
-          <p:cNvSpPr txBox="1"/>
-          <p:nvPr/>
-        </p:nvSpPr>
-        <p:spPr>
-          <a:xfrm>
-            <a:off x="548640" y="5285232"/>
-            <a:ext cx="2834640" cy="594360"/>
+          <p:cNvPr id="9" name="Shape 7"/>
+          <p:cNvSpPr/>
+          <p:nvPr/>
+        </p:nvSpPr>
+        <p:spPr>
+          <a:xfrm>
+            <a:off x="7726680" y="0"/>
+            <a:ext cx="54864" cy="6858000"/>
+          </a:xfrm>
+          <a:prstGeom prst="rect">
+            <a:avLst/>
+          </a:prstGeom>
+          <a:solidFill>
+            <a:srgbClr val="0A8FA6"/>
+          </a:solidFill>
+          <a:ln w="12700">
+            <a:solidFill>
+              <a:srgbClr val="0A8FA6"/>
+            </a:solidFill>
+            <a:prstDash val="solid"/>
+          </a:ln>
+        </p:spPr>
+      </p:sp>
+      <p:sp>
+        <p:nvSpPr>
+          <p:cNvPr id="10" name="Text 8"/>
+          <p:cNvSpPr txBox="1"/>
+          <p:nvPr/>
+        </p:nvSpPr>
+        <p:spPr>
+          <a:xfrm>
+            <a:off x="8183880" y="548640"/>
+            <a:ext cx="3596335" cy="201168"/>
+          </a:xfrm>
+          <a:prstGeom prst="rect">
+            <a:avLst/>
+          </a:prstGeom>
+          <a:noFill/>
+          <a:ln/>
+        </p:spPr>
+        <p:txBody>
+          <a:bodyPr wrap="square" lIns="0" tIns="0" rIns="0" bIns="0" rtlCol="0" anchor="t"/>
+          <a:lstStyle/>
+          <a:p>
+            <a:pPr indent="0" marL="0">
+              <a:buNone/>
+            </a:pPr>
+            <a:r>
+              <a:rPr lang="en-US" sz="900" b="1" spc="150" kern="0" dirty="0">
+                <a:solidFill>
+                  <a:srgbClr val="7FD3E3"/>
+                </a:solidFill>
+                <a:latin typeface="Segoe UI" pitchFamily="34" charset="0"/>
+                <a:ea typeface="Segoe UI" pitchFamily="34" charset="-122"/>
+                <a:cs typeface="Segoe UI" pitchFamily="34" charset="-120"/>
+              </a:rPr>
+              <a:t>AT A GLANCE</a:t>
+            </a:r>
+            <a:endParaRPr lang="en-US" sz="900" dirty="0"/>
+          </a:p>
+        </p:txBody>
+      </p:sp>
+      <p:sp>
+        <p:nvSpPr>
+          <p:cNvPr id="11" name="Text 9"/>
+          <p:cNvSpPr txBox="1"/>
+          <p:nvPr/>
+        </p:nvSpPr>
+        <p:spPr>
+          <a:xfrm>
+            <a:off x="8183880" y="914400"/>
+            <a:ext cx="3596335" cy="566928"/>
+          </a:xfrm>
+          <a:prstGeom prst="rect">
+            <a:avLst/>
+          </a:prstGeom>
+          <a:noFill/>
+          <a:ln/>
+        </p:spPr>
+        <p:txBody>
+          <a:bodyPr wrap="square" lIns="0" tIns="0" rIns="0" bIns="0" rtlCol="0" anchor="t"/>
+          <a:lstStyle/>
+          <a:p>
+            <a:pPr indent="0" marL="0">
+              <a:buNone/>
+            </a:pPr>
+            <a:r>
+              <a:rPr lang="en-US" sz="3800" spc="-200" kern="0" dirty="0">
+                <a:solidFill>
+                  <a:srgbClr val="FFFFFF"/>
+                </a:solidFill>
+                <a:latin typeface="Segoe UI" pitchFamily="34" charset="0"/>
+                <a:ea typeface="Segoe UI" pitchFamily="34" charset="-122"/>
+                <a:cs typeface="Segoe UI" pitchFamily="34" charset="-120"/>
+              </a:rPr>
+              <a:t>+336%</a:t>
+            </a:r>
+            <a:endParaRPr lang="en-US" sz="3800" dirty="0"/>
+          </a:p>
+        </p:txBody>
+      </p:sp>
+      <p:sp>
+        <p:nvSpPr>
+          <p:cNvPr id="12" name="Text 10"/>
+          <p:cNvSpPr txBox="1"/>
+          <p:nvPr/>
+        </p:nvSpPr>
+        <p:spPr>
+          <a:xfrm>
+            <a:off x="8183880" y="1517904"/>
+            <a:ext cx="3596335" cy="457200"/>
           </a:xfrm>
           <a:prstGeom prst="rect">
             <a:avLst/>
@@ -2552,18 +2719,102 @@
               <a:buNone/>
             </a:pPr>
             <a:r>
-              <a:rPr lang="en-US" sz="1050" b="1" dirty="0">
-                <a:solidFill>
-                  <a:srgbClr val="0C3C75"/>
-                </a:solidFill>
-                <a:latin typeface="Segoe UI" pitchFamily="34" charset="0"/>
-                <a:ea typeface="Segoe UI" pitchFamily="34" charset="-122"/>
-                <a:cs typeface="Segoe UI" pitchFamily="34" charset="-120"/>
-              </a:rPr>
-              <a:t>Cook County Health</a:t>
+              <a:rPr lang="en-US" sz="1050" dirty="0">
+                <a:solidFill>
+                  <a:srgbClr val="C5D6E8"/>
+                </a:solidFill>
+                <a:latin typeface="Segoe UI" pitchFamily="34" charset="0"/>
+                <a:ea typeface="Segoe UI" pitchFamily="34" charset="-122"/>
+                <a:cs typeface="Segoe UI" pitchFamily="34" charset="-120"/>
+              </a:rPr>
+              <a:t>Monthly TPL recoveries at Chicago-area partner hospitals, March – July 2026 ($33K → $144K)</a:t>
             </a:r>
             <a:endParaRPr lang="en-US" sz="1050" dirty="0"/>
           </a:p>
+        </p:txBody>
+      </p:sp>
+      <p:sp>
+        <p:nvSpPr>
+          <p:cNvPr id="13" name="Shape 11"/>
+          <p:cNvSpPr/>
+          <p:nvPr/>
+        </p:nvSpPr>
+        <p:spPr>
+          <a:xfrm>
+            <a:off x="8183880" y="1993392"/>
+            <a:ext cx="3596335" cy="0"/>
+          </a:xfrm>
+          <a:prstGeom prst="line">
+            <a:avLst/>
+          </a:prstGeom>
+          <a:noFill/>
+          <a:ln w="9525">
+            <a:solidFill>
+              <a:srgbClr val="375F8F"/>
+            </a:solidFill>
+            <a:prstDash val="solid"/>
+          </a:ln>
+        </p:spPr>
+      </p:sp>
+      <p:sp>
+        <p:nvSpPr>
+          <p:cNvPr id="14" name="Text 12"/>
+          <p:cNvSpPr txBox="1"/>
+          <p:nvPr/>
+        </p:nvSpPr>
+        <p:spPr>
+          <a:xfrm>
+            <a:off x="8183880" y="2103120"/>
+            <a:ext cx="3596335" cy="566928"/>
+          </a:xfrm>
+          <a:prstGeom prst="rect">
+            <a:avLst/>
+          </a:prstGeom>
+          <a:noFill/>
+          <a:ln/>
+        </p:spPr>
+        <p:txBody>
+          <a:bodyPr wrap="square" lIns="0" tIns="0" rIns="0" bIns="0" rtlCol="0" anchor="t"/>
+          <a:lstStyle/>
+          <a:p>
+            <a:pPr indent="0" marL="0">
+              <a:buNone/>
+            </a:pPr>
+            <a:r>
+              <a:rPr lang="en-US" sz="3800" spc="-200" kern="0" dirty="0">
+                <a:solidFill>
+                  <a:srgbClr val="FFFFFF"/>
+                </a:solidFill>
+                <a:latin typeface="Segoe UI" pitchFamily="34" charset="0"/>
+                <a:ea typeface="Segoe UI" pitchFamily="34" charset="-122"/>
+                <a:cs typeface="Segoe UI" pitchFamily="34" charset="-120"/>
+              </a:rPr>
+              <a:t>90%+</a:t>
+            </a:r>
+            <a:endParaRPr lang="en-US" sz="3800" dirty="0"/>
+          </a:p>
+        </p:txBody>
+      </p:sp>
+      <p:sp>
+        <p:nvSpPr>
+          <p:cNvPr id="15" name="Text 13"/>
+          <p:cNvSpPr txBox="1"/>
+          <p:nvPr/>
+        </p:nvSpPr>
+        <p:spPr>
+          <a:xfrm>
+            <a:off x="8183880" y="2706624"/>
+            <a:ext cx="3596335" cy="457200"/>
+          </a:xfrm>
+          <a:prstGeom prst="rect">
+            <a:avLst/>
+          </a:prstGeom>
+          <a:noFill/>
+          <a:ln/>
+        </p:spPr>
+        <p:txBody>
+          <a:bodyPr wrap="square" lIns="0" tIns="0" rIns="0" bIns="0" rtlCol="0" anchor="t"/>
+          <a:lstStyle/>
           <a:p>
             <a:pPr indent="0" marL="0">
               <a:lnSpc>
@@ -2572,15 +2823,15 @@
               <a:buNone/>
             </a:pPr>
             <a:r>
-              <a:rPr lang="en-US" sz="1050" b="1" dirty="0">
-                <a:solidFill>
-                  <a:srgbClr val="0C3C75"/>
-                </a:solidFill>
-                <a:latin typeface="Segoe UI" pitchFamily="34" charset="0"/>
-                <a:ea typeface="Segoe UI" pitchFamily="34" charset="-122"/>
-                <a:cs typeface="Segoe UI" pitchFamily="34" charset="-120"/>
-              </a:rPr>
-              <a:t>Executive Leadership — CEO · CFO · COO</a:t>
+              <a:rPr lang="en-US" sz="1050" dirty="0">
+                <a:solidFill>
+                  <a:srgbClr val="C5D6E8"/>
+                </a:solidFill>
+                <a:latin typeface="Segoe UI" pitchFamily="34" charset="0"/>
+                <a:ea typeface="Segoe UI" pitchFamily="34" charset="-122"/>
+                <a:cs typeface="Segoe UI" pitchFamily="34" charset="-120"/>
+              </a:rPr>
+              <a:t>Payer identification accuracy, up from under 30%</a:t>
             </a:r>
             <a:endParaRPr lang="en-US" sz="1050" dirty="0"/>
           </a:p>
@@ -2588,116 +2839,76 @@
       </p:sp>
       <p:sp>
         <p:nvSpPr>
-          <p:cNvPr id="8" name="Text 6"/>
-          <p:cNvSpPr txBox="1"/>
-          <p:nvPr/>
-        </p:nvSpPr>
-        <p:spPr>
-          <a:xfrm>
-            <a:off x="3657600" y="5047488"/>
-            <a:ext cx="1737360" cy="201168"/>
-          </a:xfrm>
-          <a:prstGeom prst="rect">
-            <a:avLst/>
-          </a:prstGeom>
-          <a:noFill/>
-          <a:ln/>
-        </p:spPr>
-        <p:txBody>
-          <a:bodyPr wrap="square" lIns="0" tIns="0" rIns="0" bIns="0" rtlCol="0" anchor="t"/>
-          <a:lstStyle/>
-          <a:p>
-            <a:pPr indent="0" marL="0">
-              <a:buNone/>
-            </a:pPr>
-            <a:r>
-              <a:rPr lang="en-US" sz="800" b="1" spc="150" kern="0" dirty="0">
-                <a:solidFill>
-                  <a:srgbClr val="6E7E90"/>
-                </a:solidFill>
-                <a:latin typeface="Segoe UI" pitchFamily="34" charset="0"/>
-                <a:ea typeface="Segoe UI" pitchFamily="34" charset="-122"/>
-                <a:cs typeface="Segoe UI" pitchFamily="34" charset="-120"/>
-              </a:rPr>
-              <a:t>PREPARED BY</a:t>
-            </a:r>
-            <a:endParaRPr lang="en-US" sz="800" dirty="0"/>
-          </a:p>
-        </p:txBody>
-      </p:sp>
-      <p:pic>
-        <p:nvPicPr>
-          <p:cNvPr id="9" name="Image 0" descr="E:/Claude/laborforce-deck/brand/logo_full_large.png">    </p:cNvPr>
-          <p:cNvPicPr>
-            <a:picLocks noChangeAspect="1"/>
-          </p:cNvPicPr>
-          <p:nvPr/>
-        </p:nvPicPr>
-        <p:blipFill>
-          <a:blip r:embed="rId1"/>
-          <a:stretch>
-            <a:fillRect/>
-          </a:stretch>
-        </p:blipFill>
-        <p:spPr>
-          <a:xfrm>
-            <a:off x="3657600" y="5266944"/>
-            <a:ext cx="896112" cy="589788"/>
-          </a:xfrm>
-          <a:prstGeom prst="rect">
-            <a:avLst/>
-          </a:prstGeom>
-        </p:spPr>
-      </p:pic>
-      <p:sp>
-        <p:nvSpPr>
-          <p:cNvPr id="10" name="Text 7"/>
-          <p:cNvSpPr txBox="1"/>
-          <p:nvPr/>
-        </p:nvSpPr>
-        <p:spPr>
-          <a:xfrm>
-            <a:off x="5577840" y="5047488"/>
-            <a:ext cx="1645920" cy="201168"/>
-          </a:xfrm>
-          <a:prstGeom prst="rect">
-            <a:avLst/>
-          </a:prstGeom>
-          <a:noFill/>
-          <a:ln/>
-        </p:spPr>
-        <p:txBody>
-          <a:bodyPr wrap="square" lIns="0" tIns="0" rIns="0" bIns="0" rtlCol="0" anchor="t"/>
-          <a:lstStyle/>
-          <a:p>
-            <a:pPr indent="0" marL="0">
-              <a:buNone/>
-            </a:pPr>
-            <a:r>
-              <a:rPr lang="en-US" sz="800" b="1" spc="150" kern="0" dirty="0">
-                <a:solidFill>
-                  <a:srgbClr val="6E7E90"/>
-                </a:solidFill>
-                <a:latin typeface="Segoe UI" pitchFamily="34" charset="0"/>
-                <a:ea typeface="Segoe UI" pitchFamily="34" charset="-122"/>
-                <a:cs typeface="Segoe UI" pitchFamily="34" charset="-120"/>
-              </a:rPr>
-              <a:t>BRIEFING</a:t>
-            </a:r>
-            <a:endParaRPr lang="en-US" sz="800" dirty="0"/>
-          </a:p>
-        </p:txBody>
-      </p:sp>
-      <p:sp>
-        <p:nvSpPr>
-          <p:cNvPr id="11" name="Text 8"/>
-          <p:cNvSpPr txBox="1"/>
-          <p:nvPr/>
-        </p:nvSpPr>
-        <p:spPr>
-          <a:xfrm>
-            <a:off x="5577840" y="5285232"/>
-            <a:ext cx="1645920" cy="594360"/>
+          <p:cNvPr id="16" name="Shape 14"/>
+          <p:cNvSpPr/>
+          <p:nvPr/>
+        </p:nvSpPr>
+        <p:spPr>
+          <a:xfrm>
+            <a:off x="8183880" y="3182112"/>
+            <a:ext cx="3596335" cy="0"/>
+          </a:xfrm>
+          <a:prstGeom prst="line">
+            <a:avLst/>
+          </a:prstGeom>
+          <a:noFill/>
+          <a:ln w="9525">
+            <a:solidFill>
+              <a:srgbClr val="375F8F"/>
+            </a:solidFill>
+            <a:prstDash val="solid"/>
+          </a:ln>
+        </p:spPr>
+      </p:sp>
+      <p:sp>
+        <p:nvSpPr>
+          <p:cNvPr id="17" name="Text 15"/>
+          <p:cNvSpPr txBox="1"/>
+          <p:nvPr/>
+        </p:nvSpPr>
+        <p:spPr>
+          <a:xfrm>
+            <a:off x="8183880" y="3291840"/>
+            <a:ext cx="3596335" cy="566928"/>
+          </a:xfrm>
+          <a:prstGeom prst="rect">
+            <a:avLst/>
+          </a:prstGeom>
+          <a:noFill/>
+          <a:ln/>
+        </p:spPr>
+        <p:txBody>
+          <a:bodyPr wrap="square" lIns="0" tIns="0" rIns="0" bIns="0" rtlCol="0" anchor="t"/>
+          <a:lstStyle/>
+          <a:p>
+            <a:pPr indent="0" marL="0">
+              <a:buNone/>
+            </a:pPr>
+            <a:r>
+              <a:rPr lang="en-US" sz="3800" spc="-200" kern="0" dirty="0">
+                <a:solidFill>
+                  <a:srgbClr val="FFFFFF"/>
+                </a:solidFill>
+                <a:latin typeface="Segoe UI" pitchFamily="34" charset="0"/>
+                <a:ea typeface="Segoe UI" pitchFamily="34" charset="-122"/>
+                <a:cs typeface="Segoe UI" pitchFamily="34" charset="-120"/>
+              </a:rPr>
+              <a:t>79%</a:t>
+            </a:r>
+            <a:endParaRPr lang="en-US" sz="3800" dirty="0"/>
+          </a:p>
+        </p:txBody>
+      </p:sp>
+      <p:sp>
+        <p:nvSpPr>
+          <p:cNvPr id="18" name="Text 16"/>
+          <p:cNvSpPr txBox="1"/>
+          <p:nvPr/>
+        </p:nvSpPr>
+        <p:spPr>
+          <a:xfrm>
+            <a:off x="8183880" y="3895344"/>
+            <a:ext cx="3596335" cy="457200"/>
           </a:xfrm>
           <a:prstGeom prst="rect">
             <a:avLst/>
@@ -2716,522 +2927,23 @@
               <a:buNone/>
             </a:pPr>
             <a:r>
-              <a:rPr lang="en-US" sz="1050" b="1" dirty="0">
-                <a:solidFill>
-                  <a:srgbClr val="0C3C75"/>
-                </a:solidFill>
-                <a:latin typeface="Segoe UI" pitchFamily="34" charset="0"/>
-                <a:ea typeface="Segoe UI" pitchFamily="34" charset="-122"/>
-                <a:cs typeface="Segoe UI" pitchFamily="34" charset="-120"/>
-              </a:rPr>
-              <a:t>Executive proposal</a:t>
+              <a:rPr lang="en-US" sz="1050" dirty="0">
+                <a:solidFill>
+                  <a:srgbClr val="C5D6E8"/>
+                </a:solidFill>
+                <a:latin typeface="Segoe UI" pitchFamily="34" charset="0"/>
+                <a:ea typeface="Segoe UI" pitchFamily="34" charset="-122"/>
+                <a:cs typeface="Segoe UI" pitchFamily="34" charset="-120"/>
+              </a:rPr>
+              <a:t>Of screened July encounters verified (141 of 178)</a:t>
             </a:r>
             <a:endParaRPr lang="en-US" sz="1050" dirty="0"/>
           </a:p>
-          <a:p>
-            <a:pPr indent="0" marL="0">
-              <a:lnSpc>
-                <a:spcPct val="120000"/>
-              </a:lnSpc>
-              <a:buNone/>
-            </a:pPr>
-            <a:r>
-              <a:rPr lang="en-US" sz="1050" b="1" dirty="0">
-                <a:solidFill>
-                  <a:srgbClr val="0C3C75"/>
-                </a:solidFill>
-                <a:latin typeface="Segoe UI" pitchFamily="34" charset="0"/>
-                <a:ea typeface="Segoe UI" pitchFamily="34" charset="-122"/>
-                <a:cs typeface="Segoe UI" pitchFamily="34" charset="-120"/>
-              </a:rPr>
-              <a:t>October 2026</a:t>
-            </a:r>
-            <a:endParaRPr lang="en-US" sz="1050" dirty="0"/>
-          </a:p>
-        </p:txBody>
-      </p:sp>
-      <p:sp>
-        <p:nvSpPr>
-          <p:cNvPr id="12" name="Shape 9"/>
-          <p:cNvSpPr/>
-          <p:nvPr/>
-        </p:nvSpPr>
-        <p:spPr>
-          <a:xfrm>
-            <a:off x="548640" y="6382512"/>
-            <a:ext cx="6675120" cy="0"/>
-          </a:xfrm>
-          <a:prstGeom prst="line">
-            <a:avLst/>
-          </a:prstGeom>
-          <a:noFill/>
-          <a:ln w="9525">
-            <a:solidFill>
-              <a:srgbClr val="D4DCE6"/>
-            </a:solidFill>
-            <a:prstDash val="solid"/>
-          </a:ln>
-        </p:spPr>
-      </p:sp>
-      <p:sp>
-        <p:nvSpPr>
-          <p:cNvPr id="13" name="Text 10"/>
-          <p:cNvSpPr txBox="1"/>
-          <p:nvPr/>
-        </p:nvSpPr>
-        <p:spPr>
-          <a:xfrm>
-            <a:off x="548640" y="6455664"/>
-            <a:ext cx="4572000" cy="228600"/>
-          </a:xfrm>
-          <a:prstGeom prst="rect">
-            <a:avLst/>
-          </a:prstGeom>
-          <a:noFill/>
-          <a:ln/>
-        </p:spPr>
-        <p:txBody>
-          <a:bodyPr wrap="square" lIns="0" tIns="0" rIns="0" bIns="0" rtlCol="0" anchor="t"/>
-          <a:lstStyle/>
-          <a:p>
-            <a:pPr indent="0" marL="0">
-              <a:buNone/>
-            </a:pPr>
-            <a:r>
-              <a:rPr lang="en-US" sz="800" spc="150" kern="0" dirty="0">
-                <a:solidFill>
-                  <a:srgbClr val="6E7E90"/>
-                </a:solidFill>
-                <a:latin typeface="Segoe UI" pitchFamily="34" charset="0"/>
-                <a:ea typeface="Segoe UI" pitchFamily="34" charset="-122"/>
-                <a:cs typeface="Segoe UI" pitchFamily="34" charset="-120"/>
-              </a:rPr>
-              <a:t>CONFIDENTIAL — FOR DISCUSSION PURPOSES</a:t>
-            </a:r>
-            <a:endParaRPr lang="en-US" sz="800" dirty="0"/>
-          </a:p>
-        </p:txBody>
-      </p:sp>
-      <p:sp>
-        <p:nvSpPr>
-          <p:cNvPr id="14" name="Text 11"/>
-          <p:cNvSpPr txBox="1"/>
-          <p:nvPr/>
-        </p:nvSpPr>
-        <p:spPr>
-          <a:xfrm>
-            <a:off x="5394960" y="6455664"/>
-            <a:ext cx="1828800" cy="228600"/>
-          </a:xfrm>
-          <a:prstGeom prst="rect">
-            <a:avLst/>
-          </a:prstGeom>
-          <a:noFill/>
-          <a:ln/>
-        </p:spPr>
-        <p:txBody>
-          <a:bodyPr wrap="square" lIns="0" tIns="0" rIns="0" bIns="0" rtlCol="0" anchor="t"/>
-          <a:lstStyle/>
-          <a:p>
-            <a:pPr algn="r" indent="0" marL="0">
-              <a:buNone/>
-            </a:pPr>
-            <a:r>
-              <a:rPr lang="en-US" sz="800" spc="150" kern="0" dirty="0">
-                <a:solidFill>
-                  <a:srgbClr val="6E7E90"/>
-                </a:solidFill>
-                <a:latin typeface="Segoe UI" pitchFamily="34" charset="0"/>
-                <a:ea typeface="Segoe UI" pitchFamily="34" charset="-122"/>
-                <a:cs typeface="Segoe UI" pitchFamily="34" charset="-120"/>
-              </a:rPr>
-              <a:t>01 / 10</a:t>
-            </a:r>
-            <a:endParaRPr lang="en-US" sz="800" dirty="0"/>
-          </a:p>
-        </p:txBody>
-      </p:sp>
-      <p:sp>
-        <p:nvSpPr>
-          <p:cNvPr id="15" name="Shape 12"/>
-          <p:cNvSpPr/>
-          <p:nvPr/>
-        </p:nvSpPr>
-        <p:spPr>
-          <a:xfrm>
-            <a:off x="7726680" y="0"/>
-            <a:ext cx="4465015" cy="6858000"/>
-          </a:xfrm>
-          <a:prstGeom prst="rect">
-            <a:avLst/>
-          </a:prstGeom>
-          <a:solidFill>
-            <a:srgbClr val="0C3C75"/>
-          </a:solidFill>
-          <a:ln w="12700">
-            <a:solidFill>
-              <a:srgbClr val="0C3C75"/>
-            </a:solidFill>
-            <a:prstDash val="solid"/>
-          </a:ln>
-        </p:spPr>
-      </p:sp>
-      <p:sp>
-        <p:nvSpPr>
-          <p:cNvPr id="16" name="Shape 13"/>
-          <p:cNvSpPr/>
-          <p:nvPr/>
-        </p:nvSpPr>
-        <p:spPr>
-          <a:xfrm>
-            <a:off x="7726680" y="0"/>
-            <a:ext cx="54864" cy="6858000"/>
-          </a:xfrm>
-          <a:prstGeom prst="rect">
-            <a:avLst/>
-          </a:prstGeom>
-          <a:solidFill>
-            <a:srgbClr val="0A8FA6"/>
-          </a:solidFill>
-          <a:ln w="12700">
-            <a:solidFill>
-              <a:srgbClr val="0A8FA6"/>
-            </a:solidFill>
-            <a:prstDash val="solid"/>
-          </a:ln>
-        </p:spPr>
-      </p:sp>
-      <p:sp>
-        <p:nvSpPr>
-          <p:cNvPr id="17" name="Text 14"/>
-          <p:cNvSpPr txBox="1"/>
-          <p:nvPr/>
-        </p:nvSpPr>
-        <p:spPr>
-          <a:xfrm>
-            <a:off x="8183880" y="548640"/>
-            <a:ext cx="3596335" cy="201168"/>
-          </a:xfrm>
-          <a:prstGeom prst="rect">
-            <a:avLst/>
-          </a:prstGeom>
-          <a:noFill/>
-          <a:ln/>
-        </p:spPr>
-        <p:txBody>
-          <a:bodyPr wrap="square" lIns="0" tIns="0" rIns="0" bIns="0" rtlCol="0" anchor="t"/>
-          <a:lstStyle/>
-          <a:p>
-            <a:pPr indent="0" marL="0">
-              <a:buNone/>
-            </a:pPr>
-            <a:r>
-              <a:rPr lang="en-US" sz="900" b="1" spc="150" kern="0" dirty="0">
-                <a:solidFill>
-                  <a:srgbClr val="7FD3E3"/>
-                </a:solidFill>
-                <a:latin typeface="Segoe UI" pitchFamily="34" charset="0"/>
-                <a:ea typeface="Segoe UI" pitchFamily="34" charset="-122"/>
-                <a:cs typeface="Segoe UI" pitchFamily="34" charset="-120"/>
-              </a:rPr>
-              <a:t>AT A GLANCE</a:t>
-            </a:r>
-            <a:endParaRPr lang="en-US" sz="900" dirty="0"/>
-          </a:p>
-        </p:txBody>
-      </p:sp>
-      <p:sp>
-        <p:nvSpPr>
-          <p:cNvPr id="18" name="Text 15"/>
-          <p:cNvSpPr txBox="1"/>
-          <p:nvPr/>
-        </p:nvSpPr>
-        <p:spPr>
-          <a:xfrm>
-            <a:off x="8183880" y="914400"/>
-            <a:ext cx="3596335" cy="566928"/>
-          </a:xfrm>
-          <a:prstGeom prst="rect">
-            <a:avLst/>
-          </a:prstGeom>
-          <a:noFill/>
-          <a:ln/>
-        </p:spPr>
-        <p:txBody>
-          <a:bodyPr wrap="square" lIns="0" tIns="0" rIns="0" bIns="0" rtlCol="0" anchor="t"/>
-          <a:lstStyle/>
-          <a:p>
-            <a:pPr indent="0" marL="0">
-              <a:buNone/>
-            </a:pPr>
-            <a:r>
-              <a:rPr lang="en-US" sz="3800" spc="-200" kern="0" dirty="0">
-                <a:solidFill>
-                  <a:srgbClr val="FFFFFF"/>
-                </a:solidFill>
-                <a:latin typeface="Segoe UI" pitchFamily="34" charset="0"/>
-                <a:ea typeface="Segoe UI" pitchFamily="34" charset="-122"/>
-                <a:cs typeface="Segoe UI" pitchFamily="34" charset="-120"/>
-              </a:rPr>
-              <a:t>+336%</a:t>
-            </a:r>
-            <a:endParaRPr lang="en-US" sz="3800" dirty="0"/>
-          </a:p>
-        </p:txBody>
-      </p:sp>
-      <p:sp>
-        <p:nvSpPr>
-          <p:cNvPr id="19" name="Text 16"/>
-          <p:cNvSpPr txBox="1"/>
-          <p:nvPr/>
-        </p:nvSpPr>
-        <p:spPr>
-          <a:xfrm>
-            <a:off x="8183880" y="1517904"/>
-            <a:ext cx="3596335" cy="457200"/>
-          </a:xfrm>
-          <a:prstGeom prst="rect">
-            <a:avLst/>
-          </a:prstGeom>
-          <a:noFill/>
-          <a:ln/>
-        </p:spPr>
-        <p:txBody>
-          <a:bodyPr wrap="square" lIns="0" tIns="0" rIns="0" bIns="0" rtlCol="0" anchor="t"/>
-          <a:lstStyle/>
-          <a:p>
-            <a:pPr indent="0" marL="0">
-              <a:lnSpc>
-                <a:spcPct val="120000"/>
-              </a:lnSpc>
-              <a:buNone/>
-            </a:pPr>
-            <a:r>
-              <a:rPr lang="en-US" sz="1050" dirty="0">
-                <a:solidFill>
-                  <a:srgbClr val="C5D6E8"/>
-                </a:solidFill>
-                <a:latin typeface="Segoe UI" pitchFamily="34" charset="0"/>
-                <a:ea typeface="Segoe UI" pitchFamily="34" charset="-122"/>
-                <a:cs typeface="Segoe UI" pitchFamily="34" charset="-120"/>
-              </a:rPr>
-              <a:t>Monthly TPL recoveries at Chicago-area partner hospitals, March – July 2026 ($33K → $144K)</a:t>
-            </a:r>
-            <a:endParaRPr lang="en-US" sz="1050" dirty="0"/>
-          </a:p>
-        </p:txBody>
-      </p:sp>
-      <p:sp>
-        <p:nvSpPr>
-          <p:cNvPr id="20" name="Shape 17"/>
-          <p:cNvSpPr/>
-          <p:nvPr/>
-        </p:nvSpPr>
-        <p:spPr>
-          <a:xfrm>
-            <a:off x="8183880" y="1993392"/>
-            <a:ext cx="3596335" cy="0"/>
-          </a:xfrm>
-          <a:prstGeom prst="line">
-            <a:avLst/>
-          </a:prstGeom>
-          <a:noFill/>
-          <a:ln w="9525">
-            <a:solidFill>
-              <a:srgbClr val="375F8F"/>
-            </a:solidFill>
-            <a:prstDash val="solid"/>
-          </a:ln>
-        </p:spPr>
-      </p:sp>
-      <p:sp>
-        <p:nvSpPr>
-          <p:cNvPr id="21" name="Text 18"/>
-          <p:cNvSpPr txBox="1"/>
-          <p:nvPr/>
-        </p:nvSpPr>
-        <p:spPr>
-          <a:xfrm>
-            <a:off x="8183880" y="2103120"/>
-            <a:ext cx="3596335" cy="566928"/>
-          </a:xfrm>
-          <a:prstGeom prst="rect">
-            <a:avLst/>
-          </a:prstGeom>
-          <a:noFill/>
-          <a:ln/>
-        </p:spPr>
-        <p:txBody>
-          <a:bodyPr wrap="square" lIns="0" tIns="0" rIns="0" bIns="0" rtlCol="0" anchor="t"/>
-          <a:lstStyle/>
-          <a:p>
-            <a:pPr indent="0" marL="0">
-              <a:buNone/>
-            </a:pPr>
-            <a:r>
-              <a:rPr lang="en-US" sz="3800" spc="-200" kern="0" dirty="0">
-                <a:solidFill>
-                  <a:srgbClr val="FFFFFF"/>
-                </a:solidFill>
-                <a:latin typeface="Segoe UI" pitchFamily="34" charset="0"/>
-                <a:ea typeface="Segoe UI" pitchFamily="34" charset="-122"/>
-                <a:cs typeface="Segoe UI" pitchFamily="34" charset="-120"/>
-              </a:rPr>
-              <a:t>90%+</a:t>
-            </a:r>
-            <a:endParaRPr lang="en-US" sz="3800" dirty="0"/>
-          </a:p>
-        </p:txBody>
-      </p:sp>
-      <p:sp>
-        <p:nvSpPr>
-          <p:cNvPr id="22" name="Text 19"/>
-          <p:cNvSpPr txBox="1"/>
-          <p:nvPr/>
-        </p:nvSpPr>
-        <p:spPr>
-          <a:xfrm>
-            <a:off x="8183880" y="2706624"/>
-            <a:ext cx="3596335" cy="457200"/>
-          </a:xfrm>
-          <a:prstGeom prst="rect">
-            <a:avLst/>
-          </a:prstGeom>
-          <a:noFill/>
-          <a:ln/>
-        </p:spPr>
-        <p:txBody>
-          <a:bodyPr wrap="square" lIns="0" tIns="0" rIns="0" bIns="0" rtlCol="0" anchor="t"/>
-          <a:lstStyle/>
-          <a:p>
-            <a:pPr indent="0" marL="0">
-              <a:lnSpc>
-                <a:spcPct val="120000"/>
-              </a:lnSpc>
-              <a:buNone/>
-            </a:pPr>
-            <a:r>
-              <a:rPr lang="en-US" sz="1050" dirty="0">
-                <a:solidFill>
-                  <a:srgbClr val="C5D6E8"/>
-                </a:solidFill>
-                <a:latin typeface="Segoe UI" pitchFamily="34" charset="0"/>
-                <a:ea typeface="Segoe UI" pitchFamily="34" charset="-122"/>
-                <a:cs typeface="Segoe UI" pitchFamily="34" charset="-120"/>
-              </a:rPr>
-              <a:t>Payer identification accuracy, up from under 30%</a:t>
-            </a:r>
-            <a:endParaRPr lang="en-US" sz="1050" dirty="0"/>
-          </a:p>
-        </p:txBody>
-      </p:sp>
-      <p:sp>
-        <p:nvSpPr>
-          <p:cNvPr id="23" name="Shape 20"/>
-          <p:cNvSpPr/>
-          <p:nvPr/>
-        </p:nvSpPr>
-        <p:spPr>
-          <a:xfrm>
-            <a:off x="8183880" y="3182112"/>
-            <a:ext cx="3596335" cy="0"/>
-          </a:xfrm>
-          <a:prstGeom prst="line">
-            <a:avLst/>
-          </a:prstGeom>
-          <a:noFill/>
-          <a:ln w="9525">
-            <a:solidFill>
-              <a:srgbClr val="375F8F"/>
-            </a:solidFill>
-            <a:prstDash val="solid"/>
-          </a:ln>
-        </p:spPr>
-      </p:sp>
-      <p:sp>
-        <p:nvSpPr>
-          <p:cNvPr id="24" name="Text 21"/>
-          <p:cNvSpPr txBox="1"/>
-          <p:nvPr/>
-        </p:nvSpPr>
-        <p:spPr>
-          <a:xfrm>
-            <a:off x="8183880" y="3291840"/>
-            <a:ext cx="3596335" cy="566928"/>
-          </a:xfrm>
-          <a:prstGeom prst="rect">
-            <a:avLst/>
-          </a:prstGeom>
-          <a:noFill/>
-          <a:ln/>
-        </p:spPr>
-        <p:txBody>
-          <a:bodyPr wrap="square" lIns="0" tIns="0" rIns="0" bIns="0" rtlCol="0" anchor="t"/>
-          <a:lstStyle/>
-          <a:p>
-            <a:pPr indent="0" marL="0">
-              <a:buNone/>
-            </a:pPr>
-            <a:r>
-              <a:rPr lang="en-US" sz="3800" spc="-200" kern="0" dirty="0">
-                <a:solidFill>
-                  <a:srgbClr val="FFFFFF"/>
-                </a:solidFill>
-                <a:latin typeface="Segoe UI" pitchFamily="34" charset="0"/>
-                <a:ea typeface="Segoe UI" pitchFamily="34" charset="-122"/>
-                <a:cs typeface="Segoe UI" pitchFamily="34" charset="-120"/>
-              </a:rPr>
-              <a:t>79%</a:t>
-            </a:r>
-            <a:endParaRPr lang="en-US" sz="3800" dirty="0"/>
-          </a:p>
-        </p:txBody>
-      </p:sp>
-      <p:sp>
-        <p:nvSpPr>
-          <p:cNvPr id="25" name="Text 22"/>
-          <p:cNvSpPr txBox="1"/>
-          <p:nvPr/>
-        </p:nvSpPr>
-        <p:spPr>
-          <a:xfrm>
-            <a:off x="8183880" y="3895344"/>
-            <a:ext cx="3596335" cy="457200"/>
-          </a:xfrm>
-          <a:prstGeom prst="rect">
-            <a:avLst/>
-          </a:prstGeom>
-          <a:noFill/>
-          <a:ln/>
-        </p:spPr>
-        <p:txBody>
-          <a:bodyPr wrap="square" lIns="0" tIns="0" rIns="0" bIns="0" rtlCol="0" anchor="t"/>
-          <a:lstStyle/>
-          <a:p>
-            <a:pPr indent="0" marL="0">
-              <a:lnSpc>
-                <a:spcPct val="120000"/>
-              </a:lnSpc>
-              <a:buNone/>
-            </a:pPr>
-            <a:r>
-              <a:rPr lang="en-US" sz="1050" dirty="0">
-                <a:solidFill>
-                  <a:srgbClr val="C5D6E8"/>
-                </a:solidFill>
-                <a:latin typeface="Segoe UI" pitchFamily="34" charset="0"/>
-                <a:ea typeface="Segoe UI" pitchFamily="34" charset="-122"/>
-                <a:cs typeface="Segoe UI" pitchFamily="34" charset="-120"/>
-              </a:rPr>
-              <a:t>Of screened July encounters verified (141 of 178)</a:t>
-            </a:r>
-            <a:endParaRPr lang="en-US" sz="1050" dirty="0"/>
-          </a:p>
-        </p:txBody>
-      </p:sp>
-      <p:sp>
-        <p:nvSpPr>
-          <p:cNvPr id="26" name="Shape 23"/>
+        </p:txBody>
+      </p:sp>
+      <p:sp>
+        <p:nvSpPr>
+          <p:cNvPr id="19" name="Shape 17"/>
           <p:cNvSpPr/>
           <p:nvPr/>
         </p:nvSpPr>
@@ -3258,7 +2970,7 @@
       </p:sp>
       <p:sp>
         <p:nvSpPr>
-          <p:cNvPr id="27" name="Text 24"/>
+          <p:cNvPr id="20" name="Text 18"/>
           <p:cNvSpPr txBox="1"/>
           <p:nvPr/>
         </p:nvSpPr>
@@ -3297,7 +3009,7 @@
       </p:sp>
       <p:sp>
         <p:nvSpPr>
-          <p:cNvPr id="28" name="Text 25"/>
+          <p:cNvPr id="21" name="Text 19"/>
           <p:cNvSpPr txBox="1"/>
           <p:nvPr/>
         </p:nvSpPr>
@@ -3336,7 +3048,7 @@
       </p:sp>
       <p:sp>
         <p:nvSpPr>
-          <p:cNvPr id="29" name="Text 26"/>
+          <p:cNvPr id="22" name="Text 20"/>
           <p:cNvSpPr txBox="1"/>
           <p:nvPr/>
         </p:nvSpPr>

--- a/LaborForce_CookCountyHealth.pptx
+++ b/LaborForce_CookCountyHealth.pptx
@@ -4,6 +4,9 @@
   <p:sldMasterIdLst>
     <p:sldMasterId id="2147483648" r:id="rId1"/>
   </p:sldMasterIdLst>
+  <p:notesMasterIdLst>
+    <p:notesMasterId r:id="rId12"/>
+  </p:notesMasterIdLst>
   <p:sldIdLst>
     <p:sldId id="256" r:id="rId2"/>
     <p:sldId id="257" r:id="rId3"/>
@@ -16,9 +19,6 @@
     <p:sldId id="264" r:id="rId10"/>
     <p:sldId id="265" r:id="rId11"/>
   </p:sldIdLst>
-  <p:notesMasterIdLst>
-    <p:notesMasterId r:id="rId12"/>
-  </p:notesMasterIdLst>
   <p:sldSz cx="12192000" cy="6858000"/>
   <p:notesSz cx="6858000" cy="12192000"/>
   <p:defaultTextStyle>
@@ -113,18 +113,26 @@
       </a:defRPr>
     </a:lvl9pPr>
   </p:defaultTextStyle>
+  <p:extLst>
+    <p:ext uri="{EFAFB233-063F-42B5-8137-9DF3F51BA10A}">
+      <p15:sldGuideLst xmlns:p15="http://schemas.microsoft.com/office/powerpoint/2012/main"/>
+    </p:ext>
+  </p:extLst>
 </p:presentation>
 </file>
 
 <file path=ppt/charts/chart1.xml><?xml version="1.0" encoding="utf-8"?>
-<c:chartSpace xmlns:c="http://schemas.openxmlformats.org/drawingml/2006/chart" xmlns:a="http://schemas.openxmlformats.org/drawingml/2006/main" xmlns:r="http://schemas.openxmlformats.org/officeDocument/2006/relationships">
+<c:chartSpace xmlns:c="http://schemas.openxmlformats.org/drawingml/2006/chart" xmlns:a="http://schemas.openxmlformats.org/drawingml/2006/main" xmlns:r="http://schemas.openxmlformats.org/officeDocument/2006/relationships" xmlns:c16r2="http://schemas.microsoft.com/office/drawing/2015/06/chart">
   <c:date1904 val="0"/>
+  <c:lang val="en-US"/>
   <c:roundedCorners val="1"/>
+  <c:style val="2"/>
   <c:chart>
     <c:autoTitleDeleted val="1"/>
     <c:plotArea>
       <c:layout/>
       <c:lineChart>
+        <c:grouping val="standard"/>
         <c:varyColors val="0"/>
         <c:ser>
           <c:idx val="0"/>
@@ -141,9 +149,6 @@
             </c:strRef>
           </c:tx>
           <c:spPr>
-            <a:solidFill>
-              <a:srgbClr val="0A8FA6"/>
-            </a:solidFill>
             <a:ln w="28575" cap="flat">
               <a:solidFill>
                 <a:srgbClr val="0A8FA6"/>
@@ -153,21 +158,45 @@
             </a:ln>
             <a:effectLst/>
           </c:spPr>
-          <c:invertIfNegative val="0"/>
+          <c:marker>
+            <c:symbol val="circle"/>
+            <c:size val="6"/>
+            <c:spPr>
+              <a:solidFill>
+                <a:srgbClr val="0A8FA6"/>
+              </a:solidFill>
+              <a:ln w="9525" cap="flat">
+                <a:solidFill>
+                  <a:srgbClr val="0A8FA6"/>
+                </a:solidFill>
+                <a:prstDash val="solid"/>
+                <a:round/>
+              </a:ln>
+              <a:effectLst/>
+            </c:spPr>
+          </c:marker>
           <c:dLbls>
             <c:numFmt formatCode="&quot;$&quot;0&quot;M&quot;" sourceLinked="0"/>
+            <c:spPr>
+              <a:noFill/>
+              <a:ln>
+                <a:noFill/>
+              </a:ln>
+              <a:effectLst/>
+            </c:spPr>
             <c:txPr>
               <a:bodyPr/>
               <a:lstStyle/>
               <a:p>
                 <a:pPr>
-                  <a:defRPr b="0" i="0" strike="noStrike" sz="750" u="none">
+                  <a:defRPr sz="750" b="0" i="0" u="none" strike="noStrike">
                     <a:solidFill>
                       <a:srgbClr val="4A5B6E"/>
                     </a:solidFill>
                     <a:latin typeface="Segoe UI"/>
                   </a:defRPr>
                 </a:pPr>
+                <a:endParaRPr lang="en-US"/>
               </a:p>
             </c:txPr>
             <c:dLblPos val="t"/>
@@ -178,60 +207,46 @@
             <c:showPercent val="0"/>
             <c:showBubbleSize val="0"/>
             <c:showLeaderLines val="0"/>
+            <c:extLst>
+              <c:ext xmlns:c15="http://schemas.microsoft.com/office/drawing/2012/chart" uri="{CE6537A1-D6FC-4f65-9D91-7224C49458BB}">
+                <c15:showLeaderLines val="0"/>
+              </c:ext>
+            </c:extLst>
           </c:dLbls>
-          <c:marker>
-            <c:symbol val="circle"/>
-            <c:size val="6"/>
-            <c:spPr>
-              <a:solidFill>
-                <a:srgbClr val="0A8FA6"/>
-              </a:solidFill>
-              <a:ln w="9525" cap="flat">
-                <a:solidFill>
-                  <a:srgbClr val="0A8FA6"/>
-                </a:solidFill>
-                <a:prstDash val="solid"/>
-                <a:round/>
-              </a:ln>
-              <a:effectLst/>
-            </c:spPr>
-          </c:marker>
           <c:cat>
-            <c:multiLvlStrRef>
+            <c:strRef>
               <c:f>Sheet1!$A$2:$A$10</c:f>
-              <c:multiLvlStrCache>
+              <c:strCache>
                 <c:ptCount val="9"/>
-                <c:lvl>
-                  <c:pt idx="0">
-                    <c:v>2%</c:v>
-                  </c:pt>
-                  <c:pt idx="1">
-                    <c:v>3%</c:v>
-                  </c:pt>
-                  <c:pt idx="2">
-                    <c:v>4%</c:v>
-                  </c:pt>
-                  <c:pt idx="3">
-                    <c:v>5%</c:v>
-                  </c:pt>
-                  <c:pt idx="4">
-                    <c:v>6%</c:v>
-                  </c:pt>
-                  <c:pt idx="5">
-                    <c:v>7%</c:v>
-                  </c:pt>
-                  <c:pt idx="6">
-                    <c:v>8%</c:v>
-                  </c:pt>
-                  <c:pt idx="7">
-                    <c:v>9%</c:v>
-                  </c:pt>
-                  <c:pt idx="8">
-                    <c:v>10%</c:v>
-                  </c:pt>
-                </c:lvl>
-              </c:multiLvlStrCache>
-            </c:multiLvlStrRef>
+                <c:pt idx="0">
+                  <c:v>2%</c:v>
+                </c:pt>
+                <c:pt idx="1">
+                  <c:v>3%</c:v>
+                </c:pt>
+                <c:pt idx="2">
+                  <c:v>4%</c:v>
+                </c:pt>
+                <c:pt idx="3">
+                  <c:v>5%</c:v>
+                </c:pt>
+                <c:pt idx="4">
+                  <c:v>6%</c:v>
+                </c:pt>
+                <c:pt idx="5">
+                  <c:v>7%</c:v>
+                </c:pt>
+                <c:pt idx="6">
+                  <c:v>8%</c:v>
+                </c:pt>
+                <c:pt idx="7">
+                  <c:v>9%</c:v>
+                </c:pt>
+                <c:pt idx="8">
+                  <c:v>10%</c:v>
+                </c:pt>
+              </c:strCache>
+            </c:strRef>
           </c:cat>
           <c:val>
             <c:numRef>
@@ -270,23 +285,13 @@
             </c:numRef>
           </c:val>
           <c:smooth val="0"/>
+          <c:extLst>
+            <c:ext xmlns:c16="http://schemas.microsoft.com/office/drawing/2014/chart" uri="{C3380CC4-5D6E-409C-BE32-E72D297353CC}">
+              <c16:uniqueId val="{00000000-D605-469F-ACB8-8A13E82ECF5F}"/>
+            </c:ext>
+          </c:extLst>
         </c:ser>
         <c:dLbls>
-          <c:numFmt formatCode="&quot;$&quot;0&quot;M&quot;" sourceLinked="0"/>
-          <c:txPr>
-            <a:bodyPr/>
-            <a:lstStyle/>
-            <a:p>
-              <a:pPr>
-                <a:defRPr b="0" i="0" strike="noStrike" sz="750" u="none">
-                  <a:solidFill>
-                    <a:srgbClr val="4A5B6E"/>
-                  </a:solidFill>
-                  <a:latin typeface="Segoe UI"/>
-                </a:defRPr>
-              </a:pPr>
-            </a:p>
-          </c:txPr>
           <c:dLblPos val="t"/>
           <c:showLegendKey val="0"/>
           <c:showVal val="1"/>
@@ -294,12 +299,11 @@
           <c:showSerName val="0"/>
           <c:showPercent val="0"/>
           <c:showBubbleSize val="0"/>
-          <c:showLeaderLines val="0"/>
         </c:dLbls>
         <c:marker val="1"/>
+        <c:smooth val="0"/>
         <c:axId val="2094734554"/>
         <c:axId val="2094734552"/>
-        <c:axId val="2094734556"/>
       </c:lineChart>
       <c:catAx>
         <c:axId val="2094734554"/>
@@ -334,7 +338,6 @@
               </a:p>
             </c:rich>
           </c:tx>
-          <c:layout/>
           <c:overlay val="0"/>
         </c:title>
         <c:numFmt formatCode="General" sourceLinked="1"/>
@@ -367,6 +370,7 @@
         <c:crosses val="autoZero"/>
         <c:auto val="1"/>
         <c:lblAlgn val="ctr"/>
+        <c:lblOffset val="100"/>
         <c:noMultiLvlLbl val="1"/>
       </c:catAx>
       <c:valAx>
@@ -432,6 +436,7 @@
     </c:plotArea>
     <c:plotVisOnly val="1"/>
     <c:dispBlanksAs val="span"/>
+    <c:showDLblsOverMax val="1"/>
   </c:chart>
   <c:spPr>
     <a:solidFill>
@@ -470,234 +475,10 @@
           <a:chExt cx="0" cy="0"/>
         </a:xfrm>
       </p:grpSpPr>
-      <p:sp>
-        <p:nvSpPr>
-          <p:cNvPr id="2" name="Header Placeholder 1"/>
-          <p:cNvSpPr>
-            <a:spLocks noGrp="1"/>
-          </p:cNvSpPr>
-          <p:nvPr>
-            <p:ph type="hdr" sz="quarter"/>
-          </p:nvPr>
-        </p:nvSpPr>
-        <p:spPr>
-          <a:xfrm>
-            <a:off x="0" y="0"/>
-            <a:ext cx="2971800" cy="458788"/>
-          </a:xfrm>
-          <a:prstGeom prst="rect">
-            <a:avLst/>
-          </a:prstGeom>
-        </p:spPr>
-        <p:txBody>
-          <a:bodyPr vert="horz" lIns="91440" tIns="45720" rIns="91440" bIns="45720" rtlCol="0"/>
-          <a:lstStyle>
-            <a:lvl1pPr algn="l">
-              <a:defRPr sz="1200"/>
-            </a:lvl1pPr>
-          </a:lstStyle>
-          <a:p>
-            <a:endParaRPr lang="en-US"/>
-          </a:p>
-        </p:txBody>
-      </p:sp>
-      <p:sp>
-        <p:nvSpPr>
-          <p:cNvPr id="3" name="Date Placeholder 2"/>
-          <p:cNvSpPr>
-            <a:spLocks noGrp="1"/>
-          </p:cNvSpPr>
-          <p:nvPr>
-            <p:ph type="dt" idx="1"/>
-          </p:nvPr>
-        </p:nvSpPr>
-        <p:spPr>
-          <a:xfrm>
-            <a:off x="3884613" y="0"/>
-            <a:ext cx="2971800" cy="458788"/>
-          </a:xfrm>
-          <a:prstGeom prst="rect">
-            <a:avLst/>
-          </a:prstGeom>
-        </p:spPr>
-        <p:txBody>
-          <a:bodyPr vert="horz" lIns="91440" tIns="45720" rIns="91440" bIns="45720" rtlCol="0"/>
-          <a:lstStyle>
-            <a:lvl1pPr algn="r">
-              <a:defRPr sz="1200"/>
-            </a:lvl1pPr>
-          </a:lstStyle>
-          <a:p>
-            <a:fld id="{5282F153-3F37-0F45-9E97-73ACFA13230C}" type="datetimeFigureOut">
-              <a:rPr lang="en-US"/>
-              <a:t>7/23/19</a:t>
-            </a:fld>
-            <a:endParaRPr lang="en-US"/>
-          </a:p>
-        </p:txBody>
-      </p:sp>
-      <p:sp>
-        <p:nvSpPr>
-          <p:cNvPr id="4" name="Slide Image Placeholder 3"/>
-          <p:cNvSpPr>
-            <a:spLocks noGrp="1" noRot="1" noChangeAspect="1"/>
-          </p:cNvSpPr>
-          <p:nvPr>
-            <p:ph type="sldImg" idx="2"/>
-          </p:nvPr>
-        </p:nvSpPr>
-        <p:spPr>
-          <a:xfrm>
-            <a:off x="685800" y="1143000"/>
-            <a:ext cx="5486400" cy="3086100"/>
-          </a:xfrm>
-          <a:prstGeom prst="rect">
-            <a:avLst/>
-          </a:prstGeom>
-          <a:noFill/>
-          <a:ln w="12700">
-            <a:solidFill>
-              <a:prstClr val="black"/>
-            </a:solidFill>
-          </a:ln>
-        </p:spPr>
-        <p:txBody>
-          <a:bodyPr vert="horz" lIns="91440" tIns="45720" rIns="91440" bIns="45720" rtlCol="0" anchor="ctr"/>
-          <a:lstStyle/>
-          <a:p>
-            <a:endParaRPr lang="en-US"/>
-          </a:p>
-        </p:txBody>
-      </p:sp>
-      <p:sp>
-        <p:nvSpPr>
-          <p:cNvPr id="5" name="Notes Placeholder 4"/>
-          <p:cNvSpPr>
-            <a:spLocks noGrp="1"/>
-          </p:cNvSpPr>
-          <p:nvPr>
-            <p:ph type="body" sz="quarter" idx="3"/>
-          </p:nvPr>
-        </p:nvSpPr>
-        <p:spPr>
-          <a:xfrm>
-            <a:off x="685800" y="4400550"/>
-            <a:ext cx="5486400" cy="3600450"/>
-          </a:xfrm>
-          <a:prstGeom prst="rect">
-            <a:avLst/>
-          </a:prstGeom>
-        </p:spPr>
-        <p:txBody>
-          <a:bodyPr vert="horz" lIns="91440" tIns="45720" rIns="91440" bIns="45720" rtlCol="0"/>
-          <a:lstStyle/>
-          <a:p>
-            <a:pPr lvl="0"/>
-            <a:r>
-              <a:rPr lang="en-US"/>
-              <a:t>Click to edit Master text styles</a:t>
-            </a:r>
-          </a:p>
-          <a:p>
-            <a:pPr lvl="1"/>
-            <a:r>
-              <a:rPr lang="en-US"/>
-              <a:t>Second level</a:t>
-            </a:r>
-          </a:p>
-          <a:p>
-            <a:pPr lvl="2"/>
-            <a:r>
-              <a:rPr lang="en-US"/>
-              <a:t>Third level</a:t>
-            </a:r>
-          </a:p>
-          <a:p>
-            <a:pPr lvl="3"/>
-            <a:r>
-              <a:rPr lang="en-US"/>
-              <a:t>Fourth level</a:t>
-            </a:r>
-          </a:p>
-          <a:p>
-            <a:pPr lvl="4"/>
-            <a:r>
-              <a:rPr lang="en-US"/>
-              <a:t>Fifth level</a:t>
-            </a:r>
-          </a:p>
-        </p:txBody>
-      </p:sp>
-      <p:sp>
-        <p:nvSpPr>
-          <p:cNvPr id="6" name="Footer Placeholder 5"/>
-          <p:cNvSpPr>
-            <a:spLocks noGrp="1"/>
-          </p:cNvSpPr>
-          <p:nvPr>
-            <p:ph type="ftr" sz="quarter" idx="4"/>
-          </p:nvPr>
-        </p:nvSpPr>
-        <p:spPr>
-          <a:xfrm>
-            <a:off x="0" y="8685213"/>
-            <a:ext cx="2971800" cy="458787"/>
-          </a:xfrm>
-          <a:prstGeom prst="rect">
-            <a:avLst/>
-          </a:prstGeom>
-        </p:spPr>
-        <p:txBody>
-          <a:bodyPr vert="horz" lIns="91440" tIns="45720" rIns="91440" bIns="45720" rtlCol="0" anchor="b"/>
-          <a:lstStyle>
-            <a:lvl1pPr algn="l">
-              <a:defRPr sz="1200"/>
-            </a:lvl1pPr>
-          </a:lstStyle>
-          <a:p>
-            <a:endParaRPr lang="en-US"/>
-          </a:p>
-        </p:txBody>
-      </p:sp>
-      <p:sp>
-        <p:nvSpPr>
-          <p:cNvPr id="7" name="Slide Number Placeholder 6"/>
-          <p:cNvSpPr>
-            <a:spLocks noGrp="1"/>
-          </p:cNvSpPr>
-          <p:nvPr>
-            <p:ph type="sldNum" sz="quarter" idx="5"/>
-          </p:nvPr>
-        </p:nvSpPr>
-        <p:spPr>
-          <a:xfrm>
-            <a:off x="3884613" y="8685213"/>
-            <a:ext cx="2971800" cy="458787"/>
-          </a:xfrm>
-          <a:prstGeom prst="rect">
-            <a:avLst/>
-          </a:prstGeom>
-        </p:spPr>
-        <p:txBody>
-          <a:bodyPr vert="horz" lIns="91440" tIns="45720" rIns="91440" bIns="45720" rtlCol="0" anchor="b"/>
-          <a:lstStyle>
-            <a:lvl1pPr algn="r">
-              <a:defRPr sz="1200"/>
-            </a:lvl1pPr>
-          </a:lstStyle>
-          <a:p>
-            <a:fld id="{CE5E9CC1-C706-0F49-92D6-E571CC5EEA8F}" type="slidenum">
-              <a:rPr lang="en-US"/>
-              <a:t>‹#›</a:t>
-            </a:fld>
-            <a:endParaRPr lang="en-US"/>
-          </a:p>
-        </p:txBody>
-      </p:sp>
     </p:spTree>
     <p:extLst>
       <p:ext uri="{BB962C8B-B14F-4D97-AF65-F5344CB8AC3E}">
-        <p14:creationId xmlns:p14="http://schemas.microsoft.com/office/powerpoint/2010/main" val="1024086991"/>
+        <p14:creationId xmlns:p14="http://schemas.microsoft.com/office/powerpoint/2010/main" val="3272148917"/>
       </p:ext>
     </p:extLst>
   </p:cSld>
@@ -845,7 +626,6 @@
               <a:rPr lang="en-US" dirty="0"/>
               <a:t>Cover. Program results are program-reported figures from Chicago-area partner hospitals, March–July 2026; not independently attributed.</a:t>
             </a:r>
-            <a:endParaRPr lang="en-US" dirty="0"/>
           </a:p>
         </p:txBody>
       </p:sp>
@@ -929,10 +709,6 @@
           <a:bodyPr/>
           <a:lstStyle/>
           <a:p>
-            <a:r>
-              <a:rPr lang="en-US" dirty="0"/>
-              <a:t/>
-            </a:r>
             <a:endParaRPr lang="en-US" dirty="0"/>
           </a:p>
         </p:txBody>
@@ -1017,10 +793,6 @@
           <a:bodyPr/>
           <a:lstStyle/>
           <a:p>
-            <a:r>
-              <a:rPr lang="en-US" dirty="0"/>
-              <a:t/>
-            </a:r>
             <a:endParaRPr lang="en-US" dirty="0"/>
           </a:p>
         </p:txBody>
@@ -1105,10 +877,6 @@
           <a:bodyPr/>
           <a:lstStyle/>
           <a:p>
-            <a:r>
-              <a:rPr lang="en-US" dirty="0"/>
-              <a:t/>
-            </a:r>
             <a:endParaRPr lang="en-US" dirty="0"/>
           </a:p>
         </p:txBody>
@@ -1195,9 +963,8 @@
           <a:p>
             <a:r>
               <a:rPr lang="en-US" dirty="0"/>
-              <a:t/>
-            </a:r>
-            <a:endParaRPr lang="en-US" dirty="0"/>
+              <a:t>Five-layer waterfall: findings flow from identification (01) down to lien administration and recovery (05). LaborForce works alongside the hospital's billing and collections teams.</a:t>
+            </a:r>
           </a:p>
         </p:txBody>
       </p:sp>
@@ -1281,10 +1048,6 @@
           <a:bodyPr/>
           <a:lstStyle/>
           <a:p>
-            <a:r>
-              <a:rPr lang="en-US" dirty="0"/>
-              <a:t/>
-            </a:r>
             <a:endParaRPr lang="en-US" dirty="0"/>
           </a:p>
         </p:txBody>
@@ -1369,10 +1132,6 @@
           <a:bodyPr/>
           <a:lstStyle/>
           <a:p>
-            <a:r>
-              <a:rPr lang="en-US" dirty="0"/>
-              <a:t/>
-            </a:r>
             <a:endParaRPr lang="en-US" dirty="0"/>
           </a:p>
         </p:txBody>
@@ -1461,7 +1220,6 @@
               <a:rPr lang="en-US" dirty="0"/>
               <a:t>Static version of the interactive planning model at its starting scenario: 150,000 ED encounters × 6% additional coverage × $4,000 net per encounter = $36M per year; 9,000 identified encounters; $90M associated gross charges at a $10,000 average ED charge. Each figure in the grid = 1,000 ED encounters. Illustrative planning model, not a forecast.</a:t>
             </a:r>
-            <a:endParaRPr lang="en-US" dirty="0"/>
           </a:p>
         </p:txBody>
       </p:sp>
@@ -1545,10 +1303,6 @@
           <a:bodyPr/>
           <a:lstStyle/>
           <a:p>
-            <a:r>
-              <a:rPr lang="en-US" dirty="0"/>
-              <a:t/>
-            </a:r>
             <a:endParaRPr lang="en-US" dirty="0"/>
           </a:p>
         </p:txBody>
@@ -1633,10 +1387,6 @@
           <a:bodyPr/>
           <a:lstStyle/>
           <a:p>
-            <a:r>
-              <a:rPr lang="en-US" dirty="0"/>
-              <a:t/>
-            </a:r>
             <a:endParaRPr lang="en-US" dirty="0"/>
           </a:p>
         </p:txBody>
@@ -1715,6 +1465,7 @@
         <a:solidFill>
           <a:srgbClr val="F4F6F9"/>
         </a:solidFill>
+        <a:effectLst/>
       </p:bgPr>
     </p:bg>
     <p:spTree>
@@ -1775,11 +1526,11 @@
           <a:bodyPr wrap="square" lIns="0" tIns="0" rIns="0" bIns="0" rtlCol="0" anchor="t"/>
           <a:lstStyle/>
           <a:p>
-            <a:pPr indent="0" marL="0">
-              <a:buNone/>
-            </a:pPr>
-            <a:r>
-              <a:rPr lang="en-US" sz="800" spc="150" kern="0" dirty="0">
+            <a:pPr marL="0" indent="0">
+              <a:buNone/>
+            </a:pPr>
+            <a:r>
+              <a:rPr lang="en-US" sz="800" kern="0" spc="150" dirty="0">
                 <a:solidFill>
                   <a:srgbClr val="6E7E90"/>
                 </a:solidFill>
@@ -1809,6 +1560,7 @@
         <a:solidFill>
           <a:srgbClr val="0C3C75"/>
         </a:solidFill>
+        <a:effectLst/>
       </p:bgPr>
     </p:bg>
     <p:spTree>
@@ -1869,11 +1621,11 @@
           <a:bodyPr wrap="square" lIns="0" tIns="0" rIns="0" bIns="0" rtlCol="0" anchor="t"/>
           <a:lstStyle/>
           <a:p>
-            <a:pPr indent="0" marL="0">
-              <a:buNone/>
-            </a:pPr>
-            <a:r>
-              <a:rPr lang="en-US" sz="800" spc="150" kern="0" dirty="0">
+            <a:pPr marL="0" indent="0">
+              <a:buNone/>
+            </a:pPr>
+            <a:r>
+              <a:rPr lang="en-US" sz="800" kern="0" spc="150" dirty="0">
                 <a:solidFill>
                   <a:srgbClr val="94A9C0"/>
                 </a:solidFill>
@@ -1903,6 +1655,7 @@
         <a:solidFill>
           <a:srgbClr val="F4F6F9"/>
         </a:solidFill>
+        <a:effectLst/>
       </p:bgPr>
     </p:bg>
     <p:spTree>
@@ -1935,6 +1688,7 @@
         <a:solidFill>
           <a:srgbClr val="0C3C75"/>
         </a:solidFill>
+        <a:effectLst/>
       </p:bgPr>
     </p:bg>
     <p:spTree>
@@ -1995,11 +1749,11 @@
           <a:bodyPr wrap="square" lIns="0" tIns="0" rIns="0" bIns="0" rtlCol="0" anchor="t"/>
           <a:lstStyle/>
           <a:p>
-            <a:pPr indent="0" marL="0">
-              <a:buNone/>
-            </a:pPr>
-            <a:r>
-              <a:rPr lang="en-US" sz="800" spc="150" kern="0" dirty="0">
+            <a:pPr marL="0" indent="0">
+              <a:buNone/>
+            </a:pPr>
+            <a:r>
+              <a:rPr lang="en-US" sz="800" kern="0" spc="150" dirty="0">
                 <a:solidFill>
                   <a:srgbClr val="94A9C0"/>
                 </a:solidFill>
@@ -2024,6 +1778,11 @@
 <file path=ppt/slideMasters/slideMaster1.xml><?xml version="1.0" encoding="utf-8"?>
 <p:sldMaster xmlns:a="http://schemas.openxmlformats.org/drawingml/2006/main" xmlns:r="http://schemas.openxmlformats.org/officeDocument/2006/relationships" xmlns:p="http://schemas.openxmlformats.org/presentationml/2006/main">
   <p:cSld>
+    <p:bg>
+      <p:bgRef idx="1001">
+        <a:schemeClr val="bg1"/>
+      </p:bgRef>
+    </p:bg>
     <p:spTree>
       <p:nvGrpSpPr>
         <p:cNvPr id="1" name=""/>
@@ -2340,7 +2099,7 @@
           <a:bodyPr wrap="square" lIns="0" tIns="0" rIns="0" bIns="0" rtlCol="0" anchor="t"/>
           <a:lstStyle/>
           <a:p>
-            <a:pPr indent="0" marL="0">
+            <a:pPr marL="0" indent="0">
               <a:buNone/>
             </a:pPr>
             <a:r>
@@ -2379,14 +2138,14 @@
           <a:bodyPr wrap="square" lIns="0" tIns="0" rIns="0" bIns="0" rtlCol="0" anchor="t"/>
           <a:lstStyle/>
           <a:p>
-            <a:pPr indent="0" marL="0">
+            <a:pPr marL="0" indent="0">
               <a:lnSpc>
                 <a:spcPct val="98000"/>
               </a:lnSpc>
               <a:buNone/>
             </a:pPr>
             <a:r>
-              <a:rPr lang="en-US" sz="3600" spc="-150" kern="0" dirty="0">
+              <a:rPr lang="en-US" sz="3600" kern="0" spc="-150" dirty="0">
                 <a:solidFill>
                   <a:srgbClr val="0C3C75"/>
                 </a:solidFill>
@@ -2399,14 +2158,14 @@
             <a:endParaRPr lang="en-US" sz="3600" dirty="0"/>
           </a:p>
           <a:p>
-            <a:pPr indent="0" marL="0">
+            <a:pPr marL="0" indent="0">
               <a:lnSpc>
                 <a:spcPct val="98000"/>
               </a:lnSpc>
               <a:buNone/>
             </a:pPr>
             <a:r>
-              <a:rPr lang="en-US" sz="3600" spc="-150" kern="0" dirty="0">
+              <a:rPr lang="en-US" sz="3600" kern="0" spc="-150" dirty="0">
                 <a:solidFill>
                   <a:srgbClr val="0A8FA6"/>
                 </a:solidFill>
@@ -2441,7 +2200,7 @@
           <a:bodyPr wrap="square" lIns="0" tIns="0" rIns="0" bIns="0" rtlCol="0" anchor="t"/>
           <a:lstStyle/>
           <a:p>
-            <a:pPr indent="0" marL="0">
+            <a:pPr marL="0" indent="0">
               <a:lnSpc>
                 <a:spcPct val="130000"/>
               </a:lnSpc>
@@ -2456,7 +2215,7 @@
                 <a:ea typeface="Segoe UI" pitchFamily="34" charset="-122"/>
                 <a:cs typeface="Segoe UI" pitchFamily="34" charset="-120"/>
               </a:rPr>
-              <a:t>A strategic revenue identification and recovery partnership — extending Cook County Health's revenue cycle, not replacing it.</a:t>
+              <a:t>A revenue identification and recovery partnership for Cook County Health's emergency and trauma care.</a:t>
             </a:r>
             <a:endParaRPr lang="en-US" sz="1300" dirty="0"/>
           </a:p>
@@ -2506,11 +2265,11 @@
           <a:bodyPr wrap="square" lIns="0" tIns="0" rIns="0" bIns="0" rtlCol="0" anchor="t"/>
           <a:lstStyle/>
           <a:p>
-            <a:pPr indent="0" marL="0">
-              <a:buNone/>
-            </a:pPr>
-            <a:r>
-              <a:rPr lang="en-US" sz="800" spc="150" kern="0" dirty="0">
+            <a:pPr marL="0" indent="0">
+              <a:buNone/>
+            </a:pPr>
+            <a:r>
+              <a:rPr lang="en-US" sz="800" kern="0" spc="150" dirty="0">
                 <a:solidFill>
                   <a:srgbClr val="6E7E90"/>
                 </a:solidFill>
@@ -2545,11 +2304,11 @@
           <a:bodyPr wrap="square" lIns="0" tIns="0" rIns="0" bIns="0" rtlCol="0" anchor="t"/>
           <a:lstStyle/>
           <a:p>
-            <a:pPr algn="r" indent="0" marL="0">
-              <a:buNone/>
-            </a:pPr>
-            <a:r>
-              <a:rPr lang="en-US" sz="800" spc="150" kern="0" dirty="0">
+            <a:pPr marL="0" indent="0" algn="r">
+              <a:buNone/>
+            </a:pPr>
+            <a:r>
+              <a:rPr lang="en-US" sz="800" kern="0" spc="150" dirty="0">
                 <a:solidFill>
                   <a:srgbClr val="6E7E90"/>
                 </a:solidFill>
@@ -2634,11 +2393,11 @@
           <a:bodyPr wrap="square" lIns="0" tIns="0" rIns="0" bIns="0" rtlCol="0" anchor="t"/>
           <a:lstStyle/>
           <a:p>
-            <a:pPr indent="0" marL="0">
-              <a:buNone/>
-            </a:pPr>
-            <a:r>
-              <a:rPr lang="en-US" sz="900" b="1" spc="150" kern="0" dirty="0">
+            <a:pPr marL="0" indent="0">
+              <a:buNone/>
+            </a:pPr>
+            <a:r>
+              <a:rPr lang="en-US" sz="900" b="1" kern="0" spc="150" dirty="0">
                 <a:solidFill>
                   <a:srgbClr val="7FD3E3"/>
                 </a:solidFill>
@@ -2673,11 +2432,11 @@
           <a:bodyPr wrap="square" lIns="0" tIns="0" rIns="0" bIns="0" rtlCol="0" anchor="t"/>
           <a:lstStyle/>
           <a:p>
-            <a:pPr indent="0" marL="0">
-              <a:buNone/>
-            </a:pPr>
-            <a:r>
-              <a:rPr lang="en-US" sz="3800" spc="-200" kern="0" dirty="0">
+            <a:pPr marL="0" indent="0">
+              <a:buNone/>
+            </a:pPr>
+            <a:r>
+              <a:rPr lang="en-US" sz="3800" kern="0" spc="-200" dirty="0">
                 <a:solidFill>
                   <a:srgbClr val="FFFFFF"/>
                 </a:solidFill>
@@ -2712,7 +2471,7 @@
           <a:bodyPr wrap="square" lIns="0" tIns="0" rIns="0" bIns="0" rtlCol="0" anchor="t"/>
           <a:lstStyle/>
           <a:p>
-            <a:pPr indent="0" marL="0">
+            <a:pPr marL="0" indent="0">
               <a:lnSpc>
                 <a:spcPct val="120000"/>
               </a:lnSpc>
@@ -2777,11 +2536,11 @@
           <a:bodyPr wrap="square" lIns="0" tIns="0" rIns="0" bIns="0" rtlCol="0" anchor="t"/>
           <a:lstStyle/>
           <a:p>
-            <a:pPr indent="0" marL="0">
-              <a:buNone/>
-            </a:pPr>
-            <a:r>
-              <a:rPr lang="en-US" sz="3800" spc="-200" kern="0" dirty="0">
+            <a:pPr marL="0" indent="0">
+              <a:buNone/>
+            </a:pPr>
+            <a:r>
+              <a:rPr lang="en-US" sz="3800" kern="0" spc="-200" dirty="0">
                 <a:solidFill>
                   <a:srgbClr val="FFFFFF"/>
                 </a:solidFill>
@@ -2816,7 +2575,7 @@
           <a:bodyPr wrap="square" lIns="0" tIns="0" rIns="0" bIns="0" rtlCol="0" anchor="t"/>
           <a:lstStyle/>
           <a:p>
-            <a:pPr indent="0" marL="0">
+            <a:pPr marL="0" indent="0">
               <a:lnSpc>
                 <a:spcPct val="120000"/>
               </a:lnSpc>
@@ -2881,11 +2640,11 @@
           <a:bodyPr wrap="square" lIns="0" tIns="0" rIns="0" bIns="0" rtlCol="0" anchor="t"/>
           <a:lstStyle/>
           <a:p>
-            <a:pPr indent="0" marL="0">
-              <a:buNone/>
-            </a:pPr>
-            <a:r>
-              <a:rPr lang="en-US" sz="3800" spc="-200" kern="0" dirty="0">
+            <a:pPr marL="0" indent="0">
+              <a:buNone/>
+            </a:pPr>
+            <a:r>
+              <a:rPr lang="en-US" sz="3800" kern="0" spc="-200" dirty="0">
                 <a:solidFill>
                   <a:srgbClr val="FFFFFF"/>
                 </a:solidFill>
@@ -2920,7 +2679,7 @@
           <a:bodyPr wrap="square" lIns="0" tIns="0" rIns="0" bIns="0" rtlCol="0" anchor="t"/>
           <a:lstStyle/>
           <a:p>
-            <a:pPr indent="0" marL="0">
+            <a:pPr marL="0" indent="0">
               <a:lnSpc>
                 <a:spcPct val="120000"/>
               </a:lnSpc>
@@ -2989,11 +2748,11 @@
           <a:bodyPr wrap="square" lIns="0" tIns="0" rIns="0" bIns="0" rtlCol="0" anchor="t"/>
           <a:lstStyle/>
           <a:p>
-            <a:pPr indent="0" marL="0">
-              <a:buNone/>
-            </a:pPr>
-            <a:r>
-              <a:rPr lang="en-US" sz="800" b="1" spc="150" kern="0" dirty="0">
+            <a:pPr marL="0" indent="0">
+              <a:buNone/>
+            </a:pPr>
+            <a:r>
+              <a:rPr lang="en-US" sz="800" b="1" kern="0" spc="150" dirty="0">
                 <a:solidFill>
                   <a:srgbClr val="7FD3E3"/>
                 </a:solidFill>
@@ -3028,7 +2787,7 @@
           <a:bodyPr wrap="square" lIns="0" tIns="0" rIns="0" bIns="0" rtlCol="0" anchor="t"/>
           <a:lstStyle/>
           <a:p>
-            <a:pPr indent="0" marL="0">
+            <a:pPr marL="0" indent="0">
               <a:buNone/>
             </a:pPr>
             <a:r>
@@ -3067,7 +2826,7 @@
           <a:bodyPr wrap="square" lIns="0" tIns="0" rIns="0" bIns="0" rtlCol="0" anchor="t"/>
           <a:lstStyle/>
           <a:p>
-            <a:pPr indent="0" marL="0">
+            <a:pPr marL="0" indent="0">
               <a:buNone/>
             </a:pPr>
             <a:r>
@@ -3131,11 +2890,11 @@
           <a:bodyPr wrap="square" lIns="0" tIns="0" rIns="0" bIns="0" rtlCol="0" anchor="t"/>
           <a:lstStyle/>
           <a:p>
-            <a:pPr indent="0" marL="0">
-              <a:buNone/>
-            </a:pPr>
-            <a:r>
-              <a:rPr lang="en-US" sz="900" spc="50" kern="0" dirty="0">
+            <a:pPr marL="0" indent="0">
+              <a:buNone/>
+            </a:pPr>
+            <a:r>
+              <a:rPr lang="en-US" sz="900" kern="0" spc="50" dirty="0">
                 <a:solidFill>
                   <a:srgbClr val="94A9C0"/>
                 </a:solidFill>
@@ -3145,9 +2904,6 @@
               </a:rPr>
               <a:t>10</a:t>
             </a:r>
-            <a:pPr indent="0" marL="0">
-              <a:buNone/>
-            </a:pPr>
             <a:r>
               <a:rPr lang="en-US" sz="900" dirty="0">
                 <a:solidFill>
@@ -3159,11 +2915,8 @@
               </a:rPr>
               <a:t>   |   </a:t>
             </a:r>
-            <a:pPr indent="0" marL="0">
-              <a:buNone/>
-            </a:pPr>
-            <a:r>
-              <a:rPr lang="en-US" sz="900" b="1" spc="200" kern="0" dirty="0">
+            <a:r>
+              <a:rPr lang="en-US" sz="900" b="1" kern="0" spc="200" dirty="0">
                 <a:solidFill>
                   <a:srgbClr val="7FD3E3"/>
                 </a:solidFill>
@@ -3198,14 +2951,14 @@
           <a:bodyPr wrap="square" lIns="0" tIns="0" rIns="0" bIns="0" rtlCol="0" anchor="t"/>
           <a:lstStyle/>
           <a:p>
-            <a:pPr indent="0" marL="0">
+            <a:pPr marL="0" indent="0">
               <a:lnSpc>
                 <a:spcPct val="105000"/>
               </a:lnSpc>
               <a:buNone/>
             </a:pPr>
             <a:r>
-              <a:rPr lang="en-US" sz="3000" spc="-100" kern="0" dirty="0">
+              <a:rPr lang="en-US" sz="3000" kern="0" spc="-100" dirty="0">
                 <a:solidFill>
                   <a:srgbClr val="FFFFFF"/>
                 </a:solidFill>
@@ -3215,14 +2968,8 @@
               </a:rPr>
               <a:t>Our ask: a 90-day pilot at </a:t>
             </a:r>
-            <a:pPr indent="0" marL="0">
-              <a:lnSpc>
-                <a:spcPct val="105000"/>
-              </a:lnSpc>
-              <a:buNone/>
-            </a:pPr>
-            <a:r>
-              <a:rPr lang="en-US" sz="3000" spc="-100" kern="0" dirty="0">
+            <a:r>
+              <a:rPr lang="en-US" sz="3000" kern="0" spc="-100" dirty="0">
                 <a:solidFill>
                   <a:srgbClr val="7FD3E3"/>
                 </a:solidFill>
@@ -3257,7 +3004,7 @@
           <a:bodyPr wrap="square" lIns="0" tIns="0" rIns="0" bIns="0" rtlCol="0" anchor="t"/>
           <a:lstStyle/>
           <a:p>
-            <a:pPr indent="0" marL="0">
+            <a:pPr marL="0" indent="0">
               <a:lnSpc>
                 <a:spcPct val="130000"/>
               </a:lnSpc>
@@ -3351,7 +3098,7 @@
           <a:bodyPr wrap="square" lIns="0" tIns="0" rIns="0" bIns="0" rtlCol="0" anchor="ctr"/>
           <a:lstStyle/>
           <a:p>
-            <a:pPr algn="ctr" indent="0" marL="0">
+            <a:pPr marL="0" indent="0" algn="ctr">
               <a:buNone/>
             </a:pPr>
             <a:r>
@@ -3390,11 +3137,11 @@
           <a:bodyPr wrap="square" lIns="0" tIns="0" rIns="0" bIns="0" rtlCol="0" anchor="t"/>
           <a:lstStyle/>
           <a:p>
-            <a:pPr indent="0" marL="0">
-              <a:buNone/>
-            </a:pPr>
-            <a:r>
-              <a:rPr lang="en-US" sz="1600" b="1" spc="-30" kern="0" dirty="0">
+            <a:pPr marL="0" indent="0">
+              <a:buNone/>
+            </a:pPr>
+            <a:r>
+              <a:rPr lang="en-US" sz="1600" b="1" kern="0" spc="-30" dirty="0">
                 <a:solidFill>
                   <a:srgbClr val="FFFFFF"/>
                 </a:solidFill>
@@ -3429,7 +3176,7 @@
           <a:bodyPr wrap="square" lIns="0" tIns="0" rIns="0" bIns="0" rtlCol="0" anchor="t"/>
           <a:lstStyle/>
           <a:p>
-            <a:pPr indent="0" marL="0">
+            <a:pPr marL="0" indent="0">
               <a:lnSpc>
                 <a:spcPct val="125000"/>
               </a:lnSpc>
@@ -3523,7 +3270,7 @@
           <a:bodyPr wrap="square" lIns="0" tIns="0" rIns="0" bIns="0" rtlCol="0" anchor="ctr"/>
           <a:lstStyle/>
           <a:p>
-            <a:pPr algn="ctr" indent="0" marL="0">
+            <a:pPr marL="0" indent="0" algn="ctr">
               <a:buNone/>
             </a:pPr>
             <a:r>
@@ -3562,11 +3309,11 @@
           <a:bodyPr wrap="square" lIns="0" tIns="0" rIns="0" bIns="0" rtlCol="0" anchor="t"/>
           <a:lstStyle/>
           <a:p>
-            <a:pPr indent="0" marL="0">
-              <a:buNone/>
-            </a:pPr>
-            <a:r>
-              <a:rPr lang="en-US" sz="1600" b="1" spc="-30" kern="0" dirty="0">
+            <a:pPr marL="0" indent="0">
+              <a:buNone/>
+            </a:pPr>
+            <a:r>
+              <a:rPr lang="en-US" sz="1600" b="1" kern="0" spc="-30" dirty="0">
                 <a:solidFill>
                   <a:srgbClr val="FFFFFF"/>
                 </a:solidFill>
@@ -3601,7 +3348,7 @@
           <a:bodyPr wrap="square" lIns="0" tIns="0" rIns="0" bIns="0" rtlCol="0" anchor="t"/>
           <a:lstStyle/>
           <a:p>
-            <a:pPr indent="0" marL="0">
+            <a:pPr marL="0" indent="0">
               <a:lnSpc>
                 <a:spcPct val="125000"/>
               </a:lnSpc>
@@ -3695,7 +3442,7 @@
           <a:bodyPr wrap="square" lIns="0" tIns="0" rIns="0" bIns="0" rtlCol="0" anchor="ctr"/>
           <a:lstStyle/>
           <a:p>
-            <a:pPr algn="ctr" indent="0" marL="0">
+            <a:pPr marL="0" indent="0" algn="ctr">
               <a:buNone/>
             </a:pPr>
             <a:r>
@@ -3734,11 +3481,11 @@
           <a:bodyPr wrap="square" lIns="0" tIns="0" rIns="0" bIns="0" rtlCol="0" anchor="t"/>
           <a:lstStyle/>
           <a:p>
-            <a:pPr indent="0" marL="0">
-              <a:buNone/>
-            </a:pPr>
-            <a:r>
-              <a:rPr lang="en-US" sz="1600" b="1" spc="-30" kern="0" dirty="0">
+            <a:pPr marL="0" indent="0">
+              <a:buNone/>
+            </a:pPr>
+            <a:r>
+              <a:rPr lang="en-US" sz="1600" b="1" kern="0" spc="-30" dirty="0">
                 <a:solidFill>
                   <a:srgbClr val="FFFFFF"/>
                 </a:solidFill>
@@ -3773,7 +3520,7 @@
           <a:bodyPr wrap="square" lIns="0" tIns="0" rIns="0" bIns="0" rtlCol="0" anchor="t"/>
           <a:lstStyle/>
           <a:p>
-            <a:pPr indent="0" marL="0">
+            <a:pPr marL="0" indent="0">
               <a:lnSpc>
                 <a:spcPct val="125000"/>
               </a:lnSpc>
@@ -3823,14 +3570,14 @@
       </p:sp>
       <p:pic>
         <p:nvPicPr>
-          <p:cNvPr id="21" name="Image 0" descr="E:/Claude/laborforce-deck/brand/logo_full_large.png">    </p:cNvPr>
+          <p:cNvPr id="21" name="Image 0" descr="E:/Claude/laborforce-deck/brand/logo_full_large.png"/>
           <p:cNvPicPr>
             <a:picLocks noChangeAspect="1"/>
           </p:cNvPicPr>
           <p:nvPr/>
         </p:nvPicPr>
         <p:blipFill>
-          <a:blip r:embed="rId1"/>
+          <a:blip r:embed="rId3"/>
           <a:stretch>
             <a:fillRect/>
           </a:stretch>
@@ -3866,7 +3613,7 @@
           <a:bodyPr wrap="square" lIns="0" tIns="0" rIns="0" bIns="0" rtlCol="0" anchor="t"/>
           <a:lstStyle/>
           <a:p>
-            <a:pPr algn="r" indent="0" marL="0">
+            <a:pPr marL="0" indent="0" algn="r">
               <a:buNone/>
             </a:pPr>
             <a:r>
@@ -3905,7 +3652,7 @@
           <a:bodyPr wrap="square" lIns="0" tIns="0" rIns="0" bIns="0" rtlCol="0" anchor="t"/>
           <a:lstStyle/>
           <a:p>
-            <a:pPr algn="r" indent="0" marL="0">
+            <a:pPr marL="0" indent="0" algn="r">
               <a:lnSpc>
                 <a:spcPct val="125000"/>
               </a:lnSpc>
@@ -3947,11 +3694,11 @@
           <a:bodyPr wrap="square" lIns="0" tIns="0" rIns="0" bIns="0" rtlCol="0" anchor="t"/>
           <a:lstStyle/>
           <a:p>
-            <a:pPr algn="r" indent="0" marL="0">
-              <a:buNone/>
-            </a:pPr>
-            <a:r>
-              <a:rPr lang="en-US" sz="800" spc="150" kern="0" dirty="0">
+            <a:pPr marL="0" indent="0" algn="r">
+              <a:buNone/>
+            </a:pPr>
+            <a:r>
+              <a:rPr lang="en-US" sz="800" kern="0" spc="150" dirty="0">
                 <a:solidFill>
                   <a:srgbClr val="94A9C0"/>
                 </a:solidFill>
@@ -4011,11 +3758,11 @@
           <a:bodyPr wrap="square" lIns="0" tIns="0" rIns="0" bIns="0" rtlCol="0" anchor="t"/>
           <a:lstStyle/>
           <a:p>
-            <a:pPr indent="0" marL="0">
-              <a:buNone/>
-            </a:pPr>
-            <a:r>
-              <a:rPr lang="en-US" sz="900" spc="50" kern="0" dirty="0">
+            <a:pPr marL="0" indent="0">
+              <a:buNone/>
+            </a:pPr>
+            <a:r>
+              <a:rPr lang="en-US" sz="900" kern="0" spc="50" dirty="0">
                 <a:solidFill>
                   <a:srgbClr val="6E7E90"/>
                 </a:solidFill>
@@ -4025,9 +3772,6 @@
               </a:rPr>
               <a:t>02</a:t>
             </a:r>
-            <a:pPr indent="0" marL="0">
-              <a:buNone/>
-            </a:pPr>
             <a:r>
               <a:rPr lang="en-US" sz="900" dirty="0">
                 <a:solidFill>
@@ -4039,11 +3783,8 @@
               </a:rPr>
               <a:t>   |   </a:t>
             </a:r>
-            <a:pPr indent="0" marL="0">
-              <a:buNone/>
-            </a:pPr>
-            <a:r>
-              <a:rPr lang="en-US" sz="900" b="1" spc="200" kern="0" dirty="0">
+            <a:r>
+              <a:rPr lang="en-US" sz="900" b="1" kern="0" spc="200" dirty="0">
                 <a:solidFill>
                   <a:srgbClr val="0A8FA6"/>
                 </a:solidFill>
@@ -4078,14 +3819,14 @@
           <a:bodyPr wrap="square" lIns="0" tIns="0" rIns="0" bIns="0" rtlCol="0" anchor="t"/>
           <a:lstStyle/>
           <a:p>
-            <a:pPr indent="0" marL="0">
+            <a:pPr marL="0" indent="0">
               <a:lnSpc>
                 <a:spcPct val="100000"/>
               </a:lnSpc>
               <a:buNone/>
             </a:pPr>
             <a:r>
-              <a:rPr lang="en-US" sz="3000" spc="-100" kern="0" dirty="0">
+              <a:rPr lang="en-US" sz="3000" kern="0" spc="-100" dirty="0">
                 <a:solidFill>
                   <a:srgbClr val="0C3C75"/>
                 </a:solidFill>
@@ -4093,16 +3834,10 @@
                 <a:ea typeface="Segoe UI" pitchFamily="34" charset="-122"/>
                 <a:cs typeface="Segoe UI" pitchFamily="34" charset="-120"/>
               </a:rPr>
-              <a:t>Extending your revenue cycle</a:t>
-            </a:r>
-            <a:pPr indent="0" marL="0">
-              <a:lnSpc>
-                <a:spcPct val="100000"/>
-              </a:lnSpc>
-              <a:buNone/>
-            </a:pPr>
-            <a:r>
-              <a:rPr lang="en-US" sz="3000" spc="-100" kern="0" dirty="0">
+              <a:t>We work inside the revenue cycle</a:t>
+            </a:r>
+            <a:r>
+              <a:rPr lang="en-US" sz="3000" kern="0" spc="-100" dirty="0">
                 <a:solidFill>
                   <a:srgbClr val="6A7F96"/>
                 </a:solidFill>
@@ -4110,7 +3845,7 @@
                 <a:ea typeface="Segoe UI" pitchFamily="34" charset="-122"/>
                 <a:cs typeface="Segoe UI" pitchFamily="34" charset="-120"/>
               </a:rPr>
-              <a:t> — not replacing it.</a:t>
+              <a:t> you already run.</a:t>
             </a:r>
             <a:endParaRPr lang="en-US" sz="3000" dirty="0"/>
           </a:p>
@@ -4160,11 +3895,11 @@
           <a:bodyPr wrap="square" lIns="0" tIns="0" rIns="0" bIns="0" rtlCol="0" anchor="t"/>
           <a:lstStyle/>
           <a:p>
-            <a:pPr indent="0" marL="0">
-              <a:buNone/>
-            </a:pPr>
-            <a:r>
-              <a:rPr lang="en-US" sz="800" b="1" spc="150" kern="0" dirty="0">
+            <a:pPr marL="0" indent="0">
+              <a:buNone/>
+            </a:pPr>
+            <a:r>
+              <a:rPr lang="en-US" sz="800" b="1" kern="0" spc="150" dirty="0">
                 <a:solidFill>
                   <a:srgbClr val="0A8FA6"/>
                 </a:solidFill>
@@ -4199,11 +3934,11 @@
           <a:bodyPr wrap="square" lIns="0" tIns="0" rIns="0" bIns="0" rtlCol="0" anchor="t"/>
           <a:lstStyle/>
           <a:p>
-            <a:pPr indent="0" marL="0">
-              <a:buNone/>
-            </a:pPr>
-            <a:r>
-              <a:rPr lang="en-US" sz="1700" b="1" spc="-50" kern="0" dirty="0">
+            <a:pPr marL="0" indent="0">
+              <a:buNone/>
+            </a:pPr>
+            <a:r>
+              <a:rPr lang="en-US" sz="1700" b="1" kern="0" spc="-50" dirty="0">
                 <a:solidFill>
                   <a:srgbClr val="0C3C75"/>
                 </a:solidFill>
@@ -4238,7 +3973,7 @@
           <a:bodyPr wrap="square" lIns="0" tIns="0" rIns="0" bIns="0" rtlCol="0" anchor="t"/>
           <a:lstStyle/>
           <a:p>
-            <a:pPr indent="0" marL="0">
+            <a:pPr marL="0" indent="0">
               <a:lnSpc>
                 <a:spcPct val="130000"/>
               </a:lnSpc>
@@ -4303,11 +4038,11 @@
           <a:bodyPr wrap="square" lIns="0" tIns="0" rIns="0" bIns="0" rtlCol="0" anchor="t"/>
           <a:lstStyle/>
           <a:p>
-            <a:pPr indent="0" marL="0">
-              <a:buNone/>
-            </a:pPr>
-            <a:r>
-              <a:rPr lang="en-US" sz="800" b="1" spc="150" kern="0" dirty="0">
+            <a:pPr marL="0" indent="0">
+              <a:buNone/>
+            </a:pPr>
+            <a:r>
+              <a:rPr lang="en-US" sz="800" b="1" kern="0" spc="150" dirty="0">
                 <a:solidFill>
                   <a:srgbClr val="0A8FA6"/>
                 </a:solidFill>
@@ -4342,11 +4077,11 @@
           <a:bodyPr wrap="square" lIns="0" tIns="0" rIns="0" bIns="0" rtlCol="0" anchor="t"/>
           <a:lstStyle/>
           <a:p>
-            <a:pPr indent="0" marL="0">
-              <a:buNone/>
-            </a:pPr>
-            <a:r>
-              <a:rPr lang="en-US" sz="1700" b="1" spc="-50" kern="0" dirty="0">
+            <a:pPr marL="0" indent="0">
+              <a:buNone/>
+            </a:pPr>
+            <a:r>
+              <a:rPr lang="en-US" sz="1700" b="1" kern="0" spc="-50" dirty="0">
                 <a:solidFill>
                   <a:srgbClr val="0C3C75"/>
                 </a:solidFill>
@@ -4381,7 +4116,7 @@
           <a:bodyPr wrap="square" lIns="0" tIns="0" rIns="0" bIns="0" rtlCol="0" anchor="t"/>
           <a:lstStyle/>
           <a:p>
-            <a:pPr indent="0" marL="0">
+            <a:pPr marL="0" indent="0">
               <a:lnSpc>
                 <a:spcPct val="130000"/>
               </a:lnSpc>
@@ -4446,11 +4181,11 @@
           <a:bodyPr wrap="square" lIns="0" tIns="0" rIns="0" bIns="0" rtlCol="0" anchor="t"/>
           <a:lstStyle/>
           <a:p>
-            <a:pPr indent="0" marL="0">
-              <a:buNone/>
-            </a:pPr>
-            <a:r>
-              <a:rPr lang="en-US" sz="800" b="1" spc="150" kern="0" dirty="0">
+            <a:pPr marL="0" indent="0">
+              <a:buNone/>
+            </a:pPr>
+            <a:r>
+              <a:rPr lang="en-US" sz="800" b="1" kern="0" spc="150" dirty="0">
                 <a:solidFill>
                   <a:srgbClr val="0A8FA6"/>
                 </a:solidFill>
@@ -4485,11 +4220,11 @@
           <a:bodyPr wrap="square" lIns="0" tIns="0" rIns="0" bIns="0" rtlCol="0" anchor="t"/>
           <a:lstStyle/>
           <a:p>
-            <a:pPr indent="0" marL="0">
-              <a:buNone/>
-            </a:pPr>
-            <a:r>
-              <a:rPr lang="en-US" sz="1700" b="1" spc="-50" kern="0" dirty="0">
+            <a:pPr marL="0" indent="0">
+              <a:buNone/>
+            </a:pPr>
+            <a:r>
+              <a:rPr lang="en-US" sz="1700" b="1" kern="0" spc="-50" dirty="0">
                 <a:solidFill>
                   <a:srgbClr val="0C3C75"/>
                 </a:solidFill>
@@ -4524,7 +4259,7 @@
           <a:bodyPr wrap="square" lIns="0" tIns="0" rIns="0" bIns="0" rtlCol="0" anchor="t"/>
           <a:lstStyle/>
           <a:p>
-            <a:pPr indent="0" marL="0">
+            <a:pPr marL="0" indent="0">
               <a:lnSpc>
                 <a:spcPct val="130000"/>
               </a:lnSpc>
@@ -4589,11 +4324,11 @@
           <a:bodyPr wrap="square" lIns="0" tIns="0" rIns="0" bIns="0" rtlCol="0" anchor="t"/>
           <a:lstStyle/>
           <a:p>
-            <a:pPr indent="0" marL="0">
-              <a:buNone/>
-            </a:pPr>
-            <a:r>
-              <a:rPr lang="en-US" sz="800" b="1" spc="150" kern="0" dirty="0">
+            <a:pPr marL="0" indent="0">
+              <a:buNone/>
+            </a:pPr>
+            <a:r>
+              <a:rPr lang="en-US" sz="800" b="1" kern="0" spc="150" dirty="0">
                 <a:solidFill>
                   <a:srgbClr val="0A8FA6"/>
                 </a:solidFill>
@@ -4628,11 +4363,11 @@
           <a:bodyPr wrap="square" lIns="0" tIns="0" rIns="0" bIns="0" rtlCol="0" anchor="t"/>
           <a:lstStyle/>
           <a:p>
-            <a:pPr indent="0" marL="0">
-              <a:buNone/>
-            </a:pPr>
-            <a:r>
-              <a:rPr lang="en-US" sz="1700" b="1" spc="-50" kern="0" dirty="0">
+            <a:pPr marL="0" indent="0">
+              <a:buNone/>
+            </a:pPr>
+            <a:r>
+              <a:rPr lang="en-US" sz="1700" b="1" kern="0" spc="-50" dirty="0">
                 <a:solidFill>
                   <a:srgbClr val="0A8FA6"/>
                 </a:solidFill>
@@ -4667,7 +4402,7 @@
           <a:bodyPr wrap="square" lIns="0" tIns="0" rIns="0" bIns="0" rtlCol="0" anchor="t"/>
           <a:lstStyle/>
           <a:p>
-            <a:pPr indent="0" marL="0">
+            <a:pPr marL="0" indent="0">
               <a:lnSpc>
                 <a:spcPct val="130000"/>
               </a:lnSpc>
@@ -4732,11 +4467,11 @@
           <a:bodyPr wrap="square" lIns="0" tIns="0" rIns="0" bIns="0" rtlCol="0" anchor="t"/>
           <a:lstStyle/>
           <a:p>
-            <a:pPr indent="0" marL="0">
-              <a:buNone/>
-            </a:pPr>
-            <a:r>
-              <a:rPr lang="en-US" sz="800" b="1" spc="150" kern="0" dirty="0">
+            <a:pPr marL="0" indent="0">
+              <a:buNone/>
+            </a:pPr>
+            <a:r>
+              <a:rPr lang="en-US" sz="800" b="1" kern="0" spc="150" dirty="0">
                 <a:solidFill>
                   <a:srgbClr val="0A8FA6"/>
                 </a:solidFill>
@@ -4771,7 +4506,7 @@
           <a:bodyPr wrap="square" lIns="0" tIns="0" rIns="0" bIns="0" rtlCol="0" anchor="t"/>
           <a:lstStyle/>
           <a:p>
-            <a:pPr indent="0" marL="0">
+            <a:pPr marL="0" indent="0">
               <a:buNone/>
             </a:pPr>
             <a:r>
@@ -4810,7 +4545,7 @@
           <a:bodyPr wrap="square" lIns="0" tIns="0" rIns="0" bIns="0" rtlCol="0" anchor="t"/>
           <a:lstStyle/>
           <a:p>
-            <a:pPr indent="0" marL="0">
+            <a:pPr marL="0" indent="0">
               <a:buNone/>
             </a:pPr>
             <a:r>
@@ -4849,7 +4584,7 @@
           <a:bodyPr wrap="square" lIns="0" tIns="0" rIns="0" bIns="0" rtlCol="0" anchor="t"/>
           <a:lstStyle/>
           <a:p>
-            <a:pPr indent="0" marL="0">
+            <a:pPr marL="0" indent="0">
               <a:lnSpc>
                 <a:spcPct val="120000"/>
               </a:lnSpc>
@@ -4891,7 +4626,7 @@
           <a:bodyPr wrap="square" lIns="0" tIns="0" rIns="0" bIns="0" rtlCol="0" anchor="t"/>
           <a:lstStyle/>
           <a:p>
-            <a:pPr indent="0" marL="0">
+            <a:pPr marL="0" indent="0">
               <a:buNone/>
             </a:pPr>
             <a:r>
@@ -4930,7 +4665,7 @@
           <a:bodyPr wrap="square" lIns="0" tIns="0" rIns="0" bIns="0" rtlCol="0" anchor="t"/>
           <a:lstStyle/>
           <a:p>
-            <a:pPr indent="0" marL="0">
+            <a:pPr marL="0" indent="0">
               <a:buNone/>
             </a:pPr>
             <a:r>
@@ -4969,7 +4704,7 @@
           <a:bodyPr wrap="square" lIns="0" tIns="0" rIns="0" bIns="0" rtlCol="0" anchor="t"/>
           <a:lstStyle/>
           <a:p>
-            <a:pPr indent="0" marL="0">
+            <a:pPr marL="0" indent="0">
               <a:lnSpc>
                 <a:spcPct val="120000"/>
               </a:lnSpc>
@@ -5011,7 +4746,7 @@
           <a:bodyPr wrap="square" lIns="0" tIns="0" rIns="0" bIns="0" rtlCol="0" anchor="t"/>
           <a:lstStyle/>
           <a:p>
-            <a:pPr indent="0" marL="0">
+            <a:pPr marL="0" indent="0">
               <a:buNone/>
             </a:pPr>
             <a:r>
@@ -5050,7 +4785,7 @@
           <a:bodyPr wrap="square" lIns="0" tIns="0" rIns="0" bIns="0" rtlCol="0" anchor="t"/>
           <a:lstStyle/>
           <a:p>
-            <a:pPr indent="0" marL="0">
+            <a:pPr marL="0" indent="0">
               <a:buNone/>
             </a:pPr>
             <a:r>
@@ -5089,7 +4824,7 @@
           <a:bodyPr wrap="square" lIns="0" tIns="0" rIns="0" bIns="0" rtlCol="0" anchor="t"/>
           <a:lstStyle/>
           <a:p>
-            <a:pPr indent="0" marL="0">
+            <a:pPr marL="0" indent="0">
               <a:lnSpc>
                 <a:spcPct val="120000"/>
               </a:lnSpc>
@@ -5131,7 +4866,7 @@
           <a:bodyPr wrap="square" lIns="0" tIns="0" rIns="0" bIns="0" rtlCol="0" anchor="t"/>
           <a:lstStyle/>
           <a:p>
-            <a:pPr indent="0" marL="0">
+            <a:pPr marL="0" indent="0">
               <a:buNone/>
             </a:pPr>
             <a:r>
@@ -5170,7 +4905,7 @@
           <a:bodyPr wrap="square" lIns="0" tIns="0" rIns="0" bIns="0" rtlCol="0" anchor="t"/>
           <a:lstStyle/>
           <a:p>
-            <a:pPr indent="0" marL="0">
+            <a:pPr marL="0" indent="0">
               <a:buNone/>
             </a:pPr>
             <a:r>
@@ -5209,7 +4944,7 @@
           <a:bodyPr wrap="square" lIns="0" tIns="0" rIns="0" bIns="0" rtlCol="0" anchor="t"/>
           <a:lstStyle/>
           <a:p>
-            <a:pPr indent="0" marL="0">
+            <a:pPr marL="0" indent="0">
               <a:lnSpc>
                 <a:spcPct val="120000"/>
               </a:lnSpc>
@@ -5251,11 +4986,11 @@
           <a:bodyPr wrap="square" lIns="0" tIns="0" rIns="0" bIns="0" rtlCol="0" anchor="t"/>
           <a:lstStyle/>
           <a:p>
-            <a:pPr algn="r" indent="0" marL="0">
-              <a:buNone/>
-            </a:pPr>
-            <a:r>
-              <a:rPr lang="en-US" sz="800" spc="150" kern="0" dirty="0">
+            <a:pPr marL="0" indent="0" algn="r">
+              <a:buNone/>
+            </a:pPr>
+            <a:r>
+              <a:rPr lang="en-US" sz="800" kern="0" spc="150" dirty="0">
                 <a:solidFill>
                   <a:srgbClr val="6E7E90"/>
                 </a:solidFill>
@@ -5315,11 +5050,11 @@
           <a:bodyPr wrap="square" lIns="0" tIns="0" rIns="0" bIns="0" rtlCol="0" anchor="t"/>
           <a:lstStyle/>
           <a:p>
-            <a:pPr indent="0" marL="0">
-              <a:buNone/>
-            </a:pPr>
-            <a:r>
-              <a:rPr lang="en-US" sz="900" spc="50" kern="0" dirty="0">
+            <a:pPr marL="0" indent="0">
+              <a:buNone/>
+            </a:pPr>
+            <a:r>
+              <a:rPr lang="en-US" sz="900" kern="0" spc="50" dirty="0">
                 <a:solidFill>
                   <a:srgbClr val="6E7E90"/>
                 </a:solidFill>
@@ -5329,9 +5064,6 @@
               </a:rPr>
               <a:t>03</a:t>
             </a:r>
-            <a:pPr indent="0" marL="0">
-              <a:buNone/>
-            </a:pPr>
             <a:r>
               <a:rPr lang="en-US" sz="900" dirty="0">
                 <a:solidFill>
@@ -5343,11 +5075,8 @@
               </a:rPr>
               <a:t>   |   </a:t>
             </a:r>
-            <a:pPr indent="0" marL="0">
-              <a:buNone/>
-            </a:pPr>
-            <a:r>
-              <a:rPr lang="en-US" sz="900" b="1" spc="200" kern="0" dirty="0">
+            <a:r>
+              <a:rPr lang="en-US" sz="900" b="1" kern="0" spc="200" dirty="0">
                 <a:solidFill>
                   <a:srgbClr val="0A8FA6"/>
                 </a:solidFill>
@@ -5382,14 +5111,14 @@
           <a:bodyPr wrap="square" lIns="0" tIns="0" rIns="0" bIns="0" rtlCol="0" anchor="t"/>
           <a:lstStyle/>
           <a:p>
-            <a:pPr indent="0" marL="0">
+            <a:pPr marL="0" indent="0">
               <a:lnSpc>
                 <a:spcPct val="100000"/>
               </a:lnSpc>
               <a:buNone/>
             </a:pPr>
             <a:r>
-              <a:rPr lang="en-US" sz="3000" spc="-100" kern="0" dirty="0">
+              <a:rPr lang="en-US" sz="3000" kern="0" spc="-100" dirty="0">
                 <a:solidFill>
                   <a:srgbClr val="0C3C75"/>
                 </a:solidFill>
@@ -5424,7 +5153,7 @@
           <a:bodyPr wrap="square" lIns="0" tIns="0" rIns="0" bIns="0" rtlCol="0" anchor="t"/>
           <a:lstStyle/>
           <a:p>
-            <a:pPr indent="0" marL="0">
+            <a:pPr marL="0" indent="0">
               <a:lnSpc>
                 <a:spcPct val="125000"/>
               </a:lnSpc>
@@ -5439,7 +5168,7 @@
                 <a:ea typeface="Segoe UI" pitchFamily="34" charset="-122"/>
                 <a:cs typeface="Segoe UI" pitchFamily="34" charset="-120"/>
               </a:rPr>
-              <a:t>Patients often arrive after workplace incidents, motor vehicle accidents, or injuries involving another liable party. Registration and billing workflows may not consistently capture or resolve:</a:t>
+              <a:t>Patients often arrive after workplace incidents, motor vehicle accidents, or injuries involving another liable party. Registration and billing workflows may not consistently answer:</a:t>
             </a:r>
             <a:endParaRPr lang="en-US" sz="1200" dirty="0"/>
           </a:p>
@@ -5518,7 +5247,7 @@
           <a:bodyPr wrap="square" lIns="0" tIns="0" rIns="0" bIns="0" rtlCol="0" anchor="ctr"/>
           <a:lstStyle/>
           <a:p>
-            <a:pPr algn="ctr" indent="0" marL="0">
+            <a:pPr marL="0" indent="0" algn="ctr">
               <a:buNone/>
             </a:pPr>
             <a:r>
@@ -5557,7 +5286,7 @@
           <a:bodyPr wrap="square" lIns="0" tIns="0" rIns="0" bIns="0" rtlCol="0" anchor="ctr"/>
           <a:lstStyle/>
           <a:p>
-            <a:pPr indent="0" marL="0">
+            <a:pPr marL="0" indent="0">
               <a:lnSpc>
                 <a:spcPct val="120000"/>
               </a:lnSpc>
@@ -5572,7 +5301,7 @@
                 <a:ea typeface="Segoe UI" pitchFamily="34" charset="-122"/>
                 <a:cs typeface="Segoe UI" pitchFamily="34" charset="-120"/>
               </a:rPr>
-              <a:t>Whether the injury occurred while the patient was working</a:t>
+              <a:t>Was the injury work-related?</a:t>
             </a:r>
             <a:endParaRPr lang="en-US" sz="1250" dirty="0"/>
           </a:p>
@@ -5651,7 +5380,7 @@
           <a:bodyPr wrap="square" lIns="0" tIns="0" rIns="0" bIns="0" rtlCol="0" anchor="ctr"/>
           <a:lstStyle/>
           <a:p>
-            <a:pPr algn="ctr" indent="0" marL="0">
+            <a:pPr marL="0" indent="0" algn="ctr">
               <a:buNone/>
             </a:pPr>
             <a:r>
@@ -5690,7 +5419,7 @@
           <a:bodyPr wrap="square" lIns="0" tIns="0" rIns="0" bIns="0" rtlCol="0" anchor="ctr"/>
           <a:lstStyle/>
           <a:p>
-            <a:pPr indent="0" marL="0">
+            <a:pPr marL="0" indent="0">
               <a:lnSpc>
                 <a:spcPct val="120000"/>
               </a:lnSpc>
@@ -5705,7 +5434,7 @@
                 <a:ea typeface="Segoe UI" pitchFamily="34" charset="-122"/>
                 <a:cs typeface="Segoe UI" pitchFamily="34" charset="-120"/>
               </a:rPr>
-              <a:t>Whether a motor vehicle or other third party may be responsible</a:t>
+              <a:t>Is a motor vehicle or other third party responsible?</a:t>
             </a:r>
             <a:endParaRPr lang="en-US" sz="1250" dirty="0"/>
           </a:p>
@@ -5784,7 +5513,7 @@
           <a:bodyPr wrap="square" lIns="0" tIns="0" rIns="0" bIns="0" rtlCol="0" anchor="ctr"/>
           <a:lstStyle/>
           <a:p>
-            <a:pPr algn="ctr" indent="0" marL="0">
+            <a:pPr marL="0" indent="0" algn="ctr">
               <a:buNone/>
             </a:pPr>
             <a:r>
@@ -5823,7 +5552,7 @@
           <a:bodyPr wrap="square" lIns="0" tIns="0" rIns="0" bIns="0" rtlCol="0" anchor="ctr"/>
           <a:lstStyle/>
           <a:p>
-            <a:pPr indent="0" marL="0">
+            <a:pPr marL="0" indent="0">
               <a:lnSpc>
                 <a:spcPct val="120000"/>
               </a:lnSpc>
@@ -5838,7 +5567,7 @@
                 <a:ea typeface="Segoe UI" pitchFamily="34" charset="-122"/>
                 <a:cs typeface="Segoe UI" pitchFamily="34" charset="-120"/>
               </a:rPr>
-              <a:t>Whether another insurer or payer should be investigated</a:t>
+              <a:t>Should another insurer or payer be investigated?</a:t>
             </a:r>
             <a:endParaRPr lang="en-US" sz="1250" dirty="0"/>
           </a:p>
@@ -5917,7 +5646,7 @@
           <a:bodyPr wrap="square" lIns="0" tIns="0" rIns="0" bIns="0" rtlCol="0" anchor="ctr"/>
           <a:lstStyle/>
           <a:p>
-            <a:pPr algn="ctr" indent="0" marL="0">
+            <a:pPr marL="0" indent="0" algn="ctr">
               <a:buNone/>
             </a:pPr>
             <a:r>
@@ -5956,7 +5685,7 @@
           <a:bodyPr wrap="square" lIns="0" tIns="0" rIns="0" bIns="0" rtlCol="0" anchor="ctr"/>
           <a:lstStyle/>
           <a:p>
-            <a:pPr indent="0" marL="0">
+            <a:pPr marL="0" indent="0">
               <a:lnSpc>
                 <a:spcPct val="120000"/>
               </a:lnSpc>
@@ -5971,7 +5700,7 @@
                 <a:ea typeface="Segoe UI" pitchFamily="34" charset="-122"/>
                 <a:cs typeface="Segoe UI" pitchFamily="34" charset="-120"/>
               </a:rPr>
-              <a:t>Whether the hospital has the right claim, attorney, or payer information</a:t>
+              <a:t>Does the hospital have the right claim, attorney, and payer information?</a:t>
             </a:r>
             <a:endParaRPr lang="en-US" sz="1250" dirty="0"/>
           </a:p>
@@ -6050,7 +5779,7 @@
           <a:bodyPr wrap="square" lIns="0" tIns="0" rIns="0" bIns="0" rtlCol="0" anchor="ctr"/>
           <a:lstStyle/>
           <a:p>
-            <a:pPr algn="ctr" indent="0" marL="0">
+            <a:pPr marL="0" indent="0" algn="ctr">
               <a:buNone/>
             </a:pPr>
             <a:r>
@@ -6089,7 +5818,7 @@
           <a:bodyPr wrap="square" lIns="0" tIns="0" rIns="0" bIns="0" rtlCol="0" anchor="ctr"/>
           <a:lstStyle/>
           <a:p>
-            <a:pPr indent="0" marL="0">
+            <a:pPr marL="0" indent="0">
               <a:lnSpc>
                 <a:spcPct val="120000"/>
               </a:lnSpc>
@@ -6104,7 +5833,7 @@
                 <a:ea typeface="Segoe UI" pitchFamily="34" charset="-122"/>
                 <a:cs typeface="Segoe UI" pitchFamily="34" charset="-120"/>
               </a:rPr>
-              <a:t>Whether a hospital lien is available, documented, and followed up</a:t>
+              <a:t>Is a hospital lien available, documented, and followed up?</a:t>
             </a:r>
             <a:endParaRPr lang="en-US" sz="1250" dirty="0"/>
           </a:p>
@@ -6183,7 +5912,7 @@
           <a:bodyPr wrap="square" lIns="0" tIns="0" rIns="0" bIns="0" rtlCol="0" anchor="ctr"/>
           <a:lstStyle/>
           <a:p>
-            <a:pPr algn="ctr" indent="0" marL="0">
+            <a:pPr marL="0" indent="0" algn="ctr">
               <a:buNone/>
             </a:pPr>
             <a:r>
@@ -6222,7 +5951,7 @@
           <a:bodyPr wrap="square" lIns="0" tIns="0" rIns="0" bIns="0" rtlCol="0" anchor="ctr"/>
           <a:lstStyle/>
           <a:p>
-            <a:pPr indent="0" marL="0">
+            <a:pPr marL="0" indent="0">
               <a:lnSpc>
                 <a:spcPct val="120000"/>
               </a:lnSpc>
@@ -6237,7 +5966,7 @@
                 <a:ea typeface="Segoe UI" pitchFamily="34" charset="-122"/>
                 <a:cs typeface="Segoe UI" pitchFamily="34" charset="-120"/>
               </a:rPr>
-              <a:t>Whether unresolved cases need investigation after discharge</a:t>
+              <a:t>Are unresolved cases investigated after discharge?</a:t>
             </a:r>
             <a:endParaRPr lang="en-US" sz="1250" dirty="0"/>
           </a:p>
@@ -6291,11 +6020,11 @@
           <a:bodyPr wrap="square" lIns="0" tIns="0" rIns="0" bIns="0" rtlCol="0" anchor="t"/>
           <a:lstStyle/>
           <a:p>
-            <a:pPr indent="0" marL="0">
-              <a:buNone/>
-            </a:pPr>
-            <a:r>
-              <a:rPr lang="en-US" sz="800" b="1" spc="150" kern="0" dirty="0">
+            <a:pPr marL="0" indent="0">
+              <a:buNone/>
+            </a:pPr>
+            <a:r>
+              <a:rPr lang="en-US" sz="800" b="1" kern="0" spc="150" dirty="0">
                 <a:solidFill>
                   <a:srgbClr val="0A8FA6"/>
                 </a:solidFill>
@@ -6357,11 +6086,11 @@
           <a:bodyPr wrap="square" lIns="0" tIns="0" rIns="0" bIns="0" rtlCol="0" anchor="t"/>
           <a:lstStyle/>
           <a:p>
-            <a:pPr indent="0" marL="0">
-              <a:buNone/>
-            </a:pPr>
-            <a:r>
-              <a:rPr lang="en-US" sz="1200" b="1" spc="-20" kern="0" dirty="0">
+            <a:pPr marL="0" indent="0">
+              <a:buNone/>
+            </a:pPr>
+            <a:r>
+              <a:rPr lang="en-US" sz="1200" b="1" kern="0" spc="-20" dirty="0">
                 <a:solidFill>
                   <a:srgbClr val="0C3C75"/>
                 </a:solidFill>
@@ -6396,7 +6125,7 @@
           <a:bodyPr wrap="square" lIns="0" tIns="0" rIns="0" bIns="0" rtlCol="0" anchor="t"/>
           <a:lstStyle/>
           <a:p>
-            <a:pPr indent="0" marL="0">
+            <a:pPr marL="0" indent="0">
               <a:lnSpc>
                 <a:spcPct val="110000"/>
               </a:lnSpc>
@@ -6489,11 +6218,11 @@
           <a:bodyPr wrap="square" lIns="0" tIns="0" rIns="0" bIns="0" rtlCol="0" anchor="t"/>
           <a:lstStyle/>
           <a:p>
-            <a:pPr indent="0" marL="0">
-              <a:buNone/>
-            </a:pPr>
-            <a:r>
-              <a:rPr lang="en-US" sz="1200" b="1" spc="-20" kern="0" dirty="0">
+            <a:pPr marL="0" indent="0">
+              <a:buNone/>
+            </a:pPr>
+            <a:r>
+              <a:rPr lang="en-US" sz="1200" b="1" kern="0" spc="-20" dirty="0">
                 <a:solidFill>
                   <a:srgbClr val="0C3C75"/>
                 </a:solidFill>
@@ -6528,7 +6257,7 @@
           <a:bodyPr wrap="square" lIns="0" tIns="0" rIns="0" bIns="0" rtlCol="0" anchor="t"/>
           <a:lstStyle/>
           <a:p>
-            <a:pPr indent="0" marL="0">
+            <a:pPr marL="0" indent="0">
               <a:lnSpc>
                 <a:spcPct val="110000"/>
               </a:lnSpc>
@@ -6621,11 +6350,11 @@
           <a:bodyPr wrap="square" lIns="0" tIns="0" rIns="0" bIns="0" rtlCol="0" anchor="t"/>
           <a:lstStyle/>
           <a:p>
-            <a:pPr indent="0" marL="0">
-              <a:buNone/>
-            </a:pPr>
-            <a:r>
-              <a:rPr lang="en-US" sz="1200" b="1" spc="-20" kern="0" dirty="0">
+            <a:pPr marL="0" indent="0">
+              <a:buNone/>
+            </a:pPr>
+            <a:r>
+              <a:rPr lang="en-US" sz="1200" b="1" kern="0" spc="-20" dirty="0">
                 <a:solidFill>
                   <a:srgbClr val="FFFFFF"/>
                 </a:solidFill>
@@ -6660,7 +6389,7 @@
           <a:bodyPr wrap="square" lIns="0" tIns="0" rIns="0" bIns="0" rtlCol="0" anchor="t"/>
           <a:lstStyle/>
           <a:p>
-            <a:pPr indent="0" marL="0">
+            <a:pPr marL="0" indent="0">
               <a:lnSpc>
                 <a:spcPct val="110000"/>
               </a:lnSpc>
@@ -6752,11 +6481,11 @@
           <a:bodyPr wrap="square" lIns="0" tIns="0" rIns="0" bIns="0" rtlCol="0" anchor="t"/>
           <a:lstStyle/>
           <a:p>
-            <a:pPr indent="0" marL="0">
-              <a:buNone/>
-            </a:pPr>
-            <a:r>
-              <a:rPr lang="en-US" sz="800" b="1" spc="150" kern="0" dirty="0">
+            <a:pPr marL="0" indent="0">
+              <a:buNone/>
+            </a:pPr>
+            <a:r>
+              <a:rPr lang="en-US" sz="800" b="1" kern="0" spc="150" dirty="0">
                 <a:solidFill>
                   <a:srgbClr val="0A8FA6"/>
                 </a:solidFill>
@@ -6791,7 +6520,7 @@
           <a:bodyPr wrap="square" lIns="0" tIns="0" rIns="0" bIns="0" rtlCol="0" anchor="ctr"/>
           <a:lstStyle/>
           <a:p>
-            <a:pPr indent="0" marL="0">
+            <a:pPr marL="0" indent="0">
               <a:buNone/>
             </a:pPr>
             <a:r>
@@ -6830,11 +6559,11 @@
           <a:bodyPr wrap="square" lIns="0" tIns="0" rIns="0" bIns="0" rtlCol="0" anchor="t"/>
           <a:lstStyle/>
           <a:p>
-            <a:pPr algn="r" indent="0" marL="0">
-              <a:buNone/>
-            </a:pPr>
-            <a:r>
-              <a:rPr lang="en-US" sz="800" spc="150" kern="0" dirty="0">
+            <a:pPr marL="0" indent="0" algn="r">
+              <a:buNone/>
+            </a:pPr>
+            <a:r>
+              <a:rPr lang="en-US" sz="800" kern="0" spc="150" dirty="0">
                 <a:solidFill>
                   <a:srgbClr val="6E7E90"/>
                 </a:solidFill>
@@ -6894,11 +6623,11 @@
           <a:bodyPr wrap="square" lIns="0" tIns="0" rIns="0" bIns="0" rtlCol="0" anchor="t"/>
           <a:lstStyle/>
           <a:p>
-            <a:pPr indent="0" marL="0">
-              <a:buNone/>
-            </a:pPr>
-            <a:r>
-              <a:rPr lang="en-US" sz="900" spc="50" kern="0" dirty="0">
+            <a:pPr marL="0" indent="0">
+              <a:buNone/>
+            </a:pPr>
+            <a:r>
+              <a:rPr lang="en-US" sz="900" kern="0" spc="50" dirty="0">
                 <a:solidFill>
                   <a:srgbClr val="94A9C0"/>
                 </a:solidFill>
@@ -6908,9 +6637,6 @@
               </a:rPr>
               <a:t>04</a:t>
             </a:r>
-            <a:pPr indent="0" marL="0">
-              <a:buNone/>
-            </a:pPr>
             <a:r>
               <a:rPr lang="en-US" sz="900" dirty="0">
                 <a:solidFill>
@@ -6922,11 +6648,8 @@
               </a:rPr>
               <a:t>   |   </a:t>
             </a:r>
-            <a:pPr indent="0" marL="0">
-              <a:buNone/>
-            </a:pPr>
-            <a:r>
-              <a:rPr lang="en-US" sz="900" b="1" spc="200" kern="0" dirty="0">
+            <a:r>
+              <a:rPr lang="en-US" sz="900" b="1" kern="0" spc="200" dirty="0">
                 <a:solidFill>
                   <a:srgbClr val="7FD3E3"/>
                 </a:solidFill>
@@ -6961,14 +6684,14 @@
           <a:bodyPr wrap="square" lIns="0" tIns="0" rIns="0" bIns="0" rtlCol="0" anchor="t"/>
           <a:lstStyle/>
           <a:p>
-            <a:pPr indent="0" marL="0">
+            <a:pPr marL="0" indent="0">
               <a:lnSpc>
                 <a:spcPct val="100000"/>
               </a:lnSpc>
               <a:buNone/>
             </a:pPr>
             <a:r>
-              <a:rPr lang="en-US" sz="2800" spc="-100" kern="0" dirty="0">
+              <a:rPr lang="en-US" sz="2800" kern="0" spc="-100" dirty="0">
                 <a:solidFill>
                   <a:srgbClr val="FFFFFF"/>
                 </a:solidFill>
@@ -6981,14 +6704,14 @@
             <a:endParaRPr lang="en-US" sz="2800" dirty="0"/>
           </a:p>
           <a:p>
-            <a:pPr indent="0" marL="0">
+            <a:pPr marL="0" indent="0">
               <a:lnSpc>
                 <a:spcPct val="100000"/>
               </a:lnSpc>
               <a:buNone/>
             </a:pPr>
             <a:r>
-              <a:rPr lang="en-US" sz="2800" spc="-100" kern="0" dirty="0">
+              <a:rPr lang="en-US" sz="2800" kern="0" spc="-100" dirty="0">
                 <a:solidFill>
                   <a:srgbClr val="9FC0DC"/>
                 </a:solidFill>
@@ -7004,41 +6727,1182 @@
       </p:sp>
       <p:sp>
         <p:nvSpPr>
-          <p:cNvPr id="4" name="Shape 2"/>
-          <p:cNvSpPr/>
-          <p:nvPr/>
-        </p:nvSpPr>
-        <p:spPr>
-          <a:xfrm>
-            <a:off x="548640" y="1828800"/>
-            <a:ext cx="11094415" cy="731520"/>
+          <p:cNvPr id="4" name="slab-1-left"/>
+          <p:cNvSpPr/>
+          <p:nvPr/>
+        </p:nvSpPr>
+        <p:spPr>
+          <a:xfrm>
+            <a:off x="982156" y="2186225"/>
+            <a:ext cx="1445052" cy="404615"/>
+          </a:xfrm>
+          <a:custGeom>
+            <a:avLst/>
+            <a:gdLst/>
+            <a:ahLst/>
+            <a:cxnLst/>
+            <a:rect l="l" t="t" r="r" b="b"/>
+            <a:pathLst>
+              <a:path w="1445052" h="404615">
+                <a:moveTo>
+                  <a:pt x="0" y="0"/>
+                </a:moveTo>
+                <a:lnTo>
+                  <a:pt x="1445052" y="274560"/>
+                </a:lnTo>
+                <a:lnTo>
+                  <a:pt x="1445052" y="404615"/>
+                </a:lnTo>
+                <a:lnTo>
+                  <a:pt x="0" y="130055"/>
+                </a:lnTo>
+                <a:close/>
+              </a:path>
+            </a:pathLst>
+          </a:custGeom>
+          <a:solidFill>
+            <a:srgbClr val="7ADBC0"/>
+          </a:solidFill>
+          <a:ln w="6350">
+            <a:solidFill>
+              <a:srgbClr val="7ADBC0"/>
+            </a:solidFill>
+            <a:prstDash val="solid"/>
+          </a:ln>
+        </p:spPr>
+      </p:sp>
+      <p:sp>
+        <p:nvSpPr>
+          <p:cNvPr id="5" name="slab-1-right"/>
+          <p:cNvSpPr/>
+          <p:nvPr/>
+        </p:nvSpPr>
+        <p:spPr>
+          <a:xfrm>
+            <a:off x="2427207" y="2186225"/>
+            <a:ext cx="1445052" cy="404615"/>
+          </a:xfrm>
+          <a:custGeom>
+            <a:avLst/>
+            <a:gdLst/>
+            <a:ahLst/>
+            <a:cxnLst/>
+            <a:rect l="l" t="t" r="r" b="b"/>
+            <a:pathLst>
+              <a:path w="1445052" h="404615">
+                <a:moveTo>
+                  <a:pt x="1445052" y="0"/>
+                </a:moveTo>
+                <a:lnTo>
+                  <a:pt x="0" y="274560"/>
+                </a:lnTo>
+                <a:lnTo>
+                  <a:pt x="0" y="404615"/>
+                </a:lnTo>
+                <a:lnTo>
+                  <a:pt x="1445052" y="130055"/>
+                </a:lnTo>
+                <a:close/>
+              </a:path>
+            </a:pathLst>
+          </a:custGeom>
+          <a:solidFill>
+            <a:srgbClr val="3DB48F"/>
+          </a:solidFill>
+          <a:ln w="6350">
+            <a:solidFill>
+              <a:srgbClr val="3DB48F"/>
+            </a:solidFill>
+            <a:prstDash val="solid"/>
+          </a:ln>
+        </p:spPr>
+      </p:sp>
+      <p:sp>
+        <p:nvSpPr>
+          <p:cNvPr id="6" name="slab-1-top"/>
+          <p:cNvSpPr/>
+          <p:nvPr/>
+        </p:nvSpPr>
+        <p:spPr>
+          <a:xfrm>
+            <a:off x="982156" y="1911666"/>
+            <a:ext cx="2890104" cy="549120"/>
+          </a:xfrm>
+          <a:custGeom>
+            <a:avLst/>
+            <a:gdLst/>
+            <a:ahLst/>
+            <a:cxnLst/>
+            <a:rect l="l" t="t" r="r" b="b"/>
+            <a:pathLst>
+              <a:path w="2890104" h="549120">
+                <a:moveTo>
+                  <a:pt x="0" y="274560"/>
+                </a:moveTo>
+                <a:lnTo>
+                  <a:pt x="1445052" y="0"/>
+                </a:lnTo>
+                <a:lnTo>
+                  <a:pt x="2890104" y="274560"/>
+                </a:lnTo>
+                <a:lnTo>
+                  <a:pt x="1445052" y="549120"/>
+                </a:lnTo>
+                <a:close/>
+              </a:path>
+            </a:pathLst>
+          </a:custGeom>
+          <a:solidFill>
+            <a:srgbClr val="BFEFE0"/>
+          </a:solidFill>
+          <a:ln w="6350">
+            <a:solidFill>
+              <a:srgbClr val="BFEFE0"/>
+            </a:solidFill>
+            <a:prstDash val="solid"/>
+          </a:ln>
+        </p:spPr>
+      </p:sp>
+      <p:sp>
+        <p:nvSpPr>
+          <p:cNvPr id="7" name="slab-1-num"/>
+          <p:cNvSpPr txBox="1"/>
+          <p:nvPr/>
+        </p:nvSpPr>
+        <p:spPr>
+          <a:xfrm>
+            <a:off x="1970007" y="2049065"/>
+            <a:ext cx="914400" cy="274320"/>
+          </a:xfrm>
+          <a:prstGeom prst="rect">
+            <a:avLst/>
+          </a:prstGeom>
+          <a:noFill/>
+          <a:ln/>
+        </p:spPr>
+        <p:txBody>
+          <a:bodyPr wrap="square" lIns="0" tIns="0" rIns="0" bIns="0" rtlCol="0" anchor="ctr"/>
+          <a:lstStyle/>
+          <a:p>
+            <a:pPr marL="0" indent="0" algn="ctr">
+              <a:buNone/>
+            </a:pPr>
+            <a:r>
+              <a:rPr lang="en-US" sz="1100" b="1" dirty="0">
+                <a:solidFill>
+                  <a:srgbClr val="0C3C75"/>
+                </a:solidFill>
+                <a:latin typeface="Segoe UI" pitchFamily="34" charset="0"/>
+                <a:ea typeface="Segoe UI" pitchFamily="34" charset="-122"/>
+                <a:cs typeface="Segoe UI" pitchFamily="34" charset="-120"/>
+              </a:rPr>
+              <a:t>01</a:t>
+            </a:r>
+            <a:endParaRPr lang="en-US" sz="1100" dirty="0"/>
+          </a:p>
+        </p:txBody>
+      </p:sp>
+      <p:sp>
+        <p:nvSpPr>
+          <p:cNvPr id="8" name="slab-1-link"/>
+          <p:cNvSpPr/>
+          <p:nvPr/>
+        </p:nvSpPr>
+        <p:spPr>
+          <a:xfrm>
+            <a:off x="2427207" y="2590840"/>
+            <a:ext cx="0" cy="216758"/>
+          </a:xfrm>
+          <a:prstGeom prst="line">
+            <a:avLst/>
+          </a:prstGeom>
+          <a:noFill/>
+          <a:ln w="15875">
+            <a:solidFill>
+              <a:srgbClr val="7FD3E3"/>
+            </a:solidFill>
+            <a:prstDash val="sysDash"/>
+          </a:ln>
+        </p:spPr>
+      </p:sp>
+      <p:sp>
+        <p:nvSpPr>
+          <p:cNvPr id="9" name="slab-1-drop"/>
+          <p:cNvSpPr/>
+          <p:nvPr/>
+        </p:nvSpPr>
+        <p:spPr>
+          <a:xfrm>
+            <a:off x="2399775" y="2563408"/>
+            <a:ext cx="54864" cy="54864"/>
+          </a:xfrm>
+          <a:prstGeom prst="ellipse">
+            <a:avLst/>
+          </a:prstGeom>
+          <a:solidFill>
+            <a:srgbClr val="7FD3E3"/>
+          </a:solidFill>
+          <a:ln w="12700">
+            <a:solidFill>
+              <a:srgbClr val="7FD3E3"/>
+            </a:solidFill>
+            <a:prstDash val="solid"/>
+          </a:ln>
+        </p:spPr>
+      </p:sp>
+      <p:sp>
+        <p:nvSpPr>
+          <p:cNvPr id="10" name="slab-2-left"/>
+          <p:cNvSpPr/>
+          <p:nvPr/>
+        </p:nvSpPr>
+        <p:spPr>
+          <a:xfrm>
+            <a:off x="982156" y="3038806"/>
+            <a:ext cx="1445052" cy="404615"/>
+          </a:xfrm>
+          <a:custGeom>
+            <a:avLst/>
+            <a:gdLst/>
+            <a:ahLst/>
+            <a:cxnLst/>
+            <a:rect l="l" t="t" r="r" b="b"/>
+            <a:pathLst>
+              <a:path w="1445052" h="404615">
+                <a:moveTo>
+                  <a:pt x="0" y="0"/>
+                </a:moveTo>
+                <a:lnTo>
+                  <a:pt x="1445052" y="274560"/>
+                </a:lnTo>
+                <a:lnTo>
+                  <a:pt x="1445052" y="404615"/>
+                </a:lnTo>
+                <a:lnTo>
+                  <a:pt x="0" y="130055"/>
+                </a:lnTo>
+                <a:close/>
+              </a:path>
+            </a:pathLst>
+          </a:custGeom>
+          <a:solidFill>
+            <a:srgbClr val="4CC9A6"/>
+          </a:solidFill>
+          <a:ln w="6350">
+            <a:solidFill>
+              <a:srgbClr val="4CC9A6"/>
+            </a:solidFill>
+            <a:prstDash val="solid"/>
+          </a:ln>
+        </p:spPr>
+      </p:sp>
+      <p:sp>
+        <p:nvSpPr>
+          <p:cNvPr id="11" name="slab-2-right"/>
+          <p:cNvSpPr/>
+          <p:nvPr/>
+        </p:nvSpPr>
+        <p:spPr>
+          <a:xfrm>
+            <a:off x="2427207" y="3038806"/>
+            <a:ext cx="1445052" cy="404615"/>
+          </a:xfrm>
+          <a:custGeom>
+            <a:avLst/>
+            <a:gdLst/>
+            <a:ahLst/>
+            <a:cxnLst/>
+            <a:rect l="l" t="t" r="r" b="b"/>
+            <a:pathLst>
+              <a:path w="1445052" h="404615">
+                <a:moveTo>
+                  <a:pt x="1445052" y="0"/>
+                </a:moveTo>
+                <a:lnTo>
+                  <a:pt x="0" y="274560"/>
+                </a:lnTo>
+                <a:lnTo>
+                  <a:pt x="0" y="404615"/>
+                </a:lnTo>
+                <a:lnTo>
+                  <a:pt x="1445052" y="130055"/>
+                </a:lnTo>
+                <a:close/>
+              </a:path>
+            </a:pathLst>
+          </a:custGeom>
+          <a:solidFill>
+            <a:srgbClr val="1D9E75"/>
+          </a:solidFill>
+          <a:ln w="6350">
+            <a:solidFill>
+              <a:srgbClr val="1D9E75"/>
+            </a:solidFill>
+            <a:prstDash val="solid"/>
+          </a:ln>
+        </p:spPr>
+      </p:sp>
+      <p:sp>
+        <p:nvSpPr>
+          <p:cNvPr id="12" name="slab-2-top"/>
+          <p:cNvSpPr/>
+          <p:nvPr/>
+        </p:nvSpPr>
+        <p:spPr>
+          <a:xfrm>
+            <a:off x="982156" y="2764246"/>
+            <a:ext cx="2890104" cy="549120"/>
+          </a:xfrm>
+          <a:custGeom>
+            <a:avLst/>
+            <a:gdLst/>
+            <a:ahLst/>
+            <a:cxnLst/>
+            <a:rect l="l" t="t" r="r" b="b"/>
+            <a:pathLst>
+              <a:path w="2890104" h="549120">
+                <a:moveTo>
+                  <a:pt x="0" y="274560"/>
+                </a:moveTo>
+                <a:lnTo>
+                  <a:pt x="1445052" y="0"/>
+                </a:lnTo>
+                <a:lnTo>
+                  <a:pt x="2890104" y="274560"/>
+                </a:lnTo>
+                <a:lnTo>
+                  <a:pt x="1445052" y="549120"/>
+                </a:lnTo>
+                <a:close/>
+              </a:path>
+            </a:pathLst>
+          </a:custGeom>
+          <a:solidFill>
+            <a:srgbClr val="8FE0C9"/>
+          </a:solidFill>
+          <a:ln w="6350">
+            <a:solidFill>
+              <a:srgbClr val="8FE0C9"/>
+            </a:solidFill>
+            <a:prstDash val="solid"/>
+          </a:ln>
+        </p:spPr>
+      </p:sp>
+      <p:sp>
+        <p:nvSpPr>
+          <p:cNvPr id="13" name="slab-2-num"/>
+          <p:cNvSpPr txBox="1"/>
+          <p:nvPr/>
+        </p:nvSpPr>
+        <p:spPr>
+          <a:xfrm>
+            <a:off x="1970007" y="2901646"/>
+            <a:ext cx="914400" cy="274320"/>
+          </a:xfrm>
+          <a:prstGeom prst="rect">
+            <a:avLst/>
+          </a:prstGeom>
+          <a:noFill/>
+          <a:ln/>
+        </p:spPr>
+        <p:txBody>
+          <a:bodyPr wrap="square" lIns="0" tIns="0" rIns="0" bIns="0" rtlCol="0" anchor="ctr"/>
+          <a:lstStyle/>
+          <a:p>
+            <a:pPr marL="0" indent="0" algn="ctr">
+              <a:buNone/>
+            </a:pPr>
+            <a:r>
+              <a:rPr lang="en-US" sz="1100" b="1" dirty="0">
+                <a:solidFill>
+                  <a:srgbClr val="0C3C75"/>
+                </a:solidFill>
+                <a:latin typeface="Segoe UI" pitchFamily="34" charset="0"/>
+                <a:ea typeface="Segoe UI" pitchFamily="34" charset="-122"/>
+                <a:cs typeface="Segoe UI" pitchFamily="34" charset="-120"/>
+              </a:rPr>
+              <a:t>02</a:t>
+            </a:r>
+            <a:endParaRPr lang="en-US" sz="1100" dirty="0"/>
+          </a:p>
+        </p:txBody>
+      </p:sp>
+      <p:sp>
+        <p:nvSpPr>
+          <p:cNvPr id="14" name="slab-2-link"/>
+          <p:cNvSpPr/>
+          <p:nvPr/>
+        </p:nvSpPr>
+        <p:spPr>
+          <a:xfrm>
+            <a:off x="2427207" y="3443421"/>
+            <a:ext cx="0" cy="216758"/>
+          </a:xfrm>
+          <a:prstGeom prst="line">
+            <a:avLst/>
+          </a:prstGeom>
+          <a:noFill/>
+          <a:ln w="15875">
+            <a:solidFill>
+              <a:srgbClr val="7FD3E3"/>
+            </a:solidFill>
+            <a:prstDash val="sysDash"/>
+          </a:ln>
+        </p:spPr>
+      </p:sp>
+      <p:sp>
+        <p:nvSpPr>
+          <p:cNvPr id="15" name="slab-2-drop"/>
+          <p:cNvSpPr/>
+          <p:nvPr/>
+        </p:nvSpPr>
+        <p:spPr>
+          <a:xfrm>
+            <a:off x="2399775" y="3415989"/>
+            <a:ext cx="54864" cy="54864"/>
+          </a:xfrm>
+          <a:prstGeom prst="ellipse">
+            <a:avLst/>
+          </a:prstGeom>
+          <a:solidFill>
+            <a:srgbClr val="7FD3E3"/>
+          </a:solidFill>
+          <a:ln w="12700">
+            <a:solidFill>
+              <a:srgbClr val="7FD3E3"/>
+            </a:solidFill>
+            <a:prstDash val="solid"/>
+          </a:ln>
+        </p:spPr>
+      </p:sp>
+      <p:sp>
+        <p:nvSpPr>
+          <p:cNvPr id="16" name="slab-3-left"/>
+          <p:cNvSpPr/>
+          <p:nvPr/>
+        </p:nvSpPr>
+        <p:spPr>
+          <a:xfrm>
+            <a:off x="982156" y="3891387"/>
+            <a:ext cx="1445052" cy="404615"/>
+          </a:xfrm>
+          <a:custGeom>
+            <a:avLst/>
+            <a:gdLst/>
+            <a:ahLst/>
+            <a:cxnLst/>
+            <a:rect l="l" t="t" r="r" b="b"/>
+            <a:pathLst>
+              <a:path w="1445052" h="404615">
+                <a:moveTo>
+                  <a:pt x="0" y="0"/>
+                </a:moveTo>
+                <a:lnTo>
+                  <a:pt x="1445052" y="274560"/>
+                </a:lnTo>
+                <a:lnTo>
+                  <a:pt x="1445052" y="404615"/>
+                </a:lnTo>
+                <a:lnTo>
+                  <a:pt x="0" y="130055"/>
+                </a:lnTo>
+                <a:close/>
+              </a:path>
+            </a:pathLst>
+          </a:custGeom>
+          <a:solidFill>
+            <a:srgbClr val="5AA2E6"/>
+          </a:solidFill>
+          <a:ln w="6350">
+            <a:solidFill>
+              <a:srgbClr val="5AA2E6"/>
+            </a:solidFill>
+            <a:prstDash val="solid"/>
+          </a:ln>
+        </p:spPr>
+      </p:sp>
+      <p:sp>
+        <p:nvSpPr>
+          <p:cNvPr id="17" name="slab-3-right"/>
+          <p:cNvSpPr/>
+          <p:nvPr/>
+        </p:nvSpPr>
+        <p:spPr>
+          <a:xfrm>
+            <a:off x="2427207" y="3891387"/>
+            <a:ext cx="1445052" cy="404615"/>
+          </a:xfrm>
+          <a:custGeom>
+            <a:avLst/>
+            <a:gdLst/>
+            <a:ahLst/>
+            <a:cxnLst/>
+            <a:rect l="l" t="t" r="r" b="b"/>
+            <a:pathLst>
+              <a:path w="1445052" h="404615">
+                <a:moveTo>
+                  <a:pt x="1445052" y="0"/>
+                </a:moveTo>
+                <a:lnTo>
+                  <a:pt x="0" y="274560"/>
+                </a:lnTo>
+                <a:lnTo>
+                  <a:pt x="0" y="404615"/>
+                </a:lnTo>
+                <a:lnTo>
+                  <a:pt x="1445052" y="130055"/>
+                </a:lnTo>
+                <a:close/>
+              </a:path>
+            </a:pathLst>
+          </a:custGeom>
+          <a:solidFill>
+            <a:srgbClr val="2F7FCB"/>
+          </a:solidFill>
+          <a:ln w="6350">
+            <a:solidFill>
+              <a:srgbClr val="2F7FCB"/>
+            </a:solidFill>
+            <a:prstDash val="solid"/>
+          </a:ln>
+        </p:spPr>
+      </p:sp>
+      <p:sp>
+        <p:nvSpPr>
+          <p:cNvPr id="18" name="slab-3-top"/>
+          <p:cNvSpPr/>
+          <p:nvPr/>
+        </p:nvSpPr>
+        <p:spPr>
+          <a:xfrm>
+            <a:off x="982156" y="3616827"/>
+            <a:ext cx="2890104" cy="549120"/>
+          </a:xfrm>
+          <a:custGeom>
+            <a:avLst/>
+            <a:gdLst/>
+            <a:ahLst/>
+            <a:cxnLst/>
+            <a:rect l="l" t="t" r="r" b="b"/>
+            <a:pathLst>
+              <a:path w="2890104" h="549120">
+                <a:moveTo>
+                  <a:pt x="0" y="274560"/>
+                </a:moveTo>
+                <a:lnTo>
+                  <a:pt x="1445052" y="0"/>
+                </a:lnTo>
+                <a:lnTo>
+                  <a:pt x="2890104" y="274560"/>
+                </a:lnTo>
+                <a:lnTo>
+                  <a:pt x="1445052" y="549120"/>
+                </a:lnTo>
+                <a:close/>
+              </a:path>
+            </a:pathLst>
+          </a:custGeom>
+          <a:solidFill>
+            <a:srgbClr val="9CC8F0"/>
+          </a:solidFill>
+          <a:ln w="6350">
+            <a:solidFill>
+              <a:srgbClr val="9CC8F0"/>
+            </a:solidFill>
+            <a:prstDash val="solid"/>
+          </a:ln>
+        </p:spPr>
+      </p:sp>
+      <p:sp>
+        <p:nvSpPr>
+          <p:cNvPr id="19" name="slab-3-num"/>
+          <p:cNvSpPr txBox="1"/>
+          <p:nvPr/>
+        </p:nvSpPr>
+        <p:spPr>
+          <a:xfrm>
+            <a:off x="1970007" y="3754227"/>
+            <a:ext cx="914400" cy="274320"/>
+          </a:xfrm>
+          <a:prstGeom prst="rect">
+            <a:avLst/>
+          </a:prstGeom>
+          <a:noFill/>
+          <a:ln/>
+        </p:spPr>
+        <p:txBody>
+          <a:bodyPr wrap="square" lIns="0" tIns="0" rIns="0" bIns="0" rtlCol="0" anchor="ctr"/>
+          <a:lstStyle/>
+          <a:p>
+            <a:pPr marL="0" indent="0" algn="ctr">
+              <a:buNone/>
+            </a:pPr>
+            <a:r>
+              <a:rPr lang="en-US" sz="1100" b="1" dirty="0">
+                <a:solidFill>
+                  <a:srgbClr val="0C3C75"/>
+                </a:solidFill>
+                <a:latin typeface="Segoe UI" pitchFamily="34" charset="0"/>
+                <a:ea typeface="Segoe UI" pitchFamily="34" charset="-122"/>
+                <a:cs typeface="Segoe UI" pitchFamily="34" charset="-120"/>
+              </a:rPr>
+              <a:t>03</a:t>
+            </a:r>
+            <a:endParaRPr lang="en-US" sz="1100" dirty="0"/>
+          </a:p>
+        </p:txBody>
+      </p:sp>
+      <p:sp>
+        <p:nvSpPr>
+          <p:cNvPr id="20" name="slab-3-link"/>
+          <p:cNvSpPr/>
+          <p:nvPr/>
+        </p:nvSpPr>
+        <p:spPr>
+          <a:xfrm>
+            <a:off x="2427207" y="4296001"/>
+            <a:ext cx="0" cy="216758"/>
+          </a:xfrm>
+          <a:prstGeom prst="line">
+            <a:avLst/>
+          </a:prstGeom>
+          <a:noFill/>
+          <a:ln w="15875">
+            <a:solidFill>
+              <a:srgbClr val="7FD3E3"/>
+            </a:solidFill>
+            <a:prstDash val="sysDash"/>
+          </a:ln>
+        </p:spPr>
+      </p:sp>
+      <p:sp>
+        <p:nvSpPr>
+          <p:cNvPr id="21" name="slab-3-drop"/>
+          <p:cNvSpPr/>
+          <p:nvPr/>
+        </p:nvSpPr>
+        <p:spPr>
+          <a:xfrm>
+            <a:off x="2399775" y="4268569"/>
+            <a:ext cx="54864" cy="54864"/>
+          </a:xfrm>
+          <a:prstGeom prst="ellipse">
+            <a:avLst/>
+          </a:prstGeom>
+          <a:solidFill>
+            <a:srgbClr val="7FD3E3"/>
+          </a:solidFill>
+          <a:ln w="12700">
+            <a:solidFill>
+              <a:srgbClr val="7FD3E3"/>
+            </a:solidFill>
+            <a:prstDash val="solid"/>
+          </a:ln>
+        </p:spPr>
+      </p:sp>
+      <p:sp>
+        <p:nvSpPr>
+          <p:cNvPr id="22" name="slab-4-left"/>
+          <p:cNvSpPr/>
+          <p:nvPr/>
+        </p:nvSpPr>
+        <p:spPr>
+          <a:xfrm>
+            <a:off x="982156" y="4743967"/>
+            <a:ext cx="1445052" cy="404615"/>
+          </a:xfrm>
+          <a:custGeom>
+            <a:avLst/>
+            <a:gdLst/>
+            <a:ahLst/>
+            <a:cxnLst/>
+            <a:rect l="l" t="t" r="r" b="b"/>
+            <a:pathLst>
+              <a:path w="1445052" h="404615">
+                <a:moveTo>
+                  <a:pt x="0" y="0"/>
+                </a:moveTo>
+                <a:lnTo>
+                  <a:pt x="1445052" y="274560"/>
+                </a:lnTo>
+                <a:lnTo>
+                  <a:pt x="1445052" y="404615"/>
+                </a:lnTo>
+                <a:lnTo>
+                  <a:pt x="0" y="130055"/>
+                </a:lnTo>
+                <a:close/>
+              </a:path>
+            </a:pathLst>
+          </a:custGeom>
+          <a:solidFill>
+            <a:srgbClr val="3A8FDB"/>
+          </a:solidFill>
+          <a:ln w="6350">
+            <a:solidFill>
+              <a:srgbClr val="3A8FDB"/>
+            </a:solidFill>
+            <a:prstDash val="solid"/>
+          </a:ln>
+        </p:spPr>
+      </p:sp>
+      <p:sp>
+        <p:nvSpPr>
+          <p:cNvPr id="23" name="slab-4-right"/>
+          <p:cNvSpPr/>
+          <p:nvPr/>
+        </p:nvSpPr>
+        <p:spPr>
+          <a:xfrm>
+            <a:off x="2427207" y="4743967"/>
+            <a:ext cx="1445052" cy="404615"/>
+          </a:xfrm>
+          <a:custGeom>
+            <a:avLst/>
+            <a:gdLst/>
+            <a:ahLst/>
+            <a:cxnLst/>
+            <a:rect l="l" t="t" r="r" b="b"/>
+            <a:pathLst>
+              <a:path w="1445052" h="404615">
+                <a:moveTo>
+                  <a:pt x="1445052" y="0"/>
+                </a:moveTo>
+                <a:lnTo>
+                  <a:pt x="0" y="274560"/>
+                </a:lnTo>
+                <a:lnTo>
+                  <a:pt x="0" y="404615"/>
+                </a:lnTo>
+                <a:lnTo>
+                  <a:pt x="1445052" y="130055"/>
+                </a:lnTo>
+                <a:close/>
+              </a:path>
+            </a:pathLst>
+          </a:custGeom>
+          <a:solidFill>
+            <a:srgbClr val="1F67AE"/>
+          </a:solidFill>
+          <a:ln w="6350">
+            <a:solidFill>
+              <a:srgbClr val="1F67AE"/>
+            </a:solidFill>
+            <a:prstDash val="solid"/>
+          </a:ln>
+        </p:spPr>
+      </p:sp>
+      <p:sp>
+        <p:nvSpPr>
+          <p:cNvPr id="24" name="slab-4-top"/>
+          <p:cNvSpPr/>
+          <p:nvPr/>
+        </p:nvSpPr>
+        <p:spPr>
+          <a:xfrm>
+            <a:off x="982156" y="4469407"/>
+            <a:ext cx="2890104" cy="549120"/>
+          </a:xfrm>
+          <a:custGeom>
+            <a:avLst/>
+            <a:gdLst/>
+            <a:ahLst/>
+            <a:cxnLst/>
+            <a:rect l="l" t="t" r="r" b="b"/>
+            <a:pathLst>
+              <a:path w="2890104" h="549120">
+                <a:moveTo>
+                  <a:pt x="0" y="274560"/>
+                </a:moveTo>
+                <a:lnTo>
+                  <a:pt x="1445052" y="0"/>
+                </a:lnTo>
+                <a:lnTo>
+                  <a:pt x="2890104" y="274560"/>
+                </a:lnTo>
+                <a:lnTo>
+                  <a:pt x="1445052" y="549120"/>
+                </a:lnTo>
+                <a:close/>
+              </a:path>
+            </a:pathLst>
+          </a:custGeom>
+          <a:solidFill>
+            <a:srgbClr val="6FB0EE"/>
+          </a:solidFill>
+          <a:ln w="6350">
+            <a:solidFill>
+              <a:srgbClr val="6FB0EE"/>
+            </a:solidFill>
+            <a:prstDash val="solid"/>
+          </a:ln>
+        </p:spPr>
+      </p:sp>
+      <p:sp>
+        <p:nvSpPr>
+          <p:cNvPr id="25" name="slab-4-num"/>
+          <p:cNvSpPr txBox="1"/>
+          <p:nvPr/>
+        </p:nvSpPr>
+        <p:spPr>
+          <a:xfrm>
+            <a:off x="1970007" y="4606807"/>
+            <a:ext cx="914400" cy="274320"/>
+          </a:xfrm>
+          <a:prstGeom prst="rect">
+            <a:avLst/>
+          </a:prstGeom>
+          <a:noFill/>
+          <a:ln/>
+        </p:spPr>
+        <p:txBody>
+          <a:bodyPr wrap="square" lIns="0" tIns="0" rIns="0" bIns="0" rtlCol="0" anchor="ctr"/>
+          <a:lstStyle/>
+          <a:p>
+            <a:pPr marL="0" indent="0" algn="ctr">
+              <a:buNone/>
+            </a:pPr>
+            <a:r>
+              <a:rPr lang="en-US" sz="1100" b="1" dirty="0">
+                <a:solidFill>
+                  <a:srgbClr val="0C3C75"/>
+                </a:solidFill>
+                <a:latin typeface="Segoe UI" pitchFamily="34" charset="0"/>
+                <a:ea typeface="Segoe UI" pitchFamily="34" charset="-122"/>
+                <a:cs typeface="Segoe UI" pitchFamily="34" charset="-120"/>
+              </a:rPr>
+              <a:t>04</a:t>
+            </a:r>
+            <a:endParaRPr lang="en-US" sz="1100" dirty="0"/>
+          </a:p>
+        </p:txBody>
+      </p:sp>
+      <p:sp>
+        <p:nvSpPr>
+          <p:cNvPr id="26" name="slab-4-link"/>
+          <p:cNvSpPr/>
+          <p:nvPr/>
+        </p:nvSpPr>
+        <p:spPr>
+          <a:xfrm>
+            <a:off x="2427207" y="5148582"/>
+            <a:ext cx="0" cy="216758"/>
+          </a:xfrm>
+          <a:prstGeom prst="line">
+            <a:avLst/>
+          </a:prstGeom>
+          <a:noFill/>
+          <a:ln w="15875">
+            <a:solidFill>
+              <a:srgbClr val="7FD3E3"/>
+            </a:solidFill>
+            <a:prstDash val="sysDash"/>
+          </a:ln>
+        </p:spPr>
+      </p:sp>
+      <p:sp>
+        <p:nvSpPr>
+          <p:cNvPr id="27" name="slab-4-drop"/>
+          <p:cNvSpPr/>
+          <p:nvPr/>
+        </p:nvSpPr>
+        <p:spPr>
+          <a:xfrm>
+            <a:off x="2399775" y="5121150"/>
+            <a:ext cx="54864" cy="54864"/>
+          </a:xfrm>
+          <a:prstGeom prst="ellipse">
+            <a:avLst/>
+          </a:prstGeom>
+          <a:solidFill>
+            <a:srgbClr val="7FD3E3"/>
+          </a:solidFill>
+          <a:ln w="12700">
+            <a:solidFill>
+              <a:srgbClr val="7FD3E3"/>
+            </a:solidFill>
+            <a:prstDash val="solid"/>
+          </a:ln>
+        </p:spPr>
+      </p:sp>
+      <p:sp>
+        <p:nvSpPr>
+          <p:cNvPr id="28" name="slab-5-left"/>
+          <p:cNvSpPr/>
+          <p:nvPr/>
+        </p:nvSpPr>
+        <p:spPr>
+          <a:xfrm>
+            <a:off x="982156" y="5596548"/>
+            <a:ext cx="1445052" cy="404615"/>
+          </a:xfrm>
+          <a:custGeom>
+            <a:avLst/>
+            <a:gdLst/>
+            <a:ahLst/>
+            <a:cxnLst/>
+            <a:rect l="l" t="t" r="r" b="b"/>
+            <a:pathLst>
+              <a:path w="1445052" h="404615">
+                <a:moveTo>
+                  <a:pt x="0" y="0"/>
+                </a:moveTo>
+                <a:lnTo>
+                  <a:pt x="1445052" y="274560"/>
+                </a:lnTo>
+                <a:lnTo>
+                  <a:pt x="1445052" y="404615"/>
+                </a:lnTo>
+                <a:lnTo>
+                  <a:pt x="0" y="130055"/>
+                </a:lnTo>
+                <a:close/>
+              </a:path>
+            </a:pathLst>
+          </a:custGeom>
+          <a:solidFill>
+            <a:srgbClr val="2B74BE"/>
+          </a:solidFill>
+          <a:ln w="6350">
+            <a:solidFill>
+              <a:srgbClr val="2B74BE"/>
+            </a:solidFill>
+            <a:prstDash val="solid"/>
+          </a:ln>
+        </p:spPr>
+      </p:sp>
+      <p:sp>
+        <p:nvSpPr>
+          <p:cNvPr id="29" name="slab-5-right"/>
+          <p:cNvSpPr/>
+          <p:nvPr/>
+        </p:nvSpPr>
+        <p:spPr>
+          <a:xfrm>
+            <a:off x="2427207" y="5596548"/>
+            <a:ext cx="1445052" cy="404615"/>
+          </a:xfrm>
+          <a:custGeom>
+            <a:avLst/>
+            <a:gdLst/>
+            <a:ahLst/>
+            <a:cxnLst/>
+            <a:rect l="l" t="t" r="r" b="b"/>
+            <a:pathLst>
+              <a:path w="1445052" h="404615">
+                <a:moveTo>
+                  <a:pt x="1445052" y="0"/>
+                </a:moveTo>
+                <a:lnTo>
+                  <a:pt x="0" y="274560"/>
+                </a:lnTo>
+                <a:lnTo>
+                  <a:pt x="0" y="404615"/>
+                </a:lnTo>
+                <a:lnTo>
+                  <a:pt x="1445052" y="130055"/>
+                </a:lnTo>
+                <a:close/>
+              </a:path>
+            </a:pathLst>
+          </a:custGeom>
+          <a:solidFill>
+            <a:srgbClr val="1A5590"/>
+          </a:solidFill>
+          <a:ln w="6350">
+            <a:solidFill>
+              <a:srgbClr val="1A5590"/>
+            </a:solidFill>
+            <a:prstDash val="solid"/>
+          </a:ln>
+        </p:spPr>
+      </p:sp>
+      <p:sp>
+        <p:nvSpPr>
+          <p:cNvPr id="30" name="slab-5-top"/>
+          <p:cNvSpPr/>
+          <p:nvPr/>
+        </p:nvSpPr>
+        <p:spPr>
+          <a:xfrm>
+            <a:off x="982156" y="5321988"/>
+            <a:ext cx="2890104" cy="549120"/>
+          </a:xfrm>
+          <a:custGeom>
+            <a:avLst/>
+            <a:gdLst/>
+            <a:ahLst/>
+            <a:cxnLst/>
+            <a:rect l="l" t="t" r="r" b="b"/>
+            <a:pathLst>
+              <a:path w="2890104" h="549120">
+                <a:moveTo>
+                  <a:pt x="0" y="274560"/>
+                </a:moveTo>
+                <a:lnTo>
+                  <a:pt x="1445052" y="0"/>
+                </a:lnTo>
+                <a:lnTo>
+                  <a:pt x="2890104" y="274560"/>
+                </a:lnTo>
+                <a:lnTo>
+                  <a:pt x="1445052" y="549120"/>
+                </a:lnTo>
+                <a:close/>
+              </a:path>
+            </a:pathLst>
+          </a:custGeom>
+          <a:solidFill>
+            <a:srgbClr val="4A97E2"/>
+          </a:solidFill>
+          <a:ln w="6350">
+            <a:solidFill>
+              <a:srgbClr val="4A97E2"/>
+            </a:solidFill>
+            <a:prstDash val="solid"/>
+          </a:ln>
+        </p:spPr>
+      </p:sp>
+      <p:sp>
+        <p:nvSpPr>
+          <p:cNvPr id="31" name="slab-5-num"/>
+          <p:cNvSpPr txBox="1"/>
+          <p:nvPr/>
+        </p:nvSpPr>
+        <p:spPr>
+          <a:xfrm>
+            <a:off x="1970007" y="5459388"/>
+            <a:ext cx="914400" cy="274320"/>
+          </a:xfrm>
+          <a:prstGeom prst="rect">
+            <a:avLst/>
+          </a:prstGeom>
+          <a:noFill/>
+          <a:ln/>
+        </p:spPr>
+        <p:txBody>
+          <a:bodyPr wrap="square" lIns="0" tIns="0" rIns="0" bIns="0" rtlCol="0" anchor="ctr"/>
+          <a:lstStyle/>
+          <a:p>
+            <a:pPr marL="0" indent="0" algn="ctr">
+              <a:buNone/>
+            </a:pPr>
+            <a:r>
+              <a:rPr lang="en-US" sz="1100" b="1" dirty="0">
+                <a:solidFill>
+                  <a:srgbClr val="0C3C75"/>
+                </a:solidFill>
+                <a:latin typeface="Segoe UI" pitchFamily="34" charset="0"/>
+                <a:ea typeface="Segoe UI" pitchFamily="34" charset="-122"/>
+                <a:cs typeface="Segoe UI" pitchFamily="34" charset="-120"/>
+              </a:rPr>
+              <a:t>05</a:t>
+            </a:r>
+            <a:endParaRPr lang="en-US" sz="1100" dirty="0"/>
+          </a:p>
+        </p:txBody>
+      </p:sp>
+      <p:sp>
+        <p:nvSpPr>
+          <p:cNvPr id="32" name="fn-1-card"/>
+          <p:cNvSpPr/>
+          <p:nvPr/>
+        </p:nvSpPr>
+        <p:spPr>
+          <a:xfrm>
+            <a:off x="4717255" y="1810512"/>
+            <a:ext cx="6925801" cy="749808"/>
           </a:xfrm>
           <a:prstGeom prst="roundRect">
             <a:avLst>
-              <a:gd name="adj" fmla="val 5000"/>
+              <a:gd name="adj" fmla="val 6098"/>
             </a:avLst>
           </a:prstGeom>
           <a:solidFill>
-            <a:srgbClr val="1F4C80"/>
+            <a:srgbClr val="174579"/>
           </a:solidFill>
           <a:ln w="9525">
             <a:solidFill>
-              <a:srgbClr val="2F5A8D"/>
-            </a:solidFill>
-            <a:prstDash val="solid"/>
-          </a:ln>
-        </p:spPr>
-      </p:sp>
-      <p:sp>
-        <p:nvSpPr>
-          <p:cNvPr id="5" name="Text 3"/>
+              <a:srgbClr val="2C5687"/>
+            </a:solidFill>
+            <a:prstDash val="solid"/>
+          </a:ln>
+        </p:spPr>
+      </p:sp>
+      <p:sp>
+        <p:nvSpPr>
+          <p:cNvPr id="33" name="fn-1-badge"/>
+          <p:cNvSpPr/>
+          <p:nvPr/>
+        </p:nvSpPr>
+        <p:spPr>
+          <a:xfrm>
+            <a:off x="4900135" y="2029968"/>
+            <a:ext cx="310896" cy="310896"/>
+          </a:xfrm>
+          <a:prstGeom prst="ellipse">
+            <a:avLst/>
+          </a:prstGeom>
+          <a:solidFill>
+            <a:srgbClr val="2C5687"/>
+          </a:solidFill>
+          <a:ln w="12700">
+            <a:solidFill>
+              <a:srgbClr val="2C5687"/>
+            </a:solidFill>
+            <a:prstDash val="solid"/>
+          </a:ln>
+        </p:spPr>
+      </p:sp>
+      <p:sp>
+        <p:nvSpPr>
+          <p:cNvPr id="34" name="fn-1-badgenum"/>
           <p:cNvSpPr txBox="1"/>
           <p:nvPr/>
         </p:nvSpPr>
         <p:spPr>
           <a:xfrm>
-            <a:off x="777240" y="1956816"/>
-            <a:ext cx="2743200" cy="182880"/>
+            <a:off x="4900135" y="2029968"/>
+            <a:ext cx="310896" cy="310896"/>
+          </a:xfrm>
+          <a:prstGeom prst="rect">
+            <a:avLst/>
+          </a:prstGeom>
+          <a:noFill/>
+          <a:ln/>
+        </p:spPr>
+        <p:txBody>
+          <a:bodyPr wrap="square" lIns="0" tIns="0" rIns="0" bIns="0" rtlCol="0" anchor="ctr"/>
+          <a:lstStyle/>
+          <a:p>
+            <a:pPr marL="0" indent="0" algn="ctr">
+              <a:buNone/>
+            </a:pPr>
+            <a:r>
+              <a:rPr lang="en-US" sz="850" b="1" dirty="0">
+                <a:solidFill>
+                  <a:srgbClr val="FFFFFF"/>
+                </a:solidFill>
+                <a:latin typeface="Segoe UI" pitchFamily="34" charset="0"/>
+                <a:ea typeface="Segoe UI" pitchFamily="34" charset="-122"/>
+                <a:cs typeface="Segoe UI" pitchFamily="34" charset="-120"/>
+              </a:rPr>
+              <a:t>01</a:t>
+            </a:r>
+            <a:endParaRPr lang="en-US" sz="850" dirty="0"/>
+          </a:p>
+        </p:txBody>
+      </p:sp>
+      <p:sp>
+        <p:nvSpPr>
+          <p:cNvPr id="35" name="fn-1-title"/>
+          <p:cNvSpPr txBox="1"/>
+          <p:nvPr/>
+        </p:nvSpPr>
+        <p:spPr>
+          <a:xfrm>
+            <a:off x="5375623" y="1920240"/>
+            <a:ext cx="6102841" cy="256032"/>
           </a:xfrm>
           <a:prstGeom prst="rect">
             <a:avLst/>
@@ -7050,34 +7914,34 @@
           <a:bodyPr wrap="square" lIns="0" tIns="0" rIns="0" bIns="0" rtlCol="0" anchor="t"/>
           <a:lstStyle/>
           <a:p>
-            <a:pPr indent="0" marL="0">
-              <a:buNone/>
-            </a:pPr>
-            <a:r>
-              <a:rPr lang="en-US" sz="800" b="1" spc="150" kern="0" dirty="0">
-                <a:solidFill>
-                  <a:srgbClr val="7FD3E3"/>
-                </a:solidFill>
-                <a:latin typeface="Segoe UI" pitchFamily="34" charset="0"/>
-                <a:ea typeface="Segoe UI" pitchFamily="34" charset="-122"/>
-                <a:cs typeface="Segoe UI" pitchFamily="34" charset="-120"/>
-              </a:rPr>
-              <a:t>OUTCOME</a:t>
-            </a:r>
-            <a:endParaRPr lang="en-US" sz="800" dirty="0"/>
-          </a:p>
-        </p:txBody>
-      </p:sp>
-      <p:sp>
-        <p:nvSpPr>
-          <p:cNvPr id="6" name="Text 4"/>
+            <a:pPr marL="0" indent="0">
+              <a:buNone/>
+            </a:pPr>
+            <a:r>
+              <a:rPr lang="en-US" sz="1300" b="1" kern="0" spc="-20" dirty="0">
+                <a:solidFill>
+                  <a:srgbClr val="FFFFFF"/>
+                </a:solidFill>
+                <a:latin typeface="Segoe UI" pitchFamily="34" charset="0"/>
+                <a:ea typeface="Segoe UI" pitchFamily="34" charset="-122"/>
+                <a:cs typeface="Segoe UI" pitchFamily="34" charset="-120"/>
+              </a:rPr>
+              <a:t>Proactive Revenue Identification</a:t>
+            </a:r>
+            <a:endParaRPr lang="en-US" sz="1300" dirty="0"/>
+          </a:p>
+        </p:txBody>
+      </p:sp>
+      <p:sp>
+        <p:nvSpPr>
+          <p:cNvPr id="36" name="fn-1-desc"/>
           <p:cNvSpPr txBox="1"/>
           <p:nvPr/>
         </p:nvSpPr>
         <p:spPr>
           <a:xfrm>
-            <a:off x="777240" y="2139696"/>
-            <a:ext cx="10637215" cy="237744"/>
+            <a:off x="5375623" y="2194560"/>
+            <a:ext cx="6102841" cy="347472"/>
           </a:xfrm>
           <a:prstGeom prst="rect">
             <a:avLst/>
@@ -7089,58 +7953,22 @@
           <a:bodyPr wrap="square" lIns="0" tIns="0" rIns="0" bIns="0" rtlCol="0" anchor="t"/>
           <a:lstStyle/>
           <a:p>
-            <a:pPr indent="0" marL="0">
-              <a:buNone/>
-            </a:pPr>
-            <a:r>
-              <a:rPr lang="en-US" sz="1300" b="1" dirty="0">
-                <a:solidFill>
-                  <a:srgbClr val="FFFFFF"/>
-                </a:solidFill>
-                <a:latin typeface="Segoe UI" pitchFamily="34" charset="0"/>
-                <a:ea typeface="Segoe UI" pitchFamily="34" charset="-122"/>
-                <a:cs typeface="Segoe UI" pitchFamily="34" charset="-120"/>
-              </a:rPr>
-              <a:t>Correct payer identified · lien documented · reimbursement recovered</a:t>
-            </a:r>
-            <a:endParaRPr lang="en-US" sz="1300" dirty="0"/>
-          </a:p>
-        </p:txBody>
-      </p:sp>
-      <p:sp>
-        <p:nvSpPr>
-          <p:cNvPr id="7" name="Text 5"/>
-          <p:cNvSpPr txBox="1"/>
-          <p:nvPr/>
-        </p:nvSpPr>
-        <p:spPr>
-          <a:xfrm>
-            <a:off x="777240" y="2359152"/>
-            <a:ext cx="10637215" cy="182880"/>
-          </a:xfrm>
-          <a:prstGeom prst="rect">
-            <a:avLst/>
-          </a:prstGeom>
-          <a:noFill/>
-          <a:ln/>
-        </p:spPr>
-        <p:txBody>
-          <a:bodyPr wrap="square" lIns="0" tIns="0" rIns="0" bIns="0" rtlCol="0" anchor="t"/>
-          <a:lstStyle/>
-          <a:p>
-            <a:pPr indent="0" marL="0">
+            <a:pPr marL="0" indent="0">
+              <a:lnSpc>
+                <a:spcPct val="115000"/>
+              </a:lnSpc>
               <a:buNone/>
             </a:pPr>
             <a:r>
               <a:rPr lang="en-US" sz="950" dirty="0">
                 <a:solidFill>
-                  <a:srgbClr val="C3D2E3"/>
-                </a:solidFill>
-                <a:latin typeface="Segoe UI" pitchFamily="34" charset="0"/>
-                <a:ea typeface="Segoe UI" pitchFamily="34" charset="-122"/>
-                <a:cs typeface="Segoe UI" pitchFamily="34" charset="-120"/>
-              </a:rPr>
-              <a:t>Verified findings flow back into the hospital's own billing and collections.</a:t>
+                  <a:srgbClr val="C5D6E8"/>
+                </a:solidFill>
+                <a:latin typeface="Segoe UI" pitchFamily="34" charset="0"/>
+                <a:ea typeface="Segoe UI" pitchFamily="34" charset="-122"/>
+                <a:cs typeface="Segoe UI" pitchFamily="34" charset="-120"/>
+              </a:rPr>
+              <a:t>Review injury-related encounters, identify potentially responsible payers, and prioritize accounts for investigation.</a:t>
             </a:r>
             <a:endParaRPr lang="en-US" sz="950" dirty="0"/>
           </a:p>
@@ -7148,66 +7976,105 @@
       </p:sp>
       <p:sp>
         <p:nvSpPr>
-          <p:cNvPr id="8" name="Shape 6"/>
-          <p:cNvSpPr/>
-          <p:nvPr/>
-        </p:nvSpPr>
-        <p:spPr>
-          <a:xfrm flipV="1">
-            <a:off x="5821528" y="2596896"/>
-            <a:ext cx="548640" cy="182880"/>
-          </a:xfrm>
-          <a:prstGeom prst="triangle">
-            <a:avLst/>
-          </a:prstGeom>
-          <a:solidFill>
-            <a:srgbClr val="0A8FA6"/>
-          </a:solidFill>
-          <a:ln w="12700">
-            <a:solidFill>
-              <a:srgbClr val="0A8FA6"/>
-            </a:solidFill>
-            <a:prstDash val="solid"/>
-          </a:ln>
-        </p:spPr>
-      </p:sp>
-      <p:sp>
-        <p:nvSpPr>
-          <p:cNvPr id="9" name="Shape 7"/>
-          <p:cNvSpPr/>
-          <p:nvPr/>
-        </p:nvSpPr>
-        <p:spPr>
-          <a:xfrm>
-            <a:off x="548640" y="2816352"/>
-            <a:ext cx="11094415" cy="2331720"/>
+          <p:cNvPr id="37" name="fn-2-card"/>
+          <p:cNvSpPr/>
+          <p:nvPr/>
+        </p:nvSpPr>
+        <p:spPr>
+          <a:xfrm>
+            <a:off x="4717255" y="2651760"/>
+            <a:ext cx="6925801" cy="749808"/>
           </a:xfrm>
           <a:prstGeom prst="roundRect">
             <a:avLst>
-              <a:gd name="adj" fmla="val 1569"/>
+              <a:gd name="adj" fmla="val 6098"/>
             </a:avLst>
           </a:prstGeom>
           <a:solidFill>
-            <a:srgbClr val="0677AE"/>
+            <a:srgbClr val="174579"/>
+          </a:solidFill>
+          <a:ln w="9525">
+            <a:solidFill>
+              <a:srgbClr val="2C5687"/>
+            </a:solidFill>
+            <a:prstDash val="solid"/>
+          </a:ln>
+        </p:spPr>
+      </p:sp>
+      <p:sp>
+        <p:nvSpPr>
+          <p:cNvPr id="38" name="fn-2-badge"/>
+          <p:cNvSpPr/>
+          <p:nvPr/>
+        </p:nvSpPr>
+        <p:spPr>
+          <a:xfrm>
+            <a:off x="4900135" y="2871216"/>
+            <a:ext cx="310896" cy="310896"/>
+          </a:xfrm>
+          <a:prstGeom prst="ellipse">
+            <a:avLst/>
+          </a:prstGeom>
+          <a:solidFill>
+            <a:srgbClr val="2C5687"/>
           </a:solidFill>
           <a:ln w="12700">
             <a:solidFill>
-              <a:srgbClr val="0677AE"/>
-            </a:solidFill>
-            <a:prstDash val="solid"/>
-          </a:ln>
-        </p:spPr>
-      </p:sp>
-      <p:sp>
-        <p:nvSpPr>
-          <p:cNvPr id="10" name="Text 8"/>
+              <a:srgbClr val="2C5687"/>
+            </a:solidFill>
+            <a:prstDash val="solid"/>
+          </a:ln>
+        </p:spPr>
+      </p:sp>
+      <p:sp>
+        <p:nvSpPr>
+          <p:cNvPr id="39" name="fn-2-badgenum"/>
           <p:cNvSpPr txBox="1"/>
           <p:nvPr/>
         </p:nvSpPr>
         <p:spPr>
           <a:xfrm>
-            <a:off x="777240" y="2953512"/>
-            <a:ext cx="3657600" cy="182880"/>
+            <a:off x="4900135" y="2871216"/>
+            <a:ext cx="310896" cy="310896"/>
+          </a:xfrm>
+          <a:prstGeom prst="rect">
+            <a:avLst/>
+          </a:prstGeom>
+          <a:noFill/>
+          <a:ln/>
+        </p:spPr>
+        <p:txBody>
+          <a:bodyPr wrap="square" lIns="0" tIns="0" rIns="0" bIns="0" rtlCol="0" anchor="ctr"/>
+          <a:lstStyle/>
+          <a:p>
+            <a:pPr marL="0" indent="0" algn="ctr">
+              <a:buNone/>
+            </a:pPr>
+            <a:r>
+              <a:rPr lang="en-US" sz="850" b="1" dirty="0">
+                <a:solidFill>
+                  <a:srgbClr val="FFFFFF"/>
+                </a:solidFill>
+                <a:latin typeface="Segoe UI" pitchFamily="34" charset="0"/>
+                <a:ea typeface="Segoe UI" pitchFamily="34" charset="-122"/>
+                <a:cs typeface="Segoe UI" pitchFamily="34" charset="-120"/>
+              </a:rPr>
+              <a:t>02</a:t>
+            </a:r>
+            <a:endParaRPr lang="en-US" sz="850" dirty="0"/>
+          </a:p>
+        </p:txBody>
+      </p:sp>
+      <p:sp>
+        <p:nvSpPr>
+          <p:cNvPr id="40" name="fn-2-title"/>
+          <p:cNvSpPr txBox="1"/>
+          <p:nvPr/>
+        </p:nvSpPr>
+        <p:spPr>
+          <a:xfrm>
+            <a:off x="5375623" y="2761488"/>
+            <a:ext cx="6102841" cy="256032"/>
           </a:xfrm>
           <a:prstGeom prst="rect">
             <a:avLst/>
@@ -7219,11 +8086,11 @@
           <a:bodyPr wrap="square" lIns="0" tIns="0" rIns="0" bIns="0" rtlCol="0" anchor="t"/>
           <a:lstStyle/>
           <a:p>
-            <a:pPr indent="0" marL="0">
-              <a:buNone/>
-            </a:pPr>
-            <a:r>
-              <a:rPr lang="en-US" sz="800" b="1" spc="150" kern="0" dirty="0">
+            <a:pPr marL="0" indent="0">
+              <a:buNone/>
+            </a:pPr>
+            <a:r>
+              <a:rPr lang="en-US" sz="1300" b="1" kern="0" spc="-20" dirty="0">
                 <a:solidFill>
                   <a:srgbClr val="FFFFFF"/>
                 </a:solidFill>
@@ -7231,49 +8098,155 @@
                 <a:ea typeface="Segoe UI" pitchFamily="34" charset="-122"/>
                 <a:cs typeface="Segoe UI" pitchFamily="34" charset="-120"/>
               </a:rPr>
-              <a:t>THE LABORFORCE LAYER</a:t>
-            </a:r>
-            <a:endParaRPr lang="en-US" sz="800" dirty="0"/>
-          </a:p>
-        </p:txBody>
-      </p:sp>
-      <p:sp>
-        <p:nvSpPr>
-          <p:cNvPr id="11" name="Shape 9"/>
-          <p:cNvSpPr/>
-          <p:nvPr/>
-        </p:nvSpPr>
-        <p:spPr>
-          <a:xfrm>
-            <a:off x="777240" y="3227832"/>
-            <a:ext cx="2017715" cy="1737360"/>
+              <a:t>Dedicated Patient Engagement</a:t>
+            </a:r>
+            <a:endParaRPr lang="en-US" sz="1300" dirty="0"/>
+          </a:p>
+        </p:txBody>
+      </p:sp>
+      <p:sp>
+        <p:nvSpPr>
+          <p:cNvPr id="41" name="fn-2-desc"/>
+          <p:cNvSpPr txBox="1"/>
+          <p:nvPr/>
+        </p:nvSpPr>
+        <p:spPr>
+          <a:xfrm>
+            <a:off x="5375623" y="3035808"/>
+            <a:ext cx="6102841" cy="347472"/>
+          </a:xfrm>
+          <a:prstGeom prst="rect">
+            <a:avLst/>
+          </a:prstGeom>
+          <a:noFill/>
+          <a:ln/>
+        </p:spPr>
+        <p:txBody>
+          <a:bodyPr wrap="square" lIns="0" tIns="0" rIns="0" bIns="0" rtlCol="0" anchor="t"/>
+          <a:lstStyle/>
+          <a:p>
+            <a:pPr marL="0" indent="0">
+              <a:lnSpc>
+                <a:spcPct val="115000"/>
+              </a:lnSpc>
+              <a:buNone/>
+            </a:pPr>
+            <a:r>
+              <a:rPr lang="en-US" sz="950" dirty="0">
+                <a:solidFill>
+                  <a:srgbClr val="C5D6E8"/>
+                </a:solidFill>
+                <a:latin typeface="Segoe UI" pitchFamily="34" charset="0"/>
+                <a:ea typeface="Segoe UI" pitchFamily="34" charset="-122"/>
+                <a:cs typeface="Segoe UI" pitchFamily="34" charset="-120"/>
+              </a:rPr>
+              <a:t>Outreach to verify injury circumstances and collect missing claim, employer, insurer, or attorney information.</a:t>
+            </a:r>
+            <a:endParaRPr lang="en-US" sz="950" dirty="0"/>
+          </a:p>
+        </p:txBody>
+      </p:sp>
+      <p:sp>
+        <p:nvSpPr>
+          <p:cNvPr id="42" name="fn-3-card"/>
+          <p:cNvSpPr/>
+          <p:nvPr/>
+        </p:nvSpPr>
+        <p:spPr>
+          <a:xfrm>
+            <a:off x="4717255" y="3493008"/>
+            <a:ext cx="6925801" cy="749808"/>
           </a:xfrm>
           <a:prstGeom prst="roundRect">
             <a:avLst>
-              <a:gd name="adj" fmla="val 1579"/>
+              <a:gd name="adj" fmla="val 6098"/>
             </a:avLst>
           </a:prstGeom>
           <a:solidFill>
-            <a:srgbClr val="FFFFFF"/>
+            <a:srgbClr val="174579"/>
+          </a:solidFill>
+          <a:ln w="9525">
+            <a:solidFill>
+              <a:srgbClr val="2C5687"/>
+            </a:solidFill>
+            <a:prstDash val="solid"/>
+          </a:ln>
+        </p:spPr>
+      </p:sp>
+      <p:sp>
+        <p:nvSpPr>
+          <p:cNvPr id="43" name="fn-3-badge"/>
+          <p:cNvSpPr/>
+          <p:nvPr/>
+        </p:nvSpPr>
+        <p:spPr>
+          <a:xfrm>
+            <a:off x="4900135" y="3712464"/>
+            <a:ext cx="310896" cy="310896"/>
+          </a:xfrm>
+          <a:prstGeom prst="ellipse">
+            <a:avLst/>
+          </a:prstGeom>
+          <a:solidFill>
+            <a:srgbClr val="2C5687"/>
           </a:solidFill>
           <a:ln w="12700">
             <a:solidFill>
-              <a:srgbClr val="FFFFFF"/>
-            </a:solidFill>
-            <a:prstDash val="solid"/>
-          </a:ln>
-        </p:spPr>
-      </p:sp>
-      <p:sp>
-        <p:nvSpPr>
-          <p:cNvPr id="12" name="Text 10"/>
+              <a:srgbClr val="2C5687"/>
+            </a:solidFill>
+            <a:prstDash val="solid"/>
+          </a:ln>
+        </p:spPr>
+      </p:sp>
+      <p:sp>
+        <p:nvSpPr>
+          <p:cNvPr id="44" name="fn-3-badgenum"/>
           <p:cNvSpPr txBox="1"/>
           <p:nvPr/>
         </p:nvSpPr>
         <p:spPr>
           <a:xfrm>
-            <a:off x="923544" y="3364992"/>
-            <a:ext cx="457200" cy="182880"/>
+            <a:off x="4900135" y="3712464"/>
+            <a:ext cx="310896" cy="310896"/>
+          </a:xfrm>
+          <a:prstGeom prst="rect">
+            <a:avLst/>
+          </a:prstGeom>
+          <a:noFill/>
+          <a:ln/>
+        </p:spPr>
+        <p:txBody>
+          <a:bodyPr wrap="square" lIns="0" tIns="0" rIns="0" bIns="0" rtlCol="0" anchor="ctr"/>
+          <a:lstStyle/>
+          <a:p>
+            <a:pPr marL="0" indent="0" algn="ctr">
+              <a:buNone/>
+            </a:pPr>
+            <a:r>
+              <a:rPr lang="en-US" sz="850" b="1" dirty="0">
+                <a:solidFill>
+                  <a:srgbClr val="FFFFFF"/>
+                </a:solidFill>
+                <a:latin typeface="Segoe UI" pitchFamily="34" charset="0"/>
+                <a:ea typeface="Segoe UI" pitchFamily="34" charset="-122"/>
+                <a:cs typeface="Segoe UI" pitchFamily="34" charset="-120"/>
+              </a:rPr>
+              <a:t>03</a:t>
+            </a:r>
+            <a:endParaRPr lang="en-US" sz="850" dirty="0"/>
+          </a:p>
+        </p:txBody>
+      </p:sp>
+      <p:sp>
+        <p:nvSpPr>
+          <p:cNvPr id="45" name="fn-3-title"/>
+          <p:cNvSpPr txBox="1"/>
+          <p:nvPr/>
+        </p:nvSpPr>
+        <p:spPr>
+          <a:xfrm>
+            <a:off x="5375623" y="3602736"/>
+            <a:ext cx="6102841" cy="256032"/>
           </a:xfrm>
           <a:prstGeom prst="rect">
             <a:avLst/>
@@ -7285,34 +8258,34 @@
           <a:bodyPr wrap="square" lIns="0" tIns="0" rIns="0" bIns="0" rtlCol="0" anchor="t"/>
           <a:lstStyle/>
           <a:p>
-            <a:pPr indent="0" marL="0">
-              <a:buNone/>
-            </a:pPr>
-            <a:r>
-              <a:rPr lang="en-US" sz="900" b="1" dirty="0">
-                <a:solidFill>
-                  <a:srgbClr val="0A8FA6"/>
-                </a:solidFill>
-                <a:latin typeface="Segoe UI" pitchFamily="34" charset="0"/>
-                <a:ea typeface="Segoe UI" pitchFamily="34" charset="-122"/>
-                <a:cs typeface="Segoe UI" pitchFamily="34" charset="-120"/>
-              </a:rPr>
-              <a:t>01</a:t>
-            </a:r>
-            <a:endParaRPr lang="en-US" sz="900" dirty="0"/>
-          </a:p>
-        </p:txBody>
-      </p:sp>
-      <p:sp>
-        <p:nvSpPr>
-          <p:cNvPr id="13" name="Text 11"/>
+            <a:pPr marL="0" indent="0">
+              <a:buNone/>
+            </a:pPr>
+            <a:r>
+              <a:rPr lang="en-US" sz="1300" b="1" kern="0" spc="-20" dirty="0">
+                <a:solidFill>
+                  <a:srgbClr val="FFFFFF"/>
+                </a:solidFill>
+                <a:latin typeface="Segoe UI" pitchFamily="34" charset="0"/>
+                <a:ea typeface="Segoe UI" pitchFamily="34" charset="-122"/>
+                <a:cs typeface="Segoe UI" pitchFamily="34" charset="-120"/>
+              </a:rPr>
+              <a:t>Payer Verification &amp; RCM Coordination</a:t>
+            </a:r>
+            <a:endParaRPr lang="en-US" sz="1300" dirty="0"/>
+          </a:p>
+        </p:txBody>
+      </p:sp>
+      <p:sp>
+        <p:nvSpPr>
+          <p:cNvPr id="46" name="fn-3-desc"/>
           <p:cNvSpPr txBox="1"/>
           <p:nvPr/>
         </p:nvSpPr>
         <p:spPr>
           <a:xfrm>
-            <a:off x="923544" y="3575304"/>
-            <a:ext cx="1743395" cy="411480"/>
+            <a:off x="5375623" y="3877056"/>
+            <a:ext cx="6102841" cy="347472"/>
           </a:xfrm>
           <a:prstGeom prst="rect">
             <a:avLst/>
@@ -7324,106 +8297,128 @@
           <a:bodyPr wrap="square" lIns="0" tIns="0" rIns="0" bIns="0" rtlCol="0" anchor="t"/>
           <a:lstStyle/>
           <a:p>
-            <a:pPr indent="0" marL="0">
+            <a:pPr marL="0" indent="0">
               <a:lnSpc>
-                <a:spcPct val="110000"/>
+                <a:spcPct val="115000"/>
               </a:lnSpc>
               <a:buNone/>
             </a:pPr>
             <a:r>
-              <a:rPr lang="en-US" sz="1100" b="1" spc="-20" kern="0" dirty="0">
-                <a:solidFill>
-                  <a:srgbClr val="0C3C75"/>
-                </a:solidFill>
-                <a:latin typeface="Segoe UI" pitchFamily="34" charset="0"/>
-                <a:ea typeface="Segoe UI" pitchFamily="34" charset="-122"/>
-                <a:cs typeface="Segoe UI" pitchFamily="34" charset="-120"/>
-              </a:rPr>
-              <a:t>Proactive Revenue Identification</a:t>
-            </a:r>
-            <a:endParaRPr lang="en-US" sz="1100" dirty="0"/>
-          </a:p>
-        </p:txBody>
-      </p:sp>
-      <p:sp>
-        <p:nvSpPr>
-          <p:cNvPr id="14" name="Text 12"/>
-          <p:cNvSpPr txBox="1"/>
-          <p:nvPr/>
-        </p:nvSpPr>
-        <p:spPr>
-          <a:xfrm>
-            <a:off x="923544" y="4014216"/>
-            <a:ext cx="1743395" cy="868680"/>
-          </a:xfrm>
-          <a:prstGeom prst="rect">
-            <a:avLst/>
-          </a:prstGeom>
-          <a:noFill/>
-          <a:ln/>
-        </p:spPr>
-        <p:txBody>
-          <a:bodyPr wrap="square" lIns="0" tIns="0" rIns="0" bIns="0" rtlCol="0" anchor="t"/>
-          <a:lstStyle/>
-          <a:p>
-            <a:pPr indent="0" marL="0">
-              <a:lnSpc>
-                <a:spcPct val="120000"/>
-              </a:lnSpc>
-              <a:buNone/>
-            </a:pPr>
-            <a:r>
-              <a:rPr lang="en-US" sz="900" dirty="0">
-                <a:solidFill>
-                  <a:srgbClr val="4A5B6E"/>
-                </a:solidFill>
-                <a:latin typeface="Segoe UI" pitchFamily="34" charset="0"/>
-                <a:ea typeface="Segoe UI" pitchFamily="34" charset="-122"/>
-                <a:cs typeface="Segoe UI" pitchFamily="34" charset="-120"/>
-              </a:rPr>
-              <a:t>Review injury-related encounters, identify potentially responsible payers, and prioritize accounts for investigation.</a:t>
-            </a:r>
-            <a:endParaRPr lang="en-US" sz="900" dirty="0"/>
-          </a:p>
-        </p:txBody>
-      </p:sp>
-      <p:sp>
-        <p:nvSpPr>
-          <p:cNvPr id="15" name="Shape 13"/>
-          <p:cNvSpPr/>
-          <p:nvPr/>
-        </p:nvSpPr>
-        <p:spPr>
-          <a:xfrm>
-            <a:off x="2932115" y="3227832"/>
-            <a:ext cx="2017715" cy="1737360"/>
+              <a:rPr lang="en-US" sz="950" dirty="0">
+                <a:solidFill>
+                  <a:srgbClr val="C5D6E8"/>
+                </a:solidFill>
+                <a:latin typeface="Segoe UI" pitchFamily="34" charset="0"/>
+                <a:ea typeface="Segoe UI" pitchFamily="34" charset="-122"/>
+                <a:cs typeface="Segoe UI" pitchFamily="34" charset="-120"/>
+              </a:rPr>
+              <a:t>Coordinate findings with registration, billing, and revenue cycle teams for payer determination and follow-up.</a:t>
+            </a:r>
+            <a:endParaRPr lang="en-US" sz="950" dirty="0"/>
+          </a:p>
+        </p:txBody>
+      </p:sp>
+      <p:sp>
+        <p:nvSpPr>
+          <p:cNvPr id="47" name="fn-4-card"/>
+          <p:cNvSpPr/>
+          <p:nvPr/>
+        </p:nvSpPr>
+        <p:spPr>
+          <a:xfrm>
+            <a:off x="4717255" y="4334256"/>
+            <a:ext cx="6925801" cy="749808"/>
           </a:xfrm>
           <a:prstGeom prst="roundRect">
             <a:avLst>
-              <a:gd name="adj" fmla="val 1579"/>
+              <a:gd name="adj" fmla="val 6098"/>
             </a:avLst>
           </a:prstGeom>
           <a:solidFill>
-            <a:srgbClr val="FFFFFF"/>
+            <a:srgbClr val="174579"/>
+          </a:solidFill>
+          <a:ln w="9525">
+            <a:solidFill>
+              <a:srgbClr val="2C5687"/>
+            </a:solidFill>
+            <a:prstDash val="solid"/>
+          </a:ln>
+        </p:spPr>
+      </p:sp>
+      <p:sp>
+        <p:nvSpPr>
+          <p:cNvPr id="48" name="fn-4-badge"/>
+          <p:cNvSpPr/>
+          <p:nvPr/>
+        </p:nvSpPr>
+        <p:spPr>
+          <a:xfrm>
+            <a:off x="4900135" y="4553712"/>
+            <a:ext cx="310896" cy="310896"/>
+          </a:xfrm>
+          <a:prstGeom prst="ellipse">
+            <a:avLst/>
+          </a:prstGeom>
+          <a:solidFill>
+            <a:srgbClr val="2C5687"/>
           </a:solidFill>
           <a:ln w="12700">
             <a:solidFill>
-              <a:srgbClr val="FFFFFF"/>
-            </a:solidFill>
-            <a:prstDash val="solid"/>
-          </a:ln>
-        </p:spPr>
-      </p:sp>
-      <p:sp>
-        <p:nvSpPr>
-          <p:cNvPr id="16" name="Text 14"/>
+              <a:srgbClr val="2C5687"/>
+            </a:solidFill>
+            <a:prstDash val="solid"/>
+          </a:ln>
+        </p:spPr>
+      </p:sp>
+      <p:sp>
+        <p:nvSpPr>
+          <p:cNvPr id="49" name="fn-4-badgenum"/>
           <p:cNvSpPr txBox="1"/>
           <p:nvPr/>
         </p:nvSpPr>
         <p:spPr>
           <a:xfrm>
-            <a:off x="3078419" y="3364992"/>
-            <a:ext cx="457200" cy="182880"/>
+            <a:off x="4900135" y="4553712"/>
+            <a:ext cx="310896" cy="310896"/>
+          </a:xfrm>
+          <a:prstGeom prst="rect">
+            <a:avLst/>
+          </a:prstGeom>
+          <a:noFill/>
+          <a:ln/>
+        </p:spPr>
+        <p:txBody>
+          <a:bodyPr wrap="square" lIns="0" tIns="0" rIns="0" bIns="0" rtlCol="0" anchor="ctr"/>
+          <a:lstStyle/>
+          <a:p>
+            <a:pPr marL="0" indent="0" algn="ctr">
+              <a:buNone/>
+            </a:pPr>
+            <a:r>
+              <a:rPr lang="en-US" sz="850" b="1" dirty="0">
+                <a:solidFill>
+                  <a:srgbClr val="FFFFFF"/>
+                </a:solidFill>
+                <a:latin typeface="Segoe UI" pitchFamily="34" charset="0"/>
+                <a:ea typeface="Segoe UI" pitchFamily="34" charset="-122"/>
+                <a:cs typeface="Segoe UI" pitchFamily="34" charset="-120"/>
+              </a:rPr>
+              <a:t>04</a:t>
+            </a:r>
+            <a:endParaRPr lang="en-US" sz="850" dirty="0"/>
+          </a:p>
+        </p:txBody>
+      </p:sp>
+      <p:sp>
+        <p:nvSpPr>
+          <p:cNvPr id="50" name="fn-4-title"/>
+          <p:cNvSpPr txBox="1"/>
+          <p:nvPr/>
+        </p:nvSpPr>
+        <p:spPr>
+          <a:xfrm>
+            <a:off x="5375623" y="4443984"/>
+            <a:ext cx="6102841" cy="256032"/>
           </a:xfrm>
           <a:prstGeom prst="rect">
             <a:avLst/>
@@ -7435,34 +8430,34 @@
           <a:bodyPr wrap="square" lIns="0" tIns="0" rIns="0" bIns="0" rtlCol="0" anchor="t"/>
           <a:lstStyle/>
           <a:p>
-            <a:pPr indent="0" marL="0">
-              <a:buNone/>
-            </a:pPr>
-            <a:r>
-              <a:rPr lang="en-US" sz="900" b="1" dirty="0">
-                <a:solidFill>
-                  <a:srgbClr val="0A8FA6"/>
-                </a:solidFill>
-                <a:latin typeface="Segoe UI" pitchFamily="34" charset="0"/>
-                <a:ea typeface="Segoe UI" pitchFamily="34" charset="-122"/>
-                <a:cs typeface="Segoe UI" pitchFamily="34" charset="-120"/>
-              </a:rPr>
-              <a:t>02</a:t>
-            </a:r>
-            <a:endParaRPr lang="en-US" sz="900" dirty="0"/>
-          </a:p>
-        </p:txBody>
-      </p:sp>
-      <p:sp>
-        <p:nvSpPr>
-          <p:cNvPr id="17" name="Text 15"/>
+            <a:pPr marL="0" indent="0">
+              <a:buNone/>
+            </a:pPr>
+            <a:r>
+              <a:rPr lang="en-US" sz="1300" b="1" kern="0" spc="-20" dirty="0">
+                <a:solidFill>
+                  <a:srgbClr val="FFFFFF"/>
+                </a:solidFill>
+                <a:latin typeface="Segoe UI" pitchFamily="34" charset="0"/>
+                <a:ea typeface="Segoe UI" pitchFamily="34" charset="-122"/>
+                <a:cs typeface="Segoe UI" pitchFamily="34" charset="-120"/>
+              </a:rPr>
+              <a:t>Revenue Auditing &amp; Reconciliation</a:t>
+            </a:r>
+            <a:endParaRPr lang="en-US" sz="1300" dirty="0"/>
+          </a:p>
+        </p:txBody>
+      </p:sp>
+      <p:sp>
+        <p:nvSpPr>
+          <p:cNvPr id="51" name="fn-4-desc"/>
           <p:cNvSpPr txBox="1"/>
           <p:nvPr/>
         </p:nvSpPr>
         <p:spPr>
           <a:xfrm>
-            <a:off x="3078419" y="3575304"/>
-            <a:ext cx="1743395" cy="411480"/>
+            <a:off x="5375623" y="4718304"/>
+            <a:ext cx="6102841" cy="347472"/>
           </a:xfrm>
           <a:prstGeom prst="rect">
             <a:avLst/>
@@ -7474,106 +8469,128 @@
           <a:bodyPr wrap="square" lIns="0" tIns="0" rIns="0" bIns="0" rtlCol="0" anchor="t"/>
           <a:lstStyle/>
           <a:p>
-            <a:pPr indent="0" marL="0">
+            <a:pPr marL="0" indent="0">
               <a:lnSpc>
-                <a:spcPct val="110000"/>
+                <a:spcPct val="115000"/>
               </a:lnSpc>
               <a:buNone/>
             </a:pPr>
             <a:r>
-              <a:rPr lang="en-US" sz="1100" b="1" spc="-20" kern="0" dirty="0">
-                <a:solidFill>
-                  <a:srgbClr val="0C3C75"/>
-                </a:solidFill>
-                <a:latin typeface="Segoe UI" pitchFamily="34" charset="0"/>
-                <a:ea typeface="Segoe UI" pitchFamily="34" charset="-122"/>
-                <a:cs typeface="Segoe UI" pitchFamily="34" charset="-120"/>
-              </a:rPr>
-              <a:t>Dedicated Patient Engagement</a:t>
-            </a:r>
-            <a:endParaRPr lang="en-US" sz="1100" dirty="0"/>
-          </a:p>
-        </p:txBody>
-      </p:sp>
-      <p:sp>
-        <p:nvSpPr>
-          <p:cNvPr id="18" name="Text 16"/>
-          <p:cNvSpPr txBox="1"/>
-          <p:nvPr/>
-        </p:nvSpPr>
-        <p:spPr>
-          <a:xfrm>
-            <a:off x="3078419" y="4014216"/>
-            <a:ext cx="1743395" cy="868680"/>
-          </a:xfrm>
-          <a:prstGeom prst="rect">
-            <a:avLst/>
-          </a:prstGeom>
-          <a:noFill/>
-          <a:ln/>
-        </p:spPr>
-        <p:txBody>
-          <a:bodyPr wrap="square" lIns="0" tIns="0" rIns="0" bIns="0" rtlCol="0" anchor="t"/>
-          <a:lstStyle/>
-          <a:p>
-            <a:pPr indent="0" marL="0">
-              <a:lnSpc>
-                <a:spcPct val="120000"/>
-              </a:lnSpc>
-              <a:buNone/>
-            </a:pPr>
-            <a:r>
-              <a:rPr lang="en-US" sz="900" dirty="0">
-                <a:solidFill>
-                  <a:srgbClr val="4A5B6E"/>
-                </a:solidFill>
-                <a:latin typeface="Segoe UI" pitchFamily="34" charset="0"/>
-                <a:ea typeface="Segoe UI" pitchFamily="34" charset="-122"/>
-                <a:cs typeface="Segoe UI" pitchFamily="34" charset="-120"/>
-              </a:rPr>
-              <a:t>Outreach to verify injury circumstances and collect missing claim, employer, insurer, or attorney information.</a:t>
-            </a:r>
-            <a:endParaRPr lang="en-US" sz="900" dirty="0"/>
-          </a:p>
-        </p:txBody>
-      </p:sp>
-      <p:sp>
-        <p:nvSpPr>
-          <p:cNvPr id="19" name="Shape 17"/>
-          <p:cNvSpPr/>
-          <p:nvPr/>
-        </p:nvSpPr>
-        <p:spPr>
-          <a:xfrm>
-            <a:off x="5086990" y="3227832"/>
-            <a:ext cx="2017715" cy="1737360"/>
+              <a:rPr lang="en-US" sz="950" dirty="0">
+                <a:solidFill>
+                  <a:srgbClr val="C5D6E8"/>
+                </a:solidFill>
+                <a:latin typeface="Segoe UI" pitchFamily="34" charset="0"/>
+                <a:ea typeface="Segoe UI" pitchFamily="34" charset="-122"/>
+                <a:cs typeface="Segoe UI" pitchFamily="34" charset="-120"/>
+              </a:rPr>
+              <a:t>Monitor unresolved cases, flag missing or inconsistent information, and track case status and reimbursement.</a:t>
+            </a:r>
+            <a:endParaRPr lang="en-US" sz="950" dirty="0"/>
+          </a:p>
+        </p:txBody>
+      </p:sp>
+      <p:sp>
+        <p:nvSpPr>
+          <p:cNvPr id="52" name="fn-5-card"/>
+          <p:cNvSpPr/>
+          <p:nvPr/>
+        </p:nvSpPr>
+        <p:spPr>
+          <a:xfrm>
+            <a:off x="4717255" y="5175504"/>
+            <a:ext cx="6925801" cy="749808"/>
           </a:xfrm>
           <a:prstGeom prst="roundRect">
             <a:avLst>
-              <a:gd name="adj" fmla="val 1579"/>
+              <a:gd name="adj" fmla="val 6098"/>
             </a:avLst>
           </a:prstGeom>
           <a:solidFill>
-            <a:srgbClr val="FFFFFF"/>
+            <a:srgbClr val="174579"/>
+          </a:solidFill>
+          <a:ln w="9525">
+            <a:solidFill>
+              <a:srgbClr val="2C5687"/>
+            </a:solidFill>
+            <a:prstDash val="solid"/>
+          </a:ln>
+        </p:spPr>
+      </p:sp>
+      <p:sp>
+        <p:nvSpPr>
+          <p:cNvPr id="53" name="fn-5-badge"/>
+          <p:cNvSpPr/>
+          <p:nvPr/>
+        </p:nvSpPr>
+        <p:spPr>
+          <a:xfrm>
+            <a:off x="4900135" y="5394960"/>
+            <a:ext cx="310896" cy="310896"/>
+          </a:xfrm>
+          <a:prstGeom prst="ellipse">
+            <a:avLst/>
+          </a:prstGeom>
+          <a:solidFill>
+            <a:srgbClr val="2C5687"/>
           </a:solidFill>
           <a:ln w="12700">
             <a:solidFill>
-              <a:srgbClr val="FFFFFF"/>
-            </a:solidFill>
-            <a:prstDash val="solid"/>
-          </a:ln>
-        </p:spPr>
-      </p:sp>
-      <p:sp>
-        <p:nvSpPr>
-          <p:cNvPr id="20" name="Text 18"/>
+              <a:srgbClr val="2C5687"/>
+            </a:solidFill>
+            <a:prstDash val="solid"/>
+          </a:ln>
+        </p:spPr>
+      </p:sp>
+      <p:sp>
+        <p:nvSpPr>
+          <p:cNvPr id="54" name="fn-5-badgenum"/>
           <p:cNvSpPr txBox="1"/>
           <p:nvPr/>
         </p:nvSpPr>
         <p:spPr>
           <a:xfrm>
-            <a:off x="5233294" y="3364992"/>
-            <a:ext cx="457200" cy="182880"/>
+            <a:off x="4900135" y="5394960"/>
+            <a:ext cx="310896" cy="310896"/>
+          </a:xfrm>
+          <a:prstGeom prst="rect">
+            <a:avLst/>
+          </a:prstGeom>
+          <a:noFill/>
+          <a:ln/>
+        </p:spPr>
+        <p:txBody>
+          <a:bodyPr wrap="square" lIns="0" tIns="0" rIns="0" bIns="0" rtlCol="0" anchor="ctr"/>
+          <a:lstStyle/>
+          <a:p>
+            <a:pPr marL="0" indent="0" algn="ctr">
+              <a:buNone/>
+            </a:pPr>
+            <a:r>
+              <a:rPr lang="en-US" sz="850" b="1" dirty="0">
+                <a:solidFill>
+                  <a:srgbClr val="FFFFFF"/>
+                </a:solidFill>
+                <a:latin typeface="Segoe UI" pitchFamily="34" charset="0"/>
+                <a:ea typeface="Segoe UI" pitchFamily="34" charset="-122"/>
+                <a:cs typeface="Segoe UI" pitchFamily="34" charset="-120"/>
+              </a:rPr>
+              <a:t>05</a:t>
+            </a:r>
+            <a:endParaRPr lang="en-US" sz="850" dirty="0"/>
+          </a:p>
+        </p:txBody>
+      </p:sp>
+      <p:sp>
+        <p:nvSpPr>
+          <p:cNvPr id="55" name="fn-5-title"/>
+          <p:cNvSpPr txBox="1"/>
+          <p:nvPr/>
+        </p:nvSpPr>
+        <p:spPr>
+          <a:xfrm>
+            <a:off x="5375623" y="5285232"/>
+            <a:ext cx="6102841" cy="256032"/>
           </a:xfrm>
           <a:prstGeom prst="rect">
             <a:avLst/>
@@ -7585,34 +8602,34 @@
           <a:bodyPr wrap="square" lIns="0" tIns="0" rIns="0" bIns="0" rtlCol="0" anchor="t"/>
           <a:lstStyle/>
           <a:p>
-            <a:pPr indent="0" marL="0">
-              <a:buNone/>
-            </a:pPr>
-            <a:r>
-              <a:rPr lang="en-US" sz="900" b="1" dirty="0">
-                <a:solidFill>
-                  <a:srgbClr val="0A8FA6"/>
-                </a:solidFill>
-                <a:latin typeface="Segoe UI" pitchFamily="34" charset="0"/>
-                <a:ea typeface="Segoe UI" pitchFamily="34" charset="-122"/>
-                <a:cs typeface="Segoe UI" pitchFamily="34" charset="-120"/>
-              </a:rPr>
-              <a:t>03</a:t>
-            </a:r>
-            <a:endParaRPr lang="en-US" sz="900" dirty="0"/>
-          </a:p>
-        </p:txBody>
-      </p:sp>
-      <p:sp>
-        <p:nvSpPr>
-          <p:cNvPr id="21" name="Text 19"/>
+            <a:pPr marL="0" indent="0">
+              <a:buNone/>
+            </a:pPr>
+            <a:r>
+              <a:rPr lang="en-US" sz="1300" b="1" kern="0" spc="-20" dirty="0">
+                <a:solidFill>
+                  <a:srgbClr val="FFFFFF"/>
+                </a:solidFill>
+                <a:latin typeface="Segoe UI" pitchFamily="34" charset="0"/>
+                <a:ea typeface="Segoe UI" pitchFamily="34" charset="-122"/>
+                <a:cs typeface="Segoe UI" pitchFamily="34" charset="-120"/>
+              </a:rPr>
+              <a:t>Lien Administration &amp; Recovery</a:t>
+            </a:r>
+            <a:endParaRPr lang="en-US" sz="1300" dirty="0"/>
+          </a:p>
+        </p:txBody>
+      </p:sp>
+      <p:sp>
+        <p:nvSpPr>
+          <p:cNvPr id="56" name="fn-5-desc"/>
           <p:cNvSpPr txBox="1"/>
           <p:nvPr/>
         </p:nvSpPr>
         <p:spPr>
           <a:xfrm>
-            <a:off x="5233294" y="3575304"/>
-            <a:ext cx="1743395" cy="411480"/>
+            <a:off x="5375623" y="5559552"/>
+            <a:ext cx="6102841" cy="347472"/>
           </a:xfrm>
           <a:prstGeom prst="rect">
             <a:avLst/>
@@ -7624,37 +8641,37 @@
           <a:bodyPr wrap="square" lIns="0" tIns="0" rIns="0" bIns="0" rtlCol="0" anchor="t"/>
           <a:lstStyle/>
           <a:p>
-            <a:pPr indent="0" marL="0">
+            <a:pPr marL="0" indent="0">
               <a:lnSpc>
-                <a:spcPct val="110000"/>
+                <a:spcPct val="115000"/>
               </a:lnSpc>
               <a:buNone/>
             </a:pPr>
             <a:r>
-              <a:rPr lang="en-US" sz="1100" b="1" spc="-20" kern="0" dirty="0">
-                <a:solidFill>
-                  <a:srgbClr val="0C3C75"/>
-                </a:solidFill>
-                <a:latin typeface="Segoe UI" pitchFamily="34" charset="0"/>
-                <a:ea typeface="Segoe UI" pitchFamily="34" charset="-122"/>
-                <a:cs typeface="Segoe UI" pitchFamily="34" charset="-120"/>
-              </a:rPr>
-              <a:t>Payer Verification &amp; RCM Coordination</a:t>
-            </a:r>
-            <a:endParaRPr lang="en-US" sz="1100" dirty="0"/>
-          </a:p>
-        </p:txBody>
-      </p:sp>
-      <p:sp>
-        <p:nvSpPr>
-          <p:cNvPr id="22" name="Text 20"/>
+              <a:rPr lang="en-US" sz="950" dirty="0">
+                <a:solidFill>
+                  <a:srgbClr val="C5D6E8"/>
+                </a:solidFill>
+                <a:latin typeface="Segoe UI" pitchFamily="34" charset="0"/>
+                <a:ea typeface="Segoe UI" pitchFamily="34" charset="-122"/>
+                <a:cs typeface="Segoe UI" pitchFamily="34" charset="-120"/>
+              </a:rPr>
+              <a:t>Support approved lien documentation, follow-up, and reimbursement tracking within the legal and contractual framework.</a:t>
+            </a:r>
+            <a:endParaRPr lang="en-US" sz="950" dirty="0"/>
+          </a:p>
+        </p:txBody>
+      </p:sp>
+      <p:sp>
+        <p:nvSpPr>
+          <p:cNvPr id="57" name="Text 55"/>
           <p:cNvSpPr txBox="1"/>
           <p:nvPr/>
         </p:nvSpPr>
         <p:spPr>
           <a:xfrm>
-            <a:off x="5233294" y="4014216"/>
-            <a:ext cx="1743395" cy="868680"/>
+            <a:off x="4717255" y="6035040"/>
+            <a:ext cx="6925801" cy="228600"/>
           </a:xfrm>
           <a:prstGeom prst="rect">
             <a:avLst/>
@@ -7666,491 +8683,19 @@
           <a:bodyPr wrap="square" lIns="0" tIns="0" rIns="0" bIns="0" rtlCol="0" anchor="t"/>
           <a:lstStyle/>
           <a:p>
-            <a:pPr indent="0" marL="0">
-              <a:lnSpc>
-                <a:spcPct val="120000"/>
-              </a:lnSpc>
-              <a:buNone/>
-            </a:pPr>
-            <a:r>
-              <a:rPr lang="en-US" sz="900" dirty="0">
-                <a:solidFill>
-                  <a:srgbClr val="4A5B6E"/>
-                </a:solidFill>
-                <a:latin typeface="Segoe UI" pitchFamily="34" charset="0"/>
-                <a:ea typeface="Segoe UI" pitchFamily="34" charset="-122"/>
-                <a:cs typeface="Segoe UI" pitchFamily="34" charset="-120"/>
-              </a:rPr>
-              <a:t>Coordinate findings with registration, billing, and revenue cycle teams for payer determination and follow-up.</a:t>
-            </a:r>
-            <a:endParaRPr lang="en-US" sz="900" dirty="0"/>
-          </a:p>
-        </p:txBody>
-      </p:sp>
-      <p:sp>
-        <p:nvSpPr>
-          <p:cNvPr id="23" name="Shape 21"/>
-          <p:cNvSpPr/>
-          <p:nvPr/>
-        </p:nvSpPr>
-        <p:spPr>
-          <a:xfrm>
-            <a:off x="7241865" y="3227832"/>
-            <a:ext cx="2017715" cy="1737360"/>
-          </a:xfrm>
-          <a:prstGeom prst="roundRect">
-            <a:avLst>
-              <a:gd name="adj" fmla="val 1579"/>
-            </a:avLst>
-          </a:prstGeom>
-          <a:solidFill>
-            <a:srgbClr val="FFFFFF"/>
-          </a:solidFill>
-          <a:ln w="12700">
-            <a:solidFill>
-              <a:srgbClr val="FFFFFF"/>
-            </a:solidFill>
-            <a:prstDash val="solid"/>
-          </a:ln>
-        </p:spPr>
-      </p:sp>
-      <p:sp>
-        <p:nvSpPr>
-          <p:cNvPr id="24" name="Text 22"/>
-          <p:cNvSpPr txBox="1"/>
-          <p:nvPr/>
-        </p:nvSpPr>
-        <p:spPr>
-          <a:xfrm>
-            <a:off x="7388169" y="3364992"/>
-            <a:ext cx="457200" cy="182880"/>
-          </a:xfrm>
-          <a:prstGeom prst="rect">
-            <a:avLst/>
-          </a:prstGeom>
-          <a:noFill/>
-          <a:ln/>
-        </p:spPr>
-        <p:txBody>
-          <a:bodyPr wrap="square" lIns="0" tIns="0" rIns="0" bIns="0" rtlCol="0" anchor="t"/>
-          <a:lstStyle/>
-          <a:p>
-            <a:pPr indent="0" marL="0">
-              <a:buNone/>
-            </a:pPr>
-            <a:r>
-              <a:rPr lang="en-US" sz="900" b="1" dirty="0">
-                <a:solidFill>
-                  <a:srgbClr val="0A8FA6"/>
-                </a:solidFill>
-                <a:latin typeface="Segoe UI" pitchFamily="34" charset="0"/>
-                <a:ea typeface="Segoe UI" pitchFamily="34" charset="-122"/>
-                <a:cs typeface="Segoe UI" pitchFamily="34" charset="-120"/>
-              </a:rPr>
-              <a:t>04</a:t>
-            </a:r>
-            <a:endParaRPr lang="en-US" sz="900" dirty="0"/>
-          </a:p>
-        </p:txBody>
-      </p:sp>
-      <p:sp>
-        <p:nvSpPr>
-          <p:cNvPr id="25" name="Text 23"/>
-          <p:cNvSpPr txBox="1"/>
-          <p:nvPr/>
-        </p:nvSpPr>
-        <p:spPr>
-          <a:xfrm>
-            <a:off x="7388169" y="3575304"/>
-            <a:ext cx="1743395" cy="411480"/>
-          </a:xfrm>
-          <a:prstGeom prst="rect">
-            <a:avLst/>
-          </a:prstGeom>
-          <a:noFill/>
-          <a:ln/>
-        </p:spPr>
-        <p:txBody>
-          <a:bodyPr wrap="square" lIns="0" tIns="0" rIns="0" bIns="0" rtlCol="0" anchor="t"/>
-          <a:lstStyle/>
-          <a:p>
-            <a:pPr indent="0" marL="0">
-              <a:lnSpc>
-                <a:spcPct val="110000"/>
-              </a:lnSpc>
-              <a:buNone/>
-            </a:pPr>
-            <a:r>
-              <a:rPr lang="en-US" sz="1100" b="1" spc="-20" kern="0" dirty="0">
-                <a:solidFill>
-                  <a:srgbClr val="0C3C75"/>
-                </a:solidFill>
-                <a:latin typeface="Segoe UI" pitchFamily="34" charset="0"/>
-                <a:ea typeface="Segoe UI" pitchFamily="34" charset="-122"/>
-                <a:cs typeface="Segoe UI" pitchFamily="34" charset="-120"/>
-              </a:rPr>
-              <a:t>Revenue Auditing &amp; Reconciliation</a:t>
-            </a:r>
-            <a:endParaRPr lang="en-US" sz="1100" dirty="0"/>
-          </a:p>
-        </p:txBody>
-      </p:sp>
-      <p:sp>
-        <p:nvSpPr>
-          <p:cNvPr id="26" name="Text 24"/>
-          <p:cNvSpPr txBox="1"/>
-          <p:nvPr/>
-        </p:nvSpPr>
-        <p:spPr>
-          <a:xfrm>
-            <a:off x="7388169" y="4014216"/>
-            <a:ext cx="1743395" cy="868680"/>
-          </a:xfrm>
-          <a:prstGeom prst="rect">
-            <a:avLst/>
-          </a:prstGeom>
-          <a:noFill/>
-          <a:ln/>
-        </p:spPr>
-        <p:txBody>
-          <a:bodyPr wrap="square" lIns="0" tIns="0" rIns="0" bIns="0" rtlCol="0" anchor="t"/>
-          <a:lstStyle/>
-          <a:p>
-            <a:pPr indent="0" marL="0">
-              <a:lnSpc>
-                <a:spcPct val="120000"/>
-              </a:lnSpc>
-              <a:buNone/>
-            </a:pPr>
-            <a:r>
-              <a:rPr lang="en-US" sz="900" dirty="0">
-                <a:solidFill>
-                  <a:srgbClr val="4A5B6E"/>
-                </a:solidFill>
-                <a:latin typeface="Segoe UI" pitchFamily="34" charset="0"/>
-                <a:ea typeface="Segoe UI" pitchFamily="34" charset="-122"/>
-                <a:cs typeface="Segoe UI" pitchFamily="34" charset="-120"/>
-              </a:rPr>
-              <a:t>Monitor unresolved cases, flag missing or inconsistent information, and track case status and reimbursement.</a:t>
-            </a:r>
-            <a:endParaRPr lang="en-US" sz="900" dirty="0"/>
-          </a:p>
-        </p:txBody>
-      </p:sp>
-      <p:sp>
-        <p:nvSpPr>
-          <p:cNvPr id="27" name="Shape 25"/>
-          <p:cNvSpPr/>
-          <p:nvPr/>
-        </p:nvSpPr>
-        <p:spPr>
-          <a:xfrm>
-            <a:off x="9396740" y="3227832"/>
-            <a:ext cx="2017715" cy="1737360"/>
-          </a:xfrm>
-          <a:prstGeom prst="roundRect">
-            <a:avLst>
-              <a:gd name="adj" fmla="val 1579"/>
-            </a:avLst>
-          </a:prstGeom>
-          <a:solidFill>
-            <a:srgbClr val="FFFFFF"/>
-          </a:solidFill>
-          <a:ln w="12700">
-            <a:solidFill>
-              <a:srgbClr val="FFFFFF"/>
-            </a:solidFill>
-            <a:prstDash val="solid"/>
-          </a:ln>
-        </p:spPr>
-      </p:sp>
-      <p:sp>
-        <p:nvSpPr>
-          <p:cNvPr id="28" name="Text 26"/>
-          <p:cNvSpPr txBox="1"/>
-          <p:nvPr/>
-        </p:nvSpPr>
-        <p:spPr>
-          <a:xfrm>
-            <a:off x="9543044" y="3364992"/>
-            <a:ext cx="457200" cy="182880"/>
-          </a:xfrm>
-          <a:prstGeom prst="rect">
-            <a:avLst/>
-          </a:prstGeom>
-          <a:noFill/>
-          <a:ln/>
-        </p:spPr>
-        <p:txBody>
-          <a:bodyPr wrap="square" lIns="0" tIns="0" rIns="0" bIns="0" rtlCol="0" anchor="t"/>
-          <a:lstStyle/>
-          <a:p>
-            <a:pPr indent="0" marL="0">
-              <a:buNone/>
-            </a:pPr>
-            <a:r>
-              <a:rPr lang="en-US" sz="900" b="1" dirty="0">
-                <a:solidFill>
-                  <a:srgbClr val="0A8FA6"/>
-                </a:solidFill>
-                <a:latin typeface="Segoe UI" pitchFamily="34" charset="0"/>
-                <a:ea typeface="Segoe UI" pitchFamily="34" charset="-122"/>
-                <a:cs typeface="Segoe UI" pitchFamily="34" charset="-120"/>
-              </a:rPr>
-              <a:t>05</a:t>
-            </a:r>
-            <a:endParaRPr lang="en-US" sz="900" dirty="0"/>
-          </a:p>
-        </p:txBody>
-      </p:sp>
-      <p:sp>
-        <p:nvSpPr>
-          <p:cNvPr id="29" name="Text 27"/>
-          <p:cNvSpPr txBox="1"/>
-          <p:nvPr/>
-        </p:nvSpPr>
-        <p:spPr>
-          <a:xfrm>
-            <a:off x="9543044" y="3575304"/>
-            <a:ext cx="1743395" cy="411480"/>
-          </a:xfrm>
-          <a:prstGeom prst="rect">
-            <a:avLst/>
-          </a:prstGeom>
-          <a:noFill/>
-          <a:ln/>
-        </p:spPr>
-        <p:txBody>
-          <a:bodyPr wrap="square" lIns="0" tIns="0" rIns="0" bIns="0" rtlCol="0" anchor="t"/>
-          <a:lstStyle/>
-          <a:p>
-            <a:pPr indent="0" marL="0">
-              <a:lnSpc>
-                <a:spcPct val="110000"/>
-              </a:lnSpc>
-              <a:buNone/>
-            </a:pPr>
-            <a:r>
-              <a:rPr lang="en-US" sz="1100" b="1" spc="-20" kern="0" dirty="0">
-                <a:solidFill>
-                  <a:srgbClr val="0C3C75"/>
-                </a:solidFill>
-                <a:latin typeface="Segoe UI" pitchFamily="34" charset="0"/>
-                <a:ea typeface="Segoe UI" pitchFamily="34" charset="-122"/>
-                <a:cs typeface="Segoe UI" pitchFamily="34" charset="-120"/>
-              </a:rPr>
-              <a:t>Lien Administration &amp; Recovery</a:t>
-            </a:r>
-            <a:endParaRPr lang="en-US" sz="1100" dirty="0"/>
-          </a:p>
-        </p:txBody>
-      </p:sp>
-      <p:sp>
-        <p:nvSpPr>
-          <p:cNvPr id="30" name="Text 28"/>
-          <p:cNvSpPr txBox="1"/>
-          <p:nvPr/>
-        </p:nvSpPr>
-        <p:spPr>
-          <a:xfrm>
-            <a:off x="9543044" y="4014216"/>
-            <a:ext cx="1743395" cy="868680"/>
-          </a:xfrm>
-          <a:prstGeom prst="rect">
-            <a:avLst/>
-          </a:prstGeom>
-          <a:noFill/>
-          <a:ln/>
-        </p:spPr>
-        <p:txBody>
-          <a:bodyPr wrap="square" lIns="0" tIns="0" rIns="0" bIns="0" rtlCol="0" anchor="t"/>
-          <a:lstStyle/>
-          <a:p>
-            <a:pPr indent="0" marL="0">
-              <a:lnSpc>
-                <a:spcPct val="120000"/>
-              </a:lnSpc>
-              <a:buNone/>
-            </a:pPr>
-            <a:r>
-              <a:rPr lang="en-US" sz="900" dirty="0">
-                <a:solidFill>
-                  <a:srgbClr val="4A5B6E"/>
-                </a:solidFill>
-                <a:latin typeface="Segoe UI" pitchFamily="34" charset="0"/>
-                <a:ea typeface="Segoe UI" pitchFamily="34" charset="-122"/>
-                <a:cs typeface="Segoe UI" pitchFamily="34" charset="-120"/>
-              </a:rPr>
-              <a:t>Support approved lien documentation, follow-up, and reimbursement tracking within the legal and contractual framework.</a:t>
-            </a:r>
-            <a:endParaRPr lang="en-US" sz="900" dirty="0"/>
-          </a:p>
-        </p:txBody>
-      </p:sp>
-      <p:sp>
-        <p:nvSpPr>
-          <p:cNvPr id="31" name="Shape 29"/>
-          <p:cNvSpPr/>
-          <p:nvPr/>
-        </p:nvSpPr>
-        <p:spPr>
-          <a:xfrm flipV="1">
-            <a:off x="5821528" y="5184648"/>
-            <a:ext cx="548640" cy="182880"/>
-          </a:xfrm>
-          <a:prstGeom prst="triangle">
-            <a:avLst/>
-          </a:prstGeom>
-          <a:solidFill>
-            <a:srgbClr val="0A8FA6"/>
-          </a:solidFill>
-          <a:ln w="12700">
-            <a:solidFill>
-              <a:srgbClr val="0A8FA6"/>
-            </a:solidFill>
-            <a:prstDash val="solid"/>
-          </a:ln>
-        </p:spPr>
-      </p:sp>
-      <p:sp>
-        <p:nvSpPr>
-          <p:cNvPr id="32" name="Shape 30"/>
-          <p:cNvSpPr/>
-          <p:nvPr/>
-        </p:nvSpPr>
-        <p:spPr>
-          <a:xfrm>
-            <a:off x="548640" y="5404104"/>
-            <a:ext cx="11094415" cy="795528"/>
-          </a:xfrm>
-          <a:prstGeom prst="roundRect">
-            <a:avLst>
-              <a:gd name="adj" fmla="val 4598"/>
-            </a:avLst>
-          </a:prstGeom>
-          <a:solidFill>
-            <a:srgbClr val="061F45"/>
-          </a:solidFill>
-          <a:ln w="9525">
-            <a:solidFill>
-              <a:srgbClr val="2A4A72"/>
-            </a:solidFill>
-            <a:prstDash val="solid"/>
-          </a:ln>
-        </p:spPr>
-      </p:sp>
-      <p:sp>
-        <p:nvSpPr>
-          <p:cNvPr id="33" name="Text 31"/>
-          <p:cNvSpPr txBox="1"/>
-          <p:nvPr/>
-        </p:nvSpPr>
-        <p:spPr>
-          <a:xfrm>
-            <a:off x="777240" y="5522976"/>
-            <a:ext cx="3657600" cy="182880"/>
-          </a:xfrm>
-          <a:prstGeom prst="rect">
-            <a:avLst/>
-          </a:prstGeom>
-          <a:noFill/>
-          <a:ln/>
-        </p:spPr>
-        <p:txBody>
-          <a:bodyPr wrap="square" lIns="0" tIns="0" rIns="0" bIns="0" rtlCol="0" anchor="t"/>
-          <a:lstStyle/>
-          <a:p>
-            <a:pPr indent="0" marL="0">
-              <a:buNone/>
-            </a:pPr>
-            <a:r>
-              <a:rPr lang="en-US" sz="800" b="1" spc="150" kern="0" dirty="0">
-                <a:solidFill>
-                  <a:srgbClr val="9FC0DC"/>
-                </a:solidFill>
-                <a:latin typeface="Segoe UI" pitchFamily="34" charset="0"/>
-                <a:ea typeface="Segoe UI" pitchFamily="34" charset="-122"/>
-                <a:cs typeface="Segoe UI" pitchFamily="34" charset="-120"/>
-              </a:rPr>
-              <a:t>EXISTING HOSPITAL REVENUE CYCLE</a:t>
-            </a:r>
-            <a:endParaRPr lang="en-US" sz="800" dirty="0"/>
-          </a:p>
-        </p:txBody>
-      </p:sp>
-      <p:sp>
-        <p:nvSpPr>
-          <p:cNvPr id="34" name="Text 32"/>
-          <p:cNvSpPr txBox="1"/>
-          <p:nvPr/>
-        </p:nvSpPr>
-        <p:spPr>
-          <a:xfrm>
-            <a:off x="777240" y="5705856"/>
-            <a:ext cx="10637215" cy="237744"/>
-          </a:xfrm>
-          <a:prstGeom prst="rect">
-            <a:avLst/>
-          </a:prstGeom>
-          <a:noFill/>
-          <a:ln/>
-        </p:spPr>
-        <p:txBody>
-          <a:bodyPr wrap="square" lIns="0" tIns="0" rIns="0" bIns="0" rtlCol="0" anchor="t"/>
-          <a:lstStyle/>
-          <a:p>
-            <a:pPr indent="0" marL="0">
-              <a:buNone/>
-            </a:pPr>
-            <a:r>
-              <a:rPr lang="en-US" sz="1300" b="1" dirty="0">
-                <a:solidFill>
-                  <a:srgbClr val="FFFFFF"/>
-                </a:solidFill>
-                <a:latin typeface="Segoe UI" pitchFamily="34" charset="0"/>
-                <a:ea typeface="Segoe UI" pitchFamily="34" charset="-122"/>
-                <a:cs typeface="Segoe UI" pitchFamily="34" charset="-120"/>
-              </a:rPr>
-              <a:t>Registration · Billing · Collections · Revenue cycle teams</a:t>
-            </a:r>
-            <a:endParaRPr lang="en-US" sz="1300" dirty="0"/>
-          </a:p>
-        </p:txBody>
-      </p:sp>
-      <p:sp>
-        <p:nvSpPr>
-          <p:cNvPr id="35" name="Text 33"/>
-          <p:cNvSpPr txBox="1"/>
-          <p:nvPr/>
-        </p:nvSpPr>
-        <p:spPr>
-          <a:xfrm>
-            <a:off x="777240" y="5925312"/>
-            <a:ext cx="10637215" cy="201168"/>
-          </a:xfrm>
-          <a:prstGeom prst="rect">
-            <a:avLst/>
-          </a:prstGeom>
-          <a:noFill/>
-          <a:ln/>
-        </p:spPr>
-        <p:txBody>
-          <a:bodyPr wrap="square" lIns="0" tIns="0" rIns="0" bIns="0" rtlCol="0" anchor="t"/>
-          <a:lstStyle/>
-          <a:p>
-            <a:pPr indent="0" marL="0">
-              <a:buNone/>
-            </a:pPr>
-            <a:r>
-              <a:rPr lang="en-US" sz="950" dirty="0">
-                <a:solidFill>
-                  <a:srgbClr val="AEBFD6"/>
-                </a:solidFill>
-                <a:latin typeface="Segoe UI" pitchFamily="34" charset="0"/>
-                <a:ea typeface="Segoe UI" pitchFamily="34" charset="-122"/>
-                <a:cs typeface="Segoe UI" pitchFamily="34" charset="-120"/>
-              </a:rPr>
-              <a:t>Unchanged. LaborForce works alongside these teams — uncovering and advancing opportunities they may not have the specialized resources to fully investigate.</a:t>
+            <a:pPr marL="0" indent="0">
+              <a:buNone/>
+            </a:pPr>
+            <a:r>
+              <a:rPr lang="en-US" sz="950" i="1" dirty="0">
+                <a:solidFill>
+                  <a:srgbClr val="C3D2E3"/>
+                </a:solidFill>
+                <a:latin typeface="Segoe UI" pitchFamily="34" charset="0"/>
+                <a:ea typeface="Segoe UI" pitchFamily="34" charset="-122"/>
+                <a:cs typeface="Segoe UI" pitchFamily="34" charset="-120"/>
+              </a:rPr>
+              <a:t>LaborForce works alongside your billing and collections teams.</a:t>
             </a:r>
             <a:endParaRPr lang="en-US" sz="950" dirty="0"/>
           </a:p>
@@ -8158,7 +8703,7 @@
       </p:sp>
       <p:sp>
         <p:nvSpPr>
-          <p:cNvPr id="36" name="Text 34"/>
+          <p:cNvPr id="58" name="Text 56"/>
           <p:cNvSpPr txBox="1"/>
           <p:nvPr/>
         </p:nvSpPr>
@@ -8177,11 +8722,11 @@
           <a:bodyPr wrap="square" lIns="0" tIns="0" rIns="0" bIns="0" rtlCol="0" anchor="t"/>
           <a:lstStyle/>
           <a:p>
-            <a:pPr algn="r" indent="0" marL="0">
-              <a:buNone/>
-            </a:pPr>
-            <a:r>
-              <a:rPr lang="en-US" sz="800" spc="150" kern="0" dirty="0">
+            <a:pPr marL="0" indent="0" algn="r">
+              <a:buNone/>
+            </a:pPr>
+            <a:r>
+              <a:rPr lang="en-US" sz="800" kern="0" spc="150" dirty="0">
                 <a:solidFill>
                   <a:srgbClr val="94A9C0"/>
                 </a:solidFill>
@@ -8200,6 +8745,1967 @@
   <p:clrMapOvr>
     <a:masterClrMapping/>
   </p:clrMapOvr>
+  <p:timing>
+    <p:tnLst>
+      <p:par>
+        <p:cTn id="1" dur="indefinite" restart="never" nodeType="tmRoot">
+          <p:childTnLst>
+            <p:seq concurrent="1" nextAc="seek">
+              <p:cTn id="2" dur="indefinite" nodeType="mainSeq">
+                <p:childTnLst>
+                  <p:par>
+                    <p:cTn id="3" fill="hold">
+                      <p:stCondLst>
+                        <p:cond delay="indefinite"/>
+                      </p:stCondLst>
+                      <p:childTnLst>
+                        <p:par>
+                          <p:cTn id="4" fill="hold">
+                            <p:stCondLst>
+                              <p:cond delay="0"/>
+                            </p:stCondLst>
+                            <p:childTnLst>
+                              <p:par>
+                                <p:cTn id="5" presetID="10" presetClass="entr" presetSubtype="0" fill="hold" nodeType="clickEffect">
+                                  <p:stCondLst>
+                                    <p:cond delay="0"/>
+                                  </p:stCondLst>
+                                  <p:childTnLst>
+                                    <p:set>
+                                      <p:cBhvr>
+                                        <p:cTn id="6" dur="1" fill="hold">
+                                          <p:stCondLst>
+                                            <p:cond delay="0"/>
+                                          </p:stCondLst>
+                                        </p:cTn>
+                                        <p:tgtEl>
+                                          <p:spTgt spid="4"/>
+                                        </p:tgtEl>
+                                        <p:attrNameLst>
+                                          <p:attrName>style.visibility</p:attrName>
+                                        </p:attrNameLst>
+                                      </p:cBhvr>
+                                      <p:to>
+                                        <p:strVal val="visible"/>
+                                      </p:to>
+                                    </p:set>
+                                    <p:animEffect transition="in" filter="fade">
+                                      <p:cBhvr>
+                                        <p:cTn id="7" dur="500"/>
+                                        <p:tgtEl>
+                                          <p:spTgt spid="4"/>
+                                        </p:tgtEl>
+                                      </p:cBhvr>
+                                    </p:animEffect>
+                                  </p:childTnLst>
+                                </p:cTn>
+                              </p:par>
+                              <p:par>
+                                <p:cTn id="8" presetID="10" presetClass="entr" presetSubtype="0" fill="hold" nodeType="withEffect">
+                                  <p:stCondLst>
+                                    <p:cond delay="0"/>
+                                  </p:stCondLst>
+                                  <p:childTnLst>
+                                    <p:set>
+                                      <p:cBhvr>
+                                        <p:cTn id="9" dur="1" fill="hold">
+                                          <p:stCondLst>
+                                            <p:cond delay="0"/>
+                                          </p:stCondLst>
+                                        </p:cTn>
+                                        <p:tgtEl>
+                                          <p:spTgt spid="5"/>
+                                        </p:tgtEl>
+                                        <p:attrNameLst>
+                                          <p:attrName>style.visibility</p:attrName>
+                                        </p:attrNameLst>
+                                      </p:cBhvr>
+                                      <p:to>
+                                        <p:strVal val="visible"/>
+                                      </p:to>
+                                    </p:set>
+                                    <p:animEffect transition="in" filter="fade">
+                                      <p:cBhvr>
+                                        <p:cTn id="10" dur="500"/>
+                                        <p:tgtEl>
+                                          <p:spTgt spid="5"/>
+                                        </p:tgtEl>
+                                      </p:cBhvr>
+                                    </p:animEffect>
+                                  </p:childTnLst>
+                                </p:cTn>
+                              </p:par>
+                              <p:par>
+                                <p:cTn id="11" presetID="10" presetClass="entr" presetSubtype="0" fill="hold" nodeType="withEffect">
+                                  <p:stCondLst>
+                                    <p:cond delay="0"/>
+                                  </p:stCondLst>
+                                  <p:childTnLst>
+                                    <p:set>
+                                      <p:cBhvr>
+                                        <p:cTn id="12" dur="1" fill="hold">
+                                          <p:stCondLst>
+                                            <p:cond delay="0"/>
+                                          </p:stCondLst>
+                                        </p:cTn>
+                                        <p:tgtEl>
+                                          <p:spTgt spid="6"/>
+                                        </p:tgtEl>
+                                        <p:attrNameLst>
+                                          <p:attrName>style.visibility</p:attrName>
+                                        </p:attrNameLst>
+                                      </p:cBhvr>
+                                      <p:to>
+                                        <p:strVal val="visible"/>
+                                      </p:to>
+                                    </p:set>
+                                    <p:animEffect transition="in" filter="fade">
+                                      <p:cBhvr>
+                                        <p:cTn id="13" dur="500"/>
+                                        <p:tgtEl>
+                                          <p:spTgt spid="6"/>
+                                        </p:tgtEl>
+                                      </p:cBhvr>
+                                    </p:animEffect>
+                                  </p:childTnLst>
+                                </p:cTn>
+                              </p:par>
+                              <p:par>
+                                <p:cTn id="14" presetID="10" presetClass="entr" presetSubtype="0" fill="hold" grpId="0" nodeType="withEffect">
+                                  <p:stCondLst>
+                                    <p:cond delay="0"/>
+                                  </p:stCondLst>
+                                  <p:childTnLst>
+                                    <p:set>
+                                      <p:cBhvr>
+                                        <p:cTn id="15" dur="1" fill="hold">
+                                          <p:stCondLst>
+                                            <p:cond delay="0"/>
+                                          </p:stCondLst>
+                                        </p:cTn>
+                                        <p:tgtEl>
+                                          <p:spTgt spid="7"/>
+                                        </p:tgtEl>
+                                        <p:attrNameLst>
+                                          <p:attrName>style.visibility</p:attrName>
+                                        </p:attrNameLst>
+                                      </p:cBhvr>
+                                      <p:to>
+                                        <p:strVal val="visible"/>
+                                      </p:to>
+                                    </p:set>
+                                    <p:animEffect transition="in" filter="fade">
+                                      <p:cBhvr>
+                                        <p:cTn id="16" dur="500"/>
+                                        <p:tgtEl>
+                                          <p:spTgt spid="7"/>
+                                        </p:tgtEl>
+                                      </p:cBhvr>
+                                    </p:animEffect>
+                                  </p:childTnLst>
+                                </p:cTn>
+                              </p:par>
+                              <p:par>
+                                <p:cTn id="17" presetID="10" presetClass="entr" presetSubtype="0" fill="hold" nodeType="withEffect">
+                                  <p:stCondLst>
+                                    <p:cond delay="0"/>
+                                  </p:stCondLst>
+                                  <p:childTnLst>
+                                    <p:set>
+                                      <p:cBhvr>
+                                        <p:cTn id="18" dur="1" fill="hold">
+                                          <p:stCondLst>
+                                            <p:cond delay="0"/>
+                                          </p:stCondLst>
+                                        </p:cTn>
+                                        <p:tgtEl>
+                                          <p:spTgt spid="32"/>
+                                        </p:tgtEl>
+                                        <p:attrNameLst>
+                                          <p:attrName>style.visibility</p:attrName>
+                                        </p:attrNameLst>
+                                      </p:cBhvr>
+                                      <p:to>
+                                        <p:strVal val="visible"/>
+                                      </p:to>
+                                    </p:set>
+                                    <p:animEffect transition="in" filter="fade">
+                                      <p:cBhvr>
+                                        <p:cTn id="19" dur="500"/>
+                                        <p:tgtEl>
+                                          <p:spTgt spid="32"/>
+                                        </p:tgtEl>
+                                      </p:cBhvr>
+                                    </p:animEffect>
+                                  </p:childTnLst>
+                                </p:cTn>
+                              </p:par>
+                              <p:par>
+                                <p:cTn id="20" presetID="10" presetClass="entr" presetSubtype="0" fill="hold" nodeType="withEffect">
+                                  <p:stCondLst>
+                                    <p:cond delay="0"/>
+                                  </p:stCondLst>
+                                  <p:childTnLst>
+                                    <p:set>
+                                      <p:cBhvr>
+                                        <p:cTn id="21" dur="1" fill="hold">
+                                          <p:stCondLst>
+                                            <p:cond delay="0"/>
+                                          </p:stCondLst>
+                                        </p:cTn>
+                                        <p:tgtEl>
+                                          <p:spTgt spid="33"/>
+                                        </p:tgtEl>
+                                        <p:attrNameLst>
+                                          <p:attrName>style.visibility</p:attrName>
+                                        </p:attrNameLst>
+                                      </p:cBhvr>
+                                      <p:to>
+                                        <p:strVal val="visible"/>
+                                      </p:to>
+                                    </p:set>
+                                    <p:animEffect transition="in" filter="fade">
+                                      <p:cBhvr>
+                                        <p:cTn id="22" dur="500"/>
+                                        <p:tgtEl>
+                                          <p:spTgt spid="33"/>
+                                        </p:tgtEl>
+                                      </p:cBhvr>
+                                    </p:animEffect>
+                                  </p:childTnLst>
+                                </p:cTn>
+                              </p:par>
+                              <p:par>
+                                <p:cTn id="23" presetID="10" presetClass="entr" presetSubtype="0" fill="hold" grpId="0" nodeType="withEffect">
+                                  <p:stCondLst>
+                                    <p:cond delay="0"/>
+                                  </p:stCondLst>
+                                  <p:childTnLst>
+                                    <p:set>
+                                      <p:cBhvr>
+                                        <p:cTn id="24" dur="1" fill="hold">
+                                          <p:stCondLst>
+                                            <p:cond delay="0"/>
+                                          </p:stCondLst>
+                                        </p:cTn>
+                                        <p:tgtEl>
+                                          <p:spTgt spid="34"/>
+                                        </p:tgtEl>
+                                        <p:attrNameLst>
+                                          <p:attrName>style.visibility</p:attrName>
+                                        </p:attrNameLst>
+                                      </p:cBhvr>
+                                      <p:to>
+                                        <p:strVal val="visible"/>
+                                      </p:to>
+                                    </p:set>
+                                    <p:animEffect transition="in" filter="fade">
+                                      <p:cBhvr>
+                                        <p:cTn id="25" dur="500"/>
+                                        <p:tgtEl>
+                                          <p:spTgt spid="34"/>
+                                        </p:tgtEl>
+                                      </p:cBhvr>
+                                    </p:animEffect>
+                                  </p:childTnLst>
+                                </p:cTn>
+                              </p:par>
+                              <p:par>
+                                <p:cTn id="26" presetID="10" presetClass="entr" presetSubtype="0" fill="hold" grpId="0" nodeType="withEffect">
+                                  <p:stCondLst>
+                                    <p:cond delay="0"/>
+                                  </p:stCondLst>
+                                  <p:childTnLst>
+                                    <p:set>
+                                      <p:cBhvr>
+                                        <p:cTn id="27" dur="1" fill="hold">
+                                          <p:stCondLst>
+                                            <p:cond delay="0"/>
+                                          </p:stCondLst>
+                                        </p:cTn>
+                                        <p:tgtEl>
+                                          <p:spTgt spid="35"/>
+                                        </p:tgtEl>
+                                        <p:attrNameLst>
+                                          <p:attrName>style.visibility</p:attrName>
+                                        </p:attrNameLst>
+                                      </p:cBhvr>
+                                      <p:to>
+                                        <p:strVal val="visible"/>
+                                      </p:to>
+                                    </p:set>
+                                    <p:animEffect transition="in" filter="fade">
+                                      <p:cBhvr>
+                                        <p:cTn id="28" dur="500"/>
+                                        <p:tgtEl>
+                                          <p:spTgt spid="35"/>
+                                        </p:tgtEl>
+                                      </p:cBhvr>
+                                    </p:animEffect>
+                                  </p:childTnLst>
+                                </p:cTn>
+                              </p:par>
+                              <p:par>
+                                <p:cTn id="29" presetID="10" presetClass="entr" presetSubtype="0" fill="hold" grpId="0" nodeType="withEffect">
+                                  <p:stCondLst>
+                                    <p:cond delay="0"/>
+                                  </p:stCondLst>
+                                  <p:childTnLst>
+                                    <p:set>
+                                      <p:cBhvr>
+                                        <p:cTn id="30" dur="1" fill="hold">
+                                          <p:stCondLst>
+                                            <p:cond delay="0"/>
+                                          </p:stCondLst>
+                                        </p:cTn>
+                                        <p:tgtEl>
+                                          <p:spTgt spid="36"/>
+                                        </p:tgtEl>
+                                        <p:attrNameLst>
+                                          <p:attrName>style.visibility</p:attrName>
+                                        </p:attrNameLst>
+                                      </p:cBhvr>
+                                      <p:to>
+                                        <p:strVal val="visible"/>
+                                      </p:to>
+                                    </p:set>
+                                    <p:animEffect transition="in" filter="fade">
+                                      <p:cBhvr>
+                                        <p:cTn id="31" dur="500"/>
+                                        <p:tgtEl>
+                                          <p:spTgt spid="36"/>
+                                        </p:tgtEl>
+                                      </p:cBhvr>
+                                    </p:animEffect>
+                                  </p:childTnLst>
+                                </p:cTn>
+                              </p:par>
+                              <p:par>
+                                <p:cTn id="32" presetID="10" presetClass="entr" presetSubtype="0" fill="hold" nodeType="withEffect">
+                                  <p:stCondLst>
+                                    <p:cond delay="0"/>
+                                  </p:stCondLst>
+                                  <p:childTnLst>
+                                    <p:set>
+                                      <p:cBhvr>
+                                        <p:cTn id="33" dur="1" fill="hold">
+                                          <p:stCondLst>
+                                            <p:cond delay="0"/>
+                                          </p:stCondLst>
+                                        </p:cTn>
+                                        <p:tgtEl>
+                                          <p:spTgt spid="8"/>
+                                        </p:tgtEl>
+                                        <p:attrNameLst>
+                                          <p:attrName>style.visibility</p:attrName>
+                                        </p:attrNameLst>
+                                      </p:cBhvr>
+                                      <p:to>
+                                        <p:strVal val="visible"/>
+                                      </p:to>
+                                    </p:set>
+                                    <p:animEffect transition="in" filter="fade">
+                                      <p:cBhvr>
+                                        <p:cTn id="34" dur="500"/>
+                                        <p:tgtEl>
+                                          <p:spTgt spid="8"/>
+                                        </p:tgtEl>
+                                      </p:cBhvr>
+                                    </p:animEffect>
+                                  </p:childTnLst>
+                                </p:cTn>
+                              </p:par>
+                              <p:par>
+                                <p:cTn id="35" presetID="10" presetClass="entr" presetSubtype="0" fill="hold" nodeType="withEffect">
+                                  <p:stCondLst>
+                                    <p:cond delay="0"/>
+                                  </p:stCondLst>
+                                  <p:childTnLst>
+                                    <p:set>
+                                      <p:cBhvr>
+                                        <p:cTn id="36" dur="1" fill="hold">
+                                          <p:stCondLst>
+                                            <p:cond delay="0"/>
+                                          </p:stCondLst>
+                                        </p:cTn>
+                                        <p:tgtEl>
+                                          <p:spTgt spid="9"/>
+                                        </p:tgtEl>
+                                        <p:attrNameLst>
+                                          <p:attrName>style.visibility</p:attrName>
+                                        </p:attrNameLst>
+                                      </p:cBhvr>
+                                      <p:to>
+                                        <p:strVal val="visible"/>
+                                      </p:to>
+                                    </p:set>
+                                    <p:animEffect transition="in" filter="fade">
+                                      <p:cBhvr>
+                                        <p:cTn id="37" dur="500"/>
+                                        <p:tgtEl>
+                                          <p:spTgt spid="9"/>
+                                        </p:tgtEl>
+                                      </p:cBhvr>
+                                    </p:animEffect>
+                                  </p:childTnLst>
+                                </p:cTn>
+                              </p:par>
+                            </p:childTnLst>
+                          </p:cTn>
+                        </p:par>
+                        <p:par>
+                          <p:cTn id="38" fill="hold">
+                            <p:stCondLst>
+                              <p:cond delay="500"/>
+                            </p:stCondLst>
+                            <p:childTnLst>
+                              <p:par>
+                                <p:cTn id="39" presetID="10" presetClass="entr" presetSubtype="0" fill="hold" nodeType="afterEffect">
+                                  <p:stCondLst>
+                                    <p:cond delay="150"/>
+                                  </p:stCondLst>
+                                  <p:childTnLst>
+                                    <p:set>
+                                      <p:cBhvr>
+                                        <p:cTn id="40" dur="1" fill="hold">
+                                          <p:stCondLst>
+                                            <p:cond delay="0"/>
+                                          </p:stCondLst>
+                                        </p:cTn>
+                                        <p:tgtEl>
+                                          <p:spTgt spid="10"/>
+                                        </p:tgtEl>
+                                        <p:attrNameLst>
+                                          <p:attrName>style.visibility</p:attrName>
+                                        </p:attrNameLst>
+                                      </p:cBhvr>
+                                      <p:to>
+                                        <p:strVal val="visible"/>
+                                      </p:to>
+                                    </p:set>
+                                    <p:animEffect transition="in" filter="fade">
+                                      <p:cBhvr>
+                                        <p:cTn id="41" dur="500"/>
+                                        <p:tgtEl>
+                                          <p:spTgt spid="10"/>
+                                        </p:tgtEl>
+                                      </p:cBhvr>
+                                    </p:animEffect>
+                                  </p:childTnLst>
+                                </p:cTn>
+                              </p:par>
+                              <p:par>
+                                <p:cTn id="42" presetID="10" presetClass="entr" presetSubtype="0" fill="hold" nodeType="withEffect">
+                                  <p:stCondLst>
+                                    <p:cond delay="0"/>
+                                  </p:stCondLst>
+                                  <p:childTnLst>
+                                    <p:set>
+                                      <p:cBhvr>
+                                        <p:cTn id="43" dur="1" fill="hold">
+                                          <p:stCondLst>
+                                            <p:cond delay="0"/>
+                                          </p:stCondLst>
+                                        </p:cTn>
+                                        <p:tgtEl>
+                                          <p:spTgt spid="11"/>
+                                        </p:tgtEl>
+                                        <p:attrNameLst>
+                                          <p:attrName>style.visibility</p:attrName>
+                                        </p:attrNameLst>
+                                      </p:cBhvr>
+                                      <p:to>
+                                        <p:strVal val="visible"/>
+                                      </p:to>
+                                    </p:set>
+                                    <p:animEffect transition="in" filter="fade">
+                                      <p:cBhvr>
+                                        <p:cTn id="44" dur="500"/>
+                                        <p:tgtEl>
+                                          <p:spTgt spid="11"/>
+                                        </p:tgtEl>
+                                      </p:cBhvr>
+                                    </p:animEffect>
+                                  </p:childTnLst>
+                                </p:cTn>
+                              </p:par>
+                              <p:par>
+                                <p:cTn id="45" presetID="10" presetClass="entr" presetSubtype="0" fill="hold" nodeType="withEffect">
+                                  <p:stCondLst>
+                                    <p:cond delay="0"/>
+                                  </p:stCondLst>
+                                  <p:childTnLst>
+                                    <p:set>
+                                      <p:cBhvr>
+                                        <p:cTn id="46" dur="1" fill="hold">
+                                          <p:stCondLst>
+                                            <p:cond delay="0"/>
+                                          </p:stCondLst>
+                                        </p:cTn>
+                                        <p:tgtEl>
+                                          <p:spTgt spid="12"/>
+                                        </p:tgtEl>
+                                        <p:attrNameLst>
+                                          <p:attrName>style.visibility</p:attrName>
+                                        </p:attrNameLst>
+                                      </p:cBhvr>
+                                      <p:to>
+                                        <p:strVal val="visible"/>
+                                      </p:to>
+                                    </p:set>
+                                    <p:animEffect transition="in" filter="fade">
+                                      <p:cBhvr>
+                                        <p:cTn id="47" dur="500"/>
+                                        <p:tgtEl>
+                                          <p:spTgt spid="12"/>
+                                        </p:tgtEl>
+                                      </p:cBhvr>
+                                    </p:animEffect>
+                                  </p:childTnLst>
+                                </p:cTn>
+                              </p:par>
+                              <p:par>
+                                <p:cTn id="48" presetID="10" presetClass="entr" presetSubtype="0" fill="hold" grpId="0" nodeType="withEffect">
+                                  <p:stCondLst>
+                                    <p:cond delay="0"/>
+                                  </p:stCondLst>
+                                  <p:childTnLst>
+                                    <p:set>
+                                      <p:cBhvr>
+                                        <p:cTn id="49" dur="1" fill="hold">
+                                          <p:stCondLst>
+                                            <p:cond delay="0"/>
+                                          </p:stCondLst>
+                                        </p:cTn>
+                                        <p:tgtEl>
+                                          <p:spTgt spid="13"/>
+                                        </p:tgtEl>
+                                        <p:attrNameLst>
+                                          <p:attrName>style.visibility</p:attrName>
+                                        </p:attrNameLst>
+                                      </p:cBhvr>
+                                      <p:to>
+                                        <p:strVal val="visible"/>
+                                      </p:to>
+                                    </p:set>
+                                    <p:animEffect transition="in" filter="fade">
+                                      <p:cBhvr>
+                                        <p:cTn id="50" dur="500"/>
+                                        <p:tgtEl>
+                                          <p:spTgt spid="13"/>
+                                        </p:tgtEl>
+                                      </p:cBhvr>
+                                    </p:animEffect>
+                                  </p:childTnLst>
+                                </p:cTn>
+                              </p:par>
+                              <p:par>
+                                <p:cTn id="51" presetID="10" presetClass="entr" presetSubtype="0" fill="hold" nodeType="withEffect">
+                                  <p:stCondLst>
+                                    <p:cond delay="0"/>
+                                  </p:stCondLst>
+                                  <p:childTnLst>
+                                    <p:set>
+                                      <p:cBhvr>
+                                        <p:cTn id="52" dur="1" fill="hold">
+                                          <p:stCondLst>
+                                            <p:cond delay="0"/>
+                                          </p:stCondLst>
+                                        </p:cTn>
+                                        <p:tgtEl>
+                                          <p:spTgt spid="37"/>
+                                        </p:tgtEl>
+                                        <p:attrNameLst>
+                                          <p:attrName>style.visibility</p:attrName>
+                                        </p:attrNameLst>
+                                      </p:cBhvr>
+                                      <p:to>
+                                        <p:strVal val="visible"/>
+                                      </p:to>
+                                    </p:set>
+                                    <p:animEffect transition="in" filter="fade">
+                                      <p:cBhvr>
+                                        <p:cTn id="53" dur="500"/>
+                                        <p:tgtEl>
+                                          <p:spTgt spid="37"/>
+                                        </p:tgtEl>
+                                      </p:cBhvr>
+                                    </p:animEffect>
+                                  </p:childTnLst>
+                                </p:cTn>
+                              </p:par>
+                              <p:par>
+                                <p:cTn id="54" presetID="10" presetClass="entr" presetSubtype="0" fill="hold" nodeType="withEffect">
+                                  <p:stCondLst>
+                                    <p:cond delay="0"/>
+                                  </p:stCondLst>
+                                  <p:childTnLst>
+                                    <p:set>
+                                      <p:cBhvr>
+                                        <p:cTn id="55" dur="1" fill="hold">
+                                          <p:stCondLst>
+                                            <p:cond delay="0"/>
+                                          </p:stCondLst>
+                                        </p:cTn>
+                                        <p:tgtEl>
+                                          <p:spTgt spid="38"/>
+                                        </p:tgtEl>
+                                        <p:attrNameLst>
+                                          <p:attrName>style.visibility</p:attrName>
+                                        </p:attrNameLst>
+                                      </p:cBhvr>
+                                      <p:to>
+                                        <p:strVal val="visible"/>
+                                      </p:to>
+                                    </p:set>
+                                    <p:animEffect transition="in" filter="fade">
+                                      <p:cBhvr>
+                                        <p:cTn id="56" dur="500"/>
+                                        <p:tgtEl>
+                                          <p:spTgt spid="38"/>
+                                        </p:tgtEl>
+                                      </p:cBhvr>
+                                    </p:animEffect>
+                                  </p:childTnLst>
+                                </p:cTn>
+                              </p:par>
+                              <p:par>
+                                <p:cTn id="57" presetID="10" presetClass="entr" presetSubtype="0" fill="hold" grpId="0" nodeType="withEffect">
+                                  <p:stCondLst>
+                                    <p:cond delay="0"/>
+                                  </p:stCondLst>
+                                  <p:childTnLst>
+                                    <p:set>
+                                      <p:cBhvr>
+                                        <p:cTn id="58" dur="1" fill="hold">
+                                          <p:stCondLst>
+                                            <p:cond delay="0"/>
+                                          </p:stCondLst>
+                                        </p:cTn>
+                                        <p:tgtEl>
+                                          <p:spTgt spid="39"/>
+                                        </p:tgtEl>
+                                        <p:attrNameLst>
+                                          <p:attrName>style.visibility</p:attrName>
+                                        </p:attrNameLst>
+                                      </p:cBhvr>
+                                      <p:to>
+                                        <p:strVal val="visible"/>
+                                      </p:to>
+                                    </p:set>
+                                    <p:animEffect transition="in" filter="fade">
+                                      <p:cBhvr>
+                                        <p:cTn id="59" dur="500"/>
+                                        <p:tgtEl>
+                                          <p:spTgt spid="39"/>
+                                        </p:tgtEl>
+                                      </p:cBhvr>
+                                    </p:animEffect>
+                                  </p:childTnLst>
+                                </p:cTn>
+                              </p:par>
+                              <p:par>
+                                <p:cTn id="60" presetID="10" presetClass="entr" presetSubtype="0" fill="hold" grpId="0" nodeType="withEffect">
+                                  <p:stCondLst>
+                                    <p:cond delay="0"/>
+                                  </p:stCondLst>
+                                  <p:childTnLst>
+                                    <p:set>
+                                      <p:cBhvr>
+                                        <p:cTn id="61" dur="1" fill="hold">
+                                          <p:stCondLst>
+                                            <p:cond delay="0"/>
+                                          </p:stCondLst>
+                                        </p:cTn>
+                                        <p:tgtEl>
+                                          <p:spTgt spid="40"/>
+                                        </p:tgtEl>
+                                        <p:attrNameLst>
+                                          <p:attrName>style.visibility</p:attrName>
+                                        </p:attrNameLst>
+                                      </p:cBhvr>
+                                      <p:to>
+                                        <p:strVal val="visible"/>
+                                      </p:to>
+                                    </p:set>
+                                    <p:animEffect transition="in" filter="fade">
+                                      <p:cBhvr>
+                                        <p:cTn id="62" dur="500"/>
+                                        <p:tgtEl>
+                                          <p:spTgt spid="40"/>
+                                        </p:tgtEl>
+                                      </p:cBhvr>
+                                    </p:animEffect>
+                                  </p:childTnLst>
+                                </p:cTn>
+                              </p:par>
+                              <p:par>
+                                <p:cTn id="63" presetID="10" presetClass="entr" presetSubtype="0" fill="hold" grpId="0" nodeType="withEffect">
+                                  <p:stCondLst>
+                                    <p:cond delay="0"/>
+                                  </p:stCondLst>
+                                  <p:childTnLst>
+                                    <p:set>
+                                      <p:cBhvr>
+                                        <p:cTn id="64" dur="1" fill="hold">
+                                          <p:stCondLst>
+                                            <p:cond delay="0"/>
+                                          </p:stCondLst>
+                                        </p:cTn>
+                                        <p:tgtEl>
+                                          <p:spTgt spid="41"/>
+                                        </p:tgtEl>
+                                        <p:attrNameLst>
+                                          <p:attrName>style.visibility</p:attrName>
+                                        </p:attrNameLst>
+                                      </p:cBhvr>
+                                      <p:to>
+                                        <p:strVal val="visible"/>
+                                      </p:to>
+                                    </p:set>
+                                    <p:animEffect transition="in" filter="fade">
+                                      <p:cBhvr>
+                                        <p:cTn id="65" dur="500"/>
+                                        <p:tgtEl>
+                                          <p:spTgt spid="41"/>
+                                        </p:tgtEl>
+                                      </p:cBhvr>
+                                    </p:animEffect>
+                                  </p:childTnLst>
+                                </p:cTn>
+                              </p:par>
+                              <p:par>
+                                <p:cTn id="66" presetID="10" presetClass="entr" presetSubtype="0" fill="hold" nodeType="withEffect">
+                                  <p:stCondLst>
+                                    <p:cond delay="0"/>
+                                  </p:stCondLst>
+                                  <p:childTnLst>
+                                    <p:set>
+                                      <p:cBhvr>
+                                        <p:cTn id="67" dur="1" fill="hold">
+                                          <p:stCondLst>
+                                            <p:cond delay="0"/>
+                                          </p:stCondLst>
+                                        </p:cTn>
+                                        <p:tgtEl>
+                                          <p:spTgt spid="14"/>
+                                        </p:tgtEl>
+                                        <p:attrNameLst>
+                                          <p:attrName>style.visibility</p:attrName>
+                                        </p:attrNameLst>
+                                      </p:cBhvr>
+                                      <p:to>
+                                        <p:strVal val="visible"/>
+                                      </p:to>
+                                    </p:set>
+                                    <p:animEffect transition="in" filter="fade">
+                                      <p:cBhvr>
+                                        <p:cTn id="68" dur="500"/>
+                                        <p:tgtEl>
+                                          <p:spTgt spid="14"/>
+                                        </p:tgtEl>
+                                      </p:cBhvr>
+                                    </p:animEffect>
+                                  </p:childTnLst>
+                                </p:cTn>
+                              </p:par>
+                              <p:par>
+                                <p:cTn id="69" presetID="10" presetClass="entr" presetSubtype="0" fill="hold" nodeType="withEffect">
+                                  <p:stCondLst>
+                                    <p:cond delay="0"/>
+                                  </p:stCondLst>
+                                  <p:childTnLst>
+                                    <p:set>
+                                      <p:cBhvr>
+                                        <p:cTn id="70" dur="1" fill="hold">
+                                          <p:stCondLst>
+                                            <p:cond delay="0"/>
+                                          </p:stCondLst>
+                                        </p:cTn>
+                                        <p:tgtEl>
+                                          <p:spTgt spid="15"/>
+                                        </p:tgtEl>
+                                        <p:attrNameLst>
+                                          <p:attrName>style.visibility</p:attrName>
+                                        </p:attrNameLst>
+                                      </p:cBhvr>
+                                      <p:to>
+                                        <p:strVal val="visible"/>
+                                      </p:to>
+                                    </p:set>
+                                    <p:animEffect transition="in" filter="fade">
+                                      <p:cBhvr>
+                                        <p:cTn id="71" dur="500"/>
+                                        <p:tgtEl>
+                                          <p:spTgt spid="15"/>
+                                        </p:tgtEl>
+                                      </p:cBhvr>
+                                    </p:animEffect>
+                                  </p:childTnLst>
+                                </p:cTn>
+                              </p:par>
+                            </p:childTnLst>
+                          </p:cTn>
+                        </p:par>
+                        <p:par>
+                          <p:cTn id="72" fill="hold">
+                            <p:stCondLst>
+                              <p:cond delay="1150"/>
+                            </p:stCondLst>
+                            <p:childTnLst>
+                              <p:par>
+                                <p:cTn id="73" presetID="10" presetClass="entr" presetSubtype="0" fill="hold" nodeType="afterEffect">
+                                  <p:stCondLst>
+                                    <p:cond delay="150"/>
+                                  </p:stCondLst>
+                                  <p:childTnLst>
+                                    <p:set>
+                                      <p:cBhvr>
+                                        <p:cTn id="74" dur="1" fill="hold">
+                                          <p:stCondLst>
+                                            <p:cond delay="0"/>
+                                          </p:stCondLst>
+                                        </p:cTn>
+                                        <p:tgtEl>
+                                          <p:spTgt spid="16"/>
+                                        </p:tgtEl>
+                                        <p:attrNameLst>
+                                          <p:attrName>style.visibility</p:attrName>
+                                        </p:attrNameLst>
+                                      </p:cBhvr>
+                                      <p:to>
+                                        <p:strVal val="visible"/>
+                                      </p:to>
+                                    </p:set>
+                                    <p:animEffect transition="in" filter="fade">
+                                      <p:cBhvr>
+                                        <p:cTn id="75" dur="500"/>
+                                        <p:tgtEl>
+                                          <p:spTgt spid="16"/>
+                                        </p:tgtEl>
+                                      </p:cBhvr>
+                                    </p:animEffect>
+                                  </p:childTnLst>
+                                </p:cTn>
+                              </p:par>
+                              <p:par>
+                                <p:cTn id="76" presetID="10" presetClass="entr" presetSubtype="0" fill="hold" nodeType="withEffect">
+                                  <p:stCondLst>
+                                    <p:cond delay="0"/>
+                                  </p:stCondLst>
+                                  <p:childTnLst>
+                                    <p:set>
+                                      <p:cBhvr>
+                                        <p:cTn id="77" dur="1" fill="hold">
+                                          <p:stCondLst>
+                                            <p:cond delay="0"/>
+                                          </p:stCondLst>
+                                        </p:cTn>
+                                        <p:tgtEl>
+                                          <p:spTgt spid="17"/>
+                                        </p:tgtEl>
+                                        <p:attrNameLst>
+                                          <p:attrName>style.visibility</p:attrName>
+                                        </p:attrNameLst>
+                                      </p:cBhvr>
+                                      <p:to>
+                                        <p:strVal val="visible"/>
+                                      </p:to>
+                                    </p:set>
+                                    <p:animEffect transition="in" filter="fade">
+                                      <p:cBhvr>
+                                        <p:cTn id="78" dur="500"/>
+                                        <p:tgtEl>
+                                          <p:spTgt spid="17"/>
+                                        </p:tgtEl>
+                                      </p:cBhvr>
+                                    </p:animEffect>
+                                  </p:childTnLst>
+                                </p:cTn>
+                              </p:par>
+                              <p:par>
+                                <p:cTn id="79" presetID="10" presetClass="entr" presetSubtype="0" fill="hold" nodeType="withEffect">
+                                  <p:stCondLst>
+                                    <p:cond delay="0"/>
+                                  </p:stCondLst>
+                                  <p:childTnLst>
+                                    <p:set>
+                                      <p:cBhvr>
+                                        <p:cTn id="80" dur="1" fill="hold">
+                                          <p:stCondLst>
+                                            <p:cond delay="0"/>
+                                          </p:stCondLst>
+                                        </p:cTn>
+                                        <p:tgtEl>
+                                          <p:spTgt spid="18"/>
+                                        </p:tgtEl>
+                                        <p:attrNameLst>
+                                          <p:attrName>style.visibility</p:attrName>
+                                        </p:attrNameLst>
+                                      </p:cBhvr>
+                                      <p:to>
+                                        <p:strVal val="visible"/>
+                                      </p:to>
+                                    </p:set>
+                                    <p:animEffect transition="in" filter="fade">
+                                      <p:cBhvr>
+                                        <p:cTn id="81" dur="500"/>
+                                        <p:tgtEl>
+                                          <p:spTgt spid="18"/>
+                                        </p:tgtEl>
+                                      </p:cBhvr>
+                                    </p:animEffect>
+                                  </p:childTnLst>
+                                </p:cTn>
+                              </p:par>
+                              <p:par>
+                                <p:cTn id="82" presetID="10" presetClass="entr" presetSubtype="0" fill="hold" grpId="0" nodeType="withEffect">
+                                  <p:stCondLst>
+                                    <p:cond delay="0"/>
+                                  </p:stCondLst>
+                                  <p:childTnLst>
+                                    <p:set>
+                                      <p:cBhvr>
+                                        <p:cTn id="83" dur="1" fill="hold">
+                                          <p:stCondLst>
+                                            <p:cond delay="0"/>
+                                          </p:stCondLst>
+                                        </p:cTn>
+                                        <p:tgtEl>
+                                          <p:spTgt spid="19"/>
+                                        </p:tgtEl>
+                                        <p:attrNameLst>
+                                          <p:attrName>style.visibility</p:attrName>
+                                        </p:attrNameLst>
+                                      </p:cBhvr>
+                                      <p:to>
+                                        <p:strVal val="visible"/>
+                                      </p:to>
+                                    </p:set>
+                                    <p:animEffect transition="in" filter="fade">
+                                      <p:cBhvr>
+                                        <p:cTn id="84" dur="500"/>
+                                        <p:tgtEl>
+                                          <p:spTgt spid="19"/>
+                                        </p:tgtEl>
+                                      </p:cBhvr>
+                                    </p:animEffect>
+                                  </p:childTnLst>
+                                </p:cTn>
+                              </p:par>
+                              <p:par>
+                                <p:cTn id="85" presetID="10" presetClass="entr" presetSubtype="0" fill="hold" nodeType="withEffect">
+                                  <p:stCondLst>
+                                    <p:cond delay="0"/>
+                                  </p:stCondLst>
+                                  <p:childTnLst>
+                                    <p:set>
+                                      <p:cBhvr>
+                                        <p:cTn id="86" dur="1" fill="hold">
+                                          <p:stCondLst>
+                                            <p:cond delay="0"/>
+                                          </p:stCondLst>
+                                        </p:cTn>
+                                        <p:tgtEl>
+                                          <p:spTgt spid="42"/>
+                                        </p:tgtEl>
+                                        <p:attrNameLst>
+                                          <p:attrName>style.visibility</p:attrName>
+                                        </p:attrNameLst>
+                                      </p:cBhvr>
+                                      <p:to>
+                                        <p:strVal val="visible"/>
+                                      </p:to>
+                                    </p:set>
+                                    <p:animEffect transition="in" filter="fade">
+                                      <p:cBhvr>
+                                        <p:cTn id="87" dur="500"/>
+                                        <p:tgtEl>
+                                          <p:spTgt spid="42"/>
+                                        </p:tgtEl>
+                                      </p:cBhvr>
+                                    </p:animEffect>
+                                  </p:childTnLst>
+                                </p:cTn>
+                              </p:par>
+                              <p:par>
+                                <p:cTn id="88" presetID="10" presetClass="entr" presetSubtype="0" fill="hold" nodeType="withEffect">
+                                  <p:stCondLst>
+                                    <p:cond delay="0"/>
+                                  </p:stCondLst>
+                                  <p:childTnLst>
+                                    <p:set>
+                                      <p:cBhvr>
+                                        <p:cTn id="89" dur="1" fill="hold">
+                                          <p:stCondLst>
+                                            <p:cond delay="0"/>
+                                          </p:stCondLst>
+                                        </p:cTn>
+                                        <p:tgtEl>
+                                          <p:spTgt spid="43"/>
+                                        </p:tgtEl>
+                                        <p:attrNameLst>
+                                          <p:attrName>style.visibility</p:attrName>
+                                        </p:attrNameLst>
+                                      </p:cBhvr>
+                                      <p:to>
+                                        <p:strVal val="visible"/>
+                                      </p:to>
+                                    </p:set>
+                                    <p:animEffect transition="in" filter="fade">
+                                      <p:cBhvr>
+                                        <p:cTn id="90" dur="500"/>
+                                        <p:tgtEl>
+                                          <p:spTgt spid="43"/>
+                                        </p:tgtEl>
+                                      </p:cBhvr>
+                                    </p:animEffect>
+                                  </p:childTnLst>
+                                </p:cTn>
+                              </p:par>
+                              <p:par>
+                                <p:cTn id="91" presetID="10" presetClass="entr" presetSubtype="0" fill="hold" grpId="0" nodeType="withEffect">
+                                  <p:stCondLst>
+                                    <p:cond delay="0"/>
+                                  </p:stCondLst>
+                                  <p:childTnLst>
+                                    <p:set>
+                                      <p:cBhvr>
+                                        <p:cTn id="92" dur="1" fill="hold">
+                                          <p:stCondLst>
+                                            <p:cond delay="0"/>
+                                          </p:stCondLst>
+                                        </p:cTn>
+                                        <p:tgtEl>
+                                          <p:spTgt spid="44"/>
+                                        </p:tgtEl>
+                                        <p:attrNameLst>
+                                          <p:attrName>style.visibility</p:attrName>
+                                        </p:attrNameLst>
+                                      </p:cBhvr>
+                                      <p:to>
+                                        <p:strVal val="visible"/>
+                                      </p:to>
+                                    </p:set>
+                                    <p:animEffect transition="in" filter="fade">
+                                      <p:cBhvr>
+                                        <p:cTn id="93" dur="500"/>
+                                        <p:tgtEl>
+                                          <p:spTgt spid="44"/>
+                                        </p:tgtEl>
+                                      </p:cBhvr>
+                                    </p:animEffect>
+                                  </p:childTnLst>
+                                </p:cTn>
+                              </p:par>
+                              <p:par>
+                                <p:cTn id="94" presetID="10" presetClass="entr" presetSubtype="0" fill="hold" grpId="0" nodeType="withEffect">
+                                  <p:stCondLst>
+                                    <p:cond delay="0"/>
+                                  </p:stCondLst>
+                                  <p:childTnLst>
+                                    <p:set>
+                                      <p:cBhvr>
+                                        <p:cTn id="95" dur="1" fill="hold">
+                                          <p:stCondLst>
+                                            <p:cond delay="0"/>
+                                          </p:stCondLst>
+                                        </p:cTn>
+                                        <p:tgtEl>
+                                          <p:spTgt spid="45"/>
+                                        </p:tgtEl>
+                                        <p:attrNameLst>
+                                          <p:attrName>style.visibility</p:attrName>
+                                        </p:attrNameLst>
+                                      </p:cBhvr>
+                                      <p:to>
+                                        <p:strVal val="visible"/>
+                                      </p:to>
+                                    </p:set>
+                                    <p:animEffect transition="in" filter="fade">
+                                      <p:cBhvr>
+                                        <p:cTn id="96" dur="500"/>
+                                        <p:tgtEl>
+                                          <p:spTgt spid="45"/>
+                                        </p:tgtEl>
+                                      </p:cBhvr>
+                                    </p:animEffect>
+                                  </p:childTnLst>
+                                </p:cTn>
+                              </p:par>
+                              <p:par>
+                                <p:cTn id="97" presetID="10" presetClass="entr" presetSubtype="0" fill="hold" grpId="0" nodeType="withEffect">
+                                  <p:stCondLst>
+                                    <p:cond delay="0"/>
+                                  </p:stCondLst>
+                                  <p:childTnLst>
+                                    <p:set>
+                                      <p:cBhvr>
+                                        <p:cTn id="98" dur="1" fill="hold">
+                                          <p:stCondLst>
+                                            <p:cond delay="0"/>
+                                          </p:stCondLst>
+                                        </p:cTn>
+                                        <p:tgtEl>
+                                          <p:spTgt spid="46"/>
+                                        </p:tgtEl>
+                                        <p:attrNameLst>
+                                          <p:attrName>style.visibility</p:attrName>
+                                        </p:attrNameLst>
+                                      </p:cBhvr>
+                                      <p:to>
+                                        <p:strVal val="visible"/>
+                                      </p:to>
+                                    </p:set>
+                                    <p:animEffect transition="in" filter="fade">
+                                      <p:cBhvr>
+                                        <p:cTn id="99" dur="500"/>
+                                        <p:tgtEl>
+                                          <p:spTgt spid="46"/>
+                                        </p:tgtEl>
+                                      </p:cBhvr>
+                                    </p:animEffect>
+                                  </p:childTnLst>
+                                </p:cTn>
+                              </p:par>
+                              <p:par>
+                                <p:cTn id="100" presetID="10" presetClass="entr" presetSubtype="0" fill="hold" nodeType="withEffect">
+                                  <p:stCondLst>
+                                    <p:cond delay="0"/>
+                                  </p:stCondLst>
+                                  <p:childTnLst>
+                                    <p:set>
+                                      <p:cBhvr>
+                                        <p:cTn id="101" dur="1" fill="hold">
+                                          <p:stCondLst>
+                                            <p:cond delay="0"/>
+                                          </p:stCondLst>
+                                        </p:cTn>
+                                        <p:tgtEl>
+                                          <p:spTgt spid="20"/>
+                                        </p:tgtEl>
+                                        <p:attrNameLst>
+                                          <p:attrName>style.visibility</p:attrName>
+                                        </p:attrNameLst>
+                                      </p:cBhvr>
+                                      <p:to>
+                                        <p:strVal val="visible"/>
+                                      </p:to>
+                                    </p:set>
+                                    <p:animEffect transition="in" filter="fade">
+                                      <p:cBhvr>
+                                        <p:cTn id="102" dur="500"/>
+                                        <p:tgtEl>
+                                          <p:spTgt spid="20"/>
+                                        </p:tgtEl>
+                                      </p:cBhvr>
+                                    </p:animEffect>
+                                  </p:childTnLst>
+                                </p:cTn>
+                              </p:par>
+                              <p:par>
+                                <p:cTn id="103" presetID="10" presetClass="entr" presetSubtype="0" fill="hold" nodeType="withEffect">
+                                  <p:stCondLst>
+                                    <p:cond delay="0"/>
+                                  </p:stCondLst>
+                                  <p:childTnLst>
+                                    <p:set>
+                                      <p:cBhvr>
+                                        <p:cTn id="104" dur="1" fill="hold">
+                                          <p:stCondLst>
+                                            <p:cond delay="0"/>
+                                          </p:stCondLst>
+                                        </p:cTn>
+                                        <p:tgtEl>
+                                          <p:spTgt spid="21"/>
+                                        </p:tgtEl>
+                                        <p:attrNameLst>
+                                          <p:attrName>style.visibility</p:attrName>
+                                        </p:attrNameLst>
+                                      </p:cBhvr>
+                                      <p:to>
+                                        <p:strVal val="visible"/>
+                                      </p:to>
+                                    </p:set>
+                                    <p:animEffect transition="in" filter="fade">
+                                      <p:cBhvr>
+                                        <p:cTn id="105" dur="500"/>
+                                        <p:tgtEl>
+                                          <p:spTgt spid="21"/>
+                                        </p:tgtEl>
+                                      </p:cBhvr>
+                                    </p:animEffect>
+                                  </p:childTnLst>
+                                </p:cTn>
+                              </p:par>
+                            </p:childTnLst>
+                          </p:cTn>
+                        </p:par>
+                        <p:par>
+                          <p:cTn id="106" fill="hold">
+                            <p:stCondLst>
+                              <p:cond delay="1800"/>
+                            </p:stCondLst>
+                            <p:childTnLst>
+                              <p:par>
+                                <p:cTn id="107" presetID="10" presetClass="entr" presetSubtype="0" fill="hold" nodeType="afterEffect">
+                                  <p:stCondLst>
+                                    <p:cond delay="150"/>
+                                  </p:stCondLst>
+                                  <p:childTnLst>
+                                    <p:set>
+                                      <p:cBhvr>
+                                        <p:cTn id="108" dur="1" fill="hold">
+                                          <p:stCondLst>
+                                            <p:cond delay="0"/>
+                                          </p:stCondLst>
+                                        </p:cTn>
+                                        <p:tgtEl>
+                                          <p:spTgt spid="22"/>
+                                        </p:tgtEl>
+                                        <p:attrNameLst>
+                                          <p:attrName>style.visibility</p:attrName>
+                                        </p:attrNameLst>
+                                      </p:cBhvr>
+                                      <p:to>
+                                        <p:strVal val="visible"/>
+                                      </p:to>
+                                    </p:set>
+                                    <p:animEffect transition="in" filter="fade">
+                                      <p:cBhvr>
+                                        <p:cTn id="109" dur="500"/>
+                                        <p:tgtEl>
+                                          <p:spTgt spid="22"/>
+                                        </p:tgtEl>
+                                      </p:cBhvr>
+                                    </p:animEffect>
+                                  </p:childTnLst>
+                                </p:cTn>
+                              </p:par>
+                              <p:par>
+                                <p:cTn id="110" presetID="10" presetClass="entr" presetSubtype="0" fill="hold" nodeType="withEffect">
+                                  <p:stCondLst>
+                                    <p:cond delay="0"/>
+                                  </p:stCondLst>
+                                  <p:childTnLst>
+                                    <p:set>
+                                      <p:cBhvr>
+                                        <p:cTn id="111" dur="1" fill="hold">
+                                          <p:stCondLst>
+                                            <p:cond delay="0"/>
+                                          </p:stCondLst>
+                                        </p:cTn>
+                                        <p:tgtEl>
+                                          <p:spTgt spid="23"/>
+                                        </p:tgtEl>
+                                        <p:attrNameLst>
+                                          <p:attrName>style.visibility</p:attrName>
+                                        </p:attrNameLst>
+                                      </p:cBhvr>
+                                      <p:to>
+                                        <p:strVal val="visible"/>
+                                      </p:to>
+                                    </p:set>
+                                    <p:animEffect transition="in" filter="fade">
+                                      <p:cBhvr>
+                                        <p:cTn id="112" dur="500"/>
+                                        <p:tgtEl>
+                                          <p:spTgt spid="23"/>
+                                        </p:tgtEl>
+                                      </p:cBhvr>
+                                    </p:animEffect>
+                                  </p:childTnLst>
+                                </p:cTn>
+                              </p:par>
+                              <p:par>
+                                <p:cTn id="113" presetID="10" presetClass="entr" presetSubtype="0" fill="hold" nodeType="withEffect">
+                                  <p:stCondLst>
+                                    <p:cond delay="0"/>
+                                  </p:stCondLst>
+                                  <p:childTnLst>
+                                    <p:set>
+                                      <p:cBhvr>
+                                        <p:cTn id="114" dur="1" fill="hold">
+                                          <p:stCondLst>
+                                            <p:cond delay="0"/>
+                                          </p:stCondLst>
+                                        </p:cTn>
+                                        <p:tgtEl>
+                                          <p:spTgt spid="24"/>
+                                        </p:tgtEl>
+                                        <p:attrNameLst>
+                                          <p:attrName>style.visibility</p:attrName>
+                                        </p:attrNameLst>
+                                      </p:cBhvr>
+                                      <p:to>
+                                        <p:strVal val="visible"/>
+                                      </p:to>
+                                    </p:set>
+                                    <p:animEffect transition="in" filter="fade">
+                                      <p:cBhvr>
+                                        <p:cTn id="115" dur="500"/>
+                                        <p:tgtEl>
+                                          <p:spTgt spid="24"/>
+                                        </p:tgtEl>
+                                      </p:cBhvr>
+                                    </p:animEffect>
+                                  </p:childTnLst>
+                                </p:cTn>
+                              </p:par>
+                              <p:par>
+                                <p:cTn id="116" presetID="10" presetClass="entr" presetSubtype="0" fill="hold" grpId="0" nodeType="withEffect">
+                                  <p:stCondLst>
+                                    <p:cond delay="0"/>
+                                  </p:stCondLst>
+                                  <p:childTnLst>
+                                    <p:set>
+                                      <p:cBhvr>
+                                        <p:cTn id="117" dur="1" fill="hold">
+                                          <p:stCondLst>
+                                            <p:cond delay="0"/>
+                                          </p:stCondLst>
+                                        </p:cTn>
+                                        <p:tgtEl>
+                                          <p:spTgt spid="25"/>
+                                        </p:tgtEl>
+                                        <p:attrNameLst>
+                                          <p:attrName>style.visibility</p:attrName>
+                                        </p:attrNameLst>
+                                      </p:cBhvr>
+                                      <p:to>
+                                        <p:strVal val="visible"/>
+                                      </p:to>
+                                    </p:set>
+                                    <p:animEffect transition="in" filter="fade">
+                                      <p:cBhvr>
+                                        <p:cTn id="118" dur="500"/>
+                                        <p:tgtEl>
+                                          <p:spTgt spid="25"/>
+                                        </p:tgtEl>
+                                      </p:cBhvr>
+                                    </p:animEffect>
+                                  </p:childTnLst>
+                                </p:cTn>
+                              </p:par>
+                              <p:par>
+                                <p:cTn id="119" presetID="10" presetClass="entr" presetSubtype="0" fill="hold" nodeType="withEffect">
+                                  <p:stCondLst>
+                                    <p:cond delay="0"/>
+                                  </p:stCondLst>
+                                  <p:childTnLst>
+                                    <p:set>
+                                      <p:cBhvr>
+                                        <p:cTn id="120" dur="1" fill="hold">
+                                          <p:stCondLst>
+                                            <p:cond delay="0"/>
+                                          </p:stCondLst>
+                                        </p:cTn>
+                                        <p:tgtEl>
+                                          <p:spTgt spid="47"/>
+                                        </p:tgtEl>
+                                        <p:attrNameLst>
+                                          <p:attrName>style.visibility</p:attrName>
+                                        </p:attrNameLst>
+                                      </p:cBhvr>
+                                      <p:to>
+                                        <p:strVal val="visible"/>
+                                      </p:to>
+                                    </p:set>
+                                    <p:animEffect transition="in" filter="fade">
+                                      <p:cBhvr>
+                                        <p:cTn id="121" dur="500"/>
+                                        <p:tgtEl>
+                                          <p:spTgt spid="47"/>
+                                        </p:tgtEl>
+                                      </p:cBhvr>
+                                    </p:animEffect>
+                                  </p:childTnLst>
+                                </p:cTn>
+                              </p:par>
+                              <p:par>
+                                <p:cTn id="122" presetID="10" presetClass="entr" presetSubtype="0" fill="hold" nodeType="withEffect">
+                                  <p:stCondLst>
+                                    <p:cond delay="0"/>
+                                  </p:stCondLst>
+                                  <p:childTnLst>
+                                    <p:set>
+                                      <p:cBhvr>
+                                        <p:cTn id="123" dur="1" fill="hold">
+                                          <p:stCondLst>
+                                            <p:cond delay="0"/>
+                                          </p:stCondLst>
+                                        </p:cTn>
+                                        <p:tgtEl>
+                                          <p:spTgt spid="48"/>
+                                        </p:tgtEl>
+                                        <p:attrNameLst>
+                                          <p:attrName>style.visibility</p:attrName>
+                                        </p:attrNameLst>
+                                      </p:cBhvr>
+                                      <p:to>
+                                        <p:strVal val="visible"/>
+                                      </p:to>
+                                    </p:set>
+                                    <p:animEffect transition="in" filter="fade">
+                                      <p:cBhvr>
+                                        <p:cTn id="124" dur="500"/>
+                                        <p:tgtEl>
+                                          <p:spTgt spid="48"/>
+                                        </p:tgtEl>
+                                      </p:cBhvr>
+                                    </p:animEffect>
+                                  </p:childTnLst>
+                                </p:cTn>
+                              </p:par>
+                              <p:par>
+                                <p:cTn id="125" presetID="10" presetClass="entr" presetSubtype="0" fill="hold" grpId="0" nodeType="withEffect">
+                                  <p:stCondLst>
+                                    <p:cond delay="0"/>
+                                  </p:stCondLst>
+                                  <p:childTnLst>
+                                    <p:set>
+                                      <p:cBhvr>
+                                        <p:cTn id="126" dur="1" fill="hold">
+                                          <p:stCondLst>
+                                            <p:cond delay="0"/>
+                                          </p:stCondLst>
+                                        </p:cTn>
+                                        <p:tgtEl>
+                                          <p:spTgt spid="49"/>
+                                        </p:tgtEl>
+                                        <p:attrNameLst>
+                                          <p:attrName>style.visibility</p:attrName>
+                                        </p:attrNameLst>
+                                      </p:cBhvr>
+                                      <p:to>
+                                        <p:strVal val="visible"/>
+                                      </p:to>
+                                    </p:set>
+                                    <p:animEffect transition="in" filter="fade">
+                                      <p:cBhvr>
+                                        <p:cTn id="127" dur="500"/>
+                                        <p:tgtEl>
+                                          <p:spTgt spid="49"/>
+                                        </p:tgtEl>
+                                      </p:cBhvr>
+                                    </p:animEffect>
+                                  </p:childTnLst>
+                                </p:cTn>
+                              </p:par>
+                              <p:par>
+                                <p:cTn id="128" presetID="10" presetClass="entr" presetSubtype="0" fill="hold" grpId="0" nodeType="withEffect">
+                                  <p:stCondLst>
+                                    <p:cond delay="0"/>
+                                  </p:stCondLst>
+                                  <p:childTnLst>
+                                    <p:set>
+                                      <p:cBhvr>
+                                        <p:cTn id="129" dur="1" fill="hold">
+                                          <p:stCondLst>
+                                            <p:cond delay="0"/>
+                                          </p:stCondLst>
+                                        </p:cTn>
+                                        <p:tgtEl>
+                                          <p:spTgt spid="50"/>
+                                        </p:tgtEl>
+                                        <p:attrNameLst>
+                                          <p:attrName>style.visibility</p:attrName>
+                                        </p:attrNameLst>
+                                      </p:cBhvr>
+                                      <p:to>
+                                        <p:strVal val="visible"/>
+                                      </p:to>
+                                    </p:set>
+                                    <p:animEffect transition="in" filter="fade">
+                                      <p:cBhvr>
+                                        <p:cTn id="130" dur="500"/>
+                                        <p:tgtEl>
+                                          <p:spTgt spid="50"/>
+                                        </p:tgtEl>
+                                      </p:cBhvr>
+                                    </p:animEffect>
+                                  </p:childTnLst>
+                                </p:cTn>
+                              </p:par>
+                              <p:par>
+                                <p:cTn id="131" presetID="10" presetClass="entr" presetSubtype="0" fill="hold" grpId="0" nodeType="withEffect">
+                                  <p:stCondLst>
+                                    <p:cond delay="0"/>
+                                  </p:stCondLst>
+                                  <p:childTnLst>
+                                    <p:set>
+                                      <p:cBhvr>
+                                        <p:cTn id="132" dur="1" fill="hold">
+                                          <p:stCondLst>
+                                            <p:cond delay="0"/>
+                                          </p:stCondLst>
+                                        </p:cTn>
+                                        <p:tgtEl>
+                                          <p:spTgt spid="51"/>
+                                        </p:tgtEl>
+                                        <p:attrNameLst>
+                                          <p:attrName>style.visibility</p:attrName>
+                                        </p:attrNameLst>
+                                      </p:cBhvr>
+                                      <p:to>
+                                        <p:strVal val="visible"/>
+                                      </p:to>
+                                    </p:set>
+                                    <p:animEffect transition="in" filter="fade">
+                                      <p:cBhvr>
+                                        <p:cTn id="133" dur="500"/>
+                                        <p:tgtEl>
+                                          <p:spTgt spid="51"/>
+                                        </p:tgtEl>
+                                      </p:cBhvr>
+                                    </p:animEffect>
+                                  </p:childTnLst>
+                                </p:cTn>
+                              </p:par>
+                              <p:par>
+                                <p:cTn id="134" presetID="10" presetClass="entr" presetSubtype="0" fill="hold" nodeType="withEffect">
+                                  <p:stCondLst>
+                                    <p:cond delay="0"/>
+                                  </p:stCondLst>
+                                  <p:childTnLst>
+                                    <p:set>
+                                      <p:cBhvr>
+                                        <p:cTn id="135" dur="1" fill="hold">
+                                          <p:stCondLst>
+                                            <p:cond delay="0"/>
+                                          </p:stCondLst>
+                                        </p:cTn>
+                                        <p:tgtEl>
+                                          <p:spTgt spid="26"/>
+                                        </p:tgtEl>
+                                        <p:attrNameLst>
+                                          <p:attrName>style.visibility</p:attrName>
+                                        </p:attrNameLst>
+                                      </p:cBhvr>
+                                      <p:to>
+                                        <p:strVal val="visible"/>
+                                      </p:to>
+                                    </p:set>
+                                    <p:animEffect transition="in" filter="fade">
+                                      <p:cBhvr>
+                                        <p:cTn id="136" dur="500"/>
+                                        <p:tgtEl>
+                                          <p:spTgt spid="26"/>
+                                        </p:tgtEl>
+                                      </p:cBhvr>
+                                    </p:animEffect>
+                                  </p:childTnLst>
+                                </p:cTn>
+                              </p:par>
+                              <p:par>
+                                <p:cTn id="137" presetID="10" presetClass="entr" presetSubtype="0" fill="hold" nodeType="withEffect">
+                                  <p:stCondLst>
+                                    <p:cond delay="0"/>
+                                  </p:stCondLst>
+                                  <p:childTnLst>
+                                    <p:set>
+                                      <p:cBhvr>
+                                        <p:cTn id="138" dur="1" fill="hold">
+                                          <p:stCondLst>
+                                            <p:cond delay="0"/>
+                                          </p:stCondLst>
+                                        </p:cTn>
+                                        <p:tgtEl>
+                                          <p:spTgt spid="27"/>
+                                        </p:tgtEl>
+                                        <p:attrNameLst>
+                                          <p:attrName>style.visibility</p:attrName>
+                                        </p:attrNameLst>
+                                      </p:cBhvr>
+                                      <p:to>
+                                        <p:strVal val="visible"/>
+                                      </p:to>
+                                    </p:set>
+                                    <p:animEffect transition="in" filter="fade">
+                                      <p:cBhvr>
+                                        <p:cTn id="139" dur="500"/>
+                                        <p:tgtEl>
+                                          <p:spTgt spid="27"/>
+                                        </p:tgtEl>
+                                      </p:cBhvr>
+                                    </p:animEffect>
+                                  </p:childTnLst>
+                                </p:cTn>
+                              </p:par>
+                            </p:childTnLst>
+                          </p:cTn>
+                        </p:par>
+                        <p:par>
+                          <p:cTn id="140" fill="hold">
+                            <p:stCondLst>
+                              <p:cond delay="2450"/>
+                            </p:stCondLst>
+                            <p:childTnLst>
+                              <p:par>
+                                <p:cTn id="141" presetID="10" presetClass="entr" presetSubtype="0" fill="hold" nodeType="afterEffect">
+                                  <p:stCondLst>
+                                    <p:cond delay="150"/>
+                                  </p:stCondLst>
+                                  <p:childTnLst>
+                                    <p:set>
+                                      <p:cBhvr>
+                                        <p:cTn id="142" dur="1" fill="hold">
+                                          <p:stCondLst>
+                                            <p:cond delay="0"/>
+                                          </p:stCondLst>
+                                        </p:cTn>
+                                        <p:tgtEl>
+                                          <p:spTgt spid="28"/>
+                                        </p:tgtEl>
+                                        <p:attrNameLst>
+                                          <p:attrName>style.visibility</p:attrName>
+                                        </p:attrNameLst>
+                                      </p:cBhvr>
+                                      <p:to>
+                                        <p:strVal val="visible"/>
+                                      </p:to>
+                                    </p:set>
+                                    <p:animEffect transition="in" filter="fade">
+                                      <p:cBhvr>
+                                        <p:cTn id="143" dur="500"/>
+                                        <p:tgtEl>
+                                          <p:spTgt spid="28"/>
+                                        </p:tgtEl>
+                                      </p:cBhvr>
+                                    </p:animEffect>
+                                  </p:childTnLst>
+                                </p:cTn>
+                              </p:par>
+                              <p:par>
+                                <p:cTn id="144" presetID="10" presetClass="entr" presetSubtype="0" fill="hold" nodeType="withEffect">
+                                  <p:stCondLst>
+                                    <p:cond delay="0"/>
+                                  </p:stCondLst>
+                                  <p:childTnLst>
+                                    <p:set>
+                                      <p:cBhvr>
+                                        <p:cTn id="145" dur="1" fill="hold">
+                                          <p:stCondLst>
+                                            <p:cond delay="0"/>
+                                          </p:stCondLst>
+                                        </p:cTn>
+                                        <p:tgtEl>
+                                          <p:spTgt spid="29"/>
+                                        </p:tgtEl>
+                                        <p:attrNameLst>
+                                          <p:attrName>style.visibility</p:attrName>
+                                        </p:attrNameLst>
+                                      </p:cBhvr>
+                                      <p:to>
+                                        <p:strVal val="visible"/>
+                                      </p:to>
+                                    </p:set>
+                                    <p:animEffect transition="in" filter="fade">
+                                      <p:cBhvr>
+                                        <p:cTn id="146" dur="500"/>
+                                        <p:tgtEl>
+                                          <p:spTgt spid="29"/>
+                                        </p:tgtEl>
+                                      </p:cBhvr>
+                                    </p:animEffect>
+                                  </p:childTnLst>
+                                </p:cTn>
+                              </p:par>
+                              <p:par>
+                                <p:cTn id="147" presetID="10" presetClass="entr" presetSubtype="0" fill="hold" nodeType="withEffect">
+                                  <p:stCondLst>
+                                    <p:cond delay="0"/>
+                                  </p:stCondLst>
+                                  <p:childTnLst>
+                                    <p:set>
+                                      <p:cBhvr>
+                                        <p:cTn id="148" dur="1" fill="hold">
+                                          <p:stCondLst>
+                                            <p:cond delay="0"/>
+                                          </p:stCondLst>
+                                        </p:cTn>
+                                        <p:tgtEl>
+                                          <p:spTgt spid="30"/>
+                                        </p:tgtEl>
+                                        <p:attrNameLst>
+                                          <p:attrName>style.visibility</p:attrName>
+                                        </p:attrNameLst>
+                                      </p:cBhvr>
+                                      <p:to>
+                                        <p:strVal val="visible"/>
+                                      </p:to>
+                                    </p:set>
+                                    <p:animEffect transition="in" filter="fade">
+                                      <p:cBhvr>
+                                        <p:cTn id="149" dur="500"/>
+                                        <p:tgtEl>
+                                          <p:spTgt spid="30"/>
+                                        </p:tgtEl>
+                                      </p:cBhvr>
+                                    </p:animEffect>
+                                  </p:childTnLst>
+                                </p:cTn>
+                              </p:par>
+                              <p:par>
+                                <p:cTn id="150" presetID="10" presetClass="entr" presetSubtype="0" fill="hold" grpId="0" nodeType="withEffect">
+                                  <p:stCondLst>
+                                    <p:cond delay="0"/>
+                                  </p:stCondLst>
+                                  <p:childTnLst>
+                                    <p:set>
+                                      <p:cBhvr>
+                                        <p:cTn id="151" dur="1" fill="hold">
+                                          <p:stCondLst>
+                                            <p:cond delay="0"/>
+                                          </p:stCondLst>
+                                        </p:cTn>
+                                        <p:tgtEl>
+                                          <p:spTgt spid="31"/>
+                                        </p:tgtEl>
+                                        <p:attrNameLst>
+                                          <p:attrName>style.visibility</p:attrName>
+                                        </p:attrNameLst>
+                                      </p:cBhvr>
+                                      <p:to>
+                                        <p:strVal val="visible"/>
+                                      </p:to>
+                                    </p:set>
+                                    <p:animEffect transition="in" filter="fade">
+                                      <p:cBhvr>
+                                        <p:cTn id="152" dur="500"/>
+                                        <p:tgtEl>
+                                          <p:spTgt spid="31"/>
+                                        </p:tgtEl>
+                                      </p:cBhvr>
+                                    </p:animEffect>
+                                  </p:childTnLst>
+                                </p:cTn>
+                              </p:par>
+                              <p:par>
+                                <p:cTn id="153" presetID="10" presetClass="entr" presetSubtype="0" fill="hold" nodeType="withEffect">
+                                  <p:stCondLst>
+                                    <p:cond delay="0"/>
+                                  </p:stCondLst>
+                                  <p:childTnLst>
+                                    <p:set>
+                                      <p:cBhvr>
+                                        <p:cTn id="154" dur="1" fill="hold">
+                                          <p:stCondLst>
+                                            <p:cond delay="0"/>
+                                          </p:stCondLst>
+                                        </p:cTn>
+                                        <p:tgtEl>
+                                          <p:spTgt spid="52"/>
+                                        </p:tgtEl>
+                                        <p:attrNameLst>
+                                          <p:attrName>style.visibility</p:attrName>
+                                        </p:attrNameLst>
+                                      </p:cBhvr>
+                                      <p:to>
+                                        <p:strVal val="visible"/>
+                                      </p:to>
+                                    </p:set>
+                                    <p:animEffect transition="in" filter="fade">
+                                      <p:cBhvr>
+                                        <p:cTn id="155" dur="500"/>
+                                        <p:tgtEl>
+                                          <p:spTgt spid="52"/>
+                                        </p:tgtEl>
+                                      </p:cBhvr>
+                                    </p:animEffect>
+                                  </p:childTnLst>
+                                </p:cTn>
+                              </p:par>
+                              <p:par>
+                                <p:cTn id="156" presetID="10" presetClass="entr" presetSubtype="0" fill="hold" nodeType="withEffect">
+                                  <p:stCondLst>
+                                    <p:cond delay="0"/>
+                                  </p:stCondLst>
+                                  <p:childTnLst>
+                                    <p:set>
+                                      <p:cBhvr>
+                                        <p:cTn id="157" dur="1" fill="hold">
+                                          <p:stCondLst>
+                                            <p:cond delay="0"/>
+                                          </p:stCondLst>
+                                        </p:cTn>
+                                        <p:tgtEl>
+                                          <p:spTgt spid="53"/>
+                                        </p:tgtEl>
+                                        <p:attrNameLst>
+                                          <p:attrName>style.visibility</p:attrName>
+                                        </p:attrNameLst>
+                                      </p:cBhvr>
+                                      <p:to>
+                                        <p:strVal val="visible"/>
+                                      </p:to>
+                                    </p:set>
+                                    <p:animEffect transition="in" filter="fade">
+                                      <p:cBhvr>
+                                        <p:cTn id="158" dur="500"/>
+                                        <p:tgtEl>
+                                          <p:spTgt spid="53"/>
+                                        </p:tgtEl>
+                                      </p:cBhvr>
+                                    </p:animEffect>
+                                  </p:childTnLst>
+                                </p:cTn>
+                              </p:par>
+                              <p:par>
+                                <p:cTn id="159" presetID="10" presetClass="entr" presetSubtype="0" fill="hold" grpId="0" nodeType="withEffect">
+                                  <p:stCondLst>
+                                    <p:cond delay="0"/>
+                                  </p:stCondLst>
+                                  <p:childTnLst>
+                                    <p:set>
+                                      <p:cBhvr>
+                                        <p:cTn id="160" dur="1" fill="hold">
+                                          <p:stCondLst>
+                                            <p:cond delay="0"/>
+                                          </p:stCondLst>
+                                        </p:cTn>
+                                        <p:tgtEl>
+                                          <p:spTgt spid="54"/>
+                                        </p:tgtEl>
+                                        <p:attrNameLst>
+                                          <p:attrName>style.visibility</p:attrName>
+                                        </p:attrNameLst>
+                                      </p:cBhvr>
+                                      <p:to>
+                                        <p:strVal val="visible"/>
+                                      </p:to>
+                                    </p:set>
+                                    <p:animEffect transition="in" filter="fade">
+                                      <p:cBhvr>
+                                        <p:cTn id="161" dur="500"/>
+                                        <p:tgtEl>
+                                          <p:spTgt spid="54"/>
+                                        </p:tgtEl>
+                                      </p:cBhvr>
+                                    </p:animEffect>
+                                  </p:childTnLst>
+                                </p:cTn>
+                              </p:par>
+                              <p:par>
+                                <p:cTn id="162" presetID="10" presetClass="entr" presetSubtype="0" fill="hold" grpId="0" nodeType="withEffect">
+                                  <p:stCondLst>
+                                    <p:cond delay="0"/>
+                                  </p:stCondLst>
+                                  <p:childTnLst>
+                                    <p:set>
+                                      <p:cBhvr>
+                                        <p:cTn id="163" dur="1" fill="hold">
+                                          <p:stCondLst>
+                                            <p:cond delay="0"/>
+                                          </p:stCondLst>
+                                        </p:cTn>
+                                        <p:tgtEl>
+                                          <p:spTgt spid="55"/>
+                                        </p:tgtEl>
+                                        <p:attrNameLst>
+                                          <p:attrName>style.visibility</p:attrName>
+                                        </p:attrNameLst>
+                                      </p:cBhvr>
+                                      <p:to>
+                                        <p:strVal val="visible"/>
+                                      </p:to>
+                                    </p:set>
+                                    <p:animEffect transition="in" filter="fade">
+                                      <p:cBhvr>
+                                        <p:cTn id="164" dur="500"/>
+                                        <p:tgtEl>
+                                          <p:spTgt spid="55"/>
+                                        </p:tgtEl>
+                                      </p:cBhvr>
+                                    </p:animEffect>
+                                  </p:childTnLst>
+                                </p:cTn>
+                              </p:par>
+                              <p:par>
+                                <p:cTn id="165" presetID="10" presetClass="entr" presetSubtype="0" fill="hold" grpId="0" nodeType="withEffect">
+                                  <p:stCondLst>
+                                    <p:cond delay="0"/>
+                                  </p:stCondLst>
+                                  <p:childTnLst>
+                                    <p:set>
+                                      <p:cBhvr>
+                                        <p:cTn id="166" dur="1" fill="hold">
+                                          <p:stCondLst>
+                                            <p:cond delay="0"/>
+                                          </p:stCondLst>
+                                        </p:cTn>
+                                        <p:tgtEl>
+                                          <p:spTgt spid="56"/>
+                                        </p:tgtEl>
+                                        <p:attrNameLst>
+                                          <p:attrName>style.visibility</p:attrName>
+                                        </p:attrNameLst>
+                                      </p:cBhvr>
+                                      <p:to>
+                                        <p:strVal val="visible"/>
+                                      </p:to>
+                                    </p:set>
+                                    <p:animEffect transition="in" filter="fade">
+                                      <p:cBhvr>
+                                        <p:cTn id="167" dur="500"/>
+                                        <p:tgtEl>
+                                          <p:spTgt spid="56"/>
+                                        </p:tgtEl>
+                                      </p:cBhvr>
+                                    </p:animEffect>
+                                  </p:childTnLst>
+                                </p:cTn>
+                              </p:par>
+                            </p:childTnLst>
+                          </p:cTn>
+                        </p:par>
+                      </p:childTnLst>
+                    </p:cTn>
+                  </p:par>
+                </p:childTnLst>
+              </p:cTn>
+              <p:prevCondLst>
+                <p:cond evt="onPrev" delay="0">
+                  <p:tgtEl>
+                    <p:sldTgt/>
+                  </p:tgtEl>
+                </p:cond>
+              </p:prevCondLst>
+              <p:nextCondLst>
+                <p:cond evt="onNext" delay="0">
+                  <p:tgtEl>
+                    <p:sldTgt/>
+                  </p:tgtEl>
+                </p:cond>
+              </p:nextCondLst>
+            </p:seq>
+          </p:childTnLst>
+        </p:cTn>
+      </p:par>
+    </p:tnLst>
+    <p:bldLst>
+      <p:bldP spid="7" grpId="0" animBg="1"/>
+      <p:bldP spid="13" grpId="0" animBg="1"/>
+      <p:bldP spid="19" grpId="0" animBg="1"/>
+      <p:bldP spid="25" grpId="0" animBg="1"/>
+      <p:bldP spid="31" grpId="0" animBg="1"/>
+      <p:bldP spid="34" grpId="0" animBg="1"/>
+      <p:bldP spid="35" grpId="0" animBg="1"/>
+      <p:bldP spid="36" grpId="0" animBg="1"/>
+      <p:bldP spid="39" grpId="0" animBg="1"/>
+      <p:bldP spid="40" grpId="0" animBg="1"/>
+      <p:bldP spid="41" grpId="0" animBg="1"/>
+      <p:bldP spid="44" grpId="0" animBg="1"/>
+      <p:bldP spid="45" grpId="0" animBg="1"/>
+      <p:bldP spid="46" grpId="0" animBg="1"/>
+      <p:bldP spid="49" grpId="0" animBg="1"/>
+      <p:bldP spid="50" grpId="0" animBg="1"/>
+      <p:bldP spid="51" grpId="0" animBg="1"/>
+      <p:bldP spid="54" grpId="0" animBg="1"/>
+      <p:bldP spid="55" grpId="0" animBg="1"/>
+      <p:bldP spid="56" grpId="0" animBg="1"/>
+    </p:bldLst>
+  </p:timing>
 </p:sld>
 </file>
 
@@ -8241,11 +10747,11 @@
           <a:bodyPr wrap="square" lIns="0" tIns="0" rIns="0" bIns="0" rtlCol="0" anchor="t"/>
           <a:lstStyle/>
           <a:p>
-            <a:pPr indent="0" marL="0">
-              <a:buNone/>
-            </a:pPr>
-            <a:r>
-              <a:rPr lang="en-US" sz="900" spc="50" kern="0" dirty="0">
+            <a:pPr marL="0" indent="0">
+              <a:buNone/>
+            </a:pPr>
+            <a:r>
+              <a:rPr lang="en-US" sz="900" kern="0" spc="50" dirty="0">
                 <a:solidFill>
                   <a:srgbClr val="6E7E90"/>
                 </a:solidFill>
@@ -8255,9 +10761,6 @@
               </a:rPr>
               <a:t>05</a:t>
             </a:r>
-            <a:pPr indent="0" marL="0">
-              <a:buNone/>
-            </a:pPr>
             <a:r>
               <a:rPr lang="en-US" sz="900" dirty="0">
                 <a:solidFill>
@@ -8269,11 +10772,8 @@
               </a:rPr>
               <a:t>   |   </a:t>
             </a:r>
-            <a:pPr indent="0" marL="0">
-              <a:buNone/>
-            </a:pPr>
-            <a:r>
-              <a:rPr lang="en-US" sz="900" b="1" spc="200" kern="0" dirty="0">
+            <a:r>
+              <a:rPr lang="en-US" sz="900" b="1" kern="0" spc="200" dirty="0">
                 <a:solidFill>
                   <a:srgbClr val="0A8FA6"/>
                 </a:solidFill>
@@ -8308,14 +10808,14 @@
           <a:bodyPr wrap="square" lIns="0" tIns="0" rIns="0" bIns="0" rtlCol="0" anchor="t"/>
           <a:lstStyle/>
           <a:p>
-            <a:pPr indent="0" marL="0">
+            <a:pPr marL="0" indent="0">
               <a:lnSpc>
                 <a:spcPct val="100000"/>
               </a:lnSpc>
               <a:buNone/>
             </a:pPr>
             <a:r>
-              <a:rPr lang="en-US" sz="3000" spc="-100" kern="0" dirty="0">
+              <a:rPr lang="en-US" sz="3000" kern="0" spc="-100" dirty="0">
                 <a:solidFill>
                   <a:srgbClr val="0C3C75"/>
                 </a:solidFill>
@@ -8328,14 +10828,14 @@
             <a:endParaRPr lang="en-US" sz="3000" dirty="0"/>
           </a:p>
           <a:p>
-            <a:pPr indent="0" marL="0">
+            <a:pPr marL="0" indent="0">
               <a:lnSpc>
                 <a:spcPct val="100000"/>
               </a:lnSpc>
               <a:buNone/>
             </a:pPr>
             <a:r>
-              <a:rPr lang="en-US" sz="3000" spc="-100" kern="0" dirty="0">
+              <a:rPr lang="en-US" sz="3000" kern="0" spc="-100" dirty="0">
                 <a:solidFill>
                   <a:srgbClr val="6A7F96"/>
                 </a:solidFill>
@@ -8378,17 +10878,17 @@
       </p:sp>
       <p:pic>
         <p:nvPicPr>
-          <p:cNvPr id="5" name="Image 0" descr="E:/Claude/laborforce-deck/brand/nm_logo.svg">    </p:cNvPr>
+          <p:cNvPr id="5" name="Image 0" descr="E:/Claude/laborforce-deck/brand/nm_logo.svg"/>
           <p:cNvPicPr>
             <a:picLocks noChangeAspect="1"/>
           </p:cNvPicPr>
           <p:nvPr/>
         </p:nvPicPr>
         <p:blipFill>
-          <a:blip r:embed="rId1">
+          <a:blip>
             <a:extLst>
               <a:ext uri="{96DAC541-7B7A-43D3-8B79-37D633B846F1}">
-                <asvg:svgBlip xmlns:asvg="http://schemas.microsoft.com/office/drawing/2016/SVG/main" r:embed="rId2"/>
+                <asvg:svgBlip xmlns:asvg="http://schemas.microsoft.com/office/drawing/2016/SVG/main" r:embed="rId3"/>
               </a:ext>
             </a:extLst>
           </a:blip>
@@ -8427,11 +10927,11 @@
           <a:bodyPr wrap="square" lIns="0" tIns="0" rIns="0" bIns="0" rtlCol="0" anchor="t"/>
           <a:lstStyle/>
           <a:p>
-            <a:pPr indent="0" marL="0">
-              <a:buNone/>
-            </a:pPr>
-            <a:r>
-              <a:rPr lang="en-US" sz="850" b="1" spc="100" kern="0" dirty="0">
+            <a:pPr marL="0" indent="0">
+              <a:buNone/>
+            </a:pPr>
+            <a:r>
+              <a:rPr lang="en-US" sz="850" b="1" kern="0" spc="100" dirty="0">
                 <a:solidFill>
                   <a:srgbClr val="6E7E90"/>
                 </a:solidFill>
@@ -8474,14 +10974,14 @@
       </p:sp>
       <p:pic>
         <p:nvPicPr>
-          <p:cNvPr id="8" name="Image 1" descr="E:/Claude/laborforce-deck/brand/hph_logo.png">    </p:cNvPr>
+          <p:cNvPr id="8" name="Image 1" descr="E:/Claude/laborforce-deck/brand/hph_logo.png"/>
           <p:cNvPicPr>
             <a:picLocks noChangeAspect="1"/>
           </p:cNvPicPr>
           <p:nvPr/>
         </p:nvPicPr>
         <p:blipFill>
-          <a:blip r:embed="rId3"/>
+          <a:blip r:embed="rId4"/>
           <a:stretch>
             <a:fillRect/>
           </a:stretch>
@@ -8517,11 +11017,11 @@
           <a:bodyPr wrap="square" lIns="0" tIns="0" rIns="0" bIns="0" rtlCol="0" anchor="t"/>
           <a:lstStyle/>
           <a:p>
-            <a:pPr indent="0" marL="0">
-              <a:buNone/>
-            </a:pPr>
-            <a:r>
-              <a:rPr lang="en-US" sz="850" b="1" spc="100" kern="0" dirty="0">
+            <a:pPr marL="0" indent="0">
+              <a:buNone/>
+            </a:pPr>
+            <a:r>
+              <a:rPr lang="en-US" sz="850" b="1" kern="0" spc="100" dirty="0">
                 <a:solidFill>
                   <a:srgbClr val="6E7E90"/>
                 </a:solidFill>
@@ -8583,11 +11083,11 @@
           <a:bodyPr wrap="square" lIns="0" tIns="0" rIns="0" bIns="0" rtlCol="0" anchor="t"/>
           <a:lstStyle/>
           <a:p>
-            <a:pPr indent="0" marL="0">
-              <a:buNone/>
-            </a:pPr>
-            <a:r>
-              <a:rPr lang="en-US" sz="800" b="1" spc="150" kern="0" dirty="0">
+            <a:pPr marL="0" indent="0">
+              <a:buNone/>
+            </a:pPr>
+            <a:r>
+              <a:rPr lang="en-US" sz="800" b="1" kern="0" spc="150" dirty="0">
                 <a:solidFill>
                   <a:srgbClr val="7FD3E3"/>
                 </a:solidFill>
@@ -8622,7 +11122,7 @@
           <a:bodyPr wrap="square" lIns="0" tIns="0" rIns="0" bIns="0" rtlCol="0" anchor="t"/>
           <a:lstStyle/>
           <a:p>
-            <a:pPr algn="r" indent="0" marL="0">
+            <a:pPr marL="0" indent="0" algn="r">
               <a:buNone/>
             </a:pPr>
             <a:r>
@@ -8661,11 +11161,11 @@
           <a:bodyPr wrap="square" lIns="0" tIns="0" rIns="0" bIns="0" rtlCol="0" anchor="t"/>
           <a:lstStyle/>
           <a:p>
-            <a:pPr indent="0" marL="0">
-              <a:buNone/>
-            </a:pPr>
-            <a:r>
-              <a:rPr lang="en-US" sz="3200" spc="-150" kern="0" dirty="0">
+            <a:pPr marL="0" indent="0">
+              <a:buNone/>
+            </a:pPr>
+            <a:r>
+              <a:rPr lang="en-US" sz="3200" kern="0" spc="-150" dirty="0">
                 <a:solidFill>
                   <a:srgbClr val="FFFFFF"/>
                 </a:solidFill>
@@ -8700,7 +11200,7 @@
           <a:bodyPr wrap="square" lIns="0" tIns="0" rIns="0" bIns="0" rtlCol="0" anchor="t"/>
           <a:lstStyle/>
           <a:p>
-            <a:pPr indent="0" marL="0">
+            <a:pPr marL="0" indent="0">
               <a:lnSpc>
                 <a:spcPct val="120000"/>
               </a:lnSpc>
@@ -8720,7 +11220,7 @@
             <a:endParaRPr lang="en-US" sz="1050" dirty="0"/>
           </a:p>
           <a:p>
-            <a:pPr indent="0" marL="0">
+            <a:pPr marL="0" indent="0">
               <a:lnSpc>
                 <a:spcPct val="120000"/>
               </a:lnSpc>
@@ -8785,11 +11285,11 @@
           <a:bodyPr wrap="square" lIns="0" tIns="0" rIns="0" bIns="0" rtlCol="0" anchor="t"/>
           <a:lstStyle/>
           <a:p>
-            <a:pPr indent="0" marL="0">
-              <a:buNone/>
-            </a:pPr>
-            <a:r>
-              <a:rPr lang="en-US" sz="3200" spc="-150" kern="0" dirty="0">
+            <a:pPr marL="0" indent="0">
+              <a:buNone/>
+            </a:pPr>
+            <a:r>
+              <a:rPr lang="en-US" sz="3200" kern="0" spc="-150" dirty="0">
                 <a:solidFill>
                   <a:srgbClr val="FFFFFF"/>
                 </a:solidFill>
@@ -8824,7 +11324,7 @@
           <a:bodyPr wrap="square" lIns="0" tIns="0" rIns="0" bIns="0" rtlCol="0" anchor="t"/>
           <a:lstStyle/>
           <a:p>
-            <a:pPr indent="0" marL="0">
+            <a:pPr marL="0" indent="0">
               <a:lnSpc>
                 <a:spcPct val="120000"/>
               </a:lnSpc>
@@ -8844,7 +11344,7 @@
             <a:endParaRPr lang="en-US" sz="1050" dirty="0"/>
           </a:p>
           <a:p>
-            <a:pPr indent="0" marL="0">
+            <a:pPr marL="0" indent="0">
               <a:lnSpc>
                 <a:spcPct val="120000"/>
               </a:lnSpc>
@@ -8909,11 +11409,11 @@
           <a:bodyPr wrap="square" lIns="0" tIns="0" rIns="0" bIns="0" rtlCol="0" anchor="t"/>
           <a:lstStyle/>
           <a:p>
-            <a:pPr indent="0" marL="0">
-              <a:buNone/>
-            </a:pPr>
-            <a:r>
-              <a:rPr lang="en-US" sz="3200" spc="-150" kern="0" dirty="0">
+            <a:pPr marL="0" indent="0">
+              <a:buNone/>
+            </a:pPr>
+            <a:r>
+              <a:rPr lang="en-US" sz="3200" kern="0" spc="-150" dirty="0">
                 <a:solidFill>
                   <a:srgbClr val="FFFFFF"/>
                 </a:solidFill>
@@ -8948,7 +11448,7 @@
           <a:bodyPr wrap="square" lIns="0" tIns="0" rIns="0" bIns="0" rtlCol="0" anchor="t"/>
           <a:lstStyle/>
           <a:p>
-            <a:pPr indent="0" marL="0">
+            <a:pPr marL="0" indent="0">
               <a:lnSpc>
                 <a:spcPct val="120000"/>
               </a:lnSpc>
@@ -8968,7 +11468,7 @@
             <a:endParaRPr lang="en-US" sz="1050" dirty="0"/>
           </a:p>
           <a:p>
-            <a:pPr indent="0" marL="0">
+            <a:pPr marL="0" indent="0">
               <a:lnSpc>
                 <a:spcPct val="120000"/>
               </a:lnSpc>
@@ -9033,11 +11533,11 @@
           <a:bodyPr wrap="square" lIns="0" tIns="0" rIns="0" bIns="0" rtlCol="0" anchor="t"/>
           <a:lstStyle/>
           <a:p>
-            <a:pPr indent="0" marL="0">
-              <a:buNone/>
-            </a:pPr>
-            <a:r>
-              <a:rPr lang="en-US" sz="3200" spc="-150" kern="0" dirty="0">
+            <a:pPr marL="0" indent="0">
+              <a:buNone/>
+            </a:pPr>
+            <a:r>
+              <a:rPr lang="en-US" sz="3200" kern="0" spc="-150" dirty="0">
                 <a:solidFill>
                   <a:srgbClr val="FFFFFF"/>
                 </a:solidFill>
@@ -9072,7 +11572,7 @@
           <a:bodyPr wrap="square" lIns="0" tIns="0" rIns="0" bIns="0" rtlCol="0" anchor="t"/>
           <a:lstStyle/>
           <a:p>
-            <a:pPr indent="0" marL="0">
+            <a:pPr marL="0" indent="0">
               <a:lnSpc>
                 <a:spcPct val="120000"/>
               </a:lnSpc>
@@ -9092,7 +11592,7 @@
             <a:endParaRPr lang="en-US" sz="1050" dirty="0"/>
           </a:p>
           <a:p>
-            <a:pPr indent="0" marL="0">
+            <a:pPr marL="0" indent="0">
               <a:lnSpc>
                 <a:spcPct val="120000"/>
               </a:lnSpc>
@@ -9134,11 +11634,11 @@
           <a:bodyPr wrap="square" lIns="0" tIns="0" rIns="0" bIns="0" rtlCol="0" anchor="t"/>
           <a:lstStyle/>
           <a:p>
-            <a:pPr algn="r" indent="0" marL="0">
-              <a:buNone/>
-            </a:pPr>
-            <a:r>
-              <a:rPr lang="en-US" sz="800" spc="150" kern="0" dirty="0">
+            <a:pPr marL="0" indent="0" algn="r">
+              <a:buNone/>
+            </a:pPr>
+            <a:r>
+              <a:rPr lang="en-US" sz="800" kern="0" spc="150" dirty="0">
                 <a:solidFill>
                   <a:srgbClr val="6E7E90"/>
                 </a:solidFill>
@@ -9198,11 +11698,11 @@
           <a:bodyPr wrap="square" lIns="0" tIns="0" rIns="0" bIns="0" rtlCol="0" anchor="t"/>
           <a:lstStyle/>
           <a:p>
-            <a:pPr indent="0" marL="0">
-              <a:buNone/>
-            </a:pPr>
-            <a:r>
-              <a:rPr lang="en-US" sz="900" spc="50" kern="0" dirty="0">
+            <a:pPr marL="0" indent="0">
+              <a:buNone/>
+            </a:pPr>
+            <a:r>
+              <a:rPr lang="en-US" sz="900" kern="0" spc="50" dirty="0">
                 <a:solidFill>
                   <a:srgbClr val="6E7E90"/>
                 </a:solidFill>
@@ -9212,9 +11712,6 @@
               </a:rPr>
               <a:t>06</a:t>
             </a:r>
-            <a:pPr indent="0" marL="0">
-              <a:buNone/>
-            </a:pPr>
             <a:r>
               <a:rPr lang="en-US" sz="900" dirty="0">
                 <a:solidFill>
@@ -9226,11 +11723,8 @@
               </a:rPr>
               <a:t>   |   </a:t>
             </a:r>
-            <a:pPr indent="0" marL="0">
-              <a:buNone/>
-            </a:pPr>
-            <a:r>
-              <a:rPr lang="en-US" sz="900" b="1" spc="200" kern="0" dirty="0">
+            <a:r>
+              <a:rPr lang="en-US" sz="900" b="1" kern="0" spc="200" dirty="0">
                 <a:solidFill>
                   <a:srgbClr val="0A8FA6"/>
                 </a:solidFill>
@@ -9265,14 +11759,14 @@
           <a:bodyPr wrap="square" lIns="0" tIns="0" rIns="0" bIns="0" rtlCol="0" anchor="t"/>
           <a:lstStyle/>
           <a:p>
-            <a:pPr indent="0" marL="0">
+            <a:pPr marL="0" indent="0">
               <a:lnSpc>
                 <a:spcPct val="100000"/>
               </a:lnSpc>
               <a:buNone/>
             </a:pPr>
             <a:r>
-              <a:rPr lang="en-US" sz="2800" spc="-100" kern="0" dirty="0">
+              <a:rPr lang="en-US" sz="2800" kern="0" spc="-100" dirty="0">
                 <a:solidFill>
                   <a:srgbClr val="0C3C75"/>
                 </a:solidFill>
@@ -9330,11 +11824,11 @@
           <a:bodyPr wrap="square" lIns="0" tIns="0" rIns="0" bIns="0" rtlCol="0" anchor="t"/>
           <a:lstStyle/>
           <a:p>
-            <a:pPr indent="0" marL="0">
-              <a:buNone/>
-            </a:pPr>
-            <a:r>
-              <a:rPr lang="en-US" sz="1600" b="1" spc="-30" kern="0" dirty="0">
+            <a:pPr marL="0" indent="0">
+              <a:buNone/>
+            </a:pPr>
+            <a:r>
+              <a:rPr lang="en-US" sz="1600" b="1" kern="0" spc="-30" dirty="0">
                 <a:solidFill>
                   <a:srgbClr val="0C3C75"/>
                 </a:solidFill>
@@ -9369,7 +11863,7 @@
           <a:bodyPr wrap="square" lIns="0" tIns="0" rIns="0" bIns="0" rtlCol="0" anchor="t"/>
           <a:lstStyle/>
           <a:p>
-            <a:pPr indent="0" marL="0">
+            <a:pPr marL="0" indent="0">
               <a:lnSpc>
                 <a:spcPct val="130000"/>
               </a:lnSpc>
@@ -9434,11 +11928,11 @@
           <a:bodyPr wrap="square" lIns="0" tIns="0" rIns="0" bIns="0" rtlCol="0" anchor="t"/>
           <a:lstStyle/>
           <a:p>
-            <a:pPr indent="0" marL="0">
-              <a:buNone/>
-            </a:pPr>
-            <a:r>
-              <a:rPr lang="en-US" sz="1600" b="1" spc="-30" kern="0" dirty="0">
+            <a:pPr marL="0" indent="0">
+              <a:buNone/>
+            </a:pPr>
+            <a:r>
+              <a:rPr lang="en-US" sz="1600" b="1" kern="0" spc="-30" dirty="0">
                 <a:solidFill>
                   <a:srgbClr val="0C3C75"/>
                 </a:solidFill>
@@ -9473,7 +11967,7 @@
           <a:bodyPr wrap="square" lIns="0" tIns="0" rIns="0" bIns="0" rtlCol="0" anchor="t"/>
           <a:lstStyle/>
           <a:p>
-            <a:pPr indent="0" marL="0">
+            <a:pPr marL="0" indent="0">
               <a:lnSpc>
                 <a:spcPct val="130000"/>
               </a:lnSpc>
@@ -9538,11 +12032,11 @@
           <a:bodyPr wrap="square" lIns="0" tIns="0" rIns="0" bIns="0" rtlCol="0" anchor="t"/>
           <a:lstStyle/>
           <a:p>
-            <a:pPr indent="0" marL="0">
-              <a:buNone/>
-            </a:pPr>
-            <a:r>
-              <a:rPr lang="en-US" sz="1600" b="1" spc="-30" kern="0" dirty="0">
+            <a:pPr marL="0" indent="0">
+              <a:buNone/>
+            </a:pPr>
+            <a:r>
+              <a:rPr lang="en-US" sz="1600" b="1" kern="0" spc="-30" dirty="0">
                 <a:solidFill>
                   <a:srgbClr val="0C3C75"/>
                 </a:solidFill>
@@ -9577,7 +12071,7 @@
           <a:bodyPr wrap="square" lIns="0" tIns="0" rIns="0" bIns="0" rtlCol="0" anchor="t"/>
           <a:lstStyle/>
           <a:p>
-            <a:pPr indent="0" marL="0">
+            <a:pPr marL="0" indent="0">
               <a:lnSpc>
                 <a:spcPct val="130000"/>
               </a:lnSpc>
@@ -9642,11 +12136,11 @@
           <a:bodyPr wrap="square" lIns="0" tIns="0" rIns="0" bIns="0" rtlCol="0" anchor="t"/>
           <a:lstStyle/>
           <a:p>
-            <a:pPr indent="0" marL="0">
-              <a:buNone/>
-            </a:pPr>
-            <a:r>
-              <a:rPr lang="en-US" sz="1600" b="1" spc="-30" kern="0" dirty="0">
+            <a:pPr marL="0" indent="0">
+              <a:buNone/>
+            </a:pPr>
+            <a:r>
+              <a:rPr lang="en-US" sz="1600" b="1" kern="0" spc="-30" dirty="0">
                 <a:solidFill>
                   <a:srgbClr val="0C3C75"/>
                 </a:solidFill>
@@ -9681,7 +12175,7 @@
           <a:bodyPr wrap="square" lIns="0" tIns="0" rIns="0" bIns="0" rtlCol="0" anchor="t"/>
           <a:lstStyle/>
           <a:p>
-            <a:pPr indent="0" marL="0">
+            <a:pPr marL="0" indent="0">
               <a:lnSpc>
                 <a:spcPct val="130000"/>
               </a:lnSpc>
@@ -9746,11 +12240,11 @@
           <a:bodyPr wrap="square" lIns="0" tIns="0" rIns="0" bIns="0" rtlCol="0" anchor="t"/>
           <a:lstStyle/>
           <a:p>
-            <a:pPr indent="0" marL="0">
-              <a:buNone/>
-            </a:pPr>
-            <a:r>
-              <a:rPr lang="en-US" sz="1600" b="1" spc="-30" kern="0" dirty="0">
+            <a:pPr marL="0" indent="0">
+              <a:buNone/>
+            </a:pPr>
+            <a:r>
+              <a:rPr lang="en-US" sz="1600" b="1" kern="0" spc="-30" dirty="0">
                 <a:solidFill>
                   <a:srgbClr val="0C3C75"/>
                 </a:solidFill>
@@ -9785,7 +12279,7 @@
           <a:bodyPr wrap="square" lIns="0" tIns="0" rIns="0" bIns="0" rtlCol="0" anchor="t"/>
           <a:lstStyle/>
           <a:p>
-            <a:pPr indent="0" marL="0">
+            <a:pPr marL="0" indent="0">
               <a:lnSpc>
                 <a:spcPct val="130000"/>
               </a:lnSpc>
@@ -9850,11 +12344,11 @@
           <a:bodyPr wrap="square" lIns="0" tIns="0" rIns="0" bIns="0" rtlCol="0" anchor="t"/>
           <a:lstStyle/>
           <a:p>
-            <a:pPr indent="0" marL="0">
-              <a:buNone/>
-            </a:pPr>
-            <a:r>
-              <a:rPr lang="en-US" sz="1600" b="1" spc="-30" kern="0" dirty="0">
+            <a:pPr marL="0" indent="0">
+              <a:buNone/>
+            </a:pPr>
+            <a:r>
+              <a:rPr lang="en-US" sz="1600" b="1" kern="0" spc="-30" dirty="0">
                 <a:solidFill>
                   <a:srgbClr val="0C3C75"/>
                 </a:solidFill>
@@ -9889,7 +12383,7 @@
           <a:bodyPr wrap="square" lIns="0" tIns="0" rIns="0" bIns="0" rtlCol="0" anchor="t"/>
           <a:lstStyle/>
           <a:p>
-            <a:pPr indent="0" marL="0">
+            <a:pPr marL="0" indent="0">
               <a:lnSpc>
                 <a:spcPct val="130000"/>
               </a:lnSpc>
@@ -9931,7 +12425,7 @@
           <a:bodyPr wrap="square" lIns="0" tIns="0" rIns="0" bIns="0" rtlCol="0" anchor="t"/>
           <a:lstStyle/>
           <a:p>
-            <a:pPr indent="0" marL="0">
+            <a:pPr marL="0" indent="0">
               <a:buNone/>
             </a:pPr>
             <a:r>
@@ -9970,11 +12464,11 @@
           <a:bodyPr wrap="square" lIns="0" tIns="0" rIns="0" bIns="0" rtlCol="0" anchor="t"/>
           <a:lstStyle/>
           <a:p>
-            <a:pPr algn="r" indent="0" marL="0">
-              <a:buNone/>
-            </a:pPr>
-            <a:r>
-              <a:rPr lang="en-US" sz="800" spc="150" kern="0" dirty="0">
+            <a:pPr marL="0" indent="0" algn="r">
+              <a:buNone/>
+            </a:pPr>
+            <a:r>
+              <a:rPr lang="en-US" sz="800" kern="0" spc="150" dirty="0">
                 <a:solidFill>
                   <a:srgbClr val="6E7E90"/>
                 </a:solidFill>
@@ -10034,11 +12528,11 @@
           <a:bodyPr wrap="square" lIns="0" tIns="0" rIns="0" bIns="0" rtlCol="0" anchor="t"/>
           <a:lstStyle/>
           <a:p>
-            <a:pPr indent="0" marL="0">
-              <a:buNone/>
-            </a:pPr>
-            <a:r>
-              <a:rPr lang="en-US" sz="900" spc="50" kern="0" dirty="0">
+            <a:pPr marL="0" indent="0">
+              <a:buNone/>
+            </a:pPr>
+            <a:r>
+              <a:rPr lang="en-US" sz="900" kern="0" spc="50" dirty="0">
                 <a:solidFill>
                   <a:srgbClr val="6E7E90"/>
                 </a:solidFill>
@@ -10048,9 +12542,6 @@
               </a:rPr>
               <a:t>07</a:t>
             </a:r>
-            <a:pPr indent="0" marL="0">
-              <a:buNone/>
-            </a:pPr>
             <a:r>
               <a:rPr lang="en-US" sz="900" dirty="0">
                 <a:solidFill>
@@ -10062,11 +12553,8 @@
               </a:rPr>
               <a:t>   |   </a:t>
             </a:r>
-            <a:pPr indent="0" marL="0">
-              <a:buNone/>
-            </a:pPr>
-            <a:r>
-              <a:rPr lang="en-US" sz="900" b="1" spc="200" kern="0" dirty="0">
+            <a:r>
+              <a:rPr lang="en-US" sz="900" b="1" kern="0" spc="200" dirty="0">
                 <a:solidFill>
                   <a:srgbClr val="0A8FA6"/>
                 </a:solidFill>
@@ -10101,14 +12589,14 @@
           <a:bodyPr wrap="square" lIns="0" tIns="0" rIns="0" bIns="0" rtlCol="0" anchor="t"/>
           <a:lstStyle/>
           <a:p>
-            <a:pPr indent="0" marL="0">
+            <a:pPr marL="0" indent="0">
               <a:lnSpc>
                 <a:spcPct val="100000"/>
               </a:lnSpc>
               <a:buNone/>
             </a:pPr>
             <a:r>
-              <a:rPr lang="en-US" sz="2800" spc="-100" kern="0" dirty="0">
+              <a:rPr lang="en-US" sz="2800" kern="0" spc="-100" dirty="0">
                 <a:solidFill>
                   <a:srgbClr val="0C3C75"/>
                 </a:solidFill>
@@ -10168,11 +12656,11 @@
           <a:bodyPr wrap="square" lIns="0" tIns="0" rIns="0" bIns="0" rtlCol="0" anchor="t"/>
           <a:lstStyle/>
           <a:p>
-            <a:pPr indent="0" marL="0">
-              <a:buNone/>
-            </a:pPr>
-            <a:r>
-              <a:rPr lang="en-US" sz="800" b="1" spc="150" kern="0" dirty="0">
+            <a:pPr marL="0" indent="0">
+              <a:buNone/>
+            </a:pPr>
+            <a:r>
+              <a:rPr lang="en-US" sz="800" b="1" kern="0" spc="150" dirty="0">
                 <a:solidFill>
                   <a:srgbClr val="6E7E90"/>
                 </a:solidFill>
@@ -10230,7 +12718,7 @@
           <a:bodyPr wrap="square" lIns="0" tIns="0" rIns="0" bIns="0" rtlCol="0" anchor="t"/>
           <a:lstStyle/>
           <a:p>
-            <a:pPr indent="0" marL="0">
+            <a:pPr marL="0" indent="0">
               <a:buNone/>
             </a:pPr>
             <a:r>
@@ -10244,9 +12732,6 @@
               </a:rPr>
               <a:t>01  </a:t>
             </a:r>
-            <a:pPr indent="0" marL="0">
-              <a:buNone/>
-            </a:pPr>
             <a:r>
               <a:rPr lang="en-US" sz="1150" b="1" dirty="0">
                 <a:solidFill>
@@ -10283,11 +12768,11 @@
           <a:bodyPr wrap="square" lIns="0" tIns="0" rIns="0" bIns="0" rtlCol="0" anchor="t"/>
           <a:lstStyle/>
           <a:p>
-            <a:pPr algn="r" indent="0" marL="0">
-              <a:buNone/>
-            </a:pPr>
-            <a:r>
-              <a:rPr lang="en-US" sz="1700" b="1" spc="-50" kern="0" dirty="0">
+            <a:pPr marL="0" indent="0" algn="r">
+              <a:buNone/>
+            </a:pPr>
+            <a:r>
+              <a:rPr lang="en-US" sz="1700" b="1" kern="0" spc="-50" dirty="0">
                 <a:solidFill>
                   <a:srgbClr val="0C3C75"/>
                 </a:solidFill>
@@ -10401,7 +12886,7 @@
           <a:bodyPr wrap="square" lIns="0" tIns="0" rIns="0" bIns="0" rtlCol="0" anchor="t"/>
           <a:lstStyle/>
           <a:p>
-            <a:pPr indent="0" marL="0">
+            <a:pPr marL="0" indent="0">
               <a:buNone/>
             </a:pPr>
             <a:r>
@@ -10440,7 +12925,7 @@
           <a:bodyPr wrap="square" lIns="0" tIns="0" rIns="0" bIns="0" rtlCol="0" anchor="t"/>
           <a:lstStyle/>
           <a:p>
-            <a:pPr algn="r" indent="0" marL="0">
+            <a:pPr marL="0" indent="0" algn="r">
               <a:buNone/>
             </a:pPr>
             <a:r>
@@ -10502,7 +12987,7 @@
           <a:bodyPr wrap="square" lIns="0" tIns="0" rIns="0" bIns="0" rtlCol="0" anchor="t"/>
           <a:lstStyle/>
           <a:p>
-            <a:pPr indent="0" marL="0">
+            <a:pPr marL="0" indent="0">
               <a:buNone/>
             </a:pPr>
             <a:r>
@@ -10516,9 +13001,6 @@
               </a:rPr>
               <a:t>02  </a:t>
             </a:r>
-            <a:pPr indent="0" marL="0">
-              <a:buNone/>
-            </a:pPr>
             <a:r>
               <a:rPr lang="en-US" sz="1150" b="1" dirty="0">
                 <a:solidFill>
@@ -10555,11 +13037,11 @@
           <a:bodyPr wrap="square" lIns="0" tIns="0" rIns="0" bIns="0" rtlCol="0" anchor="t"/>
           <a:lstStyle/>
           <a:p>
-            <a:pPr algn="r" indent="0" marL="0">
-              <a:buNone/>
-            </a:pPr>
-            <a:r>
-              <a:rPr lang="en-US" sz="1700" b="1" spc="-50" kern="0" dirty="0">
+            <a:pPr marL="0" indent="0" algn="r">
+              <a:buNone/>
+            </a:pPr>
+            <a:r>
+              <a:rPr lang="en-US" sz="1700" b="1" kern="0" spc="-50" dirty="0">
                 <a:solidFill>
                   <a:srgbClr val="0C3C75"/>
                 </a:solidFill>
@@ -10673,7 +13155,7 @@
           <a:bodyPr wrap="square" lIns="0" tIns="0" rIns="0" bIns="0" rtlCol="0" anchor="t"/>
           <a:lstStyle/>
           <a:p>
-            <a:pPr indent="0" marL="0">
+            <a:pPr marL="0" indent="0">
               <a:buNone/>
             </a:pPr>
             <a:r>
@@ -10712,7 +13194,7 @@
           <a:bodyPr wrap="square" lIns="0" tIns="0" rIns="0" bIns="0" rtlCol="0" anchor="t"/>
           <a:lstStyle/>
           <a:p>
-            <a:pPr algn="r" indent="0" marL="0">
+            <a:pPr marL="0" indent="0" algn="r">
               <a:buNone/>
             </a:pPr>
             <a:r>
@@ -10774,7 +13256,7 @@
           <a:bodyPr wrap="square" lIns="0" tIns="0" rIns="0" bIns="0" rtlCol="0" anchor="t"/>
           <a:lstStyle/>
           <a:p>
-            <a:pPr indent="0" marL="0">
+            <a:pPr marL="0" indent="0">
               <a:buNone/>
             </a:pPr>
             <a:r>
@@ -10788,9 +13270,6 @@
               </a:rPr>
               <a:t>03  </a:t>
             </a:r>
-            <a:pPr indent="0" marL="0">
-              <a:buNone/>
-            </a:pPr>
             <a:r>
               <a:rPr lang="en-US" sz="1150" b="1" dirty="0">
                 <a:solidFill>
@@ -10827,11 +13306,11 @@
           <a:bodyPr wrap="square" lIns="0" tIns="0" rIns="0" bIns="0" rtlCol="0" anchor="t"/>
           <a:lstStyle/>
           <a:p>
-            <a:pPr algn="r" indent="0" marL="0">
-              <a:buNone/>
-            </a:pPr>
-            <a:r>
-              <a:rPr lang="en-US" sz="1700" b="1" spc="-50" kern="0" dirty="0">
+            <a:pPr marL="0" indent="0" algn="r">
+              <a:buNone/>
+            </a:pPr>
+            <a:r>
+              <a:rPr lang="en-US" sz="1700" b="1" kern="0" spc="-50" dirty="0">
                 <a:solidFill>
                   <a:srgbClr val="0C3C75"/>
                 </a:solidFill>
@@ -10945,7 +13424,7 @@
           <a:bodyPr wrap="square" lIns="0" tIns="0" rIns="0" bIns="0" rtlCol="0" anchor="t"/>
           <a:lstStyle/>
           <a:p>
-            <a:pPr indent="0" marL="0">
+            <a:pPr marL="0" indent="0">
               <a:buNone/>
             </a:pPr>
             <a:r>
@@ -10984,7 +13463,7 @@
           <a:bodyPr wrap="square" lIns="0" tIns="0" rIns="0" bIns="0" rtlCol="0" anchor="t"/>
           <a:lstStyle/>
           <a:p>
-            <a:pPr algn="r" indent="0" marL="0">
+            <a:pPr marL="0" indent="0" algn="r">
               <a:buNone/>
             </a:pPr>
             <a:r>
@@ -11046,7 +13525,7 @@
           <a:bodyPr wrap="square" lIns="0" tIns="0" rIns="0" bIns="0" rtlCol="0" anchor="t"/>
           <a:lstStyle/>
           <a:p>
-            <a:pPr indent="0" marL="0">
+            <a:pPr marL="0" indent="0">
               <a:buNone/>
             </a:pPr>
             <a:r>
@@ -11060,9 +13539,6 @@
               </a:rPr>
               <a:t>04  </a:t>
             </a:r>
-            <a:pPr indent="0" marL="0">
-              <a:buNone/>
-            </a:pPr>
             <a:r>
               <a:rPr lang="en-US" sz="1150" b="1" dirty="0">
                 <a:solidFill>
@@ -11099,11 +13575,11 @@
           <a:bodyPr wrap="square" lIns="0" tIns="0" rIns="0" bIns="0" rtlCol="0" anchor="t"/>
           <a:lstStyle/>
           <a:p>
-            <a:pPr algn="r" indent="0" marL="0">
-              <a:buNone/>
-            </a:pPr>
-            <a:r>
-              <a:rPr lang="en-US" sz="1700" b="1" spc="-50" kern="0" dirty="0">
+            <a:pPr marL="0" indent="0" algn="r">
+              <a:buNone/>
+            </a:pPr>
+            <a:r>
+              <a:rPr lang="en-US" sz="1700" b="1" kern="0" spc="-50" dirty="0">
                 <a:solidFill>
                   <a:srgbClr val="0C3C75"/>
                 </a:solidFill>
@@ -11217,7 +13693,7 @@
           <a:bodyPr wrap="square" lIns="0" tIns="0" rIns="0" bIns="0" rtlCol="0" anchor="t"/>
           <a:lstStyle/>
           <a:p>
-            <a:pPr indent="0" marL="0">
+            <a:pPr marL="0" indent="0">
               <a:buNone/>
             </a:pPr>
             <a:r>
@@ -11256,7 +13732,7 @@
           <a:bodyPr wrap="square" lIns="0" tIns="0" rIns="0" bIns="0" rtlCol="0" anchor="t"/>
           <a:lstStyle/>
           <a:p>
-            <a:pPr algn="r" indent="0" marL="0">
+            <a:pPr marL="0" indent="0" algn="r">
               <a:buNone/>
             </a:pPr>
             <a:r>
@@ -11368,11 +13844,11 @@
           <a:bodyPr wrap="square" lIns="0" tIns="0" rIns="0" bIns="0" rtlCol="0" anchor="t"/>
           <a:lstStyle/>
           <a:p>
-            <a:pPr indent="0" marL="0">
-              <a:buNone/>
-            </a:pPr>
-            <a:r>
-              <a:rPr lang="en-US" sz="750" b="1" spc="50" kern="0" dirty="0">
+            <a:pPr marL="0" indent="0">
+              <a:buNone/>
+            </a:pPr>
+            <a:r>
+              <a:rPr lang="en-US" sz="750" b="1" kern="0" spc="50" dirty="0">
                 <a:solidFill>
                   <a:srgbClr val="7FD3E3"/>
                 </a:solidFill>
@@ -11407,11 +13883,11 @@
           <a:bodyPr wrap="square" lIns="0" tIns="0" rIns="0" bIns="0" rtlCol="0" anchor="t"/>
           <a:lstStyle/>
           <a:p>
-            <a:pPr indent="0" marL="0">
-              <a:buNone/>
-            </a:pPr>
-            <a:r>
-              <a:rPr lang="en-US" sz="3800" spc="-200" kern="0" dirty="0">
+            <a:pPr marL="0" indent="0">
+              <a:buNone/>
+            </a:pPr>
+            <a:r>
+              <a:rPr lang="en-US" sz="3800" kern="0" spc="-200" dirty="0">
                 <a:solidFill>
                   <a:srgbClr val="FFFFFF"/>
                 </a:solidFill>
@@ -11469,11 +13945,11 @@
           <a:bodyPr wrap="square" lIns="0" tIns="0" rIns="0" bIns="0" rtlCol="0" anchor="t"/>
           <a:lstStyle/>
           <a:p>
-            <a:pPr indent="0" marL="0">
-              <a:buNone/>
-            </a:pPr>
-            <a:r>
-              <a:rPr lang="en-US" sz="750" b="1" spc="50" kern="0" dirty="0">
+            <a:pPr marL="0" indent="0">
+              <a:buNone/>
+            </a:pPr>
+            <a:r>
+              <a:rPr lang="en-US" sz="750" b="1" kern="0" spc="50" dirty="0">
                 <a:solidFill>
                   <a:srgbClr val="7FD3E3"/>
                 </a:solidFill>
@@ -11508,11 +13984,11 @@
           <a:bodyPr wrap="square" lIns="0" tIns="0" rIns="0" bIns="0" rtlCol="0" anchor="t"/>
           <a:lstStyle/>
           <a:p>
-            <a:pPr indent="0" marL="0">
-              <a:buNone/>
-            </a:pPr>
-            <a:r>
-              <a:rPr lang="en-US" sz="2800" spc="-100" kern="0" dirty="0">
+            <a:pPr marL="0" indent="0">
+              <a:buNone/>
+            </a:pPr>
+            <a:r>
+              <a:rPr lang="en-US" sz="2800" kern="0" spc="-100" dirty="0">
                 <a:solidFill>
                   <a:srgbClr val="FFFFFF"/>
                 </a:solidFill>
@@ -11570,11 +14046,11 @@
           <a:bodyPr wrap="square" lIns="0" tIns="0" rIns="0" bIns="0" rtlCol="0" anchor="t"/>
           <a:lstStyle/>
           <a:p>
-            <a:pPr indent="0" marL="0">
-              <a:buNone/>
-            </a:pPr>
-            <a:r>
-              <a:rPr lang="en-US" sz="750" b="1" spc="50" kern="0" dirty="0">
+            <a:pPr marL="0" indent="0">
+              <a:buNone/>
+            </a:pPr>
+            <a:r>
+              <a:rPr lang="en-US" sz="750" b="1" kern="0" spc="50" dirty="0">
                 <a:solidFill>
                   <a:srgbClr val="7FD3E3"/>
                 </a:solidFill>
@@ -11609,11 +14085,11 @@
           <a:bodyPr wrap="square" lIns="0" tIns="0" rIns="0" bIns="0" rtlCol="0" anchor="t"/>
           <a:lstStyle/>
           <a:p>
-            <a:pPr indent="0" marL="0">
-              <a:buNone/>
-            </a:pPr>
-            <a:r>
-              <a:rPr lang="en-US" sz="2800" spc="-100" kern="0" dirty="0">
+            <a:pPr marL="0" indent="0">
+              <a:buNone/>
+            </a:pPr>
+            <a:r>
+              <a:rPr lang="en-US" sz="2800" kern="0" spc="-100" dirty="0">
                 <a:solidFill>
                   <a:srgbClr val="FFFFFF"/>
                 </a:solidFill>
@@ -11648,11 +14124,11 @@
           <a:bodyPr wrap="square" lIns="0" tIns="0" rIns="0" bIns="0" rtlCol="0" anchor="t"/>
           <a:lstStyle/>
           <a:p>
-            <a:pPr indent="0" marL="0">
-              <a:buNone/>
-            </a:pPr>
-            <a:r>
-              <a:rPr lang="en-US" sz="800" b="1" spc="150" kern="0" dirty="0">
+            <a:pPr marL="0" indent="0">
+              <a:buNone/>
+            </a:pPr>
+            <a:r>
+              <a:rPr lang="en-US" sz="800" b="1" kern="0" spc="150" dirty="0">
                 <a:solidFill>
                   <a:srgbClr val="0A8FA6"/>
                 </a:solidFill>
@@ -11687,11 +14163,11 @@
           <a:bodyPr wrap="square" lIns="0" tIns="0" rIns="0" bIns="0" rtlCol="0" anchor="t"/>
           <a:lstStyle/>
           <a:p>
-            <a:pPr indent="0" marL="0">
-              <a:buNone/>
-            </a:pPr>
-            <a:r>
-              <a:rPr lang="en-US" sz="1300" b="1" spc="-30" kern="0" dirty="0">
+            <a:pPr marL="0" indent="0">
+              <a:buNone/>
+            </a:pPr>
+            <a:r>
+              <a:rPr lang="en-US" sz="1300" b="1" kern="0" spc="-30" dirty="0">
                 <a:solidFill>
                   <a:srgbClr val="0C3C75"/>
                 </a:solidFill>
@@ -15803,7 +18279,7 @@
           <a:bodyPr wrap="square" lIns="0" tIns="0" rIns="0" bIns="0" rtlCol="0" anchor="t"/>
           <a:lstStyle/>
           <a:p>
-            <a:pPr indent="0" marL="0">
+            <a:pPr marL="0" indent="0">
               <a:buNone/>
             </a:pPr>
             <a:r>
@@ -15869,7 +18345,7 @@
           <a:bodyPr wrap="square" lIns="0" tIns="0" rIns="0" bIns="0" rtlCol="0" anchor="t"/>
           <a:lstStyle/>
           <a:p>
-            <a:pPr indent="0" marL="0">
+            <a:pPr marL="0" indent="0">
               <a:buNone/>
             </a:pPr>
             <a:r>
@@ -15908,11 +18384,11 @@
           <a:bodyPr wrap="square" lIns="0" tIns="0" rIns="0" bIns="0" rtlCol="0" anchor="t"/>
           <a:lstStyle/>
           <a:p>
-            <a:pPr indent="0" marL="0">
-              <a:buNone/>
-            </a:pPr>
-            <a:r>
-              <a:rPr lang="en-US" sz="800" b="1" spc="150" kern="0" dirty="0">
+            <a:pPr marL="0" indent="0">
+              <a:buNone/>
+            </a:pPr>
+            <a:r>
+              <a:rPr lang="en-US" sz="800" b="1" kern="0" spc="150" dirty="0">
                 <a:solidFill>
                   <a:srgbClr val="0A8FA6"/>
                 </a:solidFill>
@@ -15947,11 +18423,11 @@
           <a:bodyPr wrap="square" lIns="0" tIns="0" rIns="0" bIns="0" rtlCol="0" anchor="t"/>
           <a:lstStyle/>
           <a:p>
-            <a:pPr indent="0" marL="0">
-              <a:buNone/>
-            </a:pPr>
-            <a:r>
-              <a:rPr lang="en-US" sz="1300" b="1" spc="-30" kern="0" dirty="0">
+            <a:pPr marL="0" indent="0">
+              <a:buNone/>
+            </a:pPr>
+            <a:r>
+              <a:rPr lang="en-US" sz="1300" b="1" kern="0" spc="-30" dirty="0">
                 <a:solidFill>
                   <a:srgbClr val="0C3C75"/>
                 </a:solidFill>
@@ -15986,7 +18462,7 @@
           <a:bodyPr wrap="square" lIns="0" tIns="0" rIns="0" bIns="0" rtlCol="0" anchor="t"/>
           <a:lstStyle/>
           <a:p>
-            <a:pPr indent="0" marL="0">
+            <a:pPr marL="0" indent="0">
               <a:buNone/>
             </a:pPr>
             <a:r>
@@ -16000,9 +18476,6 @@
               </a:rPr>
               <a:t>$36M</a:t>
             </a:r>
-            <a:pPr indent="0" marL="0">
-              <a:buNone/>
-            </a:pPr>
             <a:r>
               <a:rPr lang="en-US" sz="900" dirty="0">
                 <a:solidFill>
@@ -16020,7 +18493,7 @@
       </p:sp>
       <p:graphicFrame>
         <p:nvGraphicFramePr>
-          <p:cNvPr id="208" name="Chart 0" descr=""/>
+          <p:cNvPr id="208" name="Chart 0"/>
           <p:cNvGraphicFramePr/>
           <p:nvPr/>
         </p:nvGraphicFramePr>
@@ -16028,9 +18501,9 @@
           <a:off x="8519008" y="3703320"/>
           <a:ext cx="3124048" cy="1691640"/>
         </p:xfrm>
-        <a:graphic xmlns:a="http://schemas.openxmlformats.org/drawingml/2006/main">
+        <a:graphic>
           <a:graphicData uri="http://schemas.openxmlformats.org/drawingml/2006/chart">
-            <c:chart xmlns:c="http://schemas.openxmlformats.org/drawingml/2006/chart" r:id="rId1"/>
+            <c:chart xmlns:c="http://schemas.openxmlformats.org/drawingml/2006/chart" xmlns:r="http://schemas.openxmlformats.org/officeDocument/2006/relationships" r:id="rId3"/>
           </a:graphicData>
         </a:graphic>
       </p:graphicFrame>
@@ -16082,11 +18555,11 @@
           <a:bodyPr wrap="square" lIns="0" tIns="0" rIns="0" bIns="0" rtlCol="0" anchor="t"/>
           <a:lstStyle/>
           <a:p>
-            <a:pPr indent="0" marL="0">
-              <a:buNone/>
-            </a:pPr>
-            <a:r>
-              <a:rPr lang="en-US" sz="750" spc="100" kern="0" dirty="0">
+            <a:pPr marL="0" indent="0">
+              <a:buNone/>
+            </a:pPr>
+            <a:r>
+              <a:rPr lang="en-US" sz="750" kern="0" spc="100" dirty="0">
                 <a:solidFill>
                   <a:srgbClr val="6E7E90"/>
                 </a:solidFill>
@@ -16121,11 +18594,11 @@
           <a:bodyPr wrap="square" lIns="0" tIns="0" rIns="0" bIns="0" rtlCol="0" anchor="t"/>
           <a:lstStyle/>
           <a:p>
-            <a:pPr indent="0" marL="0">
-              <a:buNone/>
-            </a:pPr>
-            <a:r>
-              <a:rPr lang="en-US" sz="1500" b="1" spc="-50" kern="0" dirty="0">
+            <a:pPr marL="0" indent="0">
+              <a:buNone/>
+            </a:pPr>
+            <a:r>
+              <a:rPr lang="en-US" sz="1500" b="1" kern="0" spc="-50" dirty="0">
                 <a:solidFill>
                   <a:srgbClr val="0C3C75"/>
                 </a:solidFill>
@@ -16160,7 +18633,7 @@
           <a:bodyPr wrap="square" lIns="0" tIns="0" rIns="0" bIns="0" rtlCol="0" anchor="ctr"/>
           <a:lstStyle/>
           <a:p>
-            <a:pPr algn="ctr" indent="0" marL="0">
+            <a:pPr marL="0" indent="0" algn="ctr">
               <a:buNone/>
             </a:pPr>
             <a:r>
@@ -16226,11 +18699,11 @@
           <a:bodyPr wrap="square" lIns="0" tIns="0" rIns="0" bIns="0" rtlCol="0" anchor="t"/>
           <a:lstStyle/>
           <a:p>
-            <a:pPr indent="0" marL="0">
-              <a:buNone/>
-            </a:pPr>
-            <a:r>
-              <a:rPr lang="en-US" sz="750" spc="100" kern="0" dirty="0">
+            <a:pPr marL="0" indent="0">
+              <a:buNone/>
+            </a:pPr>
+            <a:r>
+              <a:rPr lang="en-US" sz="750" kern="0" spc="100" dirty="0">
                 <a:solidFill>
                   <a:srgbClr val="6E7E90"/>
                 </a:solidFill>
@@ -16265,11 +18738,11 @@
           <a:bodyPr wrap="square" lIns="0" tIns="0" rIns="0" bIns="0" rtlCol="0" anchor="t"/>
           <a:lstStyle/>
           <a:p>
-            <a:pPr indent="0" marL="0">
-              <a:buNone/>
-            </a:pPr>
-            <a:r>
-              <a:rPr lang="en-US" sz="1500" b="1" spc="-50" kern="0" dirty="0">
+            <a:pPr marL="0" indent="0">
+              <a:buNone/>
+            </a:pPr>
+            <a:r>
+              <a:rPr lang="en-US" sz="1500" b="1" kern="0" spc="-50" dirty="0">
                 <a:solidFill>
                   <a:srgbClr val="0C3C75"/>
                 </a:solidFill>
@@ -16304,7 +18777,7 @@
           <a:bodyPr wrap="square" lIns="0" tIns="0" rIns="0" bIns="0" rtlCol="0" anchor="ctr"/>
           <a:lstStyle/>
           <a:p>
-            <a:pPr algn="ctr" indent="0" marL="0">
+            <a:pPr marL="0" indent="0" algn="ctr">
               <a:buNone/>
             </a:pPr>
             <a:r>
@@ -16370,11 +18843,11 @@
           <a:bodyPr wrap="square" lIns="0" tIns="0" rIns="0" bIns="0" rtlCol="0" anchor="t"/>
           <a:lstStyle/>
           <a:p>
-            <a:pPr indent="0" marL="0">
-              <a:buNone/>
-            </a:pPr>
-            <a:r>
-              <a:rPr lang="en-US" sz="750" spc="100" kern="0" dirty="0">
+            <a:pPr marL="0" indent="0">
+              <a:buNone/>
+            </a:pPr>
+            <a:r>
+              <a:rPr lang="en-US" sz="750" kern="0" spc="100" dirty="0">
                 <a:solidFill>
                   <a:srgbClr val="6E7E90"/>
                 </a:solidFill>
@@ -16409,11 +18882,11 @@
           <a:bodyPr wrap="square" lIns="0" tIns="0" rIns="0" bIns="0" rtlCol="0" anchor="t"/>
           <a:lstStyle/>
           <a:p>
-            <a:pPr indent="0" marL="0">
-              <a:buNone/>
-            </a:pPr>
-            <a:r>
-              <a:rPr lang="en-US" sz="1500" b="1" spc="-50" kern="0" dirty="0">
+            <a:pPr marL="0" indent="0">
+              <a:buNone/>
+            </a:pPr>
+            <a:r>
+              <a:rPr lang="en-US" sz="1500" b="1" kern="0" spc="-50" dirty="0">
                 <a:solidFill>
                   <a:srgbClr val="0C3C75"/>
                 </a:solidFill>
@@ -16448,7 +18921,7 @@
           <a:bodyPr wrap="square" lIns="0" tIns="0" rIns="0" bIns="0" rtlCol="0" anchor="ctr"/>
           <a:lstStyle/>
           <a:p>
-            <a:pPr algn="ctr" indent="0" marL="0">
+            <a:pPr marL="0" indent="0" algn="ctr">
               <a:buNone/>
             </a:pPr>
             <a:r>
@@ -16514,11 +18987,11 @@
           <a:bodyPr wrap="square" lIns="0" tIns="0" rIns="0" bIns="0" rtlCol="0" anchor="t"/>
           <a:lstStyle/>
           <a:p>
-            <a:pPr indent="0" marL="0">
-              <a:buNone/>
-            </a:pPr>
-            <a:r>
-              <a:rPr lang="en-US" sz="750" spc="100" kern="0" dirty="0">
+            <a:pPr marL="0" indent="0">
+              <a:buNone/>
+            </a:pPr>
+            <a:r>
+              <a:rPr lang="en-US" sz="750" kern="0" spc="100" dirty="0">
                 <a:solidFill>
                   <a:srgbClr val="6E7E90"/>
                 </a:solidFill>
@@ -16553,11 +19026,11 @@
           <a:bodyPr wrap="square" lIns="0" tIns="0" rIns="0" bIns="0" rtlCol="0" anchor="t"/>
           <a:lstStyle/>
           <a:p>
-            <a:pPr indent="0" marL="0">
-              <a:buNone/>
-            </a:pPr>
-            <a:r>
-              <a:rPr lang="en-US" sz="1500" b="1" spc="-50" kern="0" dirty="0">
+            <a:pPr marL="0" indent="0">
+              <a:buNone/>
+            </a:pPr>
+            <a:r>
+              <a:rPr lang="en-US" sz="1500" b="1" kern="0" spc="-50" dirty="0">
                 <a:solidFill>
                   <a:srgbClr val="0A8FA6"/>
                 </a:solidFill>
@@ -16592,11 +19065,11 @@
           <a:bodyPr wrap="square" lIns="0" tIns="0" rIns="0" bIns="0" rtlCol="0" anchor="t"/>
           <a:lstStyle/>
           <a:p>
-            <a:pPr algn="r" indent="0" marL="0">
-              <a:buNone/>
-            </a:pPr>
-            <a:r>
-              <a:rPr lang="en-US" sz="800" spc="150" kern="0" dirty="0">
+            <a:pPr marL="0" indent="0" algn="r">
+              <a:buNone/>
+            </a:pPr>
+            <a:r>
+              <a:rPr lang="en-US" sz="800" kern="0" spc="150" dirty="0">
                 <a:solidFill>
                   <a:srgbClr val="6E7E90"/>
                 </a:solidFill>
@@ -16656,11 +19129,11 @@
           <a:bodyPr wrap="square" lIns="0" tIns="0" rIns="0" bIns="0" rtlCol="0" anchor="t"/>
           <a:lstStyle/>
           <a:p>
-            <a:pPr indent="0" marL="0">
-              <a:buNone/>
-            </a:pPr>
-            <a:r>
-              <a:rPr lang="en-US" sz="900" spc="50" kern="0" dirty="0">
+            <a:pPr marL="0" indent="0">
+              <a:buNone/>
+            </a:pPr>
+            <a:r>
+              <a:rPr lang="en-US" sz="900" kern="0" spc="50" dirty="0">
                 <a:solidFill>
                   <a:srgbClr val="6E7E90"/>
                 </a:solidFill>
@@ -16670,9 +19143,6 @@
               </a:rPr>
               <a:t>08</a:t>
             </a:r>
-            <a:pPr indent="0" marL="0">
-              <a:buNone/>
-            </a:pPr>
             <a:r>
               <a:rPr lang="en-US" sz="900" dirty="0">
                 <a:solidFill>
@@ -16684,11 +19154,8 @@
               </a:rPr>
               <a:t>   |   </a:t>
             </a:r>
-            <a:pPr indent="0" marL="0">
-              <a:buNone/>
-            </a:pPr>
-            <a:r>
-              <a:rPr lang="en-US" sz="900" b="1" spc="200" kern="0" dirty="0">
+            <a:r>
+              <a:rPr lang="en-US" sz="900" b="1" kern="0" spc="200" dirty="0">
                 <a:solidFill>
                   <a:srgbClr val="0A8FA6"/>
                 </a:solidFill>
@@ -16723,14 +19190,14 @@
           <a:bodyPr wrap="square" lIns="0" tIns="0" rIns="0" bIns="0" rtlCol="0" anchor="t"/>
           <a:lstStyle/>
           <a:p>
-            <a:pPr indent="0" marL="0">
+            <a:pPr marL="0" indent="0">
               <a:lnSpc>
                 <a:spcPct val="100000"/>
               </a:lnSpc>
               <a:buNone/>
             </a:pPr>
             <a:r>
-              <a:rPr lang="en-US" sz="3000" spc="-100" kern="0" dirty="0">
+              <a:rPr lang="en-US" sz="3000" kern="0" spc="-100" dirty="0">
                 <a:solidFill>
                   <a:srgbClr val="0C3C75"/>
                 </a:solidFill>
@@ -16743,14 +19210,14 @@
             <a:endParaRPr lang="en-US" sz="3000" dirty="0"/>
           </a:p>
           <a:p>
-            <a:pPr indent="0" marL="0">
+            <a:pPr marL="0" indent="0">
               <a:lnSpc>
                 <a:spcPct val="100000"/>
               </a:lnSpc>
               <a:buNone/>
             </a:pPr>
             <a:r>
-              <a:rPr lang="en-US" sz="3000" spc="-100" kern="0" dirty="0">
+              <a:rPr lang="en-US" sz="3000" kern="0" spc="-100" dirty="0">
                 <a:solidFill>
                   <a:srgbClr val="6A7F96"/>
                 </a:solidFill>
@@ -16837,11 +19304,11 @@
           <a:bodyPr wrap="square" lIns="0" tIns="0" rIns="0" bIns="0" rtlCol="0" anchor="ctr"/>
           <a:lstStyle/>
           <a:p>
-            <a:pPr indent="0" marL="0">
-              <a:buNone/>
-            </a:pPr>
-            <a:r>
-              <a:rPr lang="en-US" sz="900" b="1" spc="100" kern="0" dirty="0">
+            <a:pPr marL="0" indent="0">
+              <a:buNone/>
+            </a:pPr>
+            <a:r>
+              <a:rPr lang="en-US" sz="900" b="1" kern="0" spc="100" dirty="0">
                 <a:solidFill>
                   <a:srgbClr val="0C3C75"/>
                 </a:solidFill>
@@ -16876,11 +19343,11 @@
           <a:bodyPr wrap="square" lIns="0" tIns="0" rIns="0" bIns="0" rtlCol="0" anchor="ctr"/>
           <a:lstStyle/>
           <a:p>
-            <a:pPr algn="r" indent="0" marL="0">
-              <a:buNone/>
-            </a:pPr>
-            <a:r>
-              <a:rPr lang="en-US" sz="900" b="1" spc="100" kern="0" dirty="0">
+            <a:pPr marL="0" indent="0" algn="r">
+              <a:buNone/>
+            </a:pPr>
+            <a:r>
+              <a:rPr lang="en-US" sz="900" b="1" kern="0" spc="100" dirty="0">
                 <a:solidFill>
                   <a:srgbClr val="0C3C75"/>
                 </a:solidFill>
@@ -16969,7 +19436,7 @@
           <a:bodyPr wrap="square" lIns="0" tIns="0" rIns="0" bIns="0" rtlCol="0" anchor="t"/>
           <a:lstStyle/>
           <a:p>
-            <a:pPr indent="0" marL="0">
+            <a:pPr marL="0" indent="0">
               <a:buNone/>
             </a:pPr>
             <a:r>
@@ -17008,11 +19475,11 @@
           <a:bodyPr wrap="square" lIns="0" tIns="0" rIns="0" bIns="0" rtlCol="0" anchor="t"/>
           <a:lstStyle/>
           <a:p>
-            <a:pPr indent="0" marL="0">
-              <a:buNone/>
-            </a:pPr>
-            <a:r>
-              <a:rPr lang="en-US" sz="1500" b="1" spc="-30" kern="0" dirty="0">
+            <a:pPr marL="0" indent="0">
+              <a:buNone/>
+            </a:pPr>
+            <a:r>
+              <a:rPr lang="en-US" sz="1500" b="1" kern="0" spc="-30" dirty="0">
                 <a:solidFill>
                   <a:srgbClr val="0C3C75"/>
                 </a:solidFill>
@@ -17047,7 +19514,7 @@
           <a:bodyPr wrap="square" lIns="0" tIns="0" rIns="0" bIns="0" rtlCol="0" anchor="t"/>
           <a:lstStyle/>
           <a:p>
-            <a:pPr indent="0" marL="0">
+            <a:pPr marL="0" indent="0">
               <a:lnSpc>
                 <a:spcPct val="125000"/>
               </a:lnSpc>
@@ -17141,11 +19608,11 @@
           <a:bodyPr wrap="square" lIns="0" tIns="0" rIns="0" bIns="0" rtlCol="0" anchor="ctr"/>
           <a:lstStyle/>
           <a:p>
-            <a:pPr indent="0" marL="0">
-              <a:buNone/>
-            </a:pPr>
-            <a:r>
-              <a:rPr lang="en-US" sz="900" b="1" spc="100" kern="0" dirty="0">
+            <a:pPr marL="0" indent="0">
+              <a:buNone/>
+            </a:pPr>
+            <a:r>
+              <a:rPr lang="en-US" sz="900" b="1" kern="0" spc="100" dirty="0">
                 <a:solidFill>
                   <a:srgbClr val="FFFFFF"/>
                 </a:solidFill>
@@ -17180,11 +19647,11 @@
           <a:bodyPr wrap="square" lIns="0" tIns="0" rIns="0" bIns="0" rtlCol="0" anchor="ctr"/>
           <a:lstStyle/>
           <a:p>
-            <a:pPr algn="r" indent="0" marL="0">
-              <a:buNone/>
-            </a:pPr>
-            <a:r>
-              <a:rPr lang="en-US" sz="900" b="1" spc="100" kern="0" dirty="0">
+            <a:pPr marL="0" indent="0" algn="r">
+              <a:buNone/>
+            </a:pPr>
+            <a:r>
+              <a:rPr lang="en-US" sz="900" b="1" kern="0" spc="100" dirty="0">
                 <a:solidFill>
                   <a:srgbClr val="FFFFFF"/>
                 </a:solidFill>
@@ -17273,7 +19740,7 @@
           <a:bodyPr wrap="square" lIns="0" tIns="0" rIns="0" bIns="0" rtlCol="0" anchor="t"/>
           <a:lstStyle/>
           <a:p>
-            <a:pPr indent="0" marL="0">
+            <a:pPr marL="0" indent="0">
               <a:buNone/>
             </a:pPr>
             <a:r>
@@ -17312,11 +19779,11 @@
           <a:bodyPr wrap="square" lIns="0" tIns="0" rIns="0" bIns="0" rtlCol="0" anchor="t"/>
           <a:lstStyle/>
           <a:p>
-            <a:pPr indent="0" marL="0">
-              <a:buNone/>
-            </a:pPr>
-            <a:r>
-              <a:rPr lang="en-US" sz="1500" b="1" spc="-30" kern="0" dirty="0">
+            <a:pPr marL="0" indent="0">
+              <a:buNone/>
+            </a:pPr>
+            <a:r>
+              <a:rPr lang="en-US" sz="1500" b="1" kern="0" spc="-30" dirty="0">
                 <a:solidFill>
                   <a:srgbClr val="0C3C75"/>
                 </a:solidFill>
@@ -17351,7 +19818,7 @@
           <a:bodyPr wrap="square" lIns="0" tIns="0" rIns="0" bIns="0" rtlCol="0" anchor="t"/>
           <a:lstStyle/>
           <a:p>
-            <a:pPr indent="0" marL="0">
+            <a:pPr marL="0" indent="0">
               <a:lnSpc>
                 <a:spcPct val="125000"/>
               </a:lnSpc>
@@ -17445,11 +19912,11 @@
           <a:bodyPr wrap="square" lIns="0" tIns="0" rIns="0" bIns="0" rtlCol="0" anchor="ctr"/>
           <a:lstStyle/>
           <a:p>
-            <a:pPr indent="0" marL="0">
-              <a:buNone/>
-            </a:pPr>
-            <a:r>
-              <a:rPr lang="en-US" sz="900" b="1" spc="100" kern="0" dirty="0">
+            <a:pPr marL="0" indent="0">
+              <a:buNone/>
+            </a:pPr>
+            <a:r>
+              <a:rPr lang="en-US" sz="900" b="1" kern="0" spc="100" dirty="0">
                 <a:solidFill>
                   <a:srgbClr val="FFFFFF"/>
                 </a:solidFill>
@@ -17484,11 +19951,11 @@
           <a:bodyPr wrap="square" lIns="0" tIns="0" rIns="0" bIns="0" rtlCol="0" anchor="ctr"/>
           <a:lstStyle/>
           <a:p>
-            <a:pPr algn="r" indent="0" marL="0">
-              <a:buNone/>
-            </a:pPr>
-            <a:r>
-              <a:rPr lang="en-US" sz="900" b="1" spc="100" kern="0" dirty="0">
+            <a:pPr marL="0" indent="0" algn="r">
+              <a:buNone/>
+            </a:pPr>
+            <a:r>
+              <a:rPr lang="en-US" sz="900" b="1" kern="0" spc="100" dirty="0">
                 <a:solidFill>
                   <a:srgbClr val="FFFFFF"/>
                 </a:solidFill>
@@ -17577,7 +20044,7 @@
           <a:bodyPr wrap="square" lIns="0" tIns="0" rIns="0" bIns="0" rtlCol="0" anchor="t"/>
           <a:lstStyle/>
           <a:p>
-            <a:pPr indent="0" marL="0">
+            <a:pPr marL="0" indent="0">
               <a:buNone/>
             </a:pPr>
             <a:r>
@@ -17616,11 +20083,11 @@
           <a:bodyPr wrap="square" lIns="0" tIns="0" rIns="0" bIns="0" rtlCol="0" anchor="t"/>
           <a:lstStyle/>
           <a:p>
-            <a:pPr indent="0" marL="0">
-              <a:buNone/>
-            </a:pPr>
-            <a:r>
-              <a:rPr lang="en-US" sz="1500" b="1" spc="-30" kern="0" dirty="0">
+            <a:pPr marL="0" indent="0">
+              <a:buNone/>
+            </a:pPr>
+            <a:r>
+              <a:rPr lang="en-US" sz="1500" b="1" kern="0" spc="-30" dirty="0">
                 <a:solidFill>
                   <a:srgbClr val="0C3C75"/>
                 </a:solidFill>
@@ -17655,7 +20122,7 @@
           <a:bodyPr wrap="square" lIns="0" tIns="0" rIns="0" bIns="0" rtlCol="0" anchor="t"/>
           <a:lstStyle/>
           <a:p>
-            <a:pPr indent="0" marL="0">
+            <a:pPr marL="0" indent="0">
               <a:lnSpc>
                 <a:spcPct val="125000"/>
               </a:lnSpc>
@@ -17749,11 +20216,11 @@
           <a:bodyPr wrap="square" lIns="0" tIns="0" rIns="0" bIns="0" rtlCol="0" anchor="t"/>
           <a:lstStyle/>
           <a:p>
-            <a:pPr indent="0" marL="0">
-              <a:buNone/>
-            </a:pPr>
-            <a:r>
-              <a:rPr lang="en-US" sz="800" b="1" spc="150" kern="0" dirty="0">
+            <a:pPr marL="0" indent="0">
+              <a:buNone/>
+            </a:pPr>
+            <a:r>
+              <a:rPr lang="en-US" sz="800" b="1" kern="0" spc="150" dirty="0">
                 <a:solidFill>
                   <a:srgbClr val="0A8FA6"/>
                 </a:solidFill>
@@ -17788,7 +20255,7 @@
           <a:bodyPr wrap="square" lIns="0" tIns="0" rIns="0" bIns="0" rtlCol="0" anchor="t"/>
           <a:lstStyle/>
           <a:p>
-            <a:pPr indent="0" marL="0">
+            <a:pPr marL="0" indent="0">
               <a:lnSpc>
                 <a:spcPct val="125000"/>
               </a:lnSpc>
@@ -17805,12 +20272,6 @@
               </a:rPr>
               <a:t>Many claims take longer than 90 days to resolve. The pilot measures </a:t>
             </a:r>
-            <a:pPr indent="0" marL="0">
-              <a:lnSpc>
-                <a:spcPct val="125000"/>
-              </a:lnSpc>
-              <a:buNone/>
-            </a:pPr>
             <a:r>
               <a:rPr lang="en-US" sz="1050" b="1" dirty="0">
                 <a:solidFill>
@@ -17822,12 +20283,6 @@
               </a:rPr>
               <a:t>leading indicators</a:t>
             </a:r>
-            <a:pPr indent="0" marL="0">
-              <a:lnSpc>
-                <a:spcPct val="125000"/>
-              </a:lnSpc>
-              <a:buNone/>
-            </a:pPr>
             <a:r>
               <a:rPr lang="en-US" sz="1050" dirty="0">
                 <a:solidFill>
@@ -17916,11 +20371,11 @@
           <a:bodyPr wrap="square" lIns="0" tIns="0" rIns="0" bIns="0" rtlCol="0" anchor="t"/>
           <a:lstStyle/>
           <a:p>
-            <a:pPr indent="0" marL="0">
-              <a:buNone/>
-            </a:pPr>
-            <a:r>
-              <a:rPr lang="en-US" sz="800" b="1" spc="150" kern="0" dirty="0">
+            <a:pPr marL="0" indent="0">
+              <a:buNone/>
+            </a:pPr>
+            <a:r>
+              <a:rPr lang="en-US" sz="800" b="1" kern="0" spc="150" dirty="0">
                 <a:solidFill>
                   <a:srgbClr val="0A8FA6"/>
                 </a:solidFill>
@@ -18101,11 +20556,11 @@
           <a:bodyPr wrap="square" lIns="0" tIns="0" rIns="0" bIns="0" rtlCol="0" anchor="t"/>
           <a:lstStyle/>
           <a:p>
-            <a:pPr indent="0" marL="0">
-              <a:buNone/>
-            </a:pPr>
-            <a:r>
-              <a:rPr lang="en-US" sz="800" b="1" spc="150" kern="0" dirty="0">
+            <a:pPr marL="0" indent="0">
+              <a:buNone/>
+            </a:pPr>
+            <a:r>
+              <a:rPr lang="en-US" sz="800" b="1" kern="0" spc="150" dirty="0">
                 <a:solidFill>
                   <a:srgbClr val="0A8FA6"/>
                 </a:solidFill>
@@ -18234,11 +20689,11 @@
           <a:bodyPr wrap="square" lIns="0" tIns="0" rIns="0" bIns="0" rtlCol="0" anchor="t"/>
           <a:lstStyle/>
           <a:p>
-            <a:pPr algn="r" indent="0" marL="0">
-              <a:buNone/>
-            </a:pPr>
-            <a:r>
-              <a:rPr lang="en-US" sz="800" spc="150" kern="0" dirty="0">
+            <a:pPr marL="0" indent="0" algn="r">
+              <a:buNone/>
+            </a:pPr>
+            <a:r>
+              <a:rPr lang="en-US" sz="800" kern="0" spc="150" dirty="0">
                 <a:solidFill>
                   <a:srgbClr val="6E7E90"/>
                 </a:solidFill>
@@ -18298,11 +20753,11 @@
           <a:bodyPr wrap="square" lIns="0" tIns="0" rIns="0" bIns="0" rtlCol="0" anchor="t"/>
           <a:lstStyle/>
           <a:p>
-            <a:pPr indent="0" marL="0">
-              <a:buNone/>
-            </a:pPr>
-            <a:r>
-              <a:rPr lang="en-US" sz="900" spc="50" kern="0" dirty="0">
+            <a:pPr marL="0" indent="0">
+              <a:buNone/>
+            </a:pPr>
+            <a:r>
+              <a:rPr lang="en-US" sz="900" kern="0" spc="50" dirty="0">
                 <a:solidFill>
                   <a:srgbClr val="6E7E90"/>
                 </a:solidFill>
@@ -18312,9 +20767,6 @@
               </a:rPr>
               <a:t>09</a:t>
             </a:r>
-            <a:pPr indent="0" marL="0">
-              <a:buNone/>
-            </a:pPr>
             <a:r>
               <a:rPr lang="en-US" sz="900" dirty="0">
                 <a:solidFill>
@@ -18326,11 +20778,8 @@
               </a:rPr>
               <a:t>   |   </a:t>
             </a:r>
-            <a:pPr indent="0" marL="0">
-              <a:buNone/>
-            </a:pPr>
-            <a:r>
-              <a:rPr lang="en-US" sz="900" b="1" spc="200" kern="0" dirty="0">
+            <a:r>
+              <a:rPr lang="en-US" sz="900" b="1" kern="0" spc="200" dirty="0">
                 <a:solidFill>
                   <a:srgbClr val="0A8FA6"/>
                 </a:solidFill>
@@ -18365,14 +20814,14 @@
           <a:bodyPr wrap="square" lIns="0" tIns="0" rIns="0" bIns="0" rtlCol="0" anchor="t"/>
           <a:lstStyle/>
           <a:p>
-            <a:pPr indent="0" marL="0">
+            <a:pPr marL="0" indent="0">
               <a:lnSpc>
                 <a:spcPct val="100000"/>
               </a:lnSpc>
               <a:buNone/>
             </a:pPr>
             <a:r>
-              <a:rPr lang="en-US" sz="3000" spc="-100" kern="0" dirty="0">
+              <a:rPr lang="en-US" sz="3000" kern="0" spc="-100" dirty="0">
                 <a:solidFill>
                   <a:srgbClr val="0C3C75"/>
                 </a:solidFill>
@@ -18385,14 +20834,14 @@
             <a:endParaRPr lang="en-US" sz="3000" dirty="0"/>
           </a:p>
           <a:p>
-            <a:pPr indent="0" marL="0">
+            <a:pPr marL="0" indent="0">
               <a:lnSpc>
                 <a:spcPct val="100000"/>
               </a:lnSpc>
               <a:buNone/>
             </a:pPr>
             <a:r>
-              <a:rPr lang="en-US" sz="3000" spc="-100" kern="0" dirty="0">
+              <a:rPr lang="en-US" sz="3000" kern="0" spc="-100" dirty="0">
                 <a:solidFill>
                   <a:srgbClr val="6A7F96"/>
                 </a:solidFill>
@@ -18504,7 +20953,7 @@
           <a:bodyPr wrap="square" lIns="0" tIns="0" rIns="0" bIns="0" rtlCol="0" anchor="t"/>
           <a:lstStyle/>
           <a:p>
-            <a:pPr indent="0" marL="0">
+            <a:pPr marL="0" indent="0">
               <a:buNone/>
             </a:pPr>
             <a:r>
@@ -18543,7 +20992,7 @@
           <a:bodyPr wrap="square" lIns="0" tIns="0" rIns="0" bIns="0" rtlCol="0" anchor="t"/>
           <a:lstStyle/>
           <a:p>
-            <a:pPr indent="0" marL="0">
+            <a:pPr marL="0" indent="0">
               <a:lnSpc>
                 <a:spcPct val="120000"/>
               </a:lnSpc>
@@ -18756,7 +21205,7 @@
           <a:bodyPr wrap="square" lIns="0" tIns="0" rIns="0" bIns="0" rtlCol="0" anchor="t"/>
           <a:lstStyle/>
           <a:p>
-            <a:pPr indent="0" marL="0">
+            <a:pPr marL="0" indent="0">
               <a:buNone/>
             </a:pPr>
             <a:r>
@@ -18795,7 +21244,7 @@
           <a:bodyPr wrap="square" lIns="0" tIns="0" rIns="0" bIns="0" rtlCol="0" anchor="t"/>
           <a:lstStyle/>
           <a:p>
-            <a:pPr indent="0" marL="0">
+            <a:pPr marL="0" indent="0">
               <a:lnSpc>
                 <a:spcPct val="120000"/>
               </a:lnSpc>
@@ -18984,7 +21433,7 @@
           <a:bodyPr wrap="square" lIns="0" tIns="0" rIns="0" bIns="0" rtlCol="0" anchor="t"/>
           <a:lstStyle/>
           <a:p>
-            <a:pPr indent="0" marL="0">
+            <a:pPr marL="0" indent="0">
               <a:buNone/>
             </a:pPr>
             <a:r>
@@ -19023,7 +21472,7 @@
           <a:bodyPr wrap="square" lIns="0" tIns="0" rIns="0" bIns="0" rtlCol="0" anchor="t"/>
           <a:lstStyle/>
           <a:p>
-            <a:pPr indent="0" marL="0">
+            <a:pPr marL="0" indent="0">
               <a:lnSpc>
                 <a:spcPct val="120000"/>
               </a:lnSpc>
@@ -19236,7 +21685,7 @@
           <a:bodyPr wrap="square" lIns="0" tIns="0" rIns="0" bIns="0" rtlCol="0" anchor="t"/>
           <a:lstStyle/>
           <a:p>
-            <a:pPr indent="0" marL="0">
+            <a:pPr marL="0" indent="0">
               <a:buNone/>
             </a:pPr>
             <a:r>
@@ -19275,7 +21724,7 @@
           <a:bodyPr wrap="square" lIns="0" tIns="0" rIns="0" bIns="0" rtlCol="0" anchor="t"/>
           <a:lstStyle/>
           <a:p>
-            <a:pPr indent="0" marL="0">
+            <a:pPr marL="0" indent="0">
               <a:lnSpc>
                 <a:spcPct val="120000"/>
               </a:lnSpc>
@@ -19434,11 +21883,11 @@
           <a:bodyPr wrap="square" lIns="0" tIns="0" rIns="0" bIns="0" rtlCol="0" anchor="t"/>
           <a:lstStyle/>
           <a:p>
-            <a:pPr indent="0" marL="0">
-              <a:buNone/>
-            </a:pPr>
-            <a:r>
-              <a:rPr lang="en-US" sz="800" b="1" spc="150" kern="0" dirty="0">
+            <a:pPr marL="0" indent="0">
+              <a:buNone/>
+            </a:pPr>
+            <a:r>
+              <a:rPr lang="en-US" sz="800" b="1" kern="0" spc="150" dirty="0">
                 <a:solidFill>
                   <a:srgbClr val="0A8FA6"/>
                 </a:solidFill>
@@ -19521,11 +21970,11 @@
           <a:bodyPr wrap="square" lIns="0" tIns="0" rIns="0" bIns="0" rtlCol="0" anchor="t"/>
           <a:lstStyle/>
           <a:p>
-            <a:pPr indent="0" marL="0">
-              <a:buNone/>
-            </a:pPr>
-            <a:r>
-              <a:rPr lang="en-US" sz="900" b="1" spc="100" kern="0" dirty="0">
+            <a:pPr marL="0" indent="0">
+              <a:buNone/>
+            </a:pPr>
+            <a:r>
+              <a:rPr lang="en-US" sz="900" b="1" kern="0" spc="100" dirty="0">
                 <a:solidFill>
                   <a:srgbClr val="0C3C75"/>
                 </a:solidFill>
@@ -19560,7 +22009,7 @@
           <a:bodyPr wrap="square" lIns="0" tIns="0" rIns="0" bIns="0" rtlCol="0" anchor="t"/>
           <a:lstStyle/>
           <a:p>
-            <a:pPr indent="0" marL="0">
+            <a:pPr marL="0" indent="0">
               <a:lnSpc>
                 <a:spcPct val="120000"/>
               </a:lnSpc>
@@ -19627,11 +22076,11 @@
           <a:bodyPr wrap="square" lIns="0" tIns="0" rIns="0" bIns="0" rtlCol="0" anchor="t"/>
           <a:lstStyle/>
           <a:p>
-            <a:pPr indent="0" marL="0">
-              <a:buNone/>
-            </a:pPr>
-            <a:r>
-              <a:rPr lang="en-US" sz="900" b="1" spc="100" kern="0" dirty="0">
+            <a:pPr marL="0" indent="0">
+              <a:buNone/>
+            </a:pPr>
+            <a:r>
+              <a:rPr lang="en-US" sz="900" b="1" kern="0" spc="100" dirty="0">
                 <a:solidFill>
                   <a:srgbClr val="0C3C75"/>
                 </a:solidFill>
@@ -19666,7 +22115,7 @@
           <a:bodyPr wrap="square" lIns="0" tIns="0" rIns="0" bIns="0" rtlCol="0" anchor="t"/>
           <a:lstStyle/>
           <a:p>
-            <a:pPr indent="0" marL="0">
+            <a:pPr marL="0" indent="0">
               <a:lnSpc>
                 <a:spcPct val="120000"/>
               </a:lnSpc>
@@ -19733,11 +22182,11 @@
           <a:bodyPr wrap="square" lIns="0" tIns="0" rIns="0" bIns="0" rtlCol="0" anchor="t"/>
           <a:lstStyle/>
           <a:p>
-            <a:pPr indent="0" marL="0">
-              <a:buNone/>
-            </a:pPr>
-            <a:r>
-              <a:rPr lang="en-US" sz="900" b="1" spc="100" kern="0" dirty="0">
+            <a:pPr marL="0" indent="0">
+              <a:buNone/>
+            </a:pPr>
+            <a:r>
+              <a:rPr lang="en-US" sz="900" b="1" kern="0" spc="100" dirty="0">
                 <a:solidFill>
                   <a:srgbClr val="0C3C75"/>
                 </a:solidFill>
@@ -19772,7 +22221,7 @@
           <a:bodyPr wrap="square" lIns="0" tIns="0" rIns="0" bIns="0" rtlCol="0" anchor="t"/>
           <a:lstStyle/>
           <a:p>
-            <a:pPr indent="0" marL="0">
+            <a:pPr marL="0" indent="0">
               <a:lnSpc>
                 <a:spcPct val="120000"/>
               </a:lnSpc>
@@ -19839,11 +22288,11 @@
           <a:bodyPr wrap="square" lIns="0" tIns="0" rIns="0" bIns="0" rtlCol="0" anchor="t"/>
           <a:lstStyle/>
           <a:p>
-            <a:pPr indent="0" marL="0">
-              <a:buNone/>
-            </a:pPr>
-            <a:r>
-              <a:rPr lang="en-US" sz="900" b="1" spc="100" kern="0" dirty="0">
+            <a:pPr marL="0" indent="0">
+              <a:buNone/>
+            </a:pPr>
+            <a:r>
+              <a:rPr lang="en-US" sz="900" b="1" kern="0" spc="100" dirty="0">
                 <a:solidFill>
                   <a:srgbClr val="0C3C75"/>
                 </a:solidFill>
@@ -19878,7 +22327,7 @@
           <a:bodyPr wrap="square" lIns="0" tIns="0" rIns="0" bIns="0" rtlCol="0" anchor="t"/>
           <a:lstStyle/>
           <a:p>
-            <a:pPr indent="0" marL="0">
+            <a:pPr marL="0" indent="0">
               <a:lnSpc>
                 <a:spcPct val="120000"/>
               </a:lnSpc>
@@ -19920,11 +22369,11 @@
           <a:bodyPr wrap="square" lIns="0" tIns="0" rIns="0" bIns="0" rtlCol="0" anchor="t"/>
           <a:lstStyle/>
           <a:p>
-            <a:pPr algn="r" indent="0" marL="0">
-              <a:buNone/>
-            </a:pPr>
-            <a:r>
-              <a:rPr lang="en-US" sz="800" spc="150" kern="0" dirty="0">
+            <a:pPr marL="0" indent="0" algn="r">
+              <a:buNone/>
+            </a:pPr>
+            <a:r>
+              <a:rPr lang="en-US" sz="800" kern="0" spc="150" dirty="0">
                 <a:solidFill>
                   <a:srgbClr val="6E7E90"/>
                 </a:solidFill>
@@ -20239,4 +22688,319 @@
     </a:ext>
   </a:extLst>
 </a:theme>
+</file>
+
+<file path=ppt/theme/theme2.xml><?xml version="1.0" encoding="utf-8"?>
+<a:theme xmlns:a="http://schemas.openxmlformats.org/drawingml/2006/main" name="Office Theme">
+  <a:themeElements>
+    <a:clrScheme name="Office">
+      <a:dk1>
+        <a:sysClr val="windowText" lastClr="000000"/>
+      </a:dk1>
+      <a:lt1>
+        <a:sysClr val="window" lastClr="FFFFFF"/>
+      </a:lt1>
+      <a:dk2>
+        <a:srgbClr val="0E2841"/>
+      </a:dk2>
+      <a:lt2>
+        <a:srgbClr val="E8E8E8"/>
+      </a:lt2>
+      <a:accent1>
+        <a:srgbClr val="156082"/>
+      </a:accent1>
+      <a:accent2>
+        <a:srgbClr val="E97132"/>
+      </a:accent2>
+      <a:accent3>
+        <a:srgbClr val="196B24"/>
+      </a:accent3>
+      <a:accent4>
+        <a:srgbClr val="0F9ED5"/>
+      </a:accent4>
+      <a:accent5>
+        <a:srgbClr val="A02B93"/>
+      </a:accent5>
+      <a:accent6>
+        <a:srgbClr val="4EA72E"/>
+      </a:accent6>
+      <a:hlink>
+        <a:srgbClr val="467886"/>
+      </a:hlink>
+      <a:folHlink>
+        <a:srgbClr val="96607D"/>
+      </a:folHlink>
+    </a:clrScheme>
+    <a:fontScheme name="Office">
+      <a:majorFont>
+        <a:latin typeface="Aptos Display" panose="02110004020202020204"/>
+        <a:ea typeface=""/>
+        <a:cs typeface=""/>
+        <a:font script="Jpan" typeface="游ゴシック Light"/>
+        <a:font script="Hang" typeface="맑은 고딕"/>
+        <a:font script="Hans" typeface="等线 Light"/>
+        <a:font script="Hant" typeface="新細明體"/>
+        <a:font script="Arab" typeface="Times New Roman"/>
+        <a:font script="Hebr" typeface="Times New Roman"/>
+        <a:font script="Thai" typeface="Angsana New"/>
+        <a:font script="Ethi" typeface="Nyala"/>
+        <a:font script="Beng" typeface="Vrinda"/>
+        <a:font script="Gujr" typeface="Shruti"/>
+        <a:font script="Khmr" typeface="MoolBoran"/>
+        <a:font script="Knda" typeface="Tunga"/>
+        <a:font script="Guru" typeface="Raavi"/>
+        <a:font script="Cans" typeface="Euphemia"/>
+        <a:font script="Cher" typeface="Plantagenet Cherokee"/>
+        <a:font script="Yiii" typeface="Microsoft Yi Baiti"/>
+        <a:font script="Tibt" typeface="Microsoft Himalaya"/>
+        <a:font script="Thaa" typeface="MV Boli"/>
+        <a:font script="Deva" typeface="Mangal"/>
+        <a:font script="Telu" typeface="Gautami"/>
+        <a:font script="Taml" typeface="Latha"/>
+        <a:font script="Syrc" typeface="Estrangelo Edessa"/>
+        <a:font script="Orya" typeface="Kalinga"/>
+        <a:font script="Mlym" typeface="Kartika"/>
+        <a:font script="Laoo" typeface="DokChampa"/>
+        <a:font script="Sinh" typeface="Iskoola Pota"/>
+        <a:font script="Mong" typeface="Mongolian Baiti"/>
+        <a:font script="Viet" typeface="Times New Roman"/>
+        <a:font script="Uigh" typeface="Microsoft Uighur"/>
+        <a:font script="Geor" typeface="Sylfaen"/>
+        <a:font script="Armn" typeface="Arial"/>
+        <a:font script="Bugi" typeface="Leelawadee UI"/>
+        <a:font script="Bopo" typeface="Microsoft JhengHei"/>
+        <a:font script="Java" typeface="Javanese Text"/>
+        <a:font script="Lisu" typeface="Segoe UI"/>
+        <a:font script="Mymr" typeface="Myanmar Text"/>
+        <a:font script="Nkoo" typeface="Ebrima"/>
+        <a:font script="Olck" typeface="Nirmala UI"/>
+        <a:font script="Osma" typeface="Ebrima"/>
+        <a:font script="Phag" typeface="Phagspa"/>
+        <a:font script="Syrn" typeface="Estrangelo Edessa"/>
+        <a:font script="Syrj" typeface="Estrangelo Edessa"/>
+        <a:font script="Syre" typeface="Estrangelo Edessa"/>
+        <a:font script="Sora" typeface="Nirmala UI"/>
+        <a:font script="Tale" typeface="Microsoft Tai Le"/>
+        <a:font script="Talu" typeface="Microsoft New Tai Lue"/>
+        <a:font script="Tfng" typeface="Ebrima"/>
+      </a:majorFont>
+      <a:minorFont>
+        <a:latin typeface="Aptos" panose="02110004020202020204"/>
+        <a:ea typeface=""/>
+        <a:cs typeface=""/>
+        <a:font script="Jpan" typeface="游ゴシック"/>
+        <a:font script="Hang" typeface="맑은 고딕"/>
+        <a:font script="Hans" typeface="等线"/>
+        <a:font script="Hant" typeface="新細明體"/>
+        <a:font script="Arab" typeface="Arial"/>
+        <a:font script="Hebr" typeface="Arial"/>
+        <a:font script="Thai" typeface="Cordia New"/>
+        <a:font script="Ethi" typeface="Nyala"/>
+        <a:font script="Beng" typeface="Vrinda"/>
+        <a:font script="Gujr" typeface="Shruti"/>
+        <a:font script="Khmr" typeface="DaunPenh"/>
+        <a:font script="Knda" typeface="Tunga"/>
+        <a:font script="Guru" typeface="Raavi"/>
+        <a:font script="Cans" typeface="Euphemia"/>
+        <a:font script="Cher" typeface="Plantagenet Cherokee"/>
+        <a:font script="Yiii" typeface="Microsoft Yi Baiti"/>
+        <a:font script="Tibt" typeface="Microsoft Himalaya"/>
+        <a:font script="Thaa" typeface="MV Boli"/>
+        <a:font script="Deva" typeface="Mangal"/>
+        <a:font script="Telu" typeface="Gautami"/>
+        <a:font script="Taml" typeface="Latha"/>
+        <a:font script="Syrc" typeface="Estrangelo Edessa"/>
+        <a:font script="Orya" typeface="Kalinga"/>
+        <a:font script="Mlym" typeface="Kartika"/>
+        <a:font script="Laoo" typeface="DokChampa"/>
+        <a:font script="Sinh" typeface="Iskoola Pota"/>
+        <a:font script="Mong" typeface="Mongolian Baiti"/>
+        <a:font script="Viet" typeface="Arial"/>
+        <a:font script="Uigh" typeface="Microsoft Uighur"/>
+        <a:font script="Geor" typeface="Sylfaen"/>
+        <a:font script="Armn" typeface="Arial"/>
+        <a:font script="Bugi" typeface="Leelawadee UI"/>
+        <a:font script="Bopo" typeface="Microsoft JhengHei"/>
+        <a:font script="Java" typeface="Javanese Text"/>
+        <a:font script="Lisu" typeface="Segoe UI"/>
+        <a:font script="Mymr" typeface="Myanmar Text"/>
+        <a:font script="Nkoo" typeface="Ebrima"/>
+        <a:font script="Olck" typeface="Nirmala UI"/>
+        <a:font script="Osma" typeface="Ebrima"/>
+        <a:font script="Phag" typeface="Phagspa"/>
+        <a:font script="Syrn" typeface="Estrangelo Edessa"/>
+        <a:font script="Syrj" typeface="Estrangelo Edessa"/>
+        <a:font script="Syre" typeface="Estrangelo Edessa"/>
+        <a:font script="Sora" typeface="Nirmala UI"/>
+        <a:font script="Tale" typeface="Microsoft Tai Le"/>
+        <a:font script="Talu" typeface="Microsoft New Tai Lue"/>
+        <a:font script="Tfng" typeface="Ebrima"/>
+      </a:minorFont>
+    </a:fontScheme>
+    <a:fmtScheme name="Office">
+      <a:fillStyleLst>
+        <a:solidFill>
+          <a:schemeClr val="phClr"/>
+        </a:solidFill>
+        <a:gradFill rotWithShape="1">
+          <a:gsLst>
+            <a:gs pos="0">
+              <a:schemeClr val="phClr">
+                <a:lumMod val="110000"/>
+                <a:satMod val="105000"/>
+                <a:tint val="67000"/>
+              </a:schemeClr>
+            </a:gs>
+            <a:gs pos="50000">
+              <a:schemeClr val="phClr">
+                <a:lumMod val="105000"/>
+                <a:satMod val="103000"/>
+                <a:tint val="73000"/>
+              </a:schemeClr>
+            </a:gs>
+            <a:gs pos="100000">
+              <a:schemeClr val="phClr">
+                <a:lumMod val="105000"/>
+                <a:satMod val="109000"/>
+                <a:tint val="81000"/>
+              </a:schemeClr>
+            </a:gs>
+          </a:gsLst>
+          <a:lin ang="5400000" scaled="0"/>
+        </a:gradFill>
+        <a:gradFill rotWithShape="1">
+          <a:gsLst>
+            <a:gs pos="0">
+              <a:schemeClr val="phClr">
+                <a:satMod val="103000"/>
+                <a:lumMod val="102000"/>
+                <a:tint val="94000"/>
+              </a:schemeClr>
+            </a:gs>
+            <a:gs pos="50000">
+              <a:schemeClr val="phClr">
+                <a:satMod val="110000"/>
+                <a:lumMod val="100000"/>
+                <a:shade val="100000"/>
+              </a:schemeClr>
+            </a:gs>
+            <a:gs pos="100000">
+              <a:schemeClr val="phClr">
+                <a:lumMod val="99000"/>
+                <a:satMod val="120000"/>
+                <a:shade val="78000"/>
+              </a:schemeClr>
+            </a:gs>
+          </a:gsLst>
+          <a:lin ang="5400000" scaled="0"/>
+        </a:gradFill>
+      </a:fillStyleLst>
+      <a:lnStyleLst>
+        <a:ln w="12700" cap="flat" cmpd="sng" algn="ctr">
+          <a:solidFill>
+            <a:schemeClr val="phClr"/>
+          </a:solidFill>
+          <a:prstDash val="solid"/>
+          <a:miter lim="800000"/>
+        </a:ln>
+        <a:ln w="19050" cap="flat" cmpd="sng" algn="ctr">
+          <a:solidFill>
+            <a:schemeClr val="phClr"/>
+          </a:solidFill>
+          <a:prstDash val="solid"/>
+          <a:miter lim="800000"/>
+        </a:ln>
+        <a:ln w="25400" cap="flat" cmpd="sng" algn="ctr">
+          <a:solidFill>
+            <a:schemeClr val="phClr"/>
+          </a:solidFill>
+          <a:prstDash val="solid"/>
+          <a:miter lim="800000"/>
+        </a:ln>
+      </a:lnStyleLst>
+      <a:effectStyleLst>
+        <a:effectStyle>
+          <a:effectLst/>
+        </a:effectStyle>
+        <a:effectStyle>
+          <a:effectLst/>
+        </a:effectStyle>
+        <a:effectStyle>
+          <a:effectLst>
+            <a:outerShdw blurRad="57150" dist="19050" dir="5400000" algn="ctr" rotWithShape="0">
+              <a:srgbClr val="000000">
+                <a:alpha val="63000"/>
+              </a:srgbClr>
+            </a:outerShdw>
+          </a:effectLst>
+        </a:effectStyle>
+      </a:effectStyleLst>
+      <a:bgFillStyleLst>
+        <a:solidFill>
+          <a:schemeClr val="phClr"/>
+        </a:solidFill>
+        <a:solidFill>
+          <a:schemeClr val="phClr">
+            <a:tint val="95000"/>
+            <a:satMod val="170000"/>
+          </a:schemeClr>
+        </a:solidFill>
+        <a:gradFill rotWithShape="1">
+          <a:gsLst>
+            <a:gs pos="0">
+              <a:schemeClr val="phClr">
+                <a:tint val="93000"/>
+                <a:satMod val="150000"/>
+                <a:shade val="98000"/>
+                <a:lumMod val="102000"/>
+              </a:schemeClr>
+            </a:gs>
+            <a:gs pos="50000">
+              <a:schemeClr val="phClr">
+                <a:tint val="98000"/>
+                <a:satMod val="130000"/>
+                <a:shade val="90000"/>
+                <a:lumMod val="103000"/>
+              </a:schemeClr>
+            </a:gs>
+            <a:gs pos="100000">
+              <a:schemeClr val="phClr">
+                <a:shade val="63000"/>
+                <a:satMod val="120000"/>
+              </a:schemeClr>
+            </a:gs>
+          </a:gsLst>
+          <a:lin ang="5400000" scaled="0"/>
+        </a:gradFill>
+      </a:bgFillStyleLst>
+    </a:fmtScheme>
+  </a:themeElements>
+  <a:objectDefaults>
+    <a:lnDef>
+      <a:spPr/>
+      <a:bodyPr/>
+      <a:lstStyle/>
+      <a:style>
+        <a:lnRef idx="2">
+          <a:schemeClr val="accent1"/>
+        </a:lnRef>
+        <a:fillRef idx="0">
+          <a:schemeClr val="accent1"/>
+        </a:fillRef>
+        <a:effectRef idx="1">
+          <a:schemeClr val="accent1"/>
+        </a:effectRef>
+        <a:fontRef idx="minor">
+          <a:schemeClr val="tx1"/>
+        </a:fontRef>
+      </a:style>
+    </a:lnDef>
+  </a:objectDefaults>
+  <a:extraClrSchemeLst/>
+  <a:extLst>
+    <a:ext uri="{05A4C25C-085E-4340-85A3-A5531E510DB2}">
+      <thm15:themeFamily xmlns:thm15="http://schemas.microsoft.com/office/thememl/2012/main" name="Office Theme" id="{2E142A2C-CD16-42D6-873A-C26D2A0506FA}" vid="{1BDDFF52-6CD6-40A5-AB3C-68EB2F1E4D0A}"/>
+    </a:ext>
+  </a:extLst>
+</a:theme>
 </file>
--- a/LaborForce_CookCountyHealth.pptx
+++ b/LaborForce_CookCountyHealth.pptx
@@ -287,7 +287,7 @@
           <c:smooth val="0"/>
           <c:extLst>
             <c:ext xmlns:c16="http://schemas.microsoft.com/office/drawing/2014/chart" uri="{C3380CC4-5D6E-409C-BE32-E72D297353CC}">
-              <c16:uniqueId val="{00000000-D605-469F-ACB8-8A13E82ECF5F}"/>
+              <c16:uniqueId val="{00000000-B892-469A-9AB3-8CE08ED4EC0F}"/>
             </c:ext>
           </c:extLst>
         </c:ser>
@@ -478,7 +478,7 @@
     </p:spTree>
     <p:extLst>
       <p:ext uri="{BB962C8B-B14F-4D97-AF65-F5344CB8AC3E}">
-        <p14:creationId xmlns:p14="http://schemas.microsoft.com/office/powerpoint/2010/main" val="3272148917"/>
+        <p14:creationId xmlns:p14="http://schemas.microsoft.com/office/powerpoint/2010/main" val="1142065826"/>
       </p:ext>
     </p:extLst>
   </p:cSld>
@@ -3549,12 +3549,12 @@
         </p:nvSpPr>
         <p:spPr>
           <a:xfrm>
-            <a:off x="548640" y="4892040"/>
-            <a:ext cx="2011680" cy="1234440"/>
+            <a:off x="548640" y="5779008"/>
+            <a:ext cx="777240" cy="493776"/>
           </a:xfrm>
           <a:prstGeom prst="roundRect">
             <a:avLst>
-              <a:gd name="adj" fmla="val 3704"/>
+              <a:gd name="adj" fmla="val 7407"/>
             </a:avLst>
           </a:prstGeom>
           <a:solidFill>
@@ -3584,8 +3584,8 @@
         </p:blipFill>
         <p:spPr>
           <a:xfrm>
-            <a:off x="822960" y="5029200"/>
-            <a:ext cx="1463040" cy="962863"/>
+            <a:off x="666383" y="5847588"/>
+            <a:ext cx="541755" cy="356616"/>
           </a:xfrm>
           <a:prstGeom prst="rect">
             <a:avLst/>
@@ -3600,8 +3600,8 @@
         </p:nvSpPr>
         <p:spPr>
           <a:xfrm>
-            <a:off x="7619695" y="5303520"/>
-            <a:ext cx="4023360" cy="274320"/>
+            <a:off x="7619695" y="5733288"/>
+            <a:ext cx="4023360" cy="256032"/>
           </a:xfrm>
           <a:prstGeom prst="rect">
             <a:avLst/>
@@ -3639,8 +3639,8 @@
         </p:nvSpPr>
         <p:spPr>
           <a:xfrm>
-            <a:off x="7619695" y="5605272"/>
-            <a:ext cx="4023360" cy="457200"/>
+            <a:off x="7619695" y="6007608"/>
+            <a:ext cx="4023360" cy="274320"/>
           </a:xfrm>
           <a:prstGeom prst="rect">
             <a:avLst/>
@@ -3653,9 +3653,6 @@
           <a:lstStyle/>
           <a:p>
             <a:pPr marL="0" indent="0" algn="r">
-              <a:lnSpc>
-                <a:spcPct val="125000"/>
-              </a:lnSpc>
               <a:buNone/>
             </a:pPr>
             <a:r>

--- a/LaborForce_CookCountyHealth.pptx
+++ b/LaborForce_CookCountyHealth.pptx
@@ -287,7 +287,7 @@
           <c:smooth val="0"/>
           <c:extLst>
             <c:ext xmlns:c16="http://schemas.microsoft.com/office/drawing/2014/chart" uri="{C3380CC4-5D6E-409C-BE32-E72D297353CC}">
-              <c16:uniqueId val="{00000000-B892-469A-9AB3-8CE08ED4EC0F}"/>
+              <c16:uniqueId val="{00000000-0EA7-4AA0-96A2-8760E52A399A}"/>
             </c:ext>
           </c:extLst>
         </c:ser>
@@ -478,7 +478,7 @@
     </p:spTree>
     <p:extLst>
       <p:ext uri="{BB962C8B-B14F-4D97-AF65-F5344CB8AC3E}">
-        <p14:creationId xmlns:p14="http://schemas.microsoft.com/office/powerpoint/2010/main" val="1142065826"/>
+        <p14:creationId xmlns:p14="http://schemas.microsoft.com/office/powerpoint/2010/main" val="1314938084"/>
       </p:ext>
     </p:extLst>
   </p:cSld>
@@ -5165,7 +5165,7 @@
                 <a:ea typeface="Segoe UI" pitchFamily="34" charset="-122"/>
                 <a:cs typeface="Segoe UI" pitchFamily="34" charset="-120"/>
               </a:rPr>
-              <a:t>Patients often arrive after workplace incidents, motor vehicle accidents, or injuries involving another liable party. Registration and billing workflows may not consistently answer:</a:t>
+              <a:t>Patients often arrive after workplace incidents, motor vehicle accidents, or injuries involving another liable party. Registration and billing workflows may not consistently capture or resolve:</a:t>
             </a:r>
             <a:endParaRPr lang="en-US" sz="1200" dirty="0"/>
           </a:p>
@@ -5298,7 +5298,7 @@
                 <a:ea typeface="Segoe UI" pitchFamily="34" charset="-122"/>
                 <a:cs typeface="Segoe UI" pitchFamily="34" charset="-120"/>
               </a:rPr>
-              <a:t>Was the injury work-related?</a:t>
+              <a:t>Whether the injury occurred while the patient was working</a:t>
             </a:r>
             <a:endParaRPr lang="en-US" sz="1250" dirty="0"/>
           </a:p>
@@ -5431,7 +5431,7 @@
                 <a:ea typeface="Segoe UI" pitchFamily="34" charset="-122"/>
                 <a:cs typeface="Segoe UI" pitchFamily="34" charset="-120"/>
               </a:rPr>
-              <a:t>Is a motor vehicle or other third party responsible?</a:t>
+              <a:t>Whether a motor vehicle or other third party may be responsible</a:t>
             </a:r>
             <a:endParaRPr lang="en-US" sz="1250" dirty="0"/>
           </a:p>
@@ -5564,7 +5564,7 @@
                 <a:ea typeface="Segoe UI" pitchFamily="34" charset="-122"/>
                 <a:cs typeface="Segoe UI" pitchFamily="34" charset="-120"/>
               </a:rPr>
-              <a:t>Should another insurer or payer be investigated?</a:t>
+              <a:t>Whether another insurer or payer should be investigated</a:t>
             </a:r>
             <a:endParaRPr lang="en-US" sz="1250" dirty="0"/>
           </a:p>
@@ -5697,7 +5697,7 @@
                 <a:ea typeface="Segoe UI" pitchFamily="34" charset="-122"/>
                 <a:cs typeface="Segoe UI" pitchFamily="34" charset="-120"/>
               </a:rPr>
-              <a:t>Does the hospital have the right claim, attorney, and payer information?</a:t>
+              <a:t>Whether the hospital has the right claim, attorney, or payer information</a:t>
             </a:r>
             <a:endParaRPr lang="en-US" sz="1250" dirty="0"/>
           </a:p>
@@ -5830,7 +5830,7 @@
                 <a:ea typeface="Segoe UI" pitchFamily="34" charset="-122"/>
                 <a:cs typeface="Segoe UI" pitchFamily="34" charset="-120"/>
               </a:rPr>
-              <a:t>Is a hospital lien available, documented, and followed up?</a:t>
+              <a:t>Whether a hospital lien is available, documented, and followed up</a:t>
             </a:r>
             <a:endParaRPr lang="en-US" sz="1250" dirty="0"/>
           </a:p>
@@ -5963,7 +5963,7 @@
                 <a:ea typeface="Segoe UI" pitchFamily="34" charset="-122"/>
                 <a:cs typeface="Segoe UI" pitchFamily="34" charset="-120"/>
               </a:rPr>
-              <a:t>Are unresolved cases investigated after discharge?</a:t>
+              <a:t>Whether unresolved cases need investigation after discharge</a:t>
             </a:r>
             <a:endParaRPr lang="en-US" sz="1250" dirty="0"/>
           </a:p>

--- a/LaborForce_CookCountyHealth.pptx
+++ b/LaborForce_CookCountyHealth.pptx
@@ -285,7 +285,7 @@
           <c:smooth val="0"/>
           <c:extLst>
             <c:ext xmlns:c16="http://schemas.microsoft.com/office/drawing/2014/chart" uri="{C3380CC4-5D6E-409C-BE32-E72D297353CC}">
-              <c16:uniqueId val="{00000000-5F47-4F74-9131-5AB155F9E9A8}"/>
+              <c16:uniqueId val="{00000000-55A6-46D3-A391-B7E3119AEF41}"/>
             </c:ext>
           </c:extLst>
         </c:ser>
@@ -476,7 +476,7 @@
     </p:spTree>
     <p:extLst>
       <p:ext uri="{BB962C8B-B14F-4D97-AF65-F5344CB8AC3E}">
-        <p14:creationId xmlns:p14="http://schemas.microsoft.com/office/powerpoint/2010/main" val="4134428290"/>
+        <p14:creationId xmlns:p14="http://schemas.microsoft.com/office/powerpoint/2010/main" val="3096133236"/>
       </p:ext>
     </p:extLst>
   </p:cSld>
@@ -622,7 +622,7 @@
           <a:p>
             <a:r>
               <a:rPr lang="en-US" dirty="0"/>
-              <a:t>Cover. Program results are program-reported figures from Chicago-area partner hospitals, March–July 2026; not independently attributed.</a:t>
+              <a:t>Cover: one column, hospital photo on the right. The right-hand stats panel was removed on 2026-10-26 to match the web deck.</a:t>
             </a:r>
           </a:p>
         </p:txBody>
@@ -1924,8 +1924,8 @@
         </p:blipFill>
         <p:spPr>
           <a:xfrm>
-            <a:off x="2468880" y="1783080"/>
-            <a:ext cx="5257800" cy="5074920"/>
+            <a:off x="4629607" y="1097280"/>
+            <a:ext cx="7562088" cy="5760720"/>
           </a:xfrm>
           <a:prstGeom prst="rect">
             <a:avLst/>
@@ -2289,528 +2289,6 @@
               <a:t>01 / 08</a:t>
             </a:r>
             <a:endParaRPr lang="en-US" sz="800" dirty="0"/>
-          </a:p>
-        </p:txBody>
-      </p:sp>
-      <p:sp>
-        <p:nvSpPr>
-          <p:cNvPr id="13" name="Shape 8"/>
-          <p:cNvSpPr/>
-          <p:nvPr/>
-        </p:nvSpPr>
-        <p:spPr>
-          <a:xfrm>
-            <a:off x="7726680" y="0"/>
-            <a:ext cx="4465015" cy="6858000"/>
-          </a:xfrm>
-          <a:prstGeom prst="rect">
-            <a:avLst/>
-          </a:prstGeom>
-          <a:solidFill>
-            <a:srgbClr val="0C3C75"/>
-          </a:solidFill>
-          <a:ln w="12700">
-            <a:solidFill>
-              <a:srgbClr val="0C3C75"/>
-            </a:solidFill>
-            <a:prstDash val="solid"/>
-          </a:ln>
-        </p:spPr>
-      </p:sp>
-      <p:sp>
-        <p:nvSpPr>
-          <p:cNvPr id="14" name="Shape 9"/>
-          <p:cNvSpPr/>
-          <p:nvPr/>
-        </p:nvSpPr>
-        <p:spPr>
-          <a:xfrm>
-            <a:off x="7726680" y="0"/>
-            <a:ext cx="54864" cy="6858000"/>
-          </a:xfrm>
-          <a:prstGeom prst="rect">
-            <a:avLst/>
-          </a:prstGeom>
-          <a:solidFill>
-            <a:srgbClr val="0A8FA6"/>
-          </a:solidFill>
-          <a:ln w="12700">
-            <a:solidFill>
-              <a:srgbClr val="0A8FA6"/>
-            </a:solidFill>
-            <a:prstDash val="solid"/>
-          </a:ln>
-        </p:spPr>
-      </p:sp>
-      <p:sp>
-        <p:nvSpPr>
-          <p:cNvPr id="15" name="Text 10"/>
-          <p:cNvSpPr txBox="1"/>
-          <p:nvPr/>
-        </p:nvSpPr>
-        <p:spPr>
-          <a:xfrm>
-            <a:off x="8183880" y="548640"/>
-            <a:ext cx="3596335" cy="201168"/>
-          </a:xfrm>
-          <a:prstGeom prst="rect">
-            <a:avLst/>
-          </a:prstGeom>
-          <a:noFill/>
-          <a:ln/>
-        </p:spPr>
-        <p:txBody>
-          <a:bodyPr wrap="square" lIns="0" tIns="0" rIns="0" bIns="0" rtlCol="0" anchor="t"/>
-          <a:lstStyle/>
-          <a:p>
-            <a:pPr marL="0" indent="0">
-              <a:buNone/>
-            </a:pPr>
-            <a:r>
-              <a:rPr lang="en-US" sz="900" b="1" kern="0" spc="150" dirty="0">
-                <a:solidFill>
-                  <a:srgbClr val="7FD3E3"/>
-                </a:solidFill>
-                <a:latin typeface="Segoe UI" pitchFamily="34" charset="0"/>
-                <a:ea typeface="Segoe UI" pitchFamily="34" charset="-122"/>
-                <a:cs typeface="Segoe UI" pitchFamily="34" charset="-120"/>
-              </a:rPr>
-              <a:t>AT A GLANCE</a:t>
-            </a:r>
-            <a:endParaRPr lang="en-US" sz="900" dirty="0"/>
-          </a:p>
-        </p:txBody>
-      </p:sp>
-      <p:sp>
-        <p:nvSpPr>
-          <p:cNvPr id="16" name="Text 11"/>
-          <p:cNvSpPr txBox="1"/>
-          <p:nvPr/>
-        </p:nvSpPr>
-        <p:spPr>
-          <a:xfrm>
-            <a:off x="8183880" y="914400"/>
-            <a:ext cx="3596335" cy="566928"/>
-          </a:xfrm>
-          <a:prstGeom prst="rect">
-            <a:avLst/>
-          </a:prstGeom>
-          <a:noFill/>
-          <a:ln/>
-        </p:spPr>
-        <p:txBody>
-          <a:bodyPr wrap="square" lIns="0" tIns="0" rIns="0" bIns="0" rtlCol="0" anchor="t"/>
-          <a:lstStyle/>
-          <a:p>
-            <a:pPr marL="0" indent="0">
-              <a:buNone/>
-            </a:pPr>
-            <a:r>
-              <a:rPr lang="en-US" sz="3800" kern="0" spc="-200" dirty="0">
-                <a:solidFill>
-                  <a:srgbClr val="FFFFFF"/>
-                </a:solidFill>
-                <a:latin typeface="Segoe UI" pitchFamily="34" charset="0"/>
-                <a:ea typeface="Segoe UI" pitchFamily="34" charset="-122"/>
-                <a:cs typeface="Segoe UI" pitchFamily="34" charset="-120"/>
-              </a:rPr>
-              <a:t>+336%</a:t>
-            </a:r>
-            <a:endParaRPr lang="en-US" sz="3800" dirty="0"/>
-          </a:p>
-        </p:txBody>
-      </p:sp>
-      <p:sp>
-        <p:nvSpPr>
-          <p:cNvPr id="17" name="Text 12"/>
-          <p:cNvSpPr txBox="1"/>
-          <p:nvPr/>
-        </p:nvSpPr>
-        <p:spPr>
-          <a:xfrm>
-            <a:off x="8183880" y="1517904"/>
-            <a:ext cx="3596335" cy="457200"/>
-          </a:xfrm>
-          <a:prstGeom prst="rect">
-            <a:avLst/>
-          </a:prstGeom>
-          <a:noFill/>
-          <a:ln/>
-        </p:spPr>
-        <p:txBody>
-          <a:bodyPr wrap="square" lIns="0" tIns="0" rIns="0" bIns="0" rtlCol="0" anchor="t"/>
-          <a:lstStyle/>
-          <a:p>
-            <a:pPr marL="0" indent="0">
-              <a:lnSpc>
-                <a:spcPct val="120000"/>
-              </a:lnSpc>
-              <a:buNone/>
-            </a:pPr>
-            <a:r>
-              <a:rPr lang="en-US" sz="1050" dirty="0">
-                <a:solidFill>
-                  <a:srgbClr val="C5D6E8"/>
-                </a:solidFill>
-                <a:latin typeface="Segoe UI" pitchFamily="34" charset="0"/>
-                <a:ea typeface="Segoe UI" pitchFamily="34" charset="-122"/>
-                <a:cs typeface="Segoe UI" pitchFamily="34" charset="-120"/>
-              </a:rPr>
-              <a:t>Monthly TPL recoveries at Chicago-area partner hospitals, March – July 2026 ($33K → $144K)</a:t>
-            </a:r>
-            <a:endParaRPr lang="en-US" sz="1050" dirty="0"/>
-          </a:p>
-        </p:txBody>
-      </p:sp>
-      <p:sp>
-        <p:nvSpPr>
-          <p:cNvPr id="18" name="Shape 13"/>
-          <p:cNvSpPr/>
-          <p:nvPr/>
-        </p:nvSpPr>
-        <p:spPr>
-          <a:xfrm>
-            <a:off x="8183880" y="1993392"/>
-            <a:ext cx="3596335" cy="0"/>
-          </a:xfrm>
-          <a:prstGeom prst="line">
-            <a:avLst/>
-          </a:prstGeom>
-          <a:noFill/>
-          <a:ln w="9525">
-            <a:solidFill>
-              <a:srgbClr val="375F8F"/>
-            </a:solidFill>
-            <a:prstDash val="solid"/>
-          </a:ln>
-        </p:spPr>
-      </p:sp>
-      <p:sp>
-        <p:nvSpPr>
-          <p:cNvPr id="19" name="Text 14"/>
-          <p:cNvSpPr txBox="1"/>
-          <p:nvPr/>
-        </p:nvSpPr>
-        <p:spPr>
-          <a:xfrm>
-            <a:off x="8183880" y="2103120"/>
-            <a:ext cx="3596335" cy="566928"/>
-          </a:xfrm>
-          <a:prstGeom prst="rect">
-            <a:avLst/>
-          </a:prstGeom>
-          <a:noFill/>
-          <a:ln/>
-        </p:spPr>
-        <p:txBody>
-          <a:bodyPr wrap="square" lIns="0" tIns="0" rIns="0" bIns="0" rtlCol="0" anchor="t"/>
-          <a:lstStyle/>
-          <a:p>
-            <a:pPr marL="0" indent="0">
-              <a:buNone/>
-            </a:pPr>
-            <a:r>
-              <a:rPr lang="en-US" sz="3800" kern="0" spc="-200" dirty="0">
-                <a:solidFill>
-                  <a:srgbClr val="FFFFFF"/>
-                </a:solidFill>
-                <a:latin typeface="Segoe UI" pitchFamily="34" charset="0"/>
-                <a:ea typeface="Segoe UI" pitchFamily="34" charset="-122"/>
-                <a:cs typeface="Segoe UI" pitchFamily="34" charset="-120"/>
-              </a:rPr>
-              <a:t>90%+</a:t>
-            </a:r>
-            <a:endParaRPr lang="en-US" sz="3800" dirty="0"/>
-          </a:p>
-        </p:txBody>
-      </p:sp>
-      <p:sp>
-        <p:nvSpPr>
-          <p:cNvPr id="20" name="Text 15"/>
-          <p:cNvSpPr txBox="1"/>
-          <p:nvPr/>
-        </p:nvSpPr>
-        <p:spPr>
-          <a:xfrm>
-            <a:off x="8183880" y="2706624"/>
-            <a:ext cx="3596335" cy="457200"/>
-          </a:xfrm>
-          <a:prstGeom prst="rect">
-            <a:avLst/>
-          </a:prstGeom>
-          <a:noFill/>
-          <a:ln/>
-        </p:spPr>
-        <p:txBody>
-          <a:bodyPr wrap="square" lIns="0" tIns="0" rIns="0" bIns="0" rtlCol="0" anchor="t"/>
-          <a:lstStyle/>
-          <a:p>
-            <a:pPr marL="0" indent="0">
-              <a:lnSpc>
-                <a:spcPct val="120000"/>
-              </a:lnSpc>
-              <a:buNone/>
-            </a:pPr>
-            <a:r>
-              <a:rPr lang="en-US" sz="1050" dirty="0">
-                <a:solidFill>
-                  <a:srgbClr val="C5D6E8"/>
-                </a:solidFill>
-                <a:latin typeface="Segoe UI" pitchFamily="34" charset="0"/>
-                <a:ea typeface="Segoe UI" pitchFamily="34" charset="-122"/>
-                <a:cs typeface="Segoe UI" pitchFamily="34" charset="-120"/>
-              </a:rPr>
-              <a:t>Payer identification accuracy, up from under 30%</a:t>
-            </a:r>
-            <a:endParaRPr lang="en-US" sz="1050" dirty="0"/>
-          </a:p>
-        </p:txBody>
-      </p:sp>
-      <p:sp>
-        <p:nvSpPr>
-          <p:cNvPr id="21" name="Shape 16"/>
-          <p:cNvSpPr/>
-          <p:nvPr/>
-        </p:nvSpPr>
-        <p:spPr>
-          <a:xfrm>
-            <a:off x="8183880" y="3182112"/>
-            <a:ext cx="3596335" cy="0"/>
-          </a:xfrm>
-          <a:prstGeom prst="line">
-            <a:avLst/>
-          </a:prstGeom>
-          <a:noFill/>
-          <a:ln w="9525">
-            <a:solidFill>
-              <a:srgbClr val="375F8F"/>
-            </a:solidFill>
-            <a:prstDash val="solid"/>
-          </a:ln>
-        </p:spPr>
-      </p:sp>
-      <p:sp>
-        <p:nvSpPr>
-          <p:cNvPr id="22" name="Text 17"/>
-          <p:cNvSpPr txBox="1"/>
-          <p:nvPr/>
-        </p:nvSpPr>
-        <p:spPr>
-          <a:xfrm>
-            <a:off x="8183880" y="3291840"/>
-            <a:ext cx="3596335" cy="566928"/>
-          </a:xfrm>
-          <a:prstGeom prst="rect">
-            <a:avLst/>
-          </a:prstGeom>
-          <a:noFill/>
-          <a:ln/>
-        </p:spPr>
-        <p:txBody>
-          <a:bodyPr wrap="square" lIns="0" tIns="0" rIns="0" bIns="0" rtlCol="0" anchor="t"/>
-          <a:lstStyle/>
-          <a:p>
-            <a:pPr marL="0" indent="0">
-              <a:buNone/>
-            </a:pPr>
-            <a:r>
-              <a:rPr lang="en-US" sz="3800" kern="0" spc="-200" dirty="0">
-                <a:solidFill>
-                  <a:srgbClr val="FFFFFF"/>
-                </a:solidFill>
-                <a:latin typeface="Segoe UI" pitchFamily="34" charset="0"/>
-                <a:ea typeface="Segoe UI" pitchFamily="34" charset="-122"/>
-                <a:cs typeface="Segoe UI" pitchFamily="34" charset="-120"/>
-              </a:rPr>
-              <a:t>79%</a:t>
-            </a:r>
-            <a:endParaRPr lang="en-US" sz="3800" dirty="0"/>
-          </a:p>
-        </p:txBody>
-      </p:sp>
-      <p:sp>
-        <p:nvSpPr>
-          <p:cNvPr id="23" name="Text 18"/>
-          <p:cNvSpPr txBox="1"/>
-          <p:nvPr/>
-        </p:nvSpPr>
-        <p:spPr>
-          <a:xfrm>
-            <a:off x="8183880" y="3895344"/>
-            <a:ext cx="3596335" cy="457200"/>
-          </a:xfrm>
-          <a:prstGeom prst="rect">
-            <a:avLst/>
-          </a:prstGeom>
-          <a:noFill/>
-          <a:ln/>
-        </p:spPr>
-        <p:txBody>
-          <a:bodyPr wrap="square" lIns="0" tIns="0" rIns="0" bIns="0" rtlCol="0" anchor="t"/>
-          <a:lstStyle/>
-          <a:p>
-            <a:pPr marL="0" indent="0">
-              <a:lnSpc>
-                <a:spcPct val="120000"/>
-              </a:lnSpc>
-              <a:buNone/>
-            </a:pPr>
-            <a:r>
-              <a:rPr lang="en-US" sz="1050" dirty="0">
-                <a:solidFill>
-                  <a:srgbClr val="C5D6E8"/>
-                </a:solidFill>
-                <a:latin typeface="Segoe UI" pitchFamily="34" charset="0"/>
-                <a:ea typeface="Segoe UI" pitchFamily="34" charset="-122"/>
-                <a:cs typeface="Segoe UI" pitchFamily="34" charset="-120"/>
-              </a:rPr>
-              <a:t>Of screened July encounters verified (141 of 178)</a:t>
-            </a:r>
-            <a:endParaRPr lang="en-US" sz="1050" dirty="0"/>
-          </a:p>
-        </p:txBody>
-      </p:sp>
-      <p:sp>
-        <p:nvSpPr>
-          <p:cNvPr id="24" name="Shape 19"/>
-          <p:cNvSpPr/>
-          <p:nvPr/>
-        </p:nvSpPr>
-        <p:spPr>
-          <a:xfrm>
-            <a:off x="8092440" y="4754880"/>
-            <a:ext cx="3779215" cy="914400"/>
-          </a:xfrm>
-          <a:prstGeom prst="roundRect">
-            <a:avLst>
-              <a:gd name="adj" fmla="val 4000"/>
-            </a:avLst>
-          </a:prstGeom>
-          <a:solidFill>
-            <a:srgbClr val="1D4A7F"/>
-          </a:solidFill>
-          <a:ln w="12700">
-            <a:solidFill>
-              <a:srgbClr val="1D4A7F"/>
-            </a:solidFill>
-            <a:prstDash val="solid"/>
-          </a:ln>
-        </p:spPr>
-      </p:sp>
-      <p:sp>
-        <p:nvSpPr>
-          <p:cNvPr id="25" name="Text 20"/>
-          <p:cNvSpPr txBox="1"/>
-          <p:nvPr/>
-        </p:nvSpPr>
-        <p:spPr>
-          <a:xfrm>
-            <a:off x="8275320" y="4937760"/>
-            <a:ext cx="3596335" cy="201168"/>
-          </a:xfrm>
-          <a:prstGeom prst="rect">
-            <a:avLst/>
-          </a:prstGeom>
-          <a:noFill/>
-          <a:ln/>
-        </p:spPr>
-        <p:txBody>
-          <a:bodyPr wrap="square" lIns="0" tIns="0" rIns="0" bIns="0" rtlCol="0" anchor="t"/>
-          <a:lstStyle/>
-          <a:p>
-            <a:pPr marL="0" indent="0">
-              <a:buNone/>
-            </a:pPr>
-            <a:r>
-              <a:rPr lang="en-US" sz="800" b="1" kern="0" spc="150" dirty="0">
-                <a:solidFill>
-                  <a:srgbClr val="7FD3E3"/>
-                </a:solidFill>
-                <a:latin typeface="Segoe UI" pitchFamily="34" charset="0"/>
-                <a:ea typeface="Segoe UI" pitchFamily="34" charset="-122"/>
-                <a:cs typeface="Segoe UI" pitchFamily="34" charset="-120"/>
-              </a:rPr>
-              <a:t>THE ASK</a:t>
-            </a:r>
-            <a:endParaRPr lang="en-US" sz="800" dirty="0"/>
-          </a:p>
-        </p:txBody>
-      </p:sp>
-      <p:sp>
-        <p:nvSpPr>
-          <p:cNvPr id="26" name="Text 21"/>
-          <p:cNvSpPr txBox="1"/>
-          <p:nvPr/>
-        </p:nvSpPr>
-        <p:spPr>
-          <a:xfrm>
-            <a:off x="8275320" y="5175504"/>
-            <a:ext cx="3413455" cy="365760"/>
-          </a:xfrm>
-          <a:prstGeom prst="rect">
-            <a:avLst/>
-          </a:prstGeom>
-          <a:noFill/>
-          <a:ln/>
-        </p:spPr>
-        <p:txBody>
-          <a:bodyPr wrap="square" lIns="0" tIns="0" rIns="0" bIns="0" rtlCol="0" anchor="t"/>
-          <a:lstStyle/>
-          <a:p>
-            <a:pPr marL="0" indent="0">
-              <a:buNone/>
-            </a:pPr>
-            <a:r>
-              <a:rPr lang="en-US" sz="1250" b="1" dirty="0">
-                <a:solidFill>
-                  <a:srgbClr val="FFFFFF"/>
-                </a:solidFill>
-                <a:latin typeface="Segoe UI" pitchFamily="34" charset="0"/>
-                <a:ea typeface="Segoe UI" pitchFamily="34" charset="-122"/>
-                <a:cs typeface="Segoe UI" pitchFamily="34" charset="-120"/>
-              </a:rPr>
-              <a:t>A 90-day pilot at John H. Stroger, Jr. Hospital</a:t>
-            </a:r>
-            <a:endParaRPr lang="en-US" sz="1250" dirty="0"/>
-          </a:p>
-        </p:txBody>
-      </p:sp>
-      <p:sp>
-        <p:nvSpPr>
-          <p:cNvPr id="27" name="Text 22"/>
-          <p:cNvSpPr txBox="1"/>
-          <p:nvPr/>
-        </p:nvSpPr>
-        <p:spPr>
-          <a:xfrm>
-            <a:off x="8183880" y="6080760"/>
-            <a:ext cx="3596335" cy="228600"/>
-          </a:xfrm>
-          <a:prstGeom prst="rect">
-            <a:avLst/>
-          </a:prstGeom>
-          <a:noFill/>
-          <a:ln/>
-        </p:spPr>
-        <p:txBody>
-          <a:bodyPr wrap="square" lIns="0" tIns="0" rIns="0" bIns="0" rtlCol="0" anchor="t"/>
-          <a:lstStyle/>
-          <a:p>
-            <a:pPr marL="0" indent="0">
-              <a:buNone/>
-            </a:pPr>
-            <a:r>
-              <a:rPr lang="en-US" sz="900" dirty="0">
-                <a:solidFill>
-                  <a:srgbClr val="8EA4BB"/>
-                </a:solidFill>
-                <a:latin typeface="Segoe UI" pitchFamily="34" charset="0"/>
-                <a:ea typeface="Segoe UI" pitchFamily="34" charset="-122"/>
-                <a:cs typeface="Segoe UI" pitchFamily="34" charset="-120"/>
-              </a:rPr>
-              <a:t>Program-reported figures; not independently attributed.</a:t>
-            </a:r>
-            <a:endParaRPr lang="en-US" sz="900" dirty="0"/>
           </a:p>
         </p:txBody>
       </p:sp>

--- a/LaborForce_CookCountyHealth.pptx
+++ b/LaborForce_CookCountyHealth.pptx
@@ -285,7 +285,7 @@
           <c:smooth val="0"/>
           <c:extLst>
             <c:ext xmlns:c16="http://schemas.microsoft.com/office/drawing/2014/chart" uri="{C3380CC4-5D6E-409C-BE32-E72D297353CC}">
-              <c16:uniqueId val="{00000000-55A6-46D3-A391-B7E3119AEF41}"/>
+              <c16:uniqueId val="{00000000-AAD3-49B1-BEE3-D2118833B345}"/>
             </c:ext>
           </c:extLst>
         </c:ser>
@@ -476,7 +476,7 @@
     </p:spTree>
     <p:extLst>
       <p:ext uri="{BB962C8B-B14F-4D97-AF65-F5344CB8AC3E}">
-        <p14:creationId xmlns:p14="http://schemas.microsoft.com/office/powerpoint/2010/main" val="3096133236"/>
+        <p14:creationId xmlns:p14="http://schemas.microsoft.com/office/powerpoint/2010/main" val="2246086052"/>
       </p:ext>
     </p:extLst>
   </p:cSld>
@@ -3664,7 +3664,7 @@
                 <a:ea typeface="Segoe UI" pitchFamily="34" charset="-122"/>
                 <a:cs typeface="Segoe UI" pitchFamily="34" charset="-120"/>
               </a:rPr>
-              <a:t>THE CHALLENGE</a:t>
+              <a:t>WHERE REVENUE SLIPS</a:t>
             </a:r>
             <a:endParaRPr lang="en-US" sz="900" dirty="0"/>
           </a:p>

--- a/LaborForce_CookCountyHealth.pptx
+++ b/LaborForce_CookCountyHealth.pptx
@@ -281,7 +281,7 @@
           <c:smooth val="0"/>
           <c:extLst>
             <c:ext xmlns:c16="http://schemas.microsoft.com/office/drawing/2014/chart" uri="{C3380CC4-5D6E-409C-BE32-E72D297353CC}">
-              <c16:uniqueId val="{00000000-234D-4DC3-A4CF-C38A51468B18}"/>
+              <c16:uniqueId val="{00000000-1DA7-452F-9D22-A773B8445B50}"/>
             </c:ext>
           </c:extLst>
         </c:ser>
@@ -472,7 +472,7 @@
     </p:spTree>
     <p:extLst>
       <p:ext uri="{BB962C8B-B14F-4D97-AF65-F5344CB8AC3E}">
-        <p14:creationId xmlns:p14="http://schemas.microsoft.com/office/powerpoint/2010/main" val="3161609155"/>
+        <p14:creationId xmlns:p14="http://schemas.microsoft.com/office/powerpoint/2010/main" val="432250452"/>
       </p:ext>
     </p:extLst>
   </p:cSld>
